--- a/presentation/deck_checkpoint.pptx
+++ b/presentation/deck_checkpoint.pptx
@@ -752,7 +752,7 @@
           <a:lstStyle/>
           <a:p>
             <a:r>
-              <a:t>Одна команда воспроизводит все числа из чистой копии. Мы клонировали репозиторий на чистую машину: от клона до открытой карты и пересчитанных чисел — 7,5 минуты. В проекте 253 автотестов; отдельные тесты сверяют каждое число в документах и этой презентации с единым файлом итоговых чисел, где у каждого числа есть источник и протокол. Веса моделей лежат в репозитории, поэтому ничего не нужно обучать заново. Правила выбора моделей мы записывали до сравнения: например, модель поля берётся, только если она лучше медианы на отложенном рейсе. Это защищает от подгонки под тест. Файл итоговых чисел пересобирается одной командой после любого пересчёта, и документы с этой презентацией собираются из него скриптом. Если число в тексте разойдётся с файлом, тест упадёт. Поэтому то, что вы видите на слайдах, совпадает с тем, что считает код.</a:t>
+              <a:t>Одна команда воспроизводит все числа из чистой копии. Мы клонировали репозиторий на чистую машину: от клона до открытой карты и пересчитанных чисел — 7,5 минуты. В проекте 255 автотестов; отдельные тесты сверяют каждое число в документах и этой презентации с единым файлом итоговых чисел, где у каждого числа есть источник и протокол. Веса моделей лежат в репозитории, поэтому ничего не нужно обучать заново. Правила выбора моделей мы записывали до сравнения: например, модель поля берётся, только если она лучше медианы на отложенном рейсе. Это защищает от подгонки под тест. Файл итоговых чисел пересобирается одной командой после любого пересчёта, и документы с этой презентацией собираются из него скриптом. Если число в тексте разойдётся с файлом, тест упадёт. Поэтому то, что вы видите на слайдах, совпадает с тем, что считает код.</a:t>
             </a:r>
           </a:p>
         </p:txBody>
@@ -822,7 +822,7 @@
           <a:lstStyle/>
           <a:p>
             <a:r>
-              <a:t>Три числа, которые стоит запомнить. Детектор находит полосы мусора с F1 0.871 на отложенном тесте. Поле даёт 53.9 штуки на квадратный километр с честным интервалом. И 66 пар «снимок — поле» мы проверили и показали, почему штуки по снимку пока не измеряются. Спасибо, готовы к вопросам.</a:t>
+              <a:t>Три числа, которые стоит запомнить. Детектор находит полосы мусора с F1 0.871 на отложенном тесте. Поле даёт 53.9 штуки на квадратный километр с честным интервалом. И 66 пар «снимок — поле» мы проверили и показали, почему штуки по снимку пока не измеряются. Всего за эти дни мы проверили 71 гипотезу и эксперименты, и каждое решение записано до сравнения. Спасибо, готовы к вопросам.</a:t>
             </a:r>
           </a:p>
         </p:txBody>
@@ -2082,7 +2082,7 @@
           <a:lstStyle/>
           <a:p>
             <a:r>
-              <a:t>Спутник видит пиксель, а не предмет: прямого счёта штук по снимку не существует. Предмет в море — бутылка, пакет, обрывок сети — в сотни раз меньше пикселя Sentinel-2. В пикселе он занимает ничтожную долю, и спектр пикселя почти не меняется. Чтобы научить модель считать штуки, нужны пары: снимок и полевой счёт в то же время в том же месте. Мы прошли все 318 событий CSV организаторов: снимок рядом по времени есть у части, по метаданным остаётся 29, после масок облаков и блика — 12, а синхронных с учётом дрейфа — ноль. Отдельно мы нашли 66 пар по месту и времени в данных ADIS, но видимого сигнала мусора на снимке нет ни в одной. Это не недоработка поиска, а физика: спутник видит скопление, а не отдельный предмет. Поэтому решение устроено ступенями.</a:t>
+              <a:t>Спутник видит пиксель 10 м, а предмет — 2.5–50 см: прямого счёта штук по снимку не существует. Предмет в море — бутылка, пакет, обрывок сети — в сотни раз меньше пикселя Sentinel-2. В пикселе он занимает ничтожную долю, и спектр пикселя почти не меняется. Чтобы научить модель считать штуки, нужны пары: снимок и полевой счёт в то же время в том же месте. Мы прошли все 318 событий CSV организаторов: снимок рядом по времени есть у части, по метаданным остаётся 29, после масок облаков и блика — 12, а синхронных с учётом дрейфа — ноль. Отдельно мы нашли 66 пар по месту и времени в данных ADIS, но видимого сигнала мусора на снимке нет ни в одной. Это не недоработка поиска, а физика: спутник видит скопление, а не отдельный предмет. Поэтому решение устроено ступенями.</a:t>
             </a:r>
           </a:p>
         </p:txBody>
@@ -2152,7 +2152,7 @@
           <a:lstStyle/>
           <a:p>
             <a:r>
-              <a:t>Синтетические пары — отклонены. Гипотеза: синтетика (вставка предметов в снимок) заменит настоящие пары. Как проверили: проверка переносимости синтетики на природные сцены. Решение: синтетику не используем как доказательство связки.</a:t>
+              <a:t>Синтетические пары — отклонены. Гипотеза: синтетика (вставка предметов в снимок) заменит настоящие пары. Как проверили: проверка переносимости синтетики на природные сцены. Решение: не принята: на 11 датах мишеней A* (оставь-одну-дату) MAE 893.5 против 100.9 у плоской калибровки и 113.5 у ответа «0».</a:t>
             </a:r>
           </a:p>
         </p:txBody>
@@ -2642,7 +2642,7 @@
           <a:lstStyle/>
           <a:p>
             <a:r>
-              <a:t>Перенос счётчика на реку и дрон — не работает без дообучения. Гипотеза: счётчик FML переносится на другие съёмки. Как проверили: проверка на кадрах реки и дрона другого источника. Решение: перенос не заявляем.</a:t>
+              <a:t>Перенос счётчика на реку и дрон — не работает без дообучения. Гипотеза: счётчик FML переносится на другие съёмки. Как проверили: проверка на кадрах реки и дрона другого источника. Решение: без дообучения не переносится: AP50 0.914 на отложенном FML против дрон Maharjan 2022 0.01, камера над каналом TUD-GV 0.406, камера над рекой The Ocean Cleanup 0.001.</a:t>
             </a:r>
           </a:p>
         </p:txBody>
@@ -2782,7 +2782,7 @@
           <a:lstStyle/>
           <a:p>
             <a:r>
-              <a:t>Проверка глазами жюри-человека меняет подписи и статусы. Гипотеза: интерфейс понятен без объяснений. Как проверили: независимый проверяющий листает сервис и деку и записывает, что понял неверно. Решение: подписи «оценка детектора», «пластик не подтверждён», статусы по постановке.</a:t>
+              <a:t>Внутренняя проверка глазами «жюри-человека» меняет подписи и статусы. Гипотеза: интерфейс и дека понятны без объяснений. Как проверили: независимый проверяющий внутри команды листает сервис и деку по чек-листу ТЗ и записывает, что понял неверно. Решение: подписи «оценка детектора», «пластик не подтверждён», статусы по постановке, «количество не определено».</a:t>
             </a:r>
           </a:p>
         </p:txBody>
@@ -6734,8 +6734,8 @@
         </p:blipFill>
         <p:spPr>
           <a:xfrm>
-            <a:off x="5120640" y="2040254"/>
-            <a:ext cx="6400800" cy="3600450"/>
+            <a:off x="5120640" y="2041133"/>
+            <a:ext cx="6400800" cy="3598692"/>
           </a:xfrm>
           <a:prstGeom prst="rect">
             <a:avLst/>
@@ -7078,8 +7078,8 @@
         </p:blipFill>
         <p:spPr>
           <a:xfrm>
-            <a:off x="6824589" y="1737360"/>
-            <a:ext cx="2992901" cy="4206240"/>
+            <a:off x="5120640" y="2041133"/>
+            <a:ext cx="6400800" cy="3598692"/>
           </a:xfrm>
           <a:prstGeom prst="rect">
             <a:avLst/>
@@ -7362,7 +7362,7 @@
                 </a:solidFill>
                 <a:latin typeface="Segoe UI"/>
               </a:rPr>
-              <a:t>253</a:t>
+              <a:t>255</a:t>
             </a:r>
           </a:p>
         </p:txBody>
@@ -7814,7 +7814,7 @@
                 </a:solidFill>
                 <a:latin typeface="Segoe UI"/>
               </a:rPr>
-              <a:t>66</a:t>
+              <a:t>71</a:t>
             </a:r>
           </a:p>
         </p:txBody>
@@ -7853,7 +7853,7 @@
                 </a:solidFill>
                 <a:latin typeface="Segoe UI"/>
               </a:rPr>
-              <a:t>пар «снимок — поле» проверено</a:t>
+              <a:t>проверенных гипотез и экспериментов</a:t>
             </a:r>
           </a:p>
         </p:txBody>
@@ -15183,7 +15183,7 @@
                 </a:solidFill>
                 <a:latin typeface="Segoe UI"/>
               </a:rPr>
-              <a:t>Спутник видит пиксель, а не предмет: прямого счёта штук по снимку не существует</a:t>
+              <a:t>Спутник видит пиксель 10 м, а предмет — 2.5–50 см: прямого счёта штук по снимку не существует</a:t>
             </a:r>
           </a:p>
         </p:txBody>
@@ -15339,7 +15339,7 @@
                 </a:solidFill>
                 <a:latin typeface="Segoe UI"/>
               </a:rPr>
-              <a:t>предметов считаемы поштучно при пикселе 10 м</a:t>
+              <a:t>предметов считаемы поштучно при пикселе 10 м</a:t>
             </a:r>
           </a:p>
         </p:txBody>
@@ -15800,7 +15800,7 @@
                 </a:solidFill>
                 <a:latin typeface="Segoe UI"/>
               </a:rPr>
-              <a:t>Синтетику не используем как доказательство связки.</a:t>
+              <a:t>Не принята: на 11 датах мишеней A* (оставь-одну-дату) MAE 893.5 против 100.9 у плоской калибровки и 113.5 у ответа «0».</a:t>
             </a:r>
           </a:p>
         </p:txBody>
@@ -15957,7 +15957,85 @@
         <p:spPr>
           <a:xfrm>
             <a:off x="649224" y="1783080"/>
-            <a:ext cx="10890504" cy="274320"/>
+            <a:ext cx="3931920" cy="1143000"/>
+          </a:xfrm>
+          <a:prstGeom prst="rect">
+            <a:avLst/>
+          </a:prstGeom>
+          <a:noFill/>
+        </p:spPr>
+        <p:txBody>
+          <a:bodyPr wrap="square" anchor="t" lIns="18288" rIns="18288" tIns="18288" bIns="18288">
+            <a:spAutoFit/>
+          </a:bodyPr>
+          <a:lstStyle/>
+          <a:p>
+            <a:pPr algn="l">
+              <a:spcAft>
+                <a:spcPts val="400"/>
+              </a:spcAft>
+            </a:pPr>
+            <a:r>
+              <a:rPr sz="7200" b="1">
+                <a:solidFill>
+                  <a:srgbClr val="C1400B"/>
+                </a:solidFill>
+                <a:latin typeface="Segoe UI"/>
+              </a:rPr>
+              <a:t>5</a:t>
+            </a:r>
+          </a:p>
+        </p:txBody>
+      </p:sp>
+      <p:sp>
+        <p:nvSpPr>
+          <p:cNvPr id="4" name="TextBox 3"/>
+          <p:cNvSpPr txBox="1"/>
+          <p:nvPr/>
+        </p:nvSpPr>
+        <p:spPr>
+          <a:xfrm>
+            <a:off x="676656" y="2971800"/>
+            <a:ext cx="3931920" cy="822960"/>
+          </a:xfrm>
+          <a:prstGeom prst="rect">
+            <a:avLst/>
+          </a:prstGeom>
+          <a:noFill/>
+        </p:spPr>
+        <p:txBody>
+          <a:bodyPr wrap="square" anchor="t" lIns="18288" rIns="18288" tIns="18288" bIns="18288">
+            <a:spAutoFit/>
+          </a:bodyPr>
+          <a:lstStyle/>
+          <a:p>
+            <a:pPr algn="l">
+              <a:spcAft>
+                <a:spcPts val="400"/>
+              </a:spcAft>
+            </a:pPr>
+            <a:r>
+              <a:rPr sz="1600" b="0">
+                <a:solidFill>
+                  <a:srgbClr val="4A5462"/>
+                </a:solidFill>
+                <a:latin typeface="Segoe UI"/>
+              </a:rPr>
+              <a:t>методов на лидерборде</a:t>
+            </a:r>
+          </a:p>
+        </p:txBody>
+      </p:sp>
+      <p:sp>
+        <p:nvSpPr>
+          <p:cNvPr id="5" name="TextBox 4"/>
+          <p:cNvSpPr txBox="1"/>
+          <p:nvPr/>
+        </p:nvSpPr>
+        <p:spPr>
+          <a:xfrm>
+            <a:off x="4937760" y="1783080"/>
+            <a:ext cx="6601967" cy="274320"/>
           </a:xfrm>
           <a:prstGeom prst="rect">
             <a:avLst/>
@@ -15989,14 +16067,14 @@
       </p:sp>
       <p:sp>
         <p:nvSpPr>
-          <p:cNvPr id="4" name="TextBox 3"/>
-          <p:cNvSpPr txBox="1"/>
-          <p:nvPr/>
-        </p:nvSpPr>
-        <p:spPr>
-          <a:xfrm>
-            <a:off x="649224" y="2057400"/>
-            <a:ext cx="10890504" cy="1005840"/>
+          <p:cNvPr id="6" name="TextBox 5"/>
+          <p:cNvSpPr txBox="1"/>
+          <p:nvPr/>
+        </p:nvSpPr>
+        <p:spPr>
+          <a:xfrm>
+            <a:off x="4937760" y="2057400"/>
+            <a:ext cx="6601967" cy="1005840"/>
           </a:xfrm>
           <a:prstGeom prst="rect">
             <a:avLst/>
@@ -16028,14 +16106,14 @@
       </p:sp>
       <p:sp>
         <p:nvSpPr>
-          <p:cNvPr id="5" name="TextBox 4"/>
-          <p:cNvSpPr txBox="1"/>
-          <p:nvPr/>
-        </p:nvSpPr>
-        <p:spPr>
-          <a:xfrm>
-            <a:off x="649224" y="3108960"/>
-            <a:ext cx="10890504" cy="274320"/>
+          <p:cNvPr id="7" name="TextBox 6"/>
+          <p:cNvSpPr txBox="1"/>
+          <p:nvPr/>
+        </p:nvSpPr>
+        <p:spPr>
+          <a:xfrm>
+            <a:off x="4937760" y="3108960"/>
+            <a:ext cx="6601967" cy="274320"/>
           </a:xfrm>
           <a:prstGeom prst="rect">
             <a:avLst/>
@@ -16067,14 +16145,14 @@
       </p:sp>
       <p:sp>
         <p:nvSpPr>
-          <p:cNvPr id="6" name="TextBox 5"/>
-          <p:cNvSpPr txBox="1"/>
-          <p:nvPr/>
-        </p:nvSpPr>
-        <p:spPr>
-          <a:xfrm>
-            <a:off x="649224" y="3383279"/>
-            <a:ext cx="10890504" cy="1005840"/>
+          <p:cNvPr id="8" name="TextBox 7"/>
+          <p:cNvSpPr txBox="1"/>
+          <p:nvPr/>
+        </p:nvSpPr>
+        <p:spPr>
+          <a:xfrm>
+            <a:off x="4937760" y="3383279"/>
+            <a:ext cx="6601967" cy="1005840"/>
           </a:xfrm>
           <a:prstGeom prst="rect">
             <a:avLst/>
@@ -16106,14 +16184,14 @@
       </p:sp>
       <p:sp>
         <p:nvSpPr>
-          <p:cNvPr id="7" name="TextBox 6"/>
-          <p:cNvSpPr txBox="1"/>
-          <p:nvPr/>
-        </p:nvSpPr>
-        <p:spPr>
-          <a:xfrm>
-            <a:off x="649224" y="4434840"/>
-            <a:ext cx="10890504" cy="274320"/>
+          <p:cNvPr id="9" name="TextBox 8"/>
+          <p:cNvSpPr txBox="1"/>
+          <p:nvPr/>
+        </p:nvSpPr>
+        <p:spPr>
+          <a:xfrm>
+            <a:off x="4937760" y="4434840"/>
+            <a:ext cx="6601967" cy="274320"/>
           </a:xfrm>
           <a:prstGeom prst="rect">
             <a:avLst/>
@@ -16145,14 +16223,14 @@
       </p:sp>
       <p:sp>
         <p:nvSpPr>
-          <p:cNvPr id="8" name="TextBox 7"/>
-          <p:cNvSpPr txBox="1"/>
-          <p:nvPr/>
-        </p:nvSpPr>
-        <p:spPr>
-          <a:xfrm>
-            <a:off x="649224" y="4709159"/>
-            <a:ext cx="10890504" cy="1005840"/>
+          <p:cNvPr id="10" name="TextBox 9"/>
+          <p:cNvSpPr txBox="1"/>
+          <p:nvPr/>
+        </p:nvSpPr>
+        <p:spPr>
+          <a:xfrm>
+            <a:off x="4937760" y="4709159"/>
+            <a:ext cx="6601967" cy="1005840"/>
           </a:xfrm>
           <a:prstGeom prst="rect">
             <a:avLst/>
@@ -16184,7 +16262,7 @@
       </p:sp>
       <p:sp>
         <p:nvSpPr>
-          <p:cNvPr id="9" name="TextBox 8"/>
+          <p:cNvPr id="11" name="TextBox 10"/>
           <p:cNvSpPr txBox="1"/>
           <p:nvPr/>
         </p:nvSpPr>
@@ -16223,7 +16301,7 @@
       </p:sp>
       <p:sp>
         <p:nvSpPr>
-          <p:cNvPr id="10" name="TextBox 9"/>
+          <p:cNvPr id="12" name="TextBox 11"/>
           <p:cNvSpPr txBox="1"/>
           <p:nvPr/>
         </p:nvSpPr>
@@ -17195,7 +17273,85 @@
         <p:spPr>
           <a:xfrm>
             <a:off x="649224" y="1783080"/>
-            <a:ext cx="10890504" cy="274320"/>
+            <a:ext cx="3931920" cy="1143000"/>
+          </a:xfrm>
+          <a:prstGeom prst="rect">
+            <a:avLst/>
+          </a:prstGeom>
+          <a:noFill/>
+        </p:spPr>
+        <p:txBody>
+          <a:bodyPr wrap="square" anchor="t" lIns="18288" rIns="18288" tIns="18288" bIns="18288">
+            <a:spAutoFit/>
+          </a:bodyPr>
+          <a:lstStyle/>
+          <a:p>
+            <a:pPr algn="l">
+              <a:spcAft>
+                <a:spcPts val="400"/>
+              </a:spcAft>
+            </a:pPr>
+            <a:r>
+              <a:rPr sz="7200" b="1">
+                <a:solidFill>
+                  <a:srgbClr val="C1400B"/>
+                </a:solidFill>
+                <a:latin typeface="Segoe UI"/>
+              </a:rPr>
+              <a:t>39</a:t>
+            </a:r>
+          </a:p>
+        </p:txBody>
+      </p:sp>
+      <p:sp>
+        <p:nvSpPr>
+          <p:cNvPr id="4" name="TextBox 3"/>
+          <p:cNvSpPr txBox="1"/>
+          <p:nvPr/>
+        </p:nvSpPr>
+        <p:spPr>
+          <a:xfrm>
+            <a:off x="676656" y="2971800"/>
+            <a:ext cx="3931920" cy="822960"/>
+          </a:xfrm>
+          <a:prstGeom prst="rect">
+            <a:avLst/>
+          </a:prstGeom>
+          <a:noFill/>
+        </p:spPr>
+        <p:txBody>
+          <a:bodyPr wrap="square" anchor="t" lIns="18288" rIns="18288" tIns="18288" bIns="18288">
+            <a:spAutoFit/>
+          </a:bodyPr>
+          <a:lstStyle/>
+          <a:p>
+            <a:pPr algn="l">
+              <a:spcAft>
+                <a:spcPts val="400"/>
+              </a:spcAft>
+            </a:pPr>
+            <a:r>
+              <a:rPr sz="1600" b="0">
+                <a:solidFill>
+                  <a:srgbClr val="4A5462"/>
+                </a:solidFill>
+                <a:latin typeface="Segoe UI"/>
+              </a:rPr>
+              <a:t>файлов разобрано</a:t>
+            </a:r>
+          </a:p>
+        </p:txBody>
+      </p:sp>
+      <p:sp>
+        <p:nvSpPr>
+          <p:cNvPr id="5" name="TextBox 4"/>
+          <p:cNvSpPr txBox="1"/>
+          <p:nvPr/>
+        </p:nvSpPr>
+        <p:spPr>
+          <a:xfrm>
+            <a:off x="4937760" y="1783080"/>
+            <a:ext cx="6601967" cy="274320"/>
           </a:xfrm>
           <a:prstGeom prst="rect">
             <a:avLst/>
@@ -17227,14 +17383,14 @@
       </p:sp>
       <p:sp>
         <p:nvSpPr>
-          <p:cNvPr id="4" name="TextBox 3"/>
-          <p:cNvSpPr txBox="1"/>
-          <p:nvPr/>
-        </p:nvSpPr>
-        <p:spPr>
-          <a:xfrm>
-            <a:off x="649224" y="2057400"/>
-            <a:ext cx="10890504" cy="1005840"/>
+          <p:cNvPr id="6" name="TextBox 5"/>
+          <p:cNvSpPr txBox="1"/>
+          <p:nvPr/>
+        </p:nvSpPr>
+        <p:spPr>
+          <a:xfrm>
+            <a:off x="4937760" y="2057400"/>
+            <a:ext cx="6601967" cy="1005840"/>
           </a:xfrm>
           <a:prstGeom prst="rect">
             <a:avLst/>
@@ -17266,14 +17422,14 @@
       </p:sp>
       <p:sp>
         <p:nvSpPr>
-          <p:cNvPr id="5" name="TextBox 4"/>
-          <p:cNvSpPr txBox="1"/>
-          <p:nvPr/>
-        </p:nvSpPr>
-        <p:spPr>
-          <a:xfrm>
-            <a:off x="649224" y="3108960"/>
-            <a:ext cx="10890504" cy="274320"/>
+          <p:cNvPr id="7" name="TextBox 6"/>
+          <p:cNvSpPr txBox="1"/>
+          <p:nvPr/>
+        </p:nvSpPr>
+        <p:spPr>
+          <a:xfrm>
+            <a:off x="4937760" y="3108960"/>
+            <a:ext cx="6601967" cy="274320"/>
           </a:xfrm>
           <a:prstGeom prst="rect">
             <a:avLst/>
@@ -17305,14 +17461,14 @@
       </p:sp>
       <p:sp>
         <p:nvSpPr>
-          <p:cNvPr id="6" name="TextBox 5"/>
-          <p:cNvSpPr txBox="1"/>
-          <p:nvPr/>
-        </p:nvSpPr>
-        <p:spPr>
-          <a:xfrm>
-            <a:off x="649224" y="3383279"/>
-            <a:ext cx="10890504" cy="1005840"/>
+          <p:cNvPr id="8" name="TextBox 7"/>
+          <p:cNvSpPr txBox="1"/>
+          <p:nvPr/>
+        </p:nvSpPr>
+        <p:spPr>
+          <a:xfrm>
+            <a:off x="4937760" y="3383279"/>
+            <a:ext cx="6601967" cy="1005840"/>
           </a:xfrm>
           <a:prstGeom prst="rect">
             <a:avLst/>
@@ -17344,14 +17500,14 @@
       </p:sp>
       <p:sp>
         <p:nvSpPr>
-          <p:cNvPr id="7" name="TextBox 6"/>
-          <p:cNvSpPr txBox="1"/>
-          <p:nvPr/>
-        </p:nvSpPr>
-        <p:spPr>
-          <a:xfrm>
-            <a:off x="649224" y="4434840"/>
-            <a:ext cx="10890504" cy="274320"/>
+          <p:cNvPr id="9" name="TextBox 8"/>
+          <p:cNvSpPr txBox="1"/>
+          <p:nvPr/>
+        </p:nvSpPr>
+        <p:spPr>
+          <a:xfrm>
+            <a:off x="4937760" y="4434840"/>
+            <a:ext cx="6601967" cy="274320"/>
           </a:xfrm>
           <a:prstGeom prst="rect">
             <a:avLst/>
@@ -17383,14 +17539,14 @@
       </p:sp>
       <p:sp>
         <p:nvSpPr>
-          <p:cNvPr id="8" name="TextBox 7"/>
-          <p:cNvSpPr txBox="1"/>
-          <p:nvPr/>
-        </p:nvSpPr>
-        <p:spPr>
-          <a:xfrm>
-            <a:off x="649224" y="4709159"/>
-            <a:ext cx="10890504" cy="1005840"/>
+          <p:cNvPr id="10" name="TextBox 9"/>
+          <p:cNvSpPr txBox="1"/>
+          <p:nvPr/>
+        </p:nvSpPr>
+        <p:spPr>
+          <a:xfrm>
+            <a:off x="4937760" y="4709159"/>
+            <a:ext cx="6601967" cy="1005840"/>
           </a:xfrm>
           <a:prstGeom prst="rect">
             <a:avLst/>
@@ -17422,7 +17578,7 @@
       </p:sp>
       <p:sp>
         <p:nvSpPr>
-          <p:cNvPr id="9" name="TextBox 8"/>
+          <p:cNvPr id="11" name="TextBox 10"/>
           <p:cNvSpPr txBox="1"/>
           <p:nvPr/>
         </p:nvSpPr>
@@ -17461,7 +17617,7 @@
       </p:sp>
       <p:sp>
         <p:nvSpPr>
-          <p:cNvPr id="10" name="TextBox 9"/>
+          <p:cNvPr id="12" name="TextBox 11"/>
           <p:cNvSpPr txBox="1"/>
           <p:nvPr/>
         </p:nvSpPr>
@@ -18702,7 +18858,7 @@
                 </a:solidFill>
                 <a:latin typeface="Segoe UI"/>
               </a:rPr>
-              <a:t>Перенос не заявляем.</a:t>
+              <a:t>Без дообучения не переносится: AP50 0.914 на отложенном FML против дрон Maharjan 2022 0.01, камера над каналом TUD-GV 0.406, камера над рекой The Ocean Cleanup 0.001.</a:t>
             </a:r>
           </a:p>
         </p:txBody>
@@ -18859,7 +19015,85 @@
         <p:spPr>
           <a:xfrm>
             <a:off x="649224" y="1783080"/>
-            <a:ext cx="10890504" cy="274320"/>
+            <a:ext cx="3931920" cy="1143000"/>
+          </a:xfrm>
+          <a:prstGeom prst="rect">
+            <a:avLst/>
+          </a:prstGeom>
+          <a:noFill/>
+        </p:spPr>
+        <p:txBody>
+          <a:bodyPr wrap="square" anchor="t" lIns="18288" rIns="18288" tIns="18288" bIns="18288">
+            <a:spAutoFit/>
+          </a:bodyPr>
+          <a:lstStyle/>
+          <a:p>
+            <a:pPr algn="l">
+              <a:spcAft>
+                <a:spcPts val="400"/>
+              </a:spcAft>
+            </a:pPr>
+            <a:r>
+              <a:rPr sz="7200" b="1">
+                <a:solidFill>
+                  <a:srgbClr val="C1400B"/>
+                </a:solidFill>
+                <a:latin typeface="Segoe UI"/>
+              </a:rPr>
+              <a:t>0.75</a:t>
+            </a:r>
+          </a:p>
+        </p:txBody>
+      </p:sp>
+      <p:sp>
+        <p:nvSpPr>
+          <p:cNvPr id="4" name="TextBox 3"/>
+          <p:cNvSpPr txBox="1"/>
+          <p:nvPr/>
+        </p:nvSpPr>
+        <p:spPr>
+          <a:xfrm>
+            <a:off x="676656" y="2971800"/>
+            <a:ext cx="3931920" cy="822960"/>
+          </a:xfrm>
+          <a:prstGeom prst="rect">
+            <a:avLst/>
+          </a:prstGeom>
+          <a:noFill/>
+        </p:spPr>
+        <p:txBody>
+          <a:bodyPr wrap="square" anchor="t" lIns="18288" rIns="18288" tIns="18288" bIns="18288">
+            <a:spAutoFit/>
+          </a:bodyPr>
+          <a:lstStyle/>
+          <a:p>
+            <a:pPr algn="l">
+              <a:spcAft>
+                <a:spcPts val="400"/>
+              </a:spcAft>
+            </a:pPr>
+            <a:r>
+              <a:rPr sz="1600" b="0">
+                <a:solidFill>
+                  <a:srgbClr val="4A5462"/>
+                </a:solidFill>
+                <a:latin typeface="Segoe UI"/>
+              </a:rPr>
+              <a:t>macro-F1 по материалам</a:t>
+            </a:r>
+          </a:p>
+        </p:txBody>
+      </p:sp>
+      <p:sp>
+        <p:nvSpPr>
+          <p:cNvPr id="5" name="TextBox 4"/>
+          <p:cNvSpPr txBox="1"/>
+          <p:nvPr/>
+        </p:nvSpPr>
+        <p:spPr>
+          <a:xfrm>
+            <a:off x="4937760" y="1783080"/>
+            <a:ext cx="6601967" cy="274320"/>
           </a:xfrm>
           <a:prstGeom prst="rect">
             <a:avLst/>
@@ -18891,14 +19125,14 @@
       </p:sp>
       <p:sp>
         <p:nvSpPr>
-          <p:cNvPr id="4" name="TextBox 3"/>
-          <p:cNvSpPr txBox="1"/>
-          <p:nvPr/>
-        </p:nvSpPr>
-        <p:spPr>
-          <a:xfrm>
-            <a:off x="649224" y="2057400"/>
-            <a:ext cx="10890504" cy="1005840"/>
+          <p:cNvPr id="6" name="TextBox 5"/>
+          <p:cNvSpPr txBox="1"/>
+          <p:nvPr/>
+        </p:nvSpPr>
+        <p:spPr>
+          <a:xfrm>
+            <a:off x="4937760" y="2057400"/>
+            <a:ext cx="6601967" cy="1005840"/>
           </a:xfrm>
           <a:prstGeom prst="rect">
             <a:avLst/>
@@ -18930,14 +19164,14 @@
       </p:sp>
       <p:sp>
         <p:nvSpPr>
-          <p:cNvPr id="5" name="TextBox 4"/>
-          <p:cNvSpPr txBox="1"/>
-          <p:nvPr/>
-        </p:nvSpPr>
-        <p:spPr>
-          <a:xfrm>
-            <a:off x="649224" y="3108960"/>
-            <a:ext cx="10890504" cy="274320"/>
+          <p:cNvPr id="7" name="TextBox 6"/>
+          <p:cNvSpPr txBox="1"/>
+          <p:nvPr/>
+        </p:nvSpPr>
+        <p:spPr>
+          <a:xfrm>
+            <a:off x="4937760" y="3108960"/>
+            <a:ext cx="6601967" cy="274320"/>
           </a:xfrm>
           <a:prstGeom prst="rect">
             <a:avLst/>
@@ -18969,14 +19203,14 @@
       </p:sp>
       <p:sp>
         <p:nvSpPr>
-          <p:cNvPr id="6" name="TextBox 5"/>
-          <p:cNvSpPr txBox="1"/>
-          <p:nvPr/>
-        </p:nvSpPr>
-        <p:spPr>
-          <a:xfrm>
-            <a:off x="649224" y="3383279"/>
-            <a:ext cx="10890504" cy="1005840"/>
+          <p:cNvPr id="8" name="TextBox 7"/>
+          <p:cNvSpPr txBox="1"/>
+          <p:nvPr/>
+        </p:nvSpPr>
+        <p:spPr>
+          <a:xfrm>
+            <a:off x="4937760" y="3383279"/>
+            <a:ext cx="6601967" cy="1005840"/>
           </a:xfrm>
           <a:prstGeom prst="rect">
             <a:avLst/>
@@ -19008,14 +19242,14 @@
       </p:sp>
       <p:sp>
         <p:nvSpPr>
-          <p:cNvPr id="7" name="TextBox 6"/>
-          <p:cNvSpPr txBox="1"/>
-          <p:nvPr/>
-        </p:nvSpPr>
-        <p:spPr>
-          <a:xfrm>
-            <a:off x="649224" y="4434840"/>
-            <a:ext cx="10890504" cy="274320"/>
+          <p:cNvPr id="9" name="TextBox 8"/>
+          <p:cNvSpPr txBox="1"/>
+          <p:nvPr/>
+        </p:nvSpPr>
+        <p:spPr>
+          <a:xfrm>
+            <a:off x="4937760" y="4434840"/>
+            <a:ext cx="6601967" cy="274320"/>
           </a:xfrm>
           <a:prstGeom prst="rect">
             <a:avLst/>
@@ -19047,14 +19281,14 @@
       </p:sp>
       <p:sp>
         <p:nvSpPr>
-          <p:cNvPr id="8" name="TextBox 7"/>
-          <p:cNvSpPr txBox="1"/>
-          <p:nvPr/>
-        </p:nvSpPr>
-        <p:spPr>
-          <a:xfrm>
-            <a:off x="649224" y="4709159"/>
-            <a:ext cx="10890504" cy="1005840"/>
+          <p:cNvPr id="10" name="TextBox 9"/>
+          <p:cNvSpPr txBox="1"/>
+          <p:nvPr/>
+        </p:nvSpPr>
+        <p:spPr>
+          <a:xfrm>
+            <a:off x="4937760" y="4709159"/>
+            <a:ext cx="6601967" cy="1005840"/>
           </a:xfrm>
           <a:prstGeom prst="rect">
             <a:avLst/>
@@ -19086,7 +19320,7 @@
       </p:sp>
       <p:sp>
         <p:nvSpPr>
-          <p:cNvPr id="9" name="TextBox 8"/>
+          <p:cNvPr id="11" name="TextBox 10"/>
           <p:cNvSpPr txBox="1"/>
           <p:nvPr/>
         </p:nvSpPr>
@@ -19125,7 +19359,7 @@
       </p:sp>
       <p:sp>
         <p:nvSpPr>
-          <p:cNvPr id="10" name="TextBox 9"/>
+          <p:cNvPr id="12" name="TextBox 11"/>
           <p:cNvSpPr txBox="1"/>
           <p:nvPr/>
         </p:nvSpPr>
@@ -19216,13 +19450,13 @@
               </a:spcAft>
             </a:pPr>
             <a:r>
-              <a:rPr sz="3200" b="1">
+              <a:rPr sz="2800" b="1">
                 <a:solidFill>
                   <a:srgbClr val="1E2836"/>
                 </a:solidFill>
                 <a:latin typeface="Segoe UI"/>
               </a:rPr>
-              <a:t>Проверка глазами жюри-человека меняет подписи и статусы</a:t>
+              <a:t>Внутренняя проверка глазами «жюри-человека» меняет подписи и статусы</a:t>
             </a:r>
           </a:p>
         </p:txBody>
@@ -19300,7 +19534,7 @@
                 </a:solidFill>
                 <a:latin typeface="Segoe UI"/>
               </a:rPr>
-              <a:t>Интерфейс понятен без объяснений.</a:t>
+              <a:t>Интерфейс и дека понятны без объяснений.</a:t>
             </a:r>
           </a:p>
         </p:txBody>
@@ -19378,7 +19612,7 @@
                 </a:solidFill>
                 <a:latin typeface="Segoe UI"/>
               </a:rPr>
-              <a:t>Независимый проверяющий листает сервис и деку и записывает, что понял неверно.</a:t>
+              <a:t>Независимый проверяющий внутри команды листает сервис и деку по чек-листу ТЗ и записывает, что понял неверно.</a:t>
             </a:r>
           </a:p>
         </p:txBody>
@@ -19456,7 +19690,7 @@
                 </a:solidFill>
                 <a:latin typeface="Segoe UI"/>
               </a:rPr>
-              <a:t>Подписи «оценка детектора», «пластик не подтверждён», статусы по постановке.</a:t>
+              <a:t>Подписи «оценка детектора», «пластик не подтверждён», статусы по постановке, «количество не определено».</a:t>
             </a:r>
           </a:p>
         </p:txBody>
@@ -21914,8 +22148,8 @@
         </p:blipFill>
         <p:spPr>
           <a:xfrm>
-            <a:off x="6617512" y="1737360"/>
-            <a:ext cx="3407054" cy="4206240"/>
+            <a:off x="6114343" y="1737360"/>
+            <a:ext cx="4413392" cy="4206240"/>
           </a:xfrm>
           <a:prstGeom prst="rect">
             <a:avLst/>
@@ -23199,7 +23433,7 @@
                 </a:solidFill>
                 <a:latin typeface="Segoe UI"/>
               </a:rPr>
-              <a:t>Искусственные мишени PLP: детектор видит пиксель только при большом покрытии</a:t>
+              <a:t>Искусственные мишени: 19 дат со счётом — детектор видит пиксель только при большом покрытии</a:t>
             </a:r>
           </a:p>
         </p:txBody>

--- a/presentation/deck_checkpoint.pptx
+++ b/presentation/deck_checkpoint.pptx
@@ -3202,7 +3202,7 @@
           <a:lstStyle/>
           <a:p>
             <a:r>
-              <a:t>Мы отличаем мусор от судов, пены, бликов, облаков и берега. На этом слайде примеры с отложенного теста: слева полоса, найденная верно; дальше пропуск, когда полоса слишком тонкая; судно с кильватером, которое спектрально похоже на мусор; пена и саргассум. Всего на тесте 75 ложных пикселей, и 64 процентов из них — суда и природная органика. Поэтому после детектора стоят фильтры: маска судов и кильватера, маска пены, блика и облаков по SCL, ветер по ERA5. Если снимок закрыт облаками или на нём блик, зона получает статус «анализ невозможен», а не «чисто». Это важно для эколога: отсутствие находки на плохом снимке ничего не говорит о воде. Для каждой причины ошибки у нас есть отдельный признак, который эколог видит в карточке: что исключено и что не проверяется. Например, водоросли и мутные речные шлейфы детектор не отличает надёжно, и мы пишем об этом прямо.</a:t>
+              <a:t>Мы отличаем мусор от судов, пены, бликов, облаков и берега. На этом слайде пять примеров прямо из сервиса, раздел «Проверка качества»: полоса, найденная верно; пропуск, когда детектор отметил только малую часть нити; судно с кильватером, которое спектрально похоже на мусор; пена, которую поймал фильтр; и снимок, где анализ невозможен из-за низкого солнца. Всего на тесте 75 ложных пикселей, и 64 процентов из них — суда и природная органика. Поэтому после детектора стоят фильтры: маска судов и кильватера, маска пены, блика и облаков по SCL, ветер по ERA5. Если снимок закрыт облаками или на нём блик, зона получает статус «анализ невозможен», а не «чисто». Это важно для эколога: отсутствие находки на плохом снимке ничего не говорит о воде. Для каждой причины ошибки у нас есть отдельный признак, который эколог видит в карточке: что исключено и что не проверяется. Например, водоросли и мутные речные шлейфы детектор не отличает надёжно, и мы пишем об этом прямо.</a:t>
             </a:r>
           </a:p>
         </p:txBody>
@@ -22336,9 +22336,165 @@
           </a:p>
         </p:txBody>
       </p:sp>
+      <p:sp>
+        <p:nvSpPr>
+          <p:cNvPr id="3" name="TextBox 2"/>
+          <p:cNvSpPr txBox="1"/>
+          <p:nvPr/>
+        </p:nvSpPr>
+        <p:spPr>
+          <a:xfrm>
+            <a:off x="649224" y="1737360"/>
+            <a:ext cx="4206240" cy="952500"/>
+          </a:xfrm>
+          <a:prstGeom prst="rect">
+            <a:avLst/>
+          </a:prstGeom>
+          <a:noFill/>
+        </p:spPr>
+        <p:txBody>
+          <a:bodyPr wrap="square" anchor="t" lIns="18288" rIns="18288" tIns="18288" bIns="18288">
+            <a:spAutoFit/>
+          </a:bodyPr>
+          <a:lstStyle/>
+          <a:p>
+            <a:pPr algn="l">
+              <a:spcAft>
+                <a:spcPts val="400"/>
+              </a:spcAft>
+            </a:pPr>
+            <a:r>
+              <a:rPr sz="6000" b="1">
+                <a:solidFill>
+                  <a:srgbClr val="C1400B"/>
+                </a:solidFill>
+                <a:latin typeface="Segoe UI"/>
+              </a:rPr>
+              <a:t>75</a:t>
+            </a:r>
+          </a:p>
+        </p:txBody>
+      </p:sp>
+      <p:sp>
+        <p:nvSpPr>
+          <p:cNvPr id="4" name="TextBox 3"/>
+          <p:cNvSpPr txBox="1"/>
+          <p:nvPr/>
+        </p:nvSpPr>
+        <p:spPr>
+          <a:xfrm>
+            <a:off x="676656" y="2727960"/>
+            <a:ext cx="4206240" cy="822960"/>
+          </a:xfrm>
+          <a:prstGeom prst="rect">
+            <a:avLst/>
+          </a:prstGeom>
+          <a:noFill/>
+        </p:spPr>
+        <p:txBody>
+          <a:bodyPr wrap="square" anchor="t" lIns="18288" rIns="18288" tIns="18288" bIns="18288">
+            <a:spAutoFit/>
+          </a:bodyPr>
+          <a:lstStyle/>
+          <a:p>
+            <a:pPr algn="l">
+              <a:spcAft>
+                <a:spcPts val="400"/>
+              </a:spcAft>
+            </a:pPr>
+            <a:r>
+              <a:rPr sz="1500" b="0">
+                <a:solidFill>
+                  <a:srgbClr val="4A5462"/>
+                </a:solidFill>
+                <a:latin typeface="Segoe UI"/>
+              </a:rPr>
+              <a:t>ложных пикселей на отложенном тесте</a:t>
+            </a:r>
+          </a:p>
+        </p:txBody>
+      </p:sp>
+      <p:sp>
+        <p:nvSpPr>
+          <p:cNvPr id="5" name="TextBox 4"/>
+          <p:cNvSpPr txBox="1"/>
+          <p:nvPr/>
+        </p:nvSpPr>
+        <p:spPr>
+          <a:xfrm>
+            <a:off x="649224" y="3520439"/>
+            <a:ext cx="4206240" cy="952500"/>
+          </a:xfrm>
+          <a:prstGeom prst="rect">
+            <a:avLst/>
+          </a:prstGeom>
+          <a:noFill/>
+        </p:spPr>
+        <p:txBody>
+          <a:bodyPr wrap="square" anchor="t" lIns="18288" rIns="18288" tIns="18288" bIns="18288">
+            <a:spAutoFit/>
+          </a:bodyPr>
+          <a:lstStyle/>
+          <a:p>
+            <a:pPr algn="l">
+              <a:spcAft>
+                <a:spcPts val="400"/>
+              </a:spcAft>
+            </a:pPr>
+            <a:r>
+              <a:rPr sz="6000" b="1">
+                <a:solidFill>
+                  <a:srgbClr val="C1400B"/>
+                </a:solidFill>
+                <a:latin typeface="Segoe UI"/>
+              </a:rPr>
+              <a:t>64 %</a:t>
+            </a:r>
+          </a:p>
+        </p:txBody>
+      </p:sp>
+      <p:sp>
+        <p:nvSpPr>
+          <p:cNvPr id="6" name="TextBox 5"/>
+          <p:cNvSpPr txBox="1"/>
+          <p:nvPr/>
+        </p:nvSpPr>
+        <p:spPr>
+          <a:xfrm>
+            <a:off x="676656" y="4511040"/>
+            <a:ext cx="4206240" cy="822960"/>
+          </a:xfrm>
+          <a:prstGeom prst="rect">
+            <a:avLst/>
+          </a:prstGeom>
+          <a:noFill/>
+        </p:spPr>
+        <p:txBody>
+          <a:bodyPr wrap="square" anchor="t" lIns="18288" rIns="18288" tIns="18288" bIns="18288">
+            <a:spAutoFit/>
+          </a:bodyPr>
+          <a:lstStyle/>
+          <a:p>
+            <a:pPr algn="l">
+              <a:spcAft>
+                <a:spcPts val="400"/>
+              </a:spcAft>
+            </a:pPr>
+            <a:r>
+              <a:rPr sz="1500" b="0">
+                <a:solidFill>
+                  <a:srgbClr val="4A5462"/>
+                </a:solidFill>
+                <a:latin typeface="Segoe UI"/>
+              </a:rPr>
+              <a:t>из них — суда и органика</a:t>
+            </a:r>
+          </a:p>
+        </p:txBody>
+      </p:sp>
       <p:pic>
         <p:nvPicPr>
-          <p:cNvPr id="3" name="Picture 2" descr="hard_background.jpg"/>
+          <p:cNvPr id="7" name="Picture 6" descr="defense.png"/>
           <p:cNvPicPr>
             <a:picLocks noChangeAspect="1"/>
           </p:cNvPicPr>
@@ -22352,8 +22508,8 @@
         </p:blipFill>
         <p:spPr>
           <a:xfrm>
-            <a:off x="2318004" y="1691640"/>
-            <a:ext cx="7543800" cy="3017520"/>
+            <a:off x="5769137" y="1737360"/>
+            <a:ext cx="5103805" cy="4206240"/>
           </a:xfrm>
           <a:prstGeom prst="rect">
             <a:avLst/>
@@ -22367,195 +22523,39 @@
       </p:pic>
       <p:sp>
         <p:nvSpPr>
-          <p:cNvPr id="4" name="TextBox 3"/>
-          <p:cNvSpPr txBox="1"/>
-          <p:nvPr/>
-        </p:nvSpPr>
-        <p:spPr>
-          <a:xfrm>
-            <a:off x="649224" y="4846320"/>
-            <a:ext cx="3081527" cy="698500"/>
-          </a:xfrm>
-          <a:prstGeom prst="rect">
-            <a:avLst/>
-          </a:prstGeom>
-          <a:noFill/>
-        </p:spPr>
-        <p:txBody>
-          <a:bodyPr wrap="square" anchor="t" lIns="18288" rIns="18288" tIns="18288" bIns="18288">
-            <a:spAutoFit/>
-          </a:bodyPr>
-          <a:lstStyle/>
-          <a:p>
-            <a:pPr algn="l">
-              <a:spcAft>
-                <a:spcPts val="400"/>
-              </a:spcAft>
-            </a:pPr>
-            <a:r>
-              <a:rPr sz="4400" b="1">
-                <a:solidFill>
-                  <a:srgbClr val="C1400B"/>
-                </a:solidFill>
-                <a:latin typeface="Segoe UI"/>
-              </a:rPr>
-              <a:t>75</a:t>
-            </a:r>
-          </a:p>
-        </p:txBody>
-      </p:sp>
-      <p:sp>
-        <p:nvSpPr>
-          <p:cNvPr id="5" name="TextBox 4"/>
-          <p:cNvSpPr txBox="1"/>
-          <p:nvPr/>
-        </p:nvSpPr>
-        <p:spPr>
-          <a:xfrm>
-            <a:off x="676656" y="5572760"/>
-            <a:ext cx="3081527" cy="822960"/>
-          </a:xfrm>
-          <a:prstGeom prst="rect">
-            <a:avLst/>
-          </a:prstGeom>
-          <a:noFill/>
-        </p:spPr>
-        <p:txBody>
-          <a:bodyPr wrap="square" anchor="t" lIns="18288" rIns="18288" tIns="18288" bIns="18288">
-            <a:spAutoFit/>
-          </a:bodyPr>
-          <a:lstStyle/>
-          <a:p>
-            <a:pPr algn="l">
-              <a:spcAft>
-                <a:spcPts val="400"/>
-              </a:spcAft>
-            </a:pPr>
-            <a:r>
-              <a:rPr sz="1400" b="0">
+          <p:cNvPr id="8" name="TextBox 7"/>
+          <p:cNvSpPr txBox="1"/>
+          <p:nvPr/>
+        </p:nvSpPr>
+        <p:spPr>
+          <a:xfrm>
+            <a:off x="5120640" y="6035040"/>
+            <a:ext cx="6400800" cy="548640"/>
+          </a:xfrm>
+          <a:prstGeom prst="rect">
+            <a:avLst/>
+          </a:prstGeom>
+          <a:noFill/>
+        </p:spPr>
+        <p:txBody>
+          <a:bodyPr wrap="square" anchor="t" lIns="18288" rIns="18288" tIns="18288" bIns="18288">
+            <a:spAutoFit/>
+          </a:bodyPr>
+          <a:lstStyle/>
+          <a:p>
+            <a:pPr algn="l">
+              <a:spcAft>
+                <a:spcPts val="200"/>
+              </a:spcAft>
+            </a:pPr>
+            <a:r>
+              <a:rPr sz="1200" b="0">
                 <a:solidFill>
                   <a:srgbClr val="4A5462"/>
                 </a:solidFill>
                 <a:latin typeface="Segoe UI"/>
               </a:rPr>
-              <a:t>ложных пикселей на отложенном тесте</a:t>
-            </a:r>
-          </a:p>
-        </p:txBody>
-      </p:sp>
-      <p:sp>
-        <p:nvSpPr>
-          <p:cNvPr id="6" name="TextBox 5"/>
-          <p:cNvSpPr txBox="1"/>
-          <p:nvPr/>
-        </p:nvSpPr>
-        <p:spPr>
-          <a:xfrm>
-            <a:off x="3913631" y="4846320"/>
-            <a:ext cx="3081527" cy="698500"/>
-          </a:xfrm>
-          <a:prstGeom prst="rect">
-            <a:avLst/>
-          </a:prstGeom>
-          <a:noFill/>
-        </p:spPr>
-        <p:txBody>
-          <a:bodyPr wrap="square" anchor="t" lIns="18288" rIns="18288" tIns="18288" bIns="18288">
-            <a:spAutoFit/>
-          </a:bodyPr>
-          <a:lstStyle/>
-          <a:p>
-            <a:pPr algn="l">
-              <a:spcAft>
-                <a:spcPts val="400"/>
-              </a:spcAft>
-            </a:pPr>
-            <a:r>
-              <a:rPr sz="4400" b="1">
-                <a:solidFill>
-                  <a:srgbClr val="C1400B"/>
-                </a:solidFill>
-                <a:latin typeface="Segoe UI"/>
-              </a:rPr>
-              <a:t>64 %</a:t>
-            </a:r>
-          </a:p>
-        </p:txBody>
-      </p:sp>
-      <p:sp>
-        <p:nvSpPr>
-          <p:cNvPr id="7" name="TextBox 6"/>
-          <p:cNvSpPr txBox="1"/>
-          <p:nvPr/>
-        </p:nvSpPr>
-        <p:spPr>
-          <a:xfrm>
-            <a:off x="3941063" y="5572760"/>
-            <a:ext cx="3081527" cy="822960"/>
-          </a:xfrm>
-          <a:prstGeom prst="rect">
-            <a:avLst/>
-          </a:prstGeom>
-          <a:noFill/>
-        </p:spPr>
-        <p:txBody>
-          <a:bodyPr wrap="square" anchor="t" lIns="18288" rIns="18288" tIns="18288" bIns="18288">
-            <a:spAutoFit/>
-          </a:bodyPr>
-          <a:lstStyle/>
-          <a:p>
-            <a:pPr algn="l">
-              <a:spcAft>
-                <a:spcPts val="400"/>
-              </a:spcAft>
-            </a:pPr>
-            <a:r>
-              <a:rPr sz="1400" b="0">
-                <a:solidFill>
-                  <a:srgbClr val="4A5462"/>
-                </a:solidFill>
-                <a:latin typeface="Segoe UI"/>
-              </a:rPr>
-              <a:t>из них — суда и органика</a:t>
-            </a:r>
-          </a:p>
-        </p:txBody>
-      </p:sp>
-      <p:sp>
-        <p:nvSpPr>
-          <p:cNvPr id="8" name="TextBox 7"/>
-          <p:cNvSpPr txBox="1"/>
-          <p:nvPr/>
-        </p:nvSpPr>
-        <p:spPr>
-          <a:xfrm>
-            <a:off x="7315200" y="4983480"/>
-            <a:ext cx="4206240" cy="1097280"/>
-          </a:xfrm>
-          <a:prstGeom prst="rect">
-            <a:avLst/>
-          </a:prstGeom>
-          <a:noFill/>
-        </p:spPr>
-        <p:txBody>
-          <a:bodyPr wrap="square" anchor="t" lIns="18288" rIns="18288" tIns="18288" bIns="18288">
-            <a:spAutoFit/>
-          </a:bodyPr>
-          <a:lstStyle/>
-          <a:p>
-            <a:pPr algn="l">
-              <a:spcAft>
-                <a:spcPts val="400"/>
-              </a:spcAft>
-            </a:pPr>
-            <a:r>
-              <a:rPr sz="1300" b="0">
-                <a:solidFill>
-                  <a:srgbClr val="4A5462"/>
-                </a:solidFill>
-                <a:latin typeface="Segoe UI"/>
-              </a:rPr>
-              <a:t>Верно найдено · пропуск · судно · пена · «анализ невозможен» — на отложенном тесте MARIDA</a:t>
+              <a:t>Пять примеров из сервиса («Проверка качества»): верно · пропуск · судно · пена · «анализ невозможен»</a:t>
             </a:r>
           </a:p>
         </p:txBody>

--- a/presentation/deck_checkpoint.pptx
+++ b/presentation/deck_checkpoint.pptx
@@ -542,7 +542,13 @@
           <a:lstStyle/>
           <a:p>
             <a:r>
-              <a:t>Мусор в море виден из космоса полосами, и мы находим их и честно считаем штуки там, где их можно измерить. Мы команда SAMARKAND. Наша задача в кейсе — по снимкам Sentinel-2 найти скопления плавающего мусора, оценить, сколько там предметов, и показать это экологу так, чтобы он понимал, чему можно верить. За эти дни мы собрали три вещи. Детектор, который на отложенных сценах MARIDA отличает мусор от воды, судов и пены. Полевой счёт штук на квадратный километр с честным интервалом. И счётчик предметов на детальном фото. Главное, что мы узнали по дороге: снимок показывает, где мусор, но не сколько в нём штук. Мы проверили это на всех парах «снимок — полевой счёт», которые смогли найти, и поэтому число штук по снимку мы не выдаём за измерение. Дальше — команда, проблема и три ступени решения.</a:t>
+              <a:t>Мусор в море виден из космоса полосами. Мы находим их и честно считаем штуки там, где их можно измерить. Мы команда SAMARKAND. По снимкам Sentinel-2 мы находим скопления плавающего мусора, оцениваем, сколько там предметов, и показываем экологу, чему можно верить.</a:t>
+            </a:r>
+          </a:p>
+          <a:p/>
+          <a:p>
+            <a:r>
+              <a:t>[0:00–0:18]</a:t>
             </a:r>
           </a:p>
         </p:txBody>
@@ -612,7 +618,13 @@
           <a:lstStyle/>
           <a:p>
             <a:r>
-              <a:t>На детальном фото модель считает предметы с ошибкой 0.59 штуки на кадр и определяет материал. Это третья ступень: фото с воды или с дрона, где предмет виден целиком. Мы обучили детектор объектов на открытом наборе FML и разбили его по сессиям съёмки, чтобы соседние кадры одной съёмки не попали и в обучение, и в тест. На отложенных кадрах ошибка счёта 0.59 предмета, а у бейзлайна «всегда медиана» — 2.86. На аэрофото берега Winans, где известна площадь кадра, наша ошибка 1.85 штуки против 2.29 у открытого DebrisScan, и правило замены было записано до сравнения. Материал модель называет по классам, но число по классам мы показываем только там, где есть разметка и матрица ошибок. Штуки на квадратный километр по фото мы считаем только там, где известна площадь кадра, как у Winans. Для кадров без площади единица — штуки на кадр. И это не спутник: Sentinel-2 так не считает.</a:t>
+              <a:t>На детальном фото модель считает предметы с ошибкой 0.59 шт. на кадр и определяет материал. Это фото с воды или дрона, где предмет виден целиком. На отложенных сессиях FML ошибка 0.59 предмета на кадр, у бейзлайна 2.86; на аэрофото Winans мы лучше открытого DebrisScan.</a:t>
+            </a:r>
+          </a:p>
+          <a:p/>
+          <a:p>
+            <a:r>
+              <a:t>[3:40–4:00]</a:t>
             </a:r>
           </a:p>
         </p:txBody>
@@ -682,7 +694,13 @@
           <a:lstStyle/>
           <a:p>
             <a:r>
-              <a:t>Эколог сразу видит, что найдено, где, когда и насколько этому верить. Путь такой: глобус с районами, клик по району — сцена с контурами зон, клик по зоне — карточка. Первая строка карточки — что это: плавающий материал по классу MARIDA, пластик не подтверждён. Дальше статус — один из четырёх по постановке, и отдельной строкой подтверждение: совпадает ли зона с независимой разметкой. В блоке количества прямо написано: количество предметов по этому снимку не определено, а исследовательский сценарий свёрнут и подписан оговорками. Рядом — ближайшее полевое измерение, но не как плотность этой зоны. Всё, что отфильтровано, выгружается в GeoJSON и CSV, а запрос можно сохранить и повторить. Если источник данных недоступен, сервис пишет «данные недоступны», а не «ноль зон». Находки на снимках из обучения помечены и не считаются. Так эколог отличает отсутствие мусора от отсутствия данных.</a:t>
+              <a:t>Эколог за пять шагов видит, что найдено, где, когда и насколько этому верить. Кнопка «Демо» проводит по шагам: район и даты, снимок с нумерованными зонами, карточка зоны, качество и статус, выгрузка. Первая строка карточки — что это: плавающий материал, пластик не подтверждён. Дальше статус, подтверждение независимой разметкой и прямо: количество предметов по этому снимку не определено; рядом — оценка по полю. Всё отфильтрованное выгружается в GeoJSON и CSV. Показываем это вживую в сервисе, кнопка «Демо», около полутора минут.</a:t>
+            </a:r>
+          </a:p>
+          <a:p/>
+          <a:p>
+            <a:r>
+              <a:t>[4:00–6:06]</a:t>
             </a:r>
           </a:p>
         </p:txBody>
@@ -752,7 +770,13 @@
           <a:lstStyle/>
           <a:p>
             <a:r>
-              <a:t>Одна команда воспроизводит все числа из чистой копии. Мы клонировали репозиторий на чистую машину: от клона до открытой карты и пересчитанных чисел — 7,5 минуты. В проекте 255 автотестов; отдельные тесты сверяют каждое число в документах и этой презентации с единым файлом итоговых чисел, где у каждого числа есть источник и протокол. Веса моделей лежат в репозитории, поэтому ничего не нужно обучать заново. Правила выбора моделей мы записывали до сравнения: например, модель поля берётся, только если она лучше медианы на отложенном рейсе. Это защищает от подгонки под тест. Файл итоговых чисел пересобирается одной командой после любого пересчёта, и документы с этой презентацией собираются из него скриптом. Если число в тексте разойдётся с файлом, тест упадёт. Поэтому то, что вы видите на слайдах, совпадает с тем, что считает код.</a:t>
+              <a:t>Три числа: F1 0.871 у детектора, 53.9 штуки на квадратный километр по полю и все проверенные гипотезы записаны до сравнения. Спасибо, готовы к вопросам.</a:t>
+            </a:r>
+          </a:p>
+          <a:p/>
+          <a:p>
+            <a:r>
+              <a:t>[6:06–6:17]</a:t>
             </a:r>
           </a:p>
         </p:txBody>
@@ -822,7 +846,7 @@
           <a:lstStyle/>
           <a:p>
             <a:r>
-              <a:t>Три числа, которые стоит запомнить. Детектор находит полосы мусора с F1 0.871 на отложенном тесте. Поле даёт 53.9 штуки на квадратный километр с честным интервалом. И 66 пар «снимок — поле» мы проверили и показали, почему штуки по снимку пока не измеряются. Всего за эти дни мы проверили 71 гипотезу и эксперименты, и каждое решение записано до сравнения. Спасибо, готовы к вопросам.</a:t>
+              <a:t>Приложение. Каждый слайд — одна гипотеза, как мы её проверили, число и решение.</a:t>
             </a:r>
           </a:p>
         </p:txBody>
@@ -892,7 +916,7 @@
           <a:lstStyle/>
           <a:p>
             <a:r>
-              <a:t>Приложение. Каждый слайд — одна гипотеза, как мы её проверили, число и решение.</a:t>
+              <a:t>Одна команда воспроизводит все числа из чистой копии. Мы клонировали репозиторий на чистую машину: от клона до открытой карты и пересчитанных чисел — 7,5 минуты. В проекте 255 автотестов; отдельные тесты сверяют каждое число в документах и этой презентации с единым файлом итоговых чисел, где у каждого числа есть источник и протокол. Веса моделей лежат в репозитории, поэтому ничего не нужно обучать заново. Правила выбора моделей мы записывали до сравнения: например, модель поля берётся, только если она лучше медианы на отложенном рейсе. Это защищает от подгонки под тест. Файл итоговых чисел пересобирается одной командой после любого пересчёта, и документы с этой презентацией собираются из него скриптом. Если число в тексте разойдётся с файлом, тест упадёт. Поэтому то, что вы видите на слайдах, совпадает с тем, что считает код.</a:t>
             </a:r>
           </a:p>
         </p:txBody>
@@ -1312,7 +1336,13 @@
           <a:lstStyle/>
           <a:p>
             <a:r>
-              <a:t>Наша команда — пять человек: Матвей, Егор, Марк, Фёдор и Глеб. Мы делили работу на данные и поиск пар, модели, сервис и проверку. Каждое число в этой презентации взято из одного файла с источником и протоколом, и каждое решение записано до сравнения.</a:t>
+              <a:t>Наша команда — Матвей, Егор, Марк, Фёдор и Глеб.</a:t>
+            </a:r>
+          </a:p>
+          <a:p/>
+          <a:p>
+            <a:r>
+              <a:t>[0:18–0:26]</a:t>
             </a:r>
           </a:p>
         </p:txBody>
@@ -2082,7 +2112,13 @@
           <a:lstStyle/>
           <a:p>
             <a:r>
-              <a:t>Спутник видит пиксель 10 м, а предмет — 2.5–50 см: прямого счёта штук по снимку не существует. Предмет в море — бутылка, пакет, обрывок сети — в сотни раз меньше пикселя Sentinel-2. В пикселе он занимает ничтожную долю, и спектр пикселя почти не меняется. Чтобы научить модель считать штуки, нужны пары: снимок и полевой счёт в то же время в том же месте. Мы прошли все 318 событий CSV организаторов: снимок рядом по времени есть у части, по метаданным остаётся 29, после масок облаков и блика — 12, а синхронных с учётом дрейфа — ноль. Отдельно мы нашли 66 пар по месту и времени в данных ADIS, но видимого сигнала мусора на снимке нет ни в одной. Это не недоработка поиска, а физика: спутник видит скопление, а не отдельный предмет. Поэтому решение устроено ступенями.</a:t>
+              <a:t>Спутник видит пиксель 10 м, а предмет — 2.5–50 см: прямого счёта штук по снимку не существует. Предмет — бутылка или обрывок сети — в сотни раз меньше пикселя и почти не меняет его спектр. Чтобы считать штуки по снимку, нужны пары «снимок — полевой счёт» в одно время и в одном месте. Из 318 событий CSV организаторов синхронных пар ноль; в данных ADIS мы нашли 66 пар по месту и времени, но видимого сигнала нет ни в одной. Это физика, а не недоработка поиска.</a:t>
+            </a:r>
+          </a:p>
+          <a:p/>
+          <a:p>
+            <a:r>
+              <a:t>[0:26–1:05]</a:t>
             </a:r>
           </a:p>
         </p:txBody>
@@ -2852,7 +2888,13 @@
           <a:lstStyle/>
           <a:p>
             <a:r>
-              <a:t>Три ступени: спутник находит зоны, поле даёт штуки на квадратный километр, детальное фото считает предметы. Первая ступень — детектор на спектрах Sentinel-2: он отвечает, где и когда есть полоса мусора; на отложенном тесте MARIDA у него F1 0.871. Вторая — полевой счёт: люди с судна считают предметы на полосе известной ширины, и мы делим число предметов на площадь; по отложенному рейсу это 53.9 штуки на квадратный километр с честным интервалом. Третья — детальное фото, где предмет виден целиком: модель считает предметы с ошибкой 0.59 штуки на кадр. У каждой ступени своя единица и своя проверка. Между ступенями мост возможен только через пары, а их нет, поэтому мы не переводим площадь полосы на снимке в штуки и прямо пишем это в интерфейсе.</a:t>
+              <a:t>Три ступени: спутник находит зоны, поле даёт шт./км², детальное фото считает предметы. Детектор на Sentinel-2 отвечает, где и когда есть полоса мусора: F1 0.871 на отложенном тесте. Полевой счёт даёт 53.9 штуки на квадратный километр — это независимая оценка количества. Детальное фото считает предметы с ошибкой 0.59 штуки на кадр. Мост между ступенями возможен только через пары, поэтому площадь полосы в штуки мы не переводим.</a:t>
+            </a:r>
+          </a:p>
+          <a:p/>
+          <a:p>
+            <a:r>
+              <a:t>[1:05–1:35]</a:t>
             </a:r>
           </a:p>
         </p:txBody>
@@ -3062,7 +3104,13 @@
           <a:lstStyle/>
           <a:p>
             <a:r>
-              <a:t>LightGBM на спектрах бьёт U-Net и индекс FDI на отложенном тесте MARIDA. Мы сравнили четыре подхода на одних и тех же сценах, которые модель не видела при обучении и подборе порога. Градиентный бустинг по спектральным признакам даёт F1 0.871, случайный лес — 0.771, U-Net — 0.501, а классический индекс плавающего мусора FDI с порогом — 0.042. Почему бустинг, а не нейросеть: полосы мусора узкие, в несколько пикселей, и разметки мало, поэтому признаки пикселя и его соседей работают лучше, чем свёртки. Важно, что класс MARIDA — это любой плавающий мусор, а не только пластик, и оценка детектора — не вероятность. Поэтому в сервисе мы пишем «оценка детектора» и «плавающий материал», а не «пластик». Порог детектора мы выбирали только на валидационных сценах, а тест открыли один раз. Интервал F1 посчитан бутстрепом по сценам, поэтому он учитывает, что сцены сильно отличаются друг от друга.</a:t>
+              <a:t>LightGBM на спектрах бьёт U-Net и индекс FDI на отложенном тесте MARIDA. На сценах, которых модель не видела, бустинг даёт F1 0.871, U-Net — 0.501, индекс FDI — 0.042. Полосы узкие, разметки мало — признаки пикселя работают лучше свёрток. Класс MARIDA — любой плавающий мусор, поэтому мы пишем «плавающий материал», а не «пластик».</a:t>
+            </a:r>
+          </a:p>
+          <a:p/>
+          <a:p>
+            <a:r>
+              <a:t>[1:35–1:59]</a:t>
             </a:r>
           </a:p>
         </p:txBody>
@@ -3132,7 +3180,13 @@
           <a:lstStyle/>
           <a:p>
             <a:r>
-              <a:t>На отложенной сцене 14 находок совпали с полосами, проверенными людьми. Это сцена 30SXE у Альборана за 11.03.2021; модель её не видела. Детектор выделил 23 зон, и 14 из них совпадают с нитями мусора, которые авторы Cózar 2024 разметили вручную. Всего мы обработали 286 зон на сценах и оставили 77 находок: остальные отсеяны фильтрами судов и кильватера, пены, блика, облаков, или там ветер сильнее 5 метров в секунду, когда мусор уходит под воду и снимок не информативен. Каждая зона получает один из четырёх статусов: обнаружено, не обнаружено, недостаточно данных, анализ невозможен. Статус «подтверждено» ставит только человек. На снимке справа видны контуры зон поверх нитей мусора. Сцена не входила в обучение MARIDA, поэтому совпадения с ручной разметкой — независимая проверка, а не повторение обучающих данных. Совпадение с разметкой мы показываем в карточке отдельной строкой «Подтверждение», а не смешиваем со статусом. Если независимой разметки нет, карточка так и пишет.</a:t>
+              <a:t>На отложенной сцене 14 находок совпали с полосами, проверенными людьми (Cózar 2024). Сцена 30SXE не входила в обучение; 14 из 23 зон совпали с ручной разметкой нитей. Всего из 286 обработанных зон мы оставили 77 находок: суда, пена, блик, облака и сильный ветер отфильтрованы. Статус «подтверждено» ставит только человек.</a:t>
+            </a:r>
+          </a:p>
+          <a:p/>
+          <a:p>
+            <a:r>
+              <a:t>[1:59–2:22]</a:t>
             </a:r>
           </a:p>
         </p:txBody>
@@ -3202,7 +3256,13 @@
           <a:lstStyle/>
           <a:p>
             <a:r>
-              <a:t>Мы отличаем мусор от судов, пены, бликов, облаков и берега. На этом слайде пять примеров прямо из сервиса, раздел «Проверка качества»: полоса, найденная верно; пропуск, когда детектор отметил только малую часть нити; судно с кильватером, которое спектрально похоже на мусор; пена, которую поймал фильтр; и снимок, где анализ невозможен из-за низкого солнца. Всего на тесте 75 ложных пикселей, и 64 процентов из них — суда и природная органика. Поэтому после детектора стоят фильтры: маска судов и кильватера, маска пены, блика и облаков по SCL, ветер по ERA5. Если снимок закрыт облаками или на нём блик, зона получает статус «анализ невозможен», а не «чисто». Это важно для эколога: отсутствие находки на плохом снимке ничего не говорит о воде. Для каждой причины ошибки у нас есть отдельный признак, который эколог видит в карточке: что исключено и что не проверяется. Например, водоросли и мутные речные шлейфы детектор не отличает надёжно, и мы пишем об этом прямо.</a:t>
+              <a:t>Мы отличаем мусор от судов, пены, бликов, облаков и берега. Здесь пять примеров прямо из сервиса: верное обнаружение, пропуск, судно, пена и снимок, где анализ невозможен. На тесте 64 процентов ложных пикселей — суда и органика, поэтому после детектора стоят фильтры, а плохой снимок получает «анализ невозможен», а не «чисто».</a:t>
+            </a:r>
+          </a:p>
+          <a:p/>
+          <a:p>
+            <a:r>
+              <a:t>[2:22–2:45]</a:t>
             </a:r>
           </a:p>
         </p:txBody>
@@ -3272,7 +3332,13 @@
           <a:lstStyle/>
           <a:p>
             <a:r>
-              <a:t>По полевым данным 53.9 штуки на квадратный километр, а на отложенном тесте простая медиана лучше модели, и мы показываем медиану. Считаем так: наблюдатели с судна считают предметы на полосе известной ширины; число предметов делим на площадь полосы. Интервал от 39.7 до 70.4 — бутстреп по дням рейса; он учитывает, что дни сильно отличаются друг от друга, и потому шире, чем интервал только по ошибке счёта. Мы пробовали предсказывать концентрацию моделью по месту и времени: на отложенном рейсе у модели средняя ошибка 30.0, а у медианы 25.2. Правило было записано заранее: модель берём, только если она лучше медианы. Она не лучше — значит, честный ответ сервиса по полю — медиана с интервалом. Поле — это не снимок. Полевое число мы показываем в отдельном слое «Полевые измерения», а в карточке спутниковой зоны пишем только расстояние до ближайшего полевого измерения, не выдавая чужое число за плотность этой зоны.</a:t>
+              <a:t>По полевым данным 53.9 шт./км² [39.7–70.4]; на отложенном тесте простая медиана лучше модели — показываем её. Число предметов на полосе делим на её площадь; интервал — бутстреп по дням рейса. У модели ошибка 30.0, у медианы 25.2; правило было записано заранее. Это и есть независимая оценка количества по полевым данным.</a:t>
+            </a:r>
+          </a:p>
+          <a:p/>
+          <a:p>
+            <a:r>
+              <a:t>[2:45–3:08]</a:t>
             </a:r>
           </a:p>
         </p:txBody>
@@ -3342,7 +3408,13 @@
           <a:lstStyle/>
           <a:p>
             <a:r>
-              <a:t>Мы проверили связку снимок — штуки на всех найденных парах, и посчитанные предметы спутнику не видны. Главный источник — ADIS: 21 444 отрезков наблюдений с судов; из них 66 совпадают со снимком по месту и времени. В 6 таких парах в поле есть предметы, и ни в одной детектор не сработал на полосе наблюдения. Мы проверили итальянские трансекты ISPRA и нашли одну пару по месту и дню — ER604; на карте видно, что предметы, посчитанные людьми, не лежат рядом с пикселями, где сработал детектор. Проверили искусственные мишени проекта PLP: детектор видит пиксель, только когда мишень закрывает заметную долю пикселя. Вывод: одиночные предметы, которые считают люди, спутнику не видны, а плотные нити, которые видит спутник, никто не считал поштучно. Поэтому число штук по снимку в сервисе — только исследовательский сценарий с оговорками.</a:t>
+              <a:t>Мы проверили связку снимок → штуки на всех найденных парах — посчитанные предметы спутнику не видны. Из 21 444 отрезков ADIS 66 совпали со снимком по месту и времени; в 6 с предметами детектор не сработал. На паре ISPRA посчитанные предметы лежат не рядом с пикселями детектора. Одиночные предметы спутнику не видны, а плотные нити никто не считал поштучно — поэтому штуки по снимку в сервисе только исследовательский сценарий.</a:t>
+            </a:r>
+          </a:p>
+          <a:p/>
+          <a:p>
+            <a:r>
+              <a:t>[3:08–3:40]</a:t>
             </a:r>
           </a:p>
         </p:txBody>
@@ -6755,8 +6827,8 @@
         </p:nvSpPr>
         <p:spPr>
           <a:xfrm>
-            <a:off x="5120640" y="6035040"/>
-            <a:ext cx="6400800" cy="548640"/>
+            <a:off x="5120640" y="5897880"/>
+            <a:ext cx="5394960" cy="731520"/>
           </a:xfrm>
           <a:prstGeom prst="rect">
             <a:avLst/>
@@ -6836,7 +6908,7 @@
                 </a:solidFill>
                 <a:latin typeface="Segoe UI"/>
               </a:rPr>
-              <a:t>10 / 13</a:t>
+              <a:t>10 / 12</a:t>
             </a:r>
           </a:p>
         </p:txBody>
@@ -6901,7 +6973,7 @@
                 </a:solidFill>
                 <a:latin typeface="Segoe UI"/>
               </a:rPr>
-              <a:t>Эколог сразу видит, что найдено, где, когда и насколько этому верить</a:t>
+              <a:t>Эколог за пять шагов видит, что найдено, где, когда и насколько этому верить</a:t>
             </a:r>
           </a:p>
         </p:txBody>
@@ -7099,8 +7171,8 @@
         </p:nvSpPr>
         <p:spPr>
           <a:xfrm>
-            <a:off x="5120640" y="6035040"/>
-            <a:ext cx="6400800" cy="548640"/>
+            <a:off x="5120640" y="5897880"/>
+            <a:ext cx="5394960" cy="731520"/>
           </a:xfrm>
           <a:prstGeom prst="rect">
             <a:avLst/>
@@ -7125,23 +7197,23 @@
                 </a:solidFill>
                 <a:latin typeface="Segoe UI"/>
               </a:rPr>
+              <a:t>«Демо ▶»: Район и даты → Снимок → Зона → Качество и статус → Выгрузка</a:t>
+            </a:r>
+          </a:p>
+          <a:p>
+            <a:pPr algn="l">
+              <a:spcAft>
+                <a:spcPts val="200"/>
+              </a:spcAft>
+            </a:pPr>
+            <a:r>
+              <a:rPr sz="1200" b="0">
+                <a:solidFill>
+                  <a:srgbClr val="4A5462"/>
+                </a:solidFill>
+                <a:latin typeface="Segoe UI"/>
+              </a:rPr>
               <a:t>Карточка: «Что это» · статус · подтверждение · «Количество предметов по этому снимку не определено»</a:t>
-            </a:r>
-          </a:p>
-          <a:p>
-            <a:pPr algn="l">
-              <a:spcAft>
-                <a:spcPts val="200"/>
-              </a:spcAft>
-            </a:pPr>
-            <a:r>
-              <a:rPr sz="1200" b="0">
-                <a:solidFill>
-                  <a:srgbClr val="4A5462"/>
-                </a:solidFill>
-                <a:latin typeface="Segoe UI"/>
-              </a:rPr>
-              <a:t>Земля → сцена → зона → студия запросов → назад к карте; сохранённые запросы</a:t>
             </a:r>
           </a:p>
         </p:txBody>
@@ -7180,7 +7252,7 @@
                 </a:solidFill>
                 <a:latin typeface="Segoe UI"/>
               </a:rPr>
-              <a:t>11 / 13</a:t>
+              <a:t>11 / 12</a:t>
             </a:r>
           </a:p>
         </p:txBody>
@@ -7199,7 +7271,7 @@
     <p:bg>
       <p:bgPr>
         <a:solidFill>
-          <a:srgbClr val="F9F8F6"/>
+          <a:srgbClr val="14171C"/>
         </a:solidFill>
         <a:effectLst/>
       </p:bgPr>
@@ -7219,33 +7291,33 @@
         </p:nvSpPr>
         <p:spPr>
           <a:xfrm>
-            <a:off x="649224" y="384048"/>
-            <a:ext cx="10881360" cy="1234440"/>
-          </a:xfrm>
-          <a:prstGeom prst="rect">
-            <a:avLst/>
-          </a:prstGeom>
-          <a:noFill/>
-        </p:spPr>
-        <p:txBody>
-          <a:bodyPr wrap="square" anchor="t" lIns="18288" rIns="18288" tIns="18288" bIns="18288">
-            <a:spAutoFit/>
-          </a:bodyPr>
-          <a:lstStyle/>
-          <a:p>
-            <a:pPr algn="l">
-              <a:spcAft>
-                <a:spcPts val="400"/>
-              </a:spcAft>
-            </a:pPr>
-            <a:r>
-              <a:rPr sz="3200" b="1">
-                <a:solidFill>
-                  <a:srgbClr val="1E2836"/>
-                </a:solidFill>
-                <a:latin typeface="Segoe UI"/>
-              </a:rPr>
-              <a:t>Одна команда воспроизводит все числа из чистой копии</a:t>
+            <a:off x="649224" y="2103120"/>
+            <a:ext cx="3444240" cy="1270000"/>
+          </a:xfrm>
+          <a:prstGeom prst="rect">
+            <a:avLst/>
+          </a:prstGeom>
+          <a:noFill/>
+        </p:spPr>
+        <p:txBody>
+          <a:bodyPr wrap="square" anchor="t" lIns="18288" rIns="18288" tIns="18288" bIns="18288">
+            <a:spAutoFit/>
+          </a:bodyPr>
+          <a:lstStyle/>
+          <a:p>
+            <a:pPr algn="l">
+              <a:spcAft>
+                <a:spcPts val="400"/>
+              </a:spcAft>
+            </a:pPr>
+            <a:r>
+              <a:rPr sz="8000" b="1">
+                <a:solidFill>
+                  <a:srgbClr val="FA913B"/>
+                </a:solidFill>
+                <a:latin typeface="Segoe UI"/>
+              </a:rPr>
+              <a:t>0.871</a:t>
             </a:r>
           </a:p>
         </p:txBody>
@@ -7258,33 +7330,33 @@
         </p:nvSpPr>
         <p:spPr>
           <a:xfrm>
-            <a:off x="649224" y="1783080"/>
-            <a:ext cx="5166360" cy="1047749"/>
-          </a:xfrm>
-          <a:prstGeom prst="rect">
-            <a:avLst/>
-          </a:prstGeom>
-          <a:noFill/>
-        </p:spPr>
-        <p:txBody>
-          <a:bodyPr wrap="square" anchor="t" lIns="18288" rIns="18288" tIns="18288" bIns="18288">
-            <a:spAutoFit/>
-          </a:bodyPr>
-          <a:lstStyle/>
-          <a:p>
-            <a:pPr algn="l">
-              <a:spcAft>
-                <a:spcPts val="400"/>
-              </a:spcAft>
-            </a:pPr>
-            <a:r>
-              <a:rPr sz="6600" b="1">
-                <a:solidFill>
-                  <a:srgbClr val="C1400B"/>
-                </a:solidFill>
-                <a:latin typeface="Segoe UI"/>
-              </a:rPr>
-              <a:t>7,5 мин</a:t>
+            <a:off x="676656" y="3423920"/>
+            <a:ext cx="3444240" cy="822960"/>
+          </a:xfrm>
+          <a:prstGeom prst="rect">
+            <a:avLst/>
+          </a:prstGeom>
+          <a:noFill/>
+        </p:spPr>
+        <p:txBody>
+          <a:bodyPr wrap="square" anchor="t" lIns="18288" rIns="18288" tIns="18288" bIns="18288">
+            <a:spAutoFit/>
+          </a:bodyPr>
+          <a:lstStyle/>
+          <a:p>
+            <a:pPr algn="l">
+              <a:spcAft>
+                <a:spcPts val="400"/>
+              </a:spcAft>
+            </a:pPr>
+            <a:r>
+              <a:rPr sz="2000" b="0">
+                <a:solidFill>
+                  <a:srgbClr val="D0D4DA"/>
+                </a:solidFill>
+                <a:latin typeface="Segoe UI"/>
+              </a:rPr>
+              <a:t>F1 детектора на отложенном тесте</a:t>
             </a:r>
           </a:p>
         </p:txBody>
@@ -7297,33 +7369,33 @@
         </p:nvSpPr>
         <p:spPr>
           <a:xfrm>
-            <a:off x="676656" y="2872740"/>
-            <a:ext cx="5166360" cy="822960"/>
-          </a:xfrm>
-          <a:prstGeom prst="rect">
-            <a:avLst/>
-          </a:prstGeom>
-          <a:noFill/>
-        </p:spPr>
-        <p:txBody>
-          <a:bodyPr wrap="square" anchor="t" lIns="18288" rIns="18288" tIns="18288" bIns="18288">
-            <a:spAutoFit/>
-          </a:bodyPr>
-          <a:lstStyle/>
-          <a:p>
-            <a:pPr algn="l">
-              <a:spcAft>
-                <a:spcPts val="400"/>
-              </a:spcAft>
-            </a:pPr>
-            <a:r>
-              <a:rPr sz="1600" b="0">
-                <a:solidFill>
-                  <a:srgbClr val="4A5462"/>
-                </a:solidFill>
-                <a:latin typeface="Segoe UI"/>
-              </a:rPr>
-              <a:t>чистый клон → карта и числа</a:t>
+            <a:off x="4276344" y="2103120"/>
+            <a:ext cx="3444240" cy="1270000"/>
+          </a:xfrm>
+          <a:prstGeom prst="rect">
+            <a:avLst/>
+          </a:prstGeom>
+          <a:noFill/>
+        </p:spPr>
+        <p:txBody>
+          <a:bodyPr wrap="square" anchor="t" lIns="18288" rIns="18288" tIns="18288" bIns="18288">
+            <a:spAutoFit/>
+          </a:bodyPr>
+          <a:lstStyle/>
+          <a:p>
+            <a:pPr algn="l">
+              <a:spcAft>
+                <a:spcPts val="400"/>
+              </a:spcAft>
+            </a:pPr>
+            <a:r>
+              <a:rPr sz="8000" b="1">
+                <a:solidFill>
+                  <a:srgbClr val="FA913B"/>
+                </a:solidFill>
+                <a:latin typeface="Segoe UI"/>
+              </a:rPr>
+              <a:t>53.9</a:t>
             </a:r>
           </a:p>
         </p:txBody>
@@ -7336,33 +7408,33 @@
         </p:nvSpPr>
         <p:spPr>
           <a:xfrm>
-            <a:off x="6089904" y="1783080"/>
-            <a:ext cx="5166360" cy="1143000"/>
-          </a:xfrm>
-          <a:prstGeom prst="rect">
-            <a:avLst/>
-          </a:prstGeom>
-          <a:noFill/>
-        </p:spPr>
-        <p:txBody>
-          <a:bodyPr wrap="square" anchor="t" lIns="18288" rIns="18288" tIns="18288" bIns="18288">
-            <a:spAutoFit/>
-          </a:bodyPr>
-          <a:lstStyle/>
-          <a:p>
-            <a:pPr algn="l">
-              <a:spcAft>
-                <a:spcPts val="400"/>
-              </a:spcAft>
-            </a:pPr>
-            <a:r>
-              <a:rPr sz="7200" b="1">
-                <a:solidFill>
-                  <a:srgbClr val="C1400B"/>
-                </a:solidFill>
-                <a:latin typeface="Segoe UI"/>
-              </a:rPr>
-              <a:t>255</a:t>
+            <a:off x="4303776" y="3423920"/>
+            <a:ext cx="3444240" cy="822960"/>
+          </a:xfrm>
+          <a:prstGeom prst="rect">
+            <a:avLst/>
+          </a:prstGeom>
+          <a:noFill/>
+        </p:spPr>
+        <p:txBody>
+          <a:bodyPr wrap="square" anchor="t" lIns="18288" rIns="18288" tIns="18288" bIns="18288">
+            <a:spAutoFit/>
+          </a:bodyPr>
+          <a:lstStyle/>
+          <a:p>
+            <a:pPr algn="l">
+              <a:spcAft>
+                <a:spcPts val="400"/>
+              </a:spcAft>
+            </a:pPr>
+            <a:r>
+              <a:rPr sz="2000" b="0">
+                <a:solidFill>
+                  <a:srgbClr val="D0D4DA"/>
+                </a:solidFill>
+                <a:latin typeface="Segoe UI"/>
+              </a:rPr>
+              <a:t>шт./км² по полю</a:t>
             </a:r>
           </a:p>
         </p:txBody>
@@ -7375,33 +7447,33 @@
         </p:nvSpPr>
         <p:spPr>
           <a:xfrm>
-            <a:off x="6117336" y="2971800"/>
-            <a:ext cx="5166360" cy="822960"/>
-          </a:xfrm>
-          <a:prstGeom prst="rect">
-            <a:avLst/>
-          </a:prstGeom>
-          <a:noFill/>
-        </p:spPr>
-        <p:txBody>
-          <a:bodyPr wrap="square" anchor="t" lIns="18288" rIns="18288" tIns="18288" bIns="18288">
-            <a:spAutoFit/>
-          </a:bodyPr>
-          <a:lstStyle/>
-          <a:p>
-            <a:pPr algn="l">
-              <a:spcAft>
-                <a:spcPts val="400"/>
-              </a:spcAft>
-            </a:pPr>
-            <a:r>
-              <a:rPr sz="1600" b="0">
-                <a:solidFill>
-                  <a:srgbClr val="4A5462"/>
-                </a:solidFill>
-                <a:latin typeface="Segoe UI"/>
-              </a:rPr>
-              <a:t>автотестов</a:t>
+            <a:off x="7903464" y="2103120"/>
+            <a:ext cx="3444240" cy="1270000"/>
+          </a:xfrm>
+          <a:prstGeom prst="rect">
+            <a:avLst/>
+          </a:prstGeom>
+          <a:noFill/>
+        </p:spPr>
+        <p:txBody>
+          <a:bodyPr wrap="square" anchor="t" lIns="18288" rIns="18288" tIns="18288" bIns="18288">
+            <a:spAutoFit/>
+          </a:bodyPr>
+          <a:lstStyle/>
+          <a:p>
+            <a:pPr algn="l">
+              <a:spcAft>
+                <a:spcPts val="400"/>
+              </a:spcAft>
+            </a:pPr>
+            <a:r>
+              <a:rPr sz="8000" b="1">
+                <a:solidFill>
+                  <a:srgbClr val="FA913B"/>
+                </a:solidFill>
+                <a:latin typeface="Segoe UI"/>
+              </a:rPr>
+              <a:t>71</a:t>
             </a:r>
           </a:p>
         </p:txBody>
@@ -7414,121 +7486,46 @@
         </p:nvSpPr>
         <p:spPr>
           <a:xfrm>
-            <a:off x="649224" y="3931920"/>
-            <a:ext cx="10881360" cy="1371600"/>
-          </a:xfrm>
-          <a:prstGeom prst="rect">
-            <a:avLst/>
-          </a:prstGeom>
-          <a:noFill/>
-        </p:spPr>
-        <p:txBody>
-          <a:bodyPr wrap="square" anchor="t" lIns="18288" rIns="18288" tIns="18288" bIns="18288">
-            <a:spAutoFit/>
-          </a:bodyPr>
-          <a:lstStyle/>
-          <a:p>
-            <a:pPr algn="l">
-              <a:spcAft>
-                <a:spcPts val="400"/>
-              </a:spcAft>
-            </a:pPr>
-            <a:r>
-              <a:rPr sz="1500" b="0">
-                <a:solidFill>
-                  <a:srgbClr val="4A5462"/>
-                </a:solidFill>
-                <a:latin typeface="Segoe UI"/>
-              </a:rPr>
-              <a:t>Установка 3 мин 17 с, карта открывается за 8,1 с</a:t>
-            </a:r>
-          </a:p>
-          <a:p>
-            <a:pPr algn="l">
-              <a:spcAft>
-                <a:spcPts val="400"/>
-              </a:spcAft>
-            </a:pPr>
-            <a:r>
-              <a:rPr sz="1500" b="0">
-                <a:solidFill>
-                  <a:srgbClr val="4A5462"/>
-                </a:solidFill>
-                <a:latin typeface="Segoe UI"/>
-              </a:rPr>
-              <a:t>Веса моделей в репозитории; все числа — reports/final_numbers.json с источником и протоколом</a:t>
-            </a:r>
-          </a:p>
-          <a:p>
-            <a:pPr algn="l">
-              <a:spcAft>
-                <a:spcPts val="400"/>
-              </a:spcAft>
-            </a:pPr>
-            <a:r>
-              <a:rPr sz="1500" b="0">
-                <a:solidFill>
-                  <a:srgbClr val="4A5462"/>
-                </a:solidFill>
-                <a:latin typeface="Segoe UI"/>
-              </a:rPr>
-              <a:t>Правила принятия решений записаны до сравнения (детектор, поле, счётчик)</a:t>
-            </a:r>
-          </a:p>
-        </p:txBody>
-      </p:sp>
-      <p:sp>
-        <p:nvSpPr>
-          <p:cNvPr id="8" name="Rectangle 7"/>
-          <p:cNvSpPr/>
-          <p:nvPr/>
-        </p:nvSpPr>
-        <p:spPr>
-          <a:xfrm>
-            <a:off x="649224" y="5422392"/>
-            <a:ext cx="10881360" cy="19050"/>
-          </a:xfrm>
-          <a:prstGeom prst="rect">
-            <a:avLst/>
-          </a:prstGeom>
-          <a:solidFill>
-            <a:srgbClr val="A7ADB7"/>
-          </a:solidFill>
-          <a:ln>
-            <a:noFill/>
-          </a:ln>
-        </p:spPr>
-        <p:style>
-          <a:lnRef idx="1">
-            <a:schemeClr val="accent1"/>
-          </a:lnRef>
-          <a:fillRef idx="3">
-            <a:schemeClr val="accent1"/>
-          </a:fillRef>
-          <a:effectRef idx="2">
-            <a:schemeClr val="accent1"/>
-          </a:effectRef>
-          <a:fontRef idx="minor">
-            <a:schemeClr val="lt1"/>
-          </a:fontRef>
-        </p:style>
-        <p:txBody>
-          <a:bodyPr rtlCol="0" anchor="ctr"/>
-          <a:lstStyle/>
-          <a:p>
-            <a:pPr algn="ctr"/>
-          </a:p>
-        </p:txBody>
-      </p:sp>
-      <p:sp>
-        <p:nvSpPr>
-          <p:cNvPr id="9" name="TextBox 8"/>
-          <p:cNvSpPr txBox="1"/>
-          <p:nvPr/>
-        </p:nvSpPr>
-        <p:spPr>
-          <a:xfrm>
-            <a:off x="649224" y="5532120"/>
+            <a:off x="7930896" y="3423920"/>
+            <a:ext cx="3444240" cy="822960"/>
+          </a:xfrm>
+          <a:prstGeom prst="rect">
+            <a:avLst/>
+          </a:prstGeom>
+          <a:noFill/>
+        </p:spPr>
+        <p:txBody>
+          <a:bodyPr wrap="square" anchor="t" lIns="18288" rIns="18288" tIns="18288" bIns="18288">
+            <a:spAutoFit/>
+          </a:bodyPr>
+          <a:lstStyle/>
+          <a:p>
+            <a:pPr algn="l">
+              <a:spcAft>
+                <a:spcPts val="400"/>
+              </a:spcAft>
+            </a:pPr>
+            <a:r>
+              <a:rPr sz="2000" b="0">
+                <a:solidFill>
+                  <a:srgbClr val="D0D4DA"/>
+                </a:solidFill>
+                <a:latin typeface="Segoe UI"/>
+              </a:rPr>
+              <a:t>проверенных гипотез и экспериментов</a:t>
+            </a:r>
+          </a:p>
+        </p:txBody>
+      </p:sp>
+      <p:sp>
+        <p:nvSpPr>
+          <p:cNvPr id="8" name="TextBox 7"/>
+          <p:cNvSpPr txBox="1"/>
+          <p:nvPr/>
+        </p:nvSpPr>
+        <p:spPr>
+          <a:xfrm>
+            <a:off x="649224" y="5029200"/>
             <a:ext cx="10881360" cy="548640"/>
           </a:xfrm>
           <a:prstGeom prst="rect">
@@ -7542,58 +7539,19 @@
           </a:bodyPr>
           <a:lstStyle/>
           <a:p>
-            <a:pPr algn="l">
-              <a:spcAft>
-                <a:spcPts val="400"/>
-              </a:spcAft>
-            </a:pPr>
-            <a:r>
-              <a:rPr sz="2000" b="1">
-                <a:solidFill>
-                  <a:srgbClr val="1E2836"/>
-                </a:solidFill>
-                <a:latin typeface="Segoe UI"/>
-              </a:rPr>
-              <a:t>Любое число в презентации можно проверить по файлу и команде</a:t>
-            </a:r>
-          </a:p>
-        </p:txBody>
-      </p:sp>
-      <p:sp>
-        <p:nvSpPr>
-          <p:cNvPr id="10" name="TextBox 9"/>
-          <p:cNvSpPr txBox="1"/>
-          <p:nvPr/>
-        </p:nvSpPr>
-        <p:spPr>
-          <a:xfrm>
-            <a:off x="10607040" y="6355080"/>
-            <a:ext cx="1005840" cy="274320"/>
-          </a:xfrm>
-          <a:prstGeom prst="rect">
-            <a:avLst/>
-          </a:prstGeom>
-          <a:noFill/>
-        </p:spPr>
-        <p:txBody>
-          <a:bodyPr wrap="square" anchor="t" lIns="18288" rIns="18288" tIns="18288" bIns="18288">
-            <a:spAutoFit/>
-          </a:bodyPr>
-          <a:lstStyle/>
-          <a:p>
-            <a:pPr algn="r">
-              <a:spcAft>
-                <a:spcPts val="400"/>
-              </a:spcAft>
-            </a:pPr>
-            <a:r>
-              <a:rPr sz="1100" b="0">
-                <a:solidFill>
-                  <a:srgbClr val="9AA1AC"/>
-                </a:solidFill>
-                <a:latin typeface="Segoe UI"/>
-              </a:rPr>
-              <a:t>12 / 13</a:t>
+            <a:pPr algn="ctr">
+              <a:spcAft>
+                <a:spcPts val="400"/>
+              </a:spcAft>
+            </a:pPr>
+            <a:r>
+              <a:rPr sz="2600" b="1">
+                <a:solidFill>
+                  <a:srgbClr val="FFFFFF"/>
+                </a:solidFill>
+                <a:latin typeface="Segoe UI"/>
+              </a:rPr>
+              <a:t>SAMARKAND · спасибо за внимание</a:t>
             </a:r>
           </a:p>
         </p:txBody>
@@ -7632,33 +7590,33 @@
         </p:nvSpPr>
         <p:spPr>
           <a:xfrm>
-            <a:off x="649224" y="2103120"/>
-            <a:ext cx="3444240" cy="1270000"/>
-          </a:xfrm>
-          <a:prstGeom prst="rect">
-            <a:avLst/>
-          </a:prstGeom>
-          <a:noFill/>
-        </p:spPr>
-        <p:txBody>
-          <a:bodyPr wrap="square" anchor="t" lIns="18288" rIns="18288" tIns="18288" bIns="18288">
-            <a:spAutoFit/>
-          </a:bodyPr>
-          <a:lstStyle/>
-          <a:p>
-            <a:pPr algn="l">
-              <a:spcAft>
-                <a:spcPts val="400"/>
-              </a:spcAft>
-            </a:pPr>
-            <a:r>
-              <a:rPr sz="8000" b="1">
-                <a:solidFill>
-                  <a:srgbClr val="FA913B"/>
-                </a:solidFill>
-                <a:latin typeface="Segoe UI"/>
-              </a:rPr>
-              <a:t>0.871</a:t>
+            <a:off x="832104" y="2194560"/>
+            <a:ext cx="10515600" cy="1097280"/>
+          </a:xfrm>
+          <a:prstGeom prst="rect">
+            <a:avLst/>
+          </a:prstGeom>
+          <a:noFill/>
+        </p:spPr>
+        <p:txBody>
+          <a:bodyPr wrap="square" anchor="t" lIns="18288" rIns="18288" tIns="18288" bIns="18288">
+            <a:spAutoFit/>
+          </a:bodyPr>
+          <a:lstStyle/>
+          <a:p>
+            <a:pPr algn="l">
+              <a:spcAft>
+                <a:spcPts val="400"/>
+              </a:spcAft>
+            </a:pPr>
+            <a:r>
+              <a:rPr sz="4400" b="1">
+                <a:solidFill>
+                  <a:srgbClr val="FFFFFF"/>
+                </a:solidFill>
+                <a:latin typeface="Segoe UI"/>
+              </a:rPr>
+              <a:t>Приложение. Исследование</a:t>
             </a:r>
           </a:p>
         </p:txBody>
@@ -7671,8 +7629,8 @@
         </p:nvSpPr>
         <p:spPr>
           <a:xfrm>
-            <a:off x="676656" y="3423920"/>
-            <a:ext cx="3444240" cy="822960"/>
+            <a:off x="832104" y="3383280"/>
+            <a:ext cx="10058400" cy="914400"/>
           </a:xfrm>
           <a:prstGeom prst="rect">
             <a:avLst/>
@@ -7697,203 +7655,51 @@
                 </a:solidFill>
                 <a:latin typeface="Segoe UI"/>
               </a:rPr>
-              <a:t>F1 детектора на отложенном тесте</a:t>
-            </a:r>
-          </a:p>
-        </p:txBody>
-      </p:sp>
-      <p:sp>
-        <p:nvSpPr>
-          <p:cNvPr id="4" name="TextBox 3"/>
-          <p:cNvSpPr txBox="1"/>
-          <p:nvPr/>
-        </p:nvSpPr>
-        <p:spPr>
-          <a:xfrm>
-            <a:off x="4276344" y="2103120"/>
-            <a:ext cx="3444240" cy="1270000"/>
-          </a:xfrm>
-          <a:prstGeom prst="rect">
-            <a:avLst/>
-          </a:prstGeom>
-          <a:noFill/>
-        </p:spPr>
-        <p:txBody>
-          <a:bodyPr wrap="square" anchor="t" lIns="18288" rIns="18288" tIns="18288" bIns="18288">
-            <a:spAutoFit/>
-          </a:bodyPr>
-          <a:lstStyle/>
-          <a:p>
-            <a:pPr algn="l">
-              <a:spcAft>
-                <a:spcPts val="400"/>
-              </a:spcAft>
-            </a:pPr>
-            <a:r>
-              <a:rPr sz="8000" b="1">
-                <a:solidFill>
-                  <a:srgbClr val="FA913B"/>
-                </a:solidFill>
-                <a:latin typeface="Segoe UI"/>
-              </a:rPr>
-              <a:t>53.9</a:t>
-            </a:r>
-          </a:p>
-        </p:txBody>
-      </p:sp>
-      <p:sp>
-        <p:nvSpPr>
-          <p:cNvPr id="5" name="TextBox 4"/>
-          <p:cNvSpPr txBox="1"/>
-          <p:nvPr/>
-        </p:nvSpPr>
-        <p:spPr>
-          <a:xfrm>
-            <a:off x="4303776" y="3423920"/>
-            <a:ext cx="3444240" cy="822960"/>
-          </a:xfrm>
-          <a:prstGeom prst="rect">
-            <a:avLst/>
-          </a:prstGeom>
-          <a:noFill/>
-        </p:spPr>
-        <p:txBody>
-          <a:bodyPr wrap="square" anchor="t" lIns="18288" rIns="18288" tIns="18288" bIns="18288">
-            <a:spAutoFit/>
-          </a:bodyPr>
-          <a:lstStyle/>
-          <a:p>
-            <a:pPr algn="l">
-              <a:spcAft>
-                <a:spcPts val="400"/>
-              </a:spcAft>
-            </a:pPr>
-            <a:r>
-              <a:rPr sz="2000" b="0">
-                <a:solidFill>
-                  <a:srgbClr val="D0D4DA"/>
-                </a:solidFill>
-                <a:latin typeface="Segoe UI"/>
-              </a:rPr>
-              <a:t>шт./км² по полю</a:t>
-            </a:r>
-          </a:p>
-        </p:txBody>
-      </p:sp>
-      <p:sp>
-        <p:nvSpPr>
-          <p:cNvPr id="6" name="TextBox 5"/>
-          <p:cNvSpPr txBox="1"/>
-          <p:nvPr/>
-        </p:nvSpPr>
-        <p:spPr>
-          <a:xfrm>
-            <a:off x="7903464" y="2103120"/>
-            <a:ext cx="3444240" cy="1270000"/>
-          </a:xfrm>
-          <a:prstGeom prst="rect">
-            <a:avLst/>
-          </a:prstGeom>
-          <a:noFill/>
-        </p:spPr>
-        <p:txBody>
-          <a:bodyPr wrap="square" anchor="t" lIns="18288" rIns="18288" tIns="18288" bIns="18288">
-            <a:spAutoFit/>
-          </a:bodyPr>
-          <a:lstStyle/>
-          <a:p>
-            <a:pPr algn="l">
-              <a:spcAft>
-                <a:spcPts val="400"/>
-              </a:spcAft>
-            </a:pPr>
-            <a:r>
-              <a:rPr sz="8000" b="1">
-                <a:solidFill>
-                  <a:srgbClr val="FA913B"/>
-                </a:solidFill>
-                <a:latin typeface="Segoe UI"/>
-              </a:rPr>
-              <a:t>71</a:t>
-            </a:r>
-          </a:p>
-        </p:txBody>
-      </p:sp>
-      <p:sp>
-        <p:nvSpPr>
-          <p:cNvPr id="7" name="TextBox 6"/>
-          <p:cNvSpPr txBox="1"/>
-          <p:nvPr/>
-        </p:nvSpPr>
-        <p:spPr>
-          <a:xfrm>
-            <a:off x="7930896" y="3423920"/>
-            <a:ext cx="3444240" cy="822960"/>
-          </a:xfrm>
-          <a:prstGeom prst="rect">
-            <a:avLst/>
-          </a:prstGeom>
-          <a:noFill/>
-        </p:spPr>
-        <p:txBody>
-          <a:bodyPr wrap="square" anchor="t" lIns="18288" rIns="18288" tIns="18288" bIns="18288">
-            <a:spAutoFit/>
-          </a:bodyPr>
-          <a:lstStyle/>
-          <a:p>
-            <a:pPr algn="l">
-              <a:spcAft>
-                <a:spcPts val="400"/>
-              </a:spcAft>
-            </a:pPr>
-            <a:r>
-              <a:rPr sz="2000" b="0">
-                <a:solidFill>
-                  <a:srgbClr val="D0D4DA"/>
-                </a:solidFill>
-                <a:latin typeface="Segoe UI"/>
-              </a:rPr>
-              <a:t>проверенных гипотез и экспериментов</a:t>
-            </a:r>
-          </a:p>
-        </p:txBody>
-      </p:sp>
-      <p:sp>
-        <p:nvSpPr>
-          <p:cNvPr id="8" name="TextBox 7"/>
-          <p:cNvSpPr txBox="1"/>
-          <p:nvPr/>
-        </p:nvSpPr>
-        <p:spPr>
-          <a:xfrm>
-            <a:off x="649224" y="5029200"/>
-            <a:ext cx="10881360" cy="548640"/>
-          </a:xfrm>
-          <a:prstGeom prst="rect">
-            <a:avLst/>
-          </a:prstGeom>
-          <a:noFill/>
-        </p:spPr>
-        <p:txBody>
-          <a:bodyPr wrap="square" anchor="t" lIns="18288" rIns="18288" tIns="18288" bIns="18288">
-            <a:spAutoFit/>
-          </a:bodyPr>
-          <a:lstStyle/>
-          <a:p>
-            <a:pPr algn="ctr">
-              <a:spcAft>
-                <a:spcPts val="400"/>
-              </a:spcAft>
-            </a:pPr>
-            <a:r>
-              <a:rPr sz="2600" b="1">
-                <a:solidFill>
-                  <a:srgbClr val="FFFFFF"/>
-                </a:solidFill>
-                <a:latin typeface="Segoe UI"/>
-              </a:rPr>
-              <a:t>SAMARKAND · спасибо за внимание</a:t>
-            </a:r>
+              <a:t>Каждый слайд — одна проверенная гипотеза: гипотеза → как проверили → результат → решение</a:t>
+            </a:r>
+          </a:p>
+        </p:txBody>
+      </p:sp>
+      <p:sp>
+        <p:nvSpPr>
+          <p:cNvPr id="4" name="Rectangle 3"/>
+          <p:cNvSpPr/>
+          <p:nvPr/>
+        </p:nvSpPr>
+        <p:spPr>
+          <a:xfrm>
+            <a:off x="832104" y="3246120"/>
+            <a:ext cx="2743200" cy="19050"/>
+          </a:xfrm>
+          <a:prstGeom prst="rect">
+            <a:avLst/>
+          </a:prstGeom>
+          <a:solidFill>
+            <a:srgbClr val="FA913B"/>
+          </a:solidFill>
+          <a:ln>
+            <a:noFill/>
+          </a:ln>
+        </p:spPr>
+        <p:style>
+          <a:lnRef idx="1">
+            <a:schemeClr val="accent1"/>
+          </a:lnRef>
+          <a:fillRef idx="3">
+            <a:schemeClr val="accent1"/>
+          </a:fillRef>
+          <a:effectRef idx="2">
+            <a:schemeClr val="accent1"/>
+          </a:effectRef>
+          <a:fontRef idx="minor">
+            <a:schemeClr val="lt1"/>
+          </a:fontRef>
+        </p:style>
+        <p:txBody>
+          <a:bodyPr rtlCol="0" anchor="ctr"/>
+          <a:lstStyle/>
+          <a:p>
+            <a:pPr algn="ctr"/>
           </a:p>
         </p:txBody>
       </p:sp>
@@ -7911,7 +7717,7 @@
     <p:bg>
       <p:bgPr>
         <a:solidFill>
-          <a:srgbClr val="14171C"/>
+          <a:srgbClr val="F9F8F6"/>
         </a:solidFill>
         <a:effectLst/>
       </p:bgPr>
@@ -7931,33 +7737,33 @@
         </p:nvSpPr>
         <p:spPr>
           <a:xfrm>
-            <a:off x="832104" y="2194560"/>
-            <a:ext cx="10515600" cy="1097280"/>
-          </a:xfrm>
-          <a:prstGeom prst="rect">
-            <a:avLst/>
-          </a:prstGeom>
-          <a:noFill/>
-        </p:spPr>
-        <p:txBody>
-          <a:bodyPr wrap="square" anchor="t" lIns="18288" rIns="18288" tIns="18288" bIns="18288">
-            <a:spAutoFit/>
-          </a:bodyPr>
-          <a:lstStyle/>
-          <a:p>
-            <a:pPr algn="l">
-              <a:spcAft>
-                <a:spcPts val="400"/>
-              </a:spcAft>
-            </a:pPr>
-            <a:r>
-              <a:rPr sz="4400" b="1">
-                <a:solidFill>
-                  <a:srgbClr val="FFFFFF"/>
-                </a:solidFill>
-                <a:latin typeface="Segoe UI"/>
-              </a:rPr>
-              <a:t>Приложение. Исследование</a:t>
+            <a:off x="649224" y="384048"/>
+            <a:ext cx="10881360" cy="1234440"/>
+          </a:xfrm>
+          <a:prstGeom prst="rect">
+            <a:avLst/>
+          </a:prstGeom>
+          <a:noFill/>
+        </p:spPr>
+        <p:txBody>
+          <a:bodyPr wrap="square" anchor="t" lIns="18288" rIns="18288" tIns="18288" bIns="18288">
+            <a:spAutoFit/>
+          </a:bodyPr>
+          <a:lstStyle/>
+          <a:p>
+            <a:pPr algn="l">
+              <a:spcAft>
+                <a:spcPts val="400"/>
+              </a:spcAft>
+            </a:pPr>
+            <a:r>
+              <a:rPr sz="3200" b="1">
+                <a:solidFill>
+                  <a:srgbClr val="1E2836"/>
+                </a:solidFill>
+                <a:latin typeface="Segoe UI"/>
+              </a:rPr>
+              <a:t>Одна команда воспроизводит все числа из чистой копии</a:t>
             </a:r>
           </a:p>
         </p:txBody>
@@ -7970,53 +7776,241 @@
         </p:nvSpPr>
         <p:spPr>
           <a:xfrm>
-            <a:off x="832104" y="3383280"/>
-            <a:ext cx="10058400" cy="914400"/>
-          </a:xfrm>
-          <a:prstGeom prst="rect">
-            <a:avLst/>
-          </a:prstGeom>
-          <a:noFill/>
-        </p:spPr>
-        <p:txBody>
-          <a:bodyPr wrap="square" anchor="t" lIns="18288" rIns="18288" tIns="18288" bIns="18288">
-            <a:spAutoFit/>
-          </a:bodyPr>
-          <a:lstStyle/>
-          <a:p>
-            <a:pPr algn="l">
-              <a:spcAft>
-                <a:spcPts val="400"/>
-              </a:spcAft>
-            </a:pPr>
-            <a:r>
-              <a:rPr sz="2000" b="0">
-                <a:solidFill>
-                  <a:srgbClr val="D0D4DA"/>
-                </a:solidFill>
-                <a:latin typeface="Segoe UI"/>
-              </a:rPr>
-              <a:t>Каждый слайд — одна проверенная гипотеза: гипотеза → как проверили → результат → решение</a:t>
-            </a:r>
-          </a:p>
-        </p:txBody>
-      </p:sp>
-      <p:sp>
-        <p:nvSpPr>
-          <p:cNvPr id="4" name="Rectangle 3"/>
+            <a:off x="649224" y="1783080"/>
+            <a:ext cx="5166360" cy="1047749"/>
+          </a:xfrm>
+          <a:prstGeom prst="rect">
+            <a:avLst/>
+          </a:prstGeom>
+          <a:noFill/>
+        </p:spPr>
+        <p:txBody>
+          <a:bodyPr wrap="square" anchor="t" lIns="18288" rIns="18288" tIns="18288" bIns="18288">
+            <a:spAutoFit/>
+          </a:bodyPr>
+          <a:lstStyle/>
+          <a:p>
+            <a:pPr algn="l">
+              <a:spcAft>
+                <a:spcPts val="400"/>
+              </a:spcAft>
+            </a:pPr>
+            <a:r>
+              <a:rPr sz="6600" b="1">
+                <a:solidFill>
+                  <a:srgbClr val="C1400B"/>
+                </a:solidFill>
+                <a:latin typeface="Segoe UI"/>
+              </a:rPr>
+              <a:t>7,5 мин</a:t>
+            </a:r>
+          </a:p>
+        </p:txBody>
+      </p:sp>
+      <p:sp>
+        <p:nvSpPr>
+          <p:cNvPr id="4" name="TextBox 3"/>
+          <p:cNvSpPr txBox="1"/>
+          <p:nvPr/>
+        </p:nvSpPr>
+        <p:spPr>
+          <a:xfrm>
+            <a:off x="676656" y="2872740"/>
+            <a:ext cx="5166360" cy="822960"/>
+          </a:xfrm>
+          <a:prstGeom prst="rect">
+            <a:avLst/>
+          </a:prstGeom>
+          <a:noFill/>
+        </p:spPr>
+        <p:txBody>
+          <a:bodyPr wrap="square" anchor="t" lIns="18288" rIns="18288" tIns="18288" bIns="18288">
+            <a:spAutoFit/>
+          </a:bodyPr>
+          <a:lstStyle/>
+          <a:p>
+            <a:pPr algn="l">
+              <a:spcAft>
+                <a:spcPts val="400"/>
+              </a:spcAft>
+            </a:pPr>
+            <a:r>
+              <a:rPr sz="1600" b="0">
+                <a:solidFill>
+                  <a:srgbClr val="4A5462"/>
+                </a:solidFill>
+                <a:latin typeface="Segoe UI"/>
+              </a:rPr>
+              <a:t>чистый клон → карта и числа</a:t>
+            </a:r>
+          </a:p>
+        </p:txBody>
+      </p:sp>
+      <p:sp>
+        <p:nvSpPr>
+          <p:cNvPr id="5" name="TextBox 4"/>
+          <p:cNvSpPr txBox="1"/>
+          <p:nvPr/>
+        </p:nvSpPr>
+        <p:spPr>
+          <a:xfrm>
+            <a:off x="6089904" y="1783080"/>
+            <a:ext cx="5166360" cy="1143000"/>
+          </a:xfrm>
+          <a:prstGeom prst="rect">
+            <a:avLst/>
+          </a:prstGeom>
+          <a:noFill/>
+        </p:spPr>
+        <p:txBody>
+          <a:bodyPr wrap="square" anchor="t" lIns="18288" rIns="18288" tIns="18288" bIns="18288">
+            <a:spAutoFit/>
+          </a:bodyPr>
+          <a:lstStyle/>
+          <a:p>
+            <a:pPr algn="l">
+              <a:spcAft>
+                <a:spcPts val="400"/>
+              </a:spcAft>
+            </a:pPr>
+            <a:r>
+              <a:rPr sz="7200" b="1">
+                <a:solidFill>
+                  <a:srgbClr val="C1400B"/>
+                </a:solidFill>
+                <a:latin typeface="Segoe UI"/>
+              </a:rPr>
+              <a:t>255</a:t>
+            </a:r>
+          </a:p>
+        </p:txBody>
+      </p:sp>
+      <p:sp>
+        <p:nvSpPr>
+          <p:cNvPr id="6" name="TextBox 5"/>
+          <p:cNvSpPr txBox="1"/>
+          <p:nvPr/>
+        </p:nvSpPr>
+        <p:spPr>
+          <a:xfrm>
+            <a:off x="6117336" y="2971800"/>
+            <a:ext cx="5166360" cy="822960"/>
+          </a:xfrm>
+          <a:prstGeom prst="rect">
+            <a:avLst/>
+          </a:prstGeom>
+          <a:noFill/>
+        </p:spPr>
+        <p:txBody>
+          <a:bodyPr wrap="square" anchor="t" lIns="18288" rIns="18288" tIns="18288" bIns="18288">
+            <a:spAutoFit/>
+          </a:bodyPr>
+          <a:lstStyle/>
+          <a:p>
+            <a:pPr algn="l">
+              <a:spcAft>
+                <a:spcPts val="400"/>
+              </a:spcAft>
+            </a:pPr>
+            <a:r>
+              <a:rPr sz="1600" b="0">
+                <a:solidFill>
+                  <a:srgbClr val="4A5462"/>
+                </a:solidFill>
+                <a:latin typeface="Segoe UI"/>
+              </a:rPr>
+              <a:t>автотестов</a:t>
+            </a:r>
+          </a:p>
+        </p:txBody>
+      </p:sp>
+      <p:sp>
+        <p:nvSpPr>
+          <p:cNvPr id="7" name="TextBox 6"/>
+          <p:cNvSpPr txBox="1"/>
+          <p:nvPr/>
+        </p:nvSpPr>
+        <p:spPr>
+          <a:xfrm>
+            <a:off x="649224" y="3931920"/>
+            <a:ext cx="10881360" cy="1371600"/>
+          </a:xfrm>
+          <a:prstGeom prst="rect">
+            <a:avLst/>
+          </a:prstGeom>
+          <a:noFill/>
+        </p:spPr>
+        <p:txBody>
+          <a:bodyPr wrap="square" anchor="t" lIns="18288" rIns="18288" tIns="18288" bIns="18288">
+            <a:spAutoFit/>
+          </a:bodyPr>
+          <a:lstStyle/>
+          <a:p>
+            <a:pPr algn="l">
+              <a:spcAft>
+                <a:spcPts val="400"/>
+              </a:spcAft>
+            </a:pPr>
+            <a:r>
+              <a:rPr sz="1500" b="0">
+                <a:solidFill>
+                  <a:srgbClr val="4A5462"/>
+                </a:solidFill>
+                <a:latin typeface="Segoe UI"/>
+              </a:rPr>
+              <a:t>Установка 3 мин 17 с, карта открывается за 8,1 с</a:t>
+            </a:r>
+          </a:p>
+          <a:p>
+            <a:pPr algn="l">
+              <a:spcAft>
+                <a:spcPts val="400"/>
+              </a:spcAft>
+            </a:pPr>
+            <a:r>
+              <a:rPr sz="1500" b="0">
+                <a:solidFill>
+                  <a:srgbClr val="4A5462"/>
+                </a:solidFill>
+                <a:latin typeface="Segoe UI"/>
+              </a:rPr>
+              <a:t>Веса моделей в репозитории; все числа — reports/final_numbers.json с источником и протоколом</a:t>
+            </a:r>
+          </a:p>
+          <a:p>
+            <a:pPr algn="l">
+              <a:spcAft>
+                <a:spcPts val="400"/>
+              </a:spcAft>
+            </a:pPr>
+            <a:r>
+              <a:rPr sz="1500" b="0">
+                <a:solidFill>
+                  <a:srgbClr val="4A5462"/>
+                </a:solidFill>
+                <a:latin typeface="Segoe UI"/>
+              </a:rPr>
+              <a:t>Правила принятия решений записаны до сравнения (детектор, поле, счётчик)</a:t>
+            </a:r>
+          </a:p>
+        </p:txBody>
+      </p:sp>
+      <p:sp>
+        <p:nvSpPr>
+          <p:cNvPr id="8" name="Rectangle 7"/>
           <p:cNvSpPr/>
           <p:nvPr/>
         </p:nvSpPr>
         <p:spPr>
           <a:xfrm>
-            <a:off x="832104" y="3246120"/>
-            <a:ext cx="2743200" cy="19050"/>
+            <a:off x="649224" y="5422392"/>
+            <a:ext cx="10881360" cy="19050"/>
           </a:xfrm>
           <a:prstGeom prst="rect">
             <a:avLst/>
           </a:prstGeom>
           <a:solidFill>
-            <a:srgbClr val="FA913B"/>
+            <a:srgbClr val="A7ADB7"/>
           </a:solidFill>
           <a:ln>
             <a:noFill/>
@@ -8041,6 +8035,84 @@
           <a:lstStyle/>
           <a:p>
             <a:pPr algn="ctr"/>
+          </a:p>
+        </p:txBody>
+      </p:sp>
+      <p:sp>
+        <p:nvSpPr>
+          <p:cNvPr id="9" name="TextBox 8"/>
+          <p:cNvSpPr txBox="1"/>
+          <p:nvPr/>
+        </p:nvSpPr>
+        <p:spPr>
+          <a:xfrm>
+            <a:off x="649224" y="5532120"/>
+            <a:ext cx="10881360" cy="548640"/>
+          </a:xfrm>
+          <a:prstGeom prst="rect">
+            <a:avLst/>
+          </a:prstGeom>
+          <a:noFill/>
+        </p:spPr>
+        <p:txBody>
+          <a:bodyPr wrap="square" anchor="t" lIns="18288" rIns="18288" tIns="18288" bIns="18288">
+            <a:spAutoFit/>
+          </a:bodyPr>
+          <a:lstStyle/>
+          <a:p>
+            <a:pPr algn="l">
+              <a:spcAft>
+                <a:spcPts val="400"/>
+              </a:spcAft>
+            </a:pPr>
+            <a:r>
+              <a:rPr sz="2000" b="1">
+                <a:solidFill>
+                  <a:srgbClr val="1E2836"/>
+                </a:solidFill>
+                <a:latin typeface="Segoe UI"/>
+              </a:rPr>
+              <a:t>Любое число в презентации можно проверить по файлу и команде</a:t>
+            </a:r>
+          </a:p>
+        </p:txBody>
+      </p:sp>
+      <p:sp>
+        <p:nvSpPr>
+          <p:cNvPr id="10" name="TextBox 9"/>
+          <p:cNvSpPr txBox="1"/>
+          <p:nvPr/>
+        </p:nvSpPr>
+        <p:spPr>
+          <a:xfrm>
+            <a:off x="10607040" y="6355080"/>
+            <a:ext cx="1005840" cy="274320"/>
+          </a:xfrm>
+          <a:prstGeom prst="rect">
+            <a:avLst/>
+          </a:prstGeom>
+          <a:noFill/>
+        </p:spPr>
+        <p:txBody>
+          <a:bodyPr wrap="square" anchor="t" lIns="18288" rIns="18288" tIns="18288" bIns="18288">
+            <a:spAutoFit/>
+          </a:bodyPr>
+          <a:lstStyle/>
+          <a:p>
+            <a:pPr algn="r">
+              <a:spcAft>
+                <a:spcPts val="400"/>
+              </a:spcAft>
+            </a:pPr>
+            <a:r>
+              <a:rPr sz="1100" b="0">
+                <a:solidFill>
+                  <a:srgbClr val="9AA1AC"/>
+                </a:solidFill>
+                <a:latin typeface="Segoe UI"/>
+              </a:rPr>
+              <a:t>14 / 41</a:t>
+            </a:r>
           </a:p>
         </p:txBody>
       </p:sp>
@@ -10539,7 +10611,7 @@
                 </a:solidFill>
                 <a:latin typeface="Segoe UI"/>
               </a:rPr>
-              <a:t>02 / 13</a:t>
+              <a:t>02 / 12</a:t>
             </a:r>
           </a:p>
         </p:txBody>
@@ -15501,7 +15573,7 @@
                 </a:solidFill>
                 <a:latin typeface="Segoe UI"/>
               </a:rPr>
-              <a:t>03 / 13</a:t>
+              <a:t>03 / 12</a:t>
             </a:r>
           </a:p>
         </p:txBody>
@@ -17298,7 +17370,7 @@
                 </a:solidFill>
                 <a:latin typeface="Segoe UI"/>
               </a:rPr>
-              <a:t>39</a:t>
+              <a:t>42</a:t>
             </a:r>
           </a:p>
         </p:txBody>
@@ -20259,7 +20331,7 @@
                 </a:solidFill>
                 <a:latin typeface="Segoe UI"/>
               </a:rPr>
-              <a:t>04 / 13</a:t>
+              <a:t>04 / 12</a:t>
             </a:r>
           </a:p>
         </p:txBody>
@@ -21906,7 +21978,7 @@
                 </a:solidFill>
                 <a:latin typeface="Segoe UI"/>
               </a:rPr>
-              <a:t>05 / 13</a:t>
+              <a:t>05 / 12</a:t>
             </a:r>
           </a:p>
         </p:txBody>
@@ -22169,8 +22241,8 @@
         </p:nvSpPr>
         <p:spPr>
           <a:xfrm>
-            <a:off x="5120640" y="6035040"/>
-            <a:ext cx="6400800" cy="548640"/>
+            <a:off x="5120640" y="5897880"/>
+            <a:ext cx="5394960" cy="731520"/>
           </a:xfrm>
           <a:prstGeom prst="rect">
             <a:avLst/>
@@ -22266,7 +22338,7 @@
                 </a:solidFill>
                 <a:latin typeface="Segoe UI"/>
               </a:rPr>
-              <a:t>06 / 13</a:t>
+              <a:t>06 / 12</a:t>
             </a:r>
           </a:p>
         </p:txBody>
@@ -22529,8 +22601,8 @@
         </p:nvSpPr>
         <p:spPr>
           <a:xfrm>
-            <a:off x="5120640" y="6035040"/>
-            <a:ext cx="6400800" cy="548640"/>
+            <a:off x="5120640" y="5897880"/>
+            <a:ext cx="5394960" cy="731520"/>
           </a:xfrm>
           <a:prstGeom prst="rect">
             <a:avLst/>
@@ -22594,7 +22666,7 @@
                 </a:solidFill>
                 <a:latin typeface="Segoe UI"/>
               </a:rPr>
-              <a:t>07 / 13</a:t>
+              <a:t>07 / 12</a:t>
             </a:r>
           </a:p>
         </p:txBody>
@@ -23112,7 +23184,7 @@
                 </a:solidFill>
                 <a:latin typeface="Segoe UI"/>
               </a:rPr>
-              <a:t>08 / 13</a:t>
+              <a:t>08 / 12</a:t>
             </a:r>
           </a:p>
         </p:txBody>
@@ -23511,7 +23583,7 @@
                 </a:solidFill>
                 <a:latin typeface="Segoe UI"/>
               </a:rPr>
-              <a:t>09 / 13</a:t>
+              <a:t>09 / 12</a:t>
             </a:r>
           </a:p>
         </p:txBody>

--- a/presentation/deck_checkpoint.pptx
+++ b/presentation/deck_checkpoint.pptx
@@ -46,6 +46,7 @@
     <p:sldId id="294" r:id="rId46"/>
     <p:sldId id="295" r:id="rId47"/>
     <p:sldId id="296" r:id="rId48"/>
+    <p:sldId id="297" r:id="rId49"/>
   </p:sldIdLst>
   <p:sldSz cx="12191695" cy="6858000" type="screen4x3"/>
   <p:notesSz cx="6858000" cy="9144000"/>
@@ -618,13 +619,13 @@
           <a:lstStyle/>
           <a:p>
             <a:r>
-              <a:t>На детальном фото модель считает предметы с ошибкой 0.59 шт. на кадр и определяет материал. Это фото с воды или дрона, где предмет виден целиком. На отложенных сессиях FML ошибка 0.59 предмета на кадр, у бейзлайна 2.86; на аэрофото Winans мы лучше открытого DebrisScan.</a:t>
+              <a:t>Эколог за пять шагов видит, что найдено, где, когда и насколько этому верить. Кнопка «Демо» проводит по шагам: район и даты, снимок с нумерованными зонами, карточка зоны, качество и статус, выгрузка. Первая строка карточки — что это: плавающий материал, пластик не подтверждён. Дальше статус, подтверждение независимой разметкой и прямо: количество предметов по этому снимку не определено; рядом — оценка по полю. Всё отфильтрованное выгружается в GeoJSON и CSV. Показываем это вживую в сервисе, кнопка «Демо», около полутора минут.</a:t>
             </a:r>
           </a:p>
           <a:p/>
           <a:p>
             <a:r>
-              <a:t>[3:40–4:00]</a:t>
+              <a:t>[3:28–5:34]</a:t>
             </a:r>
           </a:p>
         </p:txBody>
@@ -694,13 +695,13 @@
           <a:lstStyle/>
           <a:p>
             <a:r>
-              <a:t>Эколог за пять шагов видит, что найдено, где, когда и насколько этому верить. Кнопка «Демо» проводит по шагам: район и даты, снимок с нумерованными зонами, карточка зоны, качество и статус, выгрузка. Первая строка карточки — что это: плавающий материал, пластик не подтверждён. Дальше статус, подтверждение независимой разметкой и прямо: количество предметов по этому снимку не определено; рядом — оценка по полю. Всё отфильтрованное выгружается в GeoJSON и CSV. Показываем это вживую в сервисе, кнопка «Демо», около полутора минут.</a:t>
+              <a:t>Что ещё умеет карта: наша модель на новых снимках, дроны, дрейф и PRIME — у каждого слоя подписан источник. Это просьба жюри на чекпоинте. Реальное время — это наша модель на реальных снимках Sentinel-2: за 180 дней обработано моделью 202 из 1077 найденных снимков, с находками 10. NASA — только контекст. «Дроны» — детальные кадры с разметкой авторов, отдельно наш счётчик; карточка пишет «дрон, не спутник». «Дрейф» у находки: до 72 часов, течения и ветер на дату сцены, расчёт у 33 из 77. PRIME — демо-режим по просьбе жюри: как сервис выглядел бы на детальных снимках, не результат модели. На таймлайне у каждого источника своя дорожка.</a:t>
             </a:r>
           </a:p>
           <a:p/>
           <a:p>
             <a:r>
-              <a:t>[4:00–6:06]</a:t>
+              <a:t>[5:34–6:23]</a:t>
             </a:r>
           </a:p>
         </p:txBody>
@@ -776,7 +777,7 @@
           <a:p/>
           <a:p>
             <a:r>
-              <a:t>[6:06–6:17]</a:t>
+              <a:t>[6:23–6:34]</a:t>
             </a:r>
           </a:p>
         </p:txBody>
@@ -916,7 +917,7 @@
           <a:lstStyle/>
           <a:p>
             <a:r>
-              <a:t>Одна команда воспроизводит все числа из чистой копии. Мы клонировали репозиторий на чистую машину: от клона до открытой карты и пересчитанных чисел — 7,5 минуты. В проекте 255 автотестов; отдельные тесты сверяют каждое число в документах и этой презентации с единым файлом итоговых чисел, где у каждого числа есть источник и протокол. Веса моделей лежат в репозитории, поэтому ничего не нужно обучать заново. Правила выбора моделей мы записывали до сравнения: например, модель поля берётся, только если она лучше медианы на отложенном рейсе. Это защищает от подгонки под тест. Файл итоговых чисел пересобирается одной командой после любого пересчёта, и документы с этой презентацией собираются из него скриптом. Если число в тексте разойдётся с файлом, тест упадёт. Поэтому то, что вы видите на слайдах, совпадает с тем, что считает код.</a:t>
+              <a:t>Мы проверили связку снимок — штуки на всех найденных парах, и посчитанные предметы спутнику не видны. Главный источник — ADIS: 21 444 отрезков наблюдений с судов; из них 66 совпадают со снимком по месту и времени. В 6 таких парах в поле есть предметы, и ни в одной детектор не сработал на полосе наблюдения. Мы проверили итальянские трансекты ISPRA и нашли одну пару по месту и дню — ER604; на карте видно, что предметы, посчитанные людьми, не лежат рядом с пикселями, где сработал детектор. Проверили искусственные мишени проекта PLP: детектор видит пиксель, только когда мишень закрывает заметную долю пикселя. Вывод: одиночные предметы, которые считают люди, спутнику не видны, а плотные нити, которые видит спутник, никто не считал поштучно. Поэтому число штук по снимку в сервисе — только исследовательский сценарий с оговорками.</a:t>
             </a:r>
           </a:p>
         </p:txBody>
@@ -986,7 +987,7 @@
           <a:lstStyle/>
           <a:p>
             <a:r>
-              <a:t>Из событий CSV организаторов синхронных пар «снимок → поле» — ноль. Гипотеза: среди событий CSV есть пары снимка и полевого счёта для обучения. Как проверили: для каждого события искали снимок S2/Landsat, отбирали по времени и облачности, маскам качества и дрейфу. Решение: пары из CSV не используем для перевода снимка в штуки; ищем другие источники.</a:t>
+              <a:t>Одна команда воспроизводит все числа из чистой копии. Мы клонировали репозиторий на чистую машину: от клона до открытой карты и пересчитанных чисел — 7,5 минуты. В проекте 252 автотестов; отдельные тесты сверяют каждое число в документах и этой презентации с единым файлом итоговых чисел, где у каждого числа есть источник и протокол. Веса моделей лежат в репозитории, поэтому ничего не нужно обучать заново. Правила выбора моделей мы записывали до сравнения: например, модель поля берётся, только если она лучше медианы на отложенном рейсе. Это защищает от подгонки под тест. Файл итоговых чисел пересобирается одной командой после любого пересчёта, и документы с этой презентацией собираются из него скриптом. Если число в тексте разойдётся с файлом, тест упадёт. Поэтому то, что вы видите на слайдах, совпадает с тем, что считает код.</a:t>
             </a:r>
           </a:p>
         </p:txBody>
@@ -1056,7 +1057,7 @@
           <a:lstStyle/>
           <a:p>
             <a:r>
-              <a:t>У каждой пары — уровень доказательности и маски качества. Гипотеза: отобранные по метаданным пары пригодны без проверки облаков и блика. Как проверили: маски SCL и блика в полосе обследования; отбраковано по блику 10, по облакам 6. Решение: реестр пар хранит уровень A–D и причину отказа для каждой строки.</a:t>
+              <a:t>Из событий CSV организаторов синхронных пар «снимок → поле» — ноль. Гипотеза: среди событий CSV есть пары снимка и полевого счёта для обучения. Как проверили: для каждого события искали снимок S2/Landsat, отбирали по времени и облачности, маскам качества и дрейфу. Решение: пары из CSV не используем для перевода снимка в штуки; ищем другие источники.</a:t>
             </a:r>
           </a:p>
         </p:txBody>
@@ -1126,7 +1127,7 @@
           <a:lstStyle/>
           <a:p>
             <a:r>
-              <a:t>ADIS: 66 пар по месту и времени, видимого сигнала — 0. Гипотеза: в пересечениях маршрутов ADIS со снимками детектор увидит посчитанные предметы. Как проверили: 21 444 отрезков ADIS сопоставлены со снимками в окне по времени; полоса наблюдения против пикселей детектора. Решение: пары ADIS — «по месту и времени», не калибровочные; доля покрытия пикселя 6.6·10⁻⁸ объясняет результат.</a:t>
+              <a:t>У каждой пары — уровень доказательности и маски качества. Гипотеза: отобранные по метаданным пары пригодны без проверки облаков и блика. Как проверили: маски SCL и блика в полосе обследования; отбраковано по блику 10, по облакам 6. Решение: реестр пар хранит уровень A–D и причину отказа для каждой строки.</a:t>
             </a:r>
           </a:p>
         </p:txBody>
@@ -1196,7 +1197,7 @@
           <a:lstStyle/>
           <a:p>
             <a:r>
-              <a:t>Окна Cózar 2024 — только для проверки, не для обучения. Гипотеза: ручная разметка нитей Cózar 2024 годится как независимая проверка детектора. Как проверили: сопоставили находки с 14 374 окнами разметки; на демо-сцене — совпадения по зонам. Решение: используем только как «подтверждение» в карточке, в обучение не берём.</a:t>
+              <a:t>ADIS: 66 пар по месту и времени, видимого сигнала — 0. Гипотеза: в пересечениях маршрутов ADIS со снимками детектор увидит посчитанные предметы. Как проверили: 21 444 отрезков ADIS сопоставлены со снимками в окне по времени; полоса наблюдения против пикселей детектора. Решение: пары ADIS — «по месту и времени», не калибровочные; доля покрытия пикселя 6.6·10⁻⁸ объясняет результат.</a:t>
             </a:r>
           </a:p>
         </p:txBody>
@@ -1266,7 +1267,7 @@
           <a:lstStyle/>
           <a:p>
             <a:r>
-              <a:t>MARIDA: утечек между обучением и тестом нет. Гипотеза: одни и те же сцены или дубликаты могут попасть в обучение и тест. Как проверили: сверка по сценам, датам и содержимому; проверено 119 пар, исключено дубликатов 1. Решение: находку на снимке обучения MARIDA помечаем и не считаем находкой.</a:t>
+              <a:t>Окна Cózar 2024 — только для проверки, не для обучения. Гипотеза: ручная разметка нитей Cózar 2024 годится как независимая проверка детектора. Как проверили: сопоставили находки с 14 374 окнами разметки; на демо-сцене — совпадения по зонам. Решение: используем только как «подтверждение» в карточке, в обучение не берём.</a:t>
             </a:r>
           </a:p>
         </p:txBody>
@@ -1412,7 +1413,7 @@
           <a:lstStyle/>
           <a:p>
             <a:r>
-              <a:t>Детектор v2: 13 вариантов с новыми данными — ни один не прошёл правило. Гипотеза: новые размеченные данные (PLP, Floating Objects, суда) улучшат детектор. Как проверили: 13 вариантов × 3 seed против контрольного; правило записано до экспериментов. Решение: в сервисе остаётся прежний LightGBM.</a:t>
+              <a:t>MARIDA: утечек между обучением и тестом нет. Гипотеза: одни и те же сцены или дубликаты могут попасть в обучение и тест. Как проверили: сверка по сценам, датам и содержимому; проверено 119 пар, исключено дубликатов 1. Решение: находку на снимке обучения MARIDA помечаем и не считаем находкой.</a:t>
             </a:r>
           </a:p>
         </p:txBody>
@@ -1482,7 +1483,7 @@
           <a:lstStyle/>
           <a:p>
             <a:r>
-              <a:t>U-Net проигрывает бустингу на узких полосах. Гипотеза: свёрточная сеть лучше признаков пикселя. Как проверили: U-Net на тех же сценах и том же пороговом протоколе; сравнение по сценам (15). Решение: U-Net — только как бейзлайн.</a:t>
+              <a:t>Детектор v2: 13 вариантов с новыми данными — ни один не прошёл правило. Гипотеза: новые размеченные данные (PLP, Floating Objects, суда) улучшат детектор. Как проверили: 13 вариантов × 3 seed против контрольного; правило записано до экспериментов. Решение: в сервисе остаётся прежний LightGBM.</a:t>
             </a:r>
           </a:p>
         </p:txBody>
@@ -1552,7 +1553,7 @@
           <a:lstStyle/>
           <a:p>
             <a:r>
-              <a:t>Слой нефти MADOS — только эксперимент. Гипотеза: голова для нефтяных пятен даст полезный слой. Как проверили: обучили на MADOS, проверили на отложенном тесте и на реальных L2A (Wakashio). Решение: на реальных сценах ложные срабатывания — слой выключен по умолчанию.</a:t>
+              <a:t>U-Net проигрывает бустингу на узких полосах. Гипотеза: свёрточная сеть лучше признаков пикселя. Как проверили: U-Net на тех же сценах и том же пороговом протоколе; сравнение по сценам (15). Решение: U-Net — только как бейзлайн.</a:t>
             </a:r>
           </a:p>
         </p:txBody>
@@ -1622,7 +1623,7 @@
           <a:lstStyle/>
           <a:p>
             <a:r>
-              <a:t>При ветре ≥ 5 м/с снимок не информативен. Гипотеза: детектор одинаково работает при любом ветре. Как проверили: ветер ERA5 для каждой зоны; правило из методики Cózar 2024. Решение: зоны с сильным ветром — «недостаточно данных», в знаменатель «обследовано» не входят.</a:t>
+              <a:t>Слой нефти MADOS — только эксперимент. Гипотеза: голова для нефтяных пятен даст полезный слой. Как проверили: обучили на MADOS, проверили на отложенном тесте и на реальных L2A (Wakashio). Решение: на реальных сценах ложные срабатывания — слой выключен по умолчанию.</a:t>
             </a:r>
           </a:p>
         </p:txBody>
@@ -1692,7 +1693,7 @@
           <a:lstStyle/>
           <a:p>
             <a:r>
-              <a:t>Интервал поля: пуассоновский слишком узкий, бутстреп по дням — честный. Гипотеза: ошибка счёта (Пуассон) описывает неопределённость концентрации. Как проверили: сравнили охват отложенного рейса: пуассоновский интервал и кластерный бутстреп по дням рейса. Решение: показываем бутстреп; пуассоновский — только с подписью «только ошибка счёта».</a:t>
+              <a:t>При ветре ≥ 5 м/с снимок не информативен. Гипотеза: детектор одинаково работает при любом ветре. Как проверили: ветер ERA5 для каждой зоны; правило из методики Cózar 2024. Решение: зоны с сильным ветром — «недостаточно данных», в знаменатель «обследовано» не входят.</a:t>
             </a:r>
           </a:p>
         </p:txBody>
@@ -1762,7 +1763,7 @@
           <a:lstStyle/>
           <a:p>
             <a:r>
-              <a:t>Прогноз ADIS: модели не лучше медианы профиля. Гипотеза: модель по месту и времени предскажет концентрацию ADIS. Как проверили: кандидаты B1, M1, M2 против медианы на отложенных отрезках, правило на val. Решение: показываем медиану профиля.</a:t>
+              <a:t>Интервал поля: пуассоновский слишком узкий, бутстреп по дням — честный. Гипотеза: ошибка счёта (Пуассон) описывает неопределённость концентрации. Как проверили: сравнили охват отложенного рейса: пуассоновский интервал и кластерный бутстреп по дням рейса. Решение: показываем бутстреп; пуассоновский — только с подписью «только ошибка счёта».</a:t>
             </a:r>
           </a:p>
         </p:txBody>
@@ -1832,7 +1833,7 @@
           <a:lstStyle/>
           <a:p>
             <a:r>
-              <a:t>Калибровка по ячейкам сетки — отказ. Гипотеза: климатология поля по ячейкам свяжется с сигналом снимков. Как проверили: 123 ячеек; ранговая корреляция с доверительным интервалом по дням судна. Решение: калибровки по ячейкам нет; в одном периоде общих дат поле × спутник — ноль.</a:t>
+              <a:t>Прогноз ADIS: модели не лучше медианы профиля. Гипотеза: модель по месту и времени предскажет концентрацию ADIS. Как проверили: кандидаты B1, M1, M2 против медианы на отложенных отрезках, правило на val. Решение: показываем медиану профиля.</a:t>
             </a:r>
           </a:p>
         </p:txBody>
@@ -1902,7 +1903,7 @@
           <a:lstStyle/>
           <a:p>
             <a:r>
-              <a:t>Физика разрешения: при пикселе Sentinel-2 предметы поштучно не считаемы. Гипотеза: при достаточной модели штуки можно считать по пикселю Sentinel-2. Как проверили: распределение размеров предметов против размера пикселя разных спутников. Решение: на Sentinel-2 — только зоны скоплений; штуки — поле и детальное фото.</a:t>
+              <a:t>Калибровка по ячейкам сетки — отказ. Гипотеза: климатология поля по ячейкам свяжется с сигналом снимков. Как проверили: 123 ячеек; ранговая корреляция с доверительным интервалом по дням судна. Решение: калибровки по ячейкам нет; в одном периоде общих дат поле × спутник — ноль.</a:t>
             </a:r>
           </a:p>
         </p:txBody>
@@ -1972,7 +1973,7 @@
           <a:lstStyle/>
           <a:p>
             <a:r>
-              <a:t>Снимков сверхвысокого разрешения в день наблюдений ADIS нет. Гипотеза: для пар ADIS найдутся снимки VHR, где предмет виден. Как проверили: поиск в открытых каталогах по отрезкам ADIS в тот же день. Решение: VHR — в плане развития (запросы операторам).</a:t>
+              <a:t>Физика разрешения: при пикселе Sentinel-2 предметы поштучно не считаемы. Гипотеза: при достаточной модели штуки можно считать по пикселю Sentinel-2. Как проверили: распределение размеров предметов против размера пикселя разных спутников. Решение: на Sentinel-2 — только зоны скоплений; штуки — поле и детальное фото.</a:t>
             </a:r>
           </a:p>
         </p:txBody>
@@ -2042,7 +2043,7 @@
           <a:lstStyle/>
           <a:p>
             <a:r>
-              <a:t>Искусственные мишени PLP: спектр пикселя не переводится в долю покрытия. Гипотеза: по спектру пикселя можно восстановить долю площади под пластиком. Как проверили: 63 пикселей мишеней, 5 дат; проверка с отложенной датой. Решение: перевод «спектр → покрытие» не подтверждён; сценарий по мишеням — только исследовательский.</a:t>
+              <a:t>Снимков сверхвысокого разрешения в день наблюдений ADIS нет. Гипотеза: для пар ADIS найдутся снимки VHR, где предмет виден. Как проверили: поиск в открытых каталогах по отрезкам ADIS в тот же день. Решение: VHR — в плане развития (запросы операторам).</a:t>
             </a:r>
           </a:p>
         </p:txBody>
@@ -2188,7 +2189,7 @@
           <a:lstStyle/>
           <a:p>
             <a:r>
-              <a:t>Синтетические пары — отклонены. Гипотеза: синтетика (вставка предметов в снимок) заменит настоящие пары. Как проверили: проверка переносимости синтетики на природные сцены. Решение: не принята: на 11 датах мишеней A* (оставь-одну-дату) MAE 893.5 против 100.9 у плоской калибровки и 113.5 у ответа «0».</a:t>
+              <a:t>Искусственные мишени PLP: спектр пикселя не переводится в долю покрытия. Гипотеза: по спектру пикселя можно восстановить долю площади под пластиком. Как проверили: 63 пикселей мишеней, 5 дат; проверка с отложенной датой. Решение: перевод «спектр → покрытие» не подтверждён; сценарий по мишеням — только исследовательский.</a:t>
             </a:r>
           </a:p>
         </p:txBody>
@@ -2258,7 +2259,7 @@
           <a:lstStyle/>
           <a:p>
             <a:r>
-              <a:t>Оценщик «снимок → штуки»: плоская калибровка хуже ответа «0». Гипотеза: простая калибровка площади маски в штуки даёт полезную оценку. Как проверили: лидерборд методов на парах по месту и времени, общий протокол и метрика. Решение: в карточке — «количество не определено», сценарий свёрнут с оговорками.</a:t>
+              <a:t>Синтетические пары — отклонены. Гипотеза: синтетика (вставка предметов в снимок) заменит настоящие пары. Как проверили: проверка переносимости синтетики на природные сцены. Решение: не принята: на 11 датах мишеней A* (оставь-одну-дату) MAE 893.5 против 100.9 у плоской калибровки и 113.5 у ответа «0».</a:t>
             </a:r>
           </a:p>
         </p:txBody>
@@ -2328,7 +2329,7 @@
           <a:lstStyle/>
           <a:p>
             <a:r>
-              <a:t>ISPRA: все трансекты разобраны одним скриптом, пара по месту и дню — одна. Гипотеза: итальянские трансекты MSFD дадут пары со снимком. Как проверили: поиск снимков под каждую трансекту, маски, уровни A/C/D. Решение: ER604 — пара по месту и дню, не калибровочная: ни один предмет не рядом с пикселем детектора.</a:t>
+              <a:t>Оценщик «снимок → штуки»: плоская калибровка хуже ответа «0». Гипотеза: простая калибровка площади маски в штуки даёт полезную оценку. Как проверили: лидерборд методов на парах по месту и времени, общий протокол и метрика. Решение: в карточке — «количество не определено», сценарий свёрнут с оговорками.</a:t>
             </a:r>
           </a:p>
         </p:txBody>
@@ -2398,7 +2399,7 @@
           <a:lstStyle/>
           <a:p>
             <a:r>
-              <a:t>PLASTIC MONITOR: квадрат 1 м² не равен пикселю. Гипотеза: фото-учёт PLASTIC MONITOR даст пары со снимком. Как проверили: сопоставление площадки учёта с пикселем и пятном на снимке. Решение: уровень C: единица наблюдения несовместима с пикселем.</a:t>
+              <a:t>ISPRA: все трансекты разобраны одним скриптом, пара по месту и дню — одна. Гипотеза: итальянские трансекты MSFD дадут пары со снимком. Как проверили: поиск снимков под каждую трансекту, маски, уровни A/C/D. Решение: ER604 — пара по месту и дню, не калибровочная: ни один предмет не рядом с пикселем детектора.</a:t>
             </a:r>
           </a:p>
         </p:txBody>
@@ -2468,7 +2469,7 @@
           <a:lstStyle/>
           <a:p>
             <a:r>
-              <a:t>Архивы и приложения статей: кандидаты есть, пар нет. Гипотеза: в приложениях к статьям лежат пары «снимок — счёт». Как проверили: разбор архивов и приложений: координаты, время, площадь, счёт. Решение: запросы авторам — в плане развития.</a:t>
+              <a:t>PLASTIC MONITOR: квадрат 1 м² не равен пикселю. Гипотеза: фото-учёт PLASTIC MONITOR даст пары со снимком. Как проверили: сопоставление площадки учёта с пикселем и пятном на снимке. Решение: уровень C: единица наблюдения несовместима с пикселем.</a:t>
             </a:r>
           </a:p>
         </p:txBody>
@@ -2538,7 +2539,7 @@
           <a:lstStyle/>
           <a:p>
             <a:r>
-              <a:t>FML: разбиение по сессиям съёмки убирает утечку соседних кадров. Гипотеза: случайное разбиение кадров честно оценивает счётчик. Как проверили: сравнили случайное разбиение и разбиение по сессиям съёмки. Решение: публикуем только метрику по сессиям.</a:t>
+              <a:t>Архивы и приложения статей: кандидаты есть, пар нет. Гипотеза: в приложениях к статьям лежат пары «снимок — счёт». Как проверили: разбор архивов и приложений: координаты, время, площадь, счёт. Решение: запросы авторам — в плане развития.</a:t>
             </a:r>
           </a:p>
         </p:txBody>
@@ -2608,7 +2609,7 @@
           <a:lstStyle/>
           <a:p>
             <a:r>
-              <a:t>Winans: плотность на кадре берега — при известной площади. Гипотеза: счётчик по фото даёт шт. на площадь, если известна площадь кадра. Как проверили: пространственное разбиение, 397 тестовых кадров по 164 м². Решение: подпись «шт. на кадр берега»; берег ≠ вода, Sentinel-2 так не считает.</a:t>
+              <a:t>FML: разбиение по сессиям съёмки убирает утечку соседних кадров. Гипотеза: случайное разбиение кадров честно оценивает счётчик. Как проверили: сравнили случайное разбиение и разбиение по сессиям съёмки. Решение: публикуем только метрику по сессиям.</a:t>
             </a:r>
           </a:p>
         </p:txBody>
@@ -2678,7 +2679,7 @@
           <a:lstStyle/>
           <a:p>
             <a:r>
-              <a:t>Перенос счётчика на реку и дрон — не работает без дообучения. Гипотеза: счётчик FML переносится на другие съёмки. Как проверили: проверка на кадрах реки и дрона другого источника. Решение: без дообучения не переносится: AP50 0.914 на отложенном FML против дрон Maharjan 2022 0.01, камера над каналом TUD-GV 0.406, камера над рекой The Ocean Cleanup 0.001.</a:t>
+              <a:t>Winans: плотность на кадре берега — при известной площади. Гипотеза: счётчик по фото даёт шт. на площадь, если известна площадь кадра. Как проверили: пространственное разбиение, 397 тестовых кадров по 164 м². Решение: подпись «шт. на кадр берега»; берег ≠ вода, Sentinel-2 так не считает.</a:t>
             </a:r>
           </a:p>
         </p:txBody>
@@ -2748,7 +2749,7 @@
           <a:lstStyle/>
           <a:p>
             <a:r>
-              <a:t>Материал на фото — только с матрицей ошибок. Гипотеза: модель различает материалы предметов на фото. Как проверили: матрица ошибок по классам материала на отложенном источнике. Решение: число по классам — только при разметке и матрице ошибок; иначе «состав не определён».</a:t>
+              <a:t>Перенос счётчика на реку и дрон — не работает без дообучения. Гипотеза: счётчик FML переносится на другие съёмки. Как проверили: проверка на кадрах реки и дрона другого источника. Решение: без дообучения не переносится: AP50 0.914 на отложенном FML против дрон Maharjan 2022 0.01, камера над каналом TUD-GV 0.406, камера над рекой The Ocean Cleanup 0.001.</a:t>
             </a:r>
           </a:p>
         </p:txBody>
@@ -2818,7 +2819,7 @@
           <a:lstStyle/>
           <a:p>
             <a:r>
-              <a:t>Внутренняя проверка глазами «жюри-человека» меняет подписи и статусы. Гипотеза: интерфейс и дека понятны без объяснений. Как проверили: независимый проверяющий внутри команды листает сервис и деку по чек-листу ТЗ и записывает, что понял неверно. Решение: подписи «оценка детектора», «пластик не подтверждён», статусы по постановке, «количество не определено».</a:t>
+              <a:t>Материал на фото — только с матрицей ошибок. Гипотеза: модель различает материалы предметов на фото. Как проверили: матрица ошибок по классам материала на отложенном источнике. Решение: число по классам — только при разметке и матрице ошибок; иначе «состав не определён».</a:t>
             </a:r>
           </a:p>
         </p:txBody>
@@ -2964,7 +2965,7 @@
           <a:lstStyle/>
           <a:p>
             <a:r>
-              <a:t>Сколько гипотез мы проверили. Гипотеза: итог — это отбор из многих проверенных идей, а не первая удачная. Как проверили: подсчёт по журналу и конвейеру: гипотезы, эксперименты, решения. Решение: каждое решение записано до сравнения.</a:t>
+              <a:t>Внутренняя проверка глазами «жюри-человека» меняет подписи и статусы. Гипотеза: интерфейс и дека понятны без объяснений. Как проверили: независимый проверяющий внутри команды листает сервис и деку по чек-листу ТЗ и записывает, что понял неверно. Решение: подписи «оценка детектора», «пластик не подтверждён», статусы по постановке, «количество не определено».</a:t>
             </a:r>
           </a:p>
         </p:txBody>
@@ -3034,6 +3035,76 @@
           <a:lstStyle/>
           <a:p>
             <a:r>
+              <a:t>Сколько гипотез мы проверили. Гипотеза: итог — это отбор из многих проверенных идей, а не первая удачная. Как проверили: подсчёт по журналу и конвейеру: гипотезы, эксперименты, решения. Решение: каждое решение записано до сравнения.</a:t>
+            </a:r>
+          </a:p>
+        </p:txBody>
+      </p:sp>
+      <p:sp>
+        <p:nvSpPr>
+          <p:cNvPr id="4" name="Slide Number Placeholder 3"/>
+          <p:cNvSpPr>
+            <a:spLocks noGrp="1"/>
+          </p:cNvSpPr>
+          <p:nvPr>
+            <p:ph type="sldNum" idx="5" sz="quarter"/>
+          </p:nvPr>
+        </p:nvSpPr>
+        <p:spPr/>
+      </p:sp>
+    </p:spTree>
+  </p:cSld>
+  <p:clrMapOvr>
+    <a:masterClrMapping/>
+  </p:clrMapOvr>
+</p:notes>
+</file>
+
+<file path=ppt/notesSlides/notesSlide42.xml><?xml version="1.0" encoding="utf-8"?>
+<p:notes xmlns:a="http://schemas.openxmlformats.org/drawingml/2006/main" xmlns:p="http://schemas.openxmlformats.org/presentationml/2006/main" xmlns:r="http://schemas.openxmlformats.org/officeDocument/2006/relationships">
+  <p:cSld>
+    <p:spTree>
+      <p:nvGrpSpPr>
+        <p:cNvPr id="1" name=""/>
+        <p:cNvGrpSpPr/>
+        <p:nvPr/>
+      </p:nvGrpSpPr>
+      <p:grpSpPr>
+        <a:xfrm>
+          <a:off x="0" y="0"/>
+          <a:ext cx="0" cy="0"/>
+          <a:chOff x="0" y="0"/>
+          <a:chExt cx="0" cy="0"/>
+        </a:xfrm>
+      </p:grpSpPr>
+      <p:sp>
+        <p:nvSpPr>
+          <p:cNvPr id="2" name="Slide Image Placeholder 1"/>
+          <p:cNvSpPr>
+            <a:spLocks noGrp="1"/>
+          </p:cNvSpPr>
+          <p:nvPr>
+            <p:ph type="sldImg" idx="2"/>
+          </p:nvPr>
+        </p:nvSpPr>
+        <p:spPr/>
+      </p:sp>
+      <p:sp>
+        <p:nvSpPr>
+          <p:cNvPr id="3" name="Notes Placeholder 2"/>
+          <p:cNvSpPr>
+            <a:spLocks noGrp="1"/>
+          </p:cNvSpPr>
+          <p:nvPr>
+            <p:ph type="body" idx="3" sz="quarter"/>
+          </p:nvPr>
+        </p:nvSpPr>
+        <p:spPr/>
+        <p:txBody>
+          <a:bodyPr/>
+          <a:lstStyle/>
+          <a:p>
+            <a:r>
               <a:t>Что нужно для настоящих пар «снимок → штуки». Гипотеза: связка возможна, если считать предметы там, где их видит спутник. Как проверили: по итогам всех проверок: какие данные закрывают разрыв. Решение: запросы авторам полевых данных, VHR в день наблюдений, дроны над нитями, которые видит Sentinel-2.</a:t>
             </a:r>
           </a:p>
@@ -3408,13 +3479,13 @@
           <a:lstStyle/>
           <a:p>
             <a:r>
-              <a:t>Мы проверили связку снимок → штуки на всех найденных парах — посчитанные предметы спутнику не видны. Из 21 444 отрезков ADIS 66 совпали со снимком по месту и времени; в 6 с предметами детектор не сработал. На паре ISPRA посчитанные предметы лежат не рядом с пикселями детектора. Одиночные предметы спутнику не видны, а плотные нити никто не считал поштучно — поэтому штуки по снимку в сервисе только исследовательский сценарий.</a:t>
+              <a:t>На детальном фото модель считает предметы с ошибкой 0.59 шт. на кадр и определяет материал. Это фото с воды или дрона, где предмет виден целиком. На отложенных сессиях FML ошибка 0.59 предмета на кадр, у бейзлайна 2.86; на аэрофото Winans мы лучше открытого DebrisScan.</a:t>
             </a:r>
           </a:p>
           <a:p/>
           <a:p>
             <a:r>
-              <a:t>[3:08–3:40]</a:t>
+              <a:t>[3:08–3:28]</a:t>
             </a:r>
           </a:p>
         </p:txBody>
@@ -6629,7 +6700,7 @@
                 </a:solidFill>
                 <a:latin typeface="Segoe UI"/>
               </a:rPr>
-              <a:t>На детальном фото модель считает предметы с ошибкой 0.59 шт. на кадр и определяет материал</a:t>
+              <a:t>Эколог за пять шагов видит, что найдено, где, когда и насколько этому верить</a:t>
             </a:r>
           </a:p>
         </p:txBody>
@@ -6668,7 +6739,7 @@
                 </a:solidFill>
                 <a:latin typeface="Segoe UI"/>
               </a:rPr>
-              <a:t>0.59</a:t>
+              <a:t>4</a:t>
             </a:r>
           </a:p>
         </p:txBody>
@@ -6707,7 +6778,7 @@
                 </a:solidFill>
                 <a:latin typeface="Segoe UI"/>
               </a:rPr>
-              <a:t>шт./кадр — ошибка на FML (медиана-бейзлайн 2.86)</a:t>
+              <a:t>статуса зоны по постановке</a:t>
             </a:r>
           </a:p>
         </p:txBody>
@@ -6721,32 +6792,32 @@
         <p:spPr>
           <a:xfrm>
             <a:off x="649224" y="3520439"/>
-            <a:ext cx="4206240" cy="952500"/>
-          </a:xfrm>
-          <a:prstGeom prst="rect">
-            <a:avLst/>
-          </a:prstGeom>
-          <a:noFill/>
-        </p:spPr>
-        <p:txBody>
-          <a:bodyPr wrap="square" anchor="t" lIns="18288" rIns="18288" tIns="18288" bIns="18288">
-            <a:spAutoFit/>
-          </a:bodyPr>
-          <a:lstStyle/>
-          <a:p>
-            <a:pPr algn="l">
-              <a:spcAft>
-                <a:spcPts val="400"/>
-              </a:spcAft>
-            </a:pPr>
-            <a:r>
-              <a:rPr sz="6000" b="1">
+            <a:ext cx="4206240" cy="571500"/>
+          </a:xfrm>
+          <a:prstGeom prst="rect">
+            <a:avLst/>
+          </a:prstGeom>
+          <a:noFill/>
+        </p:spPr>
+        <p:txBody>
+          <a:bodyPr wrap="square" anchor="t" lIns="18288" rIns="18288" tIns="18288" bIns="18288">
+            <a:spAutoFit/>
+          </a:bodyPr>
+          <a:lstStyle/>
+          <a:p>
+            <a:pPr algn="l">
+              <a:spcAft>
+                <a:spcPts val="400"/>
+              </a:spcAft>
+            </a:pPr>
+            <a:r>
+              <a:rPr sz="3600" b="1">
                 <a:solidFill>
                   <a:srgbClr val="C1400B"/>
                 </a:solidFill>
                 <a:latin typeface="Segoe UI"/>
               </a:rPr>
-              <a:t>1.85</a:t>
+              <a:t>GeoJSON · CSV</a:t>
             </a:r>
           </a:p>
         </p:txBody>
@@ -6759,7 +6830,7 @@
         </p:nvSpPr>
         <p:spPr>
           <a:xfrm>
-            <a:off x="676656" y="4511040"/>
+            <a:off x="676656" y="4114800"/>
             <a:ext cx="4206240" cy="822960"/>
           </a:xfrm>
           <a:prstGeom prst="rect">
@@ -6785,14 +6856,14 @@
                 </a:solidFill>
                 <a:latin typeface="Segoe UI"/>
               </a:rPr>
-              <a:t>шт. на 164 м² кадра берега — Winans; DebrisScan 2.29</a:t>
+              <a:t>выгрузка того, что отфильтровано</a:t>
             </a:r>
           </a:p>
         </p:txBody>
       </p:sp>
       <p:pic>
         <p:nvPicPr>
-          <p:cNvPr id="7" name="Picture 6" descr="photo.jpg"/>
+          <p:cNvPr id="7" name="Picture 6" descr="card.jpg"/>
           <p:cNvPicPr>
             <a:picLocks noChangeAspect="1"/>
           </p:cNvPicPr>
@@ -6853,7 +6924,7 @@
                 </a:solidFill>
                 <a:latin typeface="Segoe UI"/>
               </a:rPr>
-              <a:t>FML: 1 190 кадров, разбиение по сессиям съёмки; AP50 0.914</a:t>
+              <a:t>«Демо ▶»: Район и даты → Снимок → Зона → Качество и статус → Выгрузка</a:t>
             </a:r>
           </a:p>
           <a:p>
@@ -6869,7 +6940,7 @@
                 </a:solidFill>
                 <a:latin typeface="Segoe UI"/>
               </a:rPr>
-              <a:t>Фото с воды или дрона, не спутник; шт./км² — только где известна площадь кадра</a:t>
+              <a:t>Карточка: «Что это» · статус · подтверждение · «Количество предметов по этому снимку не определено»</a:t>
             </a:r>
           </a:p>
         </p:txBody>
@@ -6967,13 +7038,13 @@
               </a:spcAft>
             </a:pPr>
             <a:r>
-              <a:rPr sz="2800" b="1">
+              <a:rPr sz="2500" b="1">
                 <a:solidFill>
                   <a:srgbClr val="1E2836"/>
                 </a:solidFill>
                 <a:latin typeface="Segoe UI"/>
               </a:rPr>
-              <a:t>Эколог за пять шагов видит, что найдено, где, когда и насколько этому верить</a:t>
+              <a:t>Что ещё умеет карта: наша модель на новых снимках, дроны, дрейф и PRIME — у каждого слоя подписан источник</a:t>
             </a:r>
           </a:p>
         </p:txBody>
@@ -6986,33 +7057,33 @@
         </p:nvSpPr>
         <p:spPr>
           <a:xfrm>
-            <a:off x="649224" y="1737360"/>
-            <a:ext cx="4206240" cy="952500"/>
-          </a:xfrm>
-          <a:prstGeom prst="rect">
-            <a:avLst/>
-          </a:prstGeom>
-          <a:noFill/>
-        </p:spPr>
-        <p:txBody>
-          <a:bodyPr wrap="square" anchor="t" lIns="18288" rIns="18288" tIns="18288" bIns="18288">
-            <a:spAutoFit/>
-          </a:bodyPr>
-          <a:lstStyle/>
-          <a:p>
-            <a:pPr algn="l">
-              <a:spcAft>
-                <a:spcPts val="400"/>
-              </a:spcAft>
-            </a:pPr>
-            <a:r>
-              <a:rPr sz="6000" b="1">
+            <a:off x="649224" y="1627632"/>
+            <a:ext cx="2569464" cy="329184"/>
+          </a:xfrm>
+          <a:prstGeom prst="rect">
+            <a:avLst/>
+          </a:prstGeom>
+          <a:noFill/>
+        </p:spPr>
+        <p:txBody>
+          <a:bodyPr wrap="square" anchor="t" lIns="18288" rIns="18288" tIns="18288" bIns="18288">
+            <a:spAutoFit/>
+          </a:bodyPr>
+          <a:lstStyle/>
+          <a:p>
+            <a:pPr algn="l">
+              <a:spcAft>
+                <a:spcPts val="400"/>
+              </a:spcAft>
+            </a:pPr>
+            <a:r>
+              <a:rPr sz="1700" b="1">
                 <a:solidFill>
                   <a:srgbClr val="C1400B"/>
                 </a:solidFill>
                 <a:latin typeface="Segoe UI"/>
               </a:rPr>
-              <a:t>4</a:t>
+              <a:t>Реальное время</a:t>
             </a:r>
           </a:p>
         </p:txBody>
@@ -7025,118 +7096,40 @@
         </p:nvSpPr>
         <p:spPr>
           <a:xfrm>
-            <a:off x="676656" y="2727960"/>
-            <a:ext cx="4206240" cy="822960"/>
-          </a:xfrm>
-          <a:prstGeom prst="rect">
-            <a:avLst/>
-          </a:prstGeom>
-          <a:noFill/>
-        </p:spPr>
-        <p:txBody>
-          <a:bodyPr wrap="square" anchor="t" lIns="18288" rIns="18288" tIns="18288" bIns="18288">
-            <a:spAutoFit/>
-          </a:bodyPr>
-          <a:lstStyle/>
-          <a:p>
-            <a:pPr algn="l">
-              <a:spcAft>
-                <a:spcPts val="400"/>
-              </a:spcAft>
-            </a:pPr>
-            <a:r>
-              <a:rPr sz="1500" b="0">
+            <a:off x="649224" y="1956816"/>
+            <a:ext cx="2569464" cy="274320"/>
+          </a:xfrm>
+          <a:prstGeom prst="rect">
+            <a:avLst/>
+          </a:prstGeom>
+          <a:noFill/>
+        </p:spPr>
+        <p:txBody>
+          <a:bodyPr wrap="square" anchor="t" lIns="18288" rIns="18288" tIns="18288" bIns="18288">
+            <a:spAutoFit/>
+          </a:bodyPr>
+          <a:lstStyle/>
+          <a:p>
+            <a:pPr algn="l">
+              <a:spcAft>
+                <a:spcPts val="400"/>
+              </a:spcAft>
+            </a:pPr>
+            <a:r>
+              <a:rPr sz="1100" b="1">
                 <a:solidFill>
                   <a:srgbClr val="4A5462"/>
                 </a:solidFill>
                 <a:latin typeface="Segoe UI"/>
               </a:rPr>
-              <a:t>статуса зоны по постановке</a:t>
-            </a:r>
-          </a:p>
-        </p:txBody>
-      </p:sp>
-      <p:sp>
-        <p:nvSpPr>
-          <p:cNvPr id="5" name="TextBox 4"/>
-          <p:cNvSpPr txBox="1"/>
-          <p:nvPr/>
-        </p:nvSpPr>
-        <p:spPr>
-          <a:xfrm>
-            <a:off x="649224" y="3520439"/>
-            <a:ext cx="4206240" cy="571500"/>
-          </a:xfrm>
-          <a:prstGeom prst="rect">
-            <a:avLst/>
-          </a:prstGeom>
-          <a:noFill/>
-        </p:spPr>
-        <p:txBody>
-          <a:bodyPr wrap="square" anchor="t" lIns="18288" rIns="18288" tIns="18288" bIns="18288">
-            <a:spAutoFit/>
-          </a:bodyPr>
-          <a:lstStyle/>
-          <a:p>
-            <a:pPr algn="l">
-              <a:spcAft>
-                <a:spcPts val="400"/>
-              </a:spcAft>
-            </a:pPr>
-            <a:r>
-              <a:rPr sz="3600" b="1">
-                <a:solidFill>
-                  <a:srgbClr val="C1400B"/>
-                </a:solidFill>
-                <a:latin typeface="Segoe UI"/>
-              </a:rPr>
-              <a:t>GeoJSON · CSV</a:t>
-            </a:r>
-          </a:p>
-        </p:txBody>
-      </p:sp>
-      <p:sp>
-        <p:nvSpPr>
-          <p:cNvPr id="6" name="TextBox 5"/>
-          <p:cNvSpPr txBox="1"/>
-          <p:nvPr/>
-        </p:nvSpPr>
-        <p:spPr>
-          <a:xfrm>
-            <a:off x="676656" y="4114800"/>
-            <a:ext cx="4206240" cy="822960"/>
-          </a:xfrm>
-          <a:prstGeom prst="rect">
-            <a:avLst/>
-          </a:prstGeom>
-          <a:noFill/>
-        </p:spPr>
-        <p:txBody>
-          <a:bodyPr wrap="square" anchor="t" lIns="18288" rIns="18288" tIns="18288" bIns="18288">
-            <a:spAutoFit/>
-          </a:bodyPr>
-          <a:lstStyle/>
-          <a:p>
-            <a:pPr algn="l">
-              <a:spcAft>
-                <a:spcPts val="400"/>
-              </a:spcAft>
-            </a:pPr>
-            <a:r>
-              <a:rPr sz="1500" b="0">
-                <a:solidFill>
-                  <a:srgbClr val="4A5462"/>
-                </a:solidFill>
-                <a:latin typeface="Segoe UI"/>
-              </a:rPr>
-              <a:t>выгрузка того, что отфильтровано</a:t>
+              <a:t>наша модель, автоматически</a:t>
             </a:r>
           </a:p>
         </p:txBody>
       </p:sp>
       <p:pic>
         <p:nvPicPr>
-          <p:cNvPr id="7" name="Picture 6" descr="card.jpg"/>
+          <p:cNvPr id="5" name="Picture 4" descr="s54_realtime.jpg"/>
           <p:cNvPicPr>
             <a:picLocks noChangeAspect="1"/>
           </p:cNvPicPr>
@@ -7150,8 +7143,8 @@
         </p:blipFill>
         <p:spPr>
           <a:xfrm>
-            <a:off x="5120640" y="2041133"/>
-            <a:ext cx="6400800" cy="3598692"/>
+            <a:off x="763524" y="2286000"/>
+            <a:ext cx="2340864" cy="1463040"/>
           </a:xfrm>
           <a:prstGeom prst="rect">
             <a:avLst/>
@@ -7165,62 +7158,566 @@
       </p:pic>
       <p:sp>
         <p:nvSpPr>
+          <p:cNvPr id="6" name="TextBox 5"/>
+          <p:cNvSpPr txBox="1"/>
+          <p:nvPr/>
+        </p:nvSpPr>
+        <p:spPr>
+          <a:xfrm>
+            <a:off x="649224" y="3840480"/>
+            <a:ext cx="2569464" cy="1463039"/>
+          </a:xfrm>
+          <a:prstGeom prst="rect">
+            <a:avLst/>
+          </a:prstGeom>
+          <a:noFill/>
+        </p:spPr>
+        <p:txBody>
+          <a:bodyPr wrap="square" anchor="t" lIns="18288" rIns="18288" tIns="18288" bIns="18288">
+            <a:spAutoFit/>
+          </a:bodyPr>
+          <a:lstStyle/>
+          <a:p>
+            <a:pPr algn="l">
+              <a:spcAft>
+                <a:spcPts val="300"/>
+              </a:spcAft>
+            </a:pPr>
+            <a:r>
+              <a:rPr sz="1200" b="0">
+                <a:solidFill>
+                  <a:srgbClr val="1E2836"/>
+                </a:solidFill>
+                <a:latin typeface="Segoe UI"/>
+              </a:rPr>
+              <a:t>За 180 дней обработано моделью 202 из 1077 найденных снимков, с находками 10. Те же фильтры; не проверено человеком. NASA 250–375 м — только контекст, модель на нём не запускаем.</a:t>
+            </a:r>
+          </a:p>
+        </p:txBody>
+      </p:sp>
+      <p:sp>
+        <p:nvSpPr>
+          <p:cNvPr id="7" name="TextBox 6"/>
+          <p:cNvSpPr txBox="1"/>
+          <p:nvPr/>
+        </p:nvSpPr>
+        <p:spPr>
+          <a:xfrm>
+            <a:off x="3419856" y="1627632"/>
+            <a:ext cx="2569464" cy="329184"/>
+          </a:xfrm>
+          <a:prstGeom prst="rect">
+            <a:avLst/>
+          </a:prstGeom>
+          <a:noFill/>
+        </p:spPr>
+        <p:txBody>
+          <a:bodyPr wrap="square" anchor="t" lIns="18288" rIns="18288" tIns="18288" bIns="18288">
+            <a:spAutoFit/>
+          </a:bodyPr>
+          <a:lstStyle/>
+          <a:p>
+            <a:pPr algn="l">
+              <a:spcAft>
+                <a:spcPts val="400"/>
+              </a:spcAft>
+            </a:pPr>
+            <a:r>
+              <a:rPr sz="1700" b="1">
+                <a:solidFill>
+                  <a:srgbClr val="C1400B"/>
+                </a:solidFill>
+                <a:latin typeface="Segoe UI"/>
+              </a:rPr>
+              <a:t>Дроны</a:t>
+            </a:r>
+          </a:p>
+        </p:txBody>
+      </p:sp>
+      <p:sp>
+        <p:nvSpPr>
           <p:cNvPr id="8" name="TextBox 7"/>
           <p:cNvSpPr txBox="1"/>
           <p:nvPr/>
         </p:nvSpPr>
         <p:spPr>
           <a:xfrm>
-            <a:off x="5120640" y="5897880"/>
-            <a:ext cx="5394960" cy="731520"/>
-          </a:xfrm>
-          <a:prstGeom prst="rect">
-            <a:avLst/>
-          </a:prstGeom>
-          <a:noFill/>
-        </p:spPr>
-        <p:txBody>
-          <a:bodyPr wrap="square" anchor="t" lIns="18288" rIns="18288" tIns="18288" bIns="18288">
-            <a:spAutoFit/>
-          </a:bodyPr>
-          <a:lstStyle/>
-          <a:p>
-            <a:pPr algn="l">
-              <a:spcAft>
-                <a:spcPts val="200"/>
+            <a:off x="3419856" y="1956816"/>
+            <a:ext cx="2569464" cy="274320"/>
+          </a:xfrm>
+          <a:prstGeom prst="rect">
+            <a:avLst/>
+          </a:prstGeom>
+          <a:noFill/>
+        </p:spPr>
+        <p:txBody>
+          <a:bodyPr wrap="square" anchor="t" lIns="18288" rIns="18288" tIns="18288" bIns="18288">
+            <a:spAutoFit/>
+          </a:bodyPr>
+          <a:lstStyle/>
+          <a:p>
+            <a:pPr algn="l">
+              <a:spcAft>
+                <a:spcPts val="400"/>
+              </a:spcAft>
+            </a:pPr>
+            <a:r>
+              <a:rPr sz="1100" b="1">
+                <a:solidFill>
+                  <a:srgbClr val="4A5462"/>
+                </a:solidFill>
+                <a:latin typeface="Segoe UI"/>
+              </a:rPr>
+              <a:t>дрон, не спутник</a:t>
+            </a:r>
+          </a:p>
+        </p:txBody>
+      </p:sp>
+      <p:pic>
+        <p:nvPicPr>
+          <p:cNvPr id="9" name="Picture 8" descr="s54_drones.jpg"/>
+          <p:cNvPicPr>
+            <a:picLocks noChangeAspect="1"/>
+          </p:cNvPicPr>
+          <p:nvPr/>
+        </p:nvPicPr>
+        <p:blipFill>
+          <a:blip r:embed="rId3"/>
+          <a:stretch>
+            <a:fillRect/>
+          </a:stretch>
+        </p:blipFill>
+        <p:spPr>
+          <a:xfrm>
+            <a:off x="3534156" y="2286000"/>
+            <a:ext cx="2340864" cy="1463040"/>
+          </a:xfrm>
+          <a:prstGeom prst="rect">
+            <a:avLst/>
+          </a:prstGeom>
+          <a:ln w="9525">
+            <a:solidFill>
+              <a:srgbClr val="DDDFE3"/>
+            </a:solidFill>
+          </a:ln>
+        </p:spPr>
+      </p:pic>
+      <p:sp>
+        <p:nvSpPr>
+          <p:cNvPr id="10" name="TextBox 9"/>
+          <p:cNvSpPr txBox="1"/>
+          <p:nvPr/>
+        </p:nvSpPr>
+        <p:spPr>
+          <a:xfrm>
+            <a:off x="3419856" y="3840480"/>
+            <a:ext cx="2569464" cy="1463039"/>
+          </a:xfrm>
+          <a:prstGeom prst="rect">
+            <a:avLst/>
+          </a:prstGeom>
+          <a:noFill/>
+        </p:spPr>
+        <p:txBody>
+          <a:bodyPr wrap="square" anchor="t" lIns="18288" rIns="18288" tIns="18288" bIns="18288">
+            <a:spAutoFit/>
+          </a:bodyPr>
+          <a:lstStyle/>
+          <a:p>
+            <a:pPr algn="l">
+              <a:spcAft>
+                <a:spcPts val="300"/>
               </a:spcAft>
             </a:pPr>
             <a:r>
               <a:rPr sz="1200" b="0">
                 <a:solidFill>
+                  <a:srgbClr val="1E2836"/>
+                </a:solidFill>
+                <a:latin typeface="Segoe UI"/>
+              </a:rPr>
+              <a:t>Детальные кадры открытых наборов — 6 наборов, 81 кадр (4 — дрон, остальные — самолёт и судно): рамки и классы авторов. Шт./м² — только при известной площади кадра. Наш счётчик: 274 из 444 размеченных, ложных 257 — вне обучения ошибается.</a:t>
+            </a:r>
+          </a:p>
+        </p:txBody>
+      </p:sp>
+      <p:sp>
+        <p:nvSpPr>
+          <p:cNvPr id="11" name="TextBox 10"/>
+          <p:cNvSpPr txBox="1"/>
+          <p:nvPr/>
+        </p:nvSpPr>
+        <p:spPr>
+          <a:xfrm>
+            <a:off x="6190488" y="1627632"/>
+            <a:ext cx="2569464" cy="329184"/>
+          </a:xfrm>
+          <a:prstGeom prst="rect">
+            <a:avLst/>
+          </a:prstGeom>
+          <a:noFill/>
+        </p:spPr>
+        <p:txBody>
+          <a:bodyPr wrap="square" anchor="t" lIns="18288" rIns="18288" tIns="18288" bIns="18288">
+            <a:spAutoFit/>
+          </a:bodyPr>
+          <a:lstStyle/>
+          <a:p>
+            <a:pPr algn="l">
+              <a:spcAft>
+                <a:spcPts val="400"/>
+              </a:spcAft>
+            </a:pPr>
+            <a:r>
+              <a:rPr sz="1700" b="1">
+                <a:solidFill>
+                  <a:srgbClr val="C1400B"/>
+                </a:solidFill>
+                <a:latin typeface="Segoe UI"/>
+              </a:rPr>
+              <a:t>Дрейф ▶</a:t>
+            </a:r>
+          </a:p>
+        </p:txBody>
+      </p:sp>
+      <p:sp>
+        <p:nvSpPr>
+          <p:cNvPr id="12" name="TextBox 11"/>
+          <p:cNvSpPr txBox="1"/>
+          <p:nvPr/>
+        </p:nvSpPr>
+        <p:spPr>
+          <a:xfrm>
+            <a:off x="6190488" y="1956816"/>
+            <a:ext cx="2569464" cy="274320"/>
+          </a:xfrm>
+          <a:prstGeom prst="rect">
+            <a:avLst/>
+          </a:prstGeom>
+          <a:noFill/>
+        </p:spPr>
+        <p:txBody>
+          <a:bodyPr wrap="square" anchor="t" lIns="18288" rIns="18288" tIns="18288" bIns="18288">
+            <a:spAutoFit/>
+          </a:bodyPr>
+          <a:lstStyle/>
+          <a:p>
+            <a:pPr algn="l">
+              <a:spcAft>
+                <a:spcPts val="400"/>
+              </a:spcAft>
+            </a:pPr>
+            <a:r>
+              <a:rPr sz="1100" b="1">
+                <a:solidFill>
                   <a:srgbClr val="4A5462"/>
                 </a:solidFill>
                 <a:latin typeface="Segoe UI"/>
               </a:rPr>
-              <a:t>«Демо ▶»: Район и даты → Снимок → Зона → Качество и статус → Выгрузка</a:t>
-            </a:r>
-          </a:p>
-          <a:p>
-            <a:pPr algn="l">
-              <a:spcAft>
-                <a:spcPts val="200"/>
+              <a:t>HYCOM + GFS на дату сцены</a:t>
+            </a:r>
+          </a:p>
+        </p:txBody>
+      </p:sp>
+      <p:pic>
+        <p:nvPicPr>
+          <p:cNvPr id="13" name="Picture 12" descr="s54_drift_map.jpg"/>
+          <p:cNvPicPr>
+            <a:picLocks noChangeAspect="1"/>
+          </p:cNvPicPr>
+          <p:nvPr/>
+        </p:nvPicPr>
+        <p:blipFill>
+          <a:blip r:embed="rId4"/>
+          <a:stretch>
+            <a:fillRect/>
+          </a:stretch>
+        </p:blipFill>
+        <p:spPr>
+          <a:xfrm>
+            <a:off x="6304788" y="2286000"/>
+            <a:ext cx="2340864" cy="1463040"/>
+          </a:xfrm>
+          <a:prstGeom prst="rect">
+            <a:avLst/>
+          </a:prstGeom>
+          <a:ln w="9525">
+            <a:solidFill>
+              <a:srgbClr val="DDDFE3"/>
+            </a:solidFill>
+          </a:ln>
+        </p:spPr>
+      </p:pic>
+      <p:sp>
+        <p:nvSpPr>
+          <p:cNvPr id="14" name="TextBox 13"/>
+          <p:cNvSpPr txBox="1"/>
+          <p:nvPr/>
+        </p:nvSpPr>
+        <p:spPr>
+          <a:xfrm>
+            <a:off x="6190488" y="3840480"/>
+            <a:ext cx="2569464" cy="1463039"/>
+          </a:xfrm>
+          <a:prstGeom prst="rect">
+            <a:avLst/>
+          </a:prstGeom>
+          <a:noFill/>
+        </p:spPr>
+        <p:txBody>
+          <a:bodyPr wrap="square" anchor="t" lIns="18288" rIns="18288" tIns="18288" bIns="18288">
+            <a:spAutoFit/>
+          </a:bodyPr>
+          <a:lstStyle/>
+          <a:p>
+            <a:pPr algn="l">
+              <a:spcAft>
+                <a:spcPts val="300"/>
               </a:spcAft>
             </a:pPr>
             <a:r>
               <a:rPr sz="1200" b="0">
                 <a:solidFill>
+                  <a:srgbClr val="1E2836"/>
+                </a:solidFill>
+                <a:latin typeface="Segoe UI"/>
+              </a:rPr>
+              <a:t>Кнопка у находки на карте: до 72 ч, облако частиц с вероятностью. Расчёт есть у 33 из 77 находок, у остальных — «нет расчёта» с причиной. Прогноз модели, не наблюдение.</a:t>
+            </a:r>
+          </a:p>
+        </p:txBody>
+      </p:sp>
+      <p:sp>
+        <p:nvSpPr>
+          <p:cNvPr id="15" name="TextBox 14"/>
+          <p:cNvSpPr txBox="1"/>
+          <p:nvPr/>
+        </p:nvSpPr>
+        <p:spPr>
+          <a:xfrm>
+            <a:off x="8961120" y="1627632"/>
+            <a:ext cx="2569464" cy="329184"/>
+          </a:xfrm>
+          <a:prstGeom prst="rect">
+            <a:avLst/>
+          </a:prstGeom>
+          <a:noFill/>
+        </p:spPr>
+        <p:txBody>
+          <a:bodyPr wrap="square" anchor="t" lIns="18288" rIns="18288" tIns="18288" bIns="18288">
+            <a:spAutoFit/>
+          </a:bodyPr>
+          <a:lstStyle/>
+          <a:p>
+            <a:pPr algn="l">
+              <a:spcAft>
+                <a:spcPts val="400"/>
+              </a:spcAft>
+            </a:pPr>
+            <a:r>
+              <a:rPr sz="1700" b="1">
+                <a:solidFill>
+                  <a:srgbClr val="C1400B"/>
+                </a:solidFill>
+                <a:latin typeface="Segoe UI"/>
+              </a:rPr>
+              <a:t>PRIME MODE</a:t>
+            </a:r>
+          </a:p>
+        </p:txBody>
+      </p:sp>
+      <p:sp>
+        <p:nvSpPr>
+          <p:cNvPr id="16" name="TextBox 15"/>
+          <p:cNvSpPr txBox="1"/>
+          <p:nvPr/>
+        </p:nvSpPr>
+        <p:spPr>
+          <a:xfrm>
+            <a:off x="8961120" y="1956816"/>
+            <a:ext cx="2569464" cy="274320"/>
+          </a:xfrm>
+          <a:prstGeom prst="rect">
+            <a:avLst/>
+          </a:prstGeom>
+          <a:noFill/>
+        </p:spPr>
+        <p:txBody>
+          <a:bodyPr wrap="square" anchor="t" lIns="18288" rIns="18288" tIns="18288" bIns="18288">
+            <a:spAutoFit/>
+          </a:bodyPr>
+          <a:lstStyle/>
+          <a:p>
+            <a:pPr algn="l">
+              <a:spcAft>
+                <a:spcPts val="400"/>
+              </a:spcAft>
+            </a:pPr>
+            <a:r>
+              <a:rPr sz="1100" b="1">
+                <a:solidFill>
                   <a:srgbClr val="4A5462"/>
                 </a:solidFill>
                 <a:latin typeface="Segoe UI"/>
               </a:rPr>
-              <a:t>Карточка: «Что это» · статус · подтверждение · «Количество предметов по этому снимку не определено»</a:t>
-            </a:r>
-          </a:p>
-        </p:txBody>
-      </p:sp>
-      <p:sp>
-        <p:nvSpPr>
-          <p:cNvPr id="9" name="TextBox 8"/>
+              <a:t>демо-данные, не результат модели</a:t>
+            </a:r>
+          </a:p>
+        </p:txBody>
+      </p:sp>
+      <p:pic>
+        <p:nvPicPr>
+          <p:cNvPr id="17" name="Picture 16" descr="s54_prime.jpg"/>
+          <p:cNvPicPr>
+            <a:picLocks noChangeAspect="1"/>
+          </p:cNvPicPr>
+          <p:nvPr/>
+        </p:nvPicPr>
+        <p:blipFill>
+          <a:blip r:embed="rId5"/>
+          <a:stretch>
+            <a:fillRect/>
+          </a:stretch>
+        </p:blipFill>
+        <p:spPr>
+          <a:xfrm>
+            <a:off x="9075420" y="2286000"/>
+            <a:ext cx="2340864" cy="1463040"/>
+          </a:xfrm>
+          <a:prstGeom prst="rect">
+            <a:avLst/>
+          </a:prstGeom>
+          <a:ln w="9525">
+            <a:solidFill>
+              <a:srgbClr val="DDDFE3"/>
+            </a:solidFill>
+          </a:ln>
+        </p:spPr>
+      </p:pic>
+      <p:sp>
+        <p:nvSpPr>
+          <p:cNvPr id="18" name="TextBox 17"/>
+          <p:cNvSpPr txBox="1"/>
+          <p:nvPr/>
+        </p:nvSpPr>
+        <p:spPr>
+          <a:xfrm>
+            <a:off x="8961120" y="3840480"/>
+            <a:ext cx="2569464" cy="1463039"/>
+          </a:xfrm>
+          <a:prstGeom prst="rect">
+            <a:avLst/>
+          </a:prstGeom>
+          <a:noFill/>
+        </p:spPr>
+        <p:txBody>
+          <a:bodyPr wrap="square" anchor="t" lIns="18288" rIns="18288" tIns="18288" bIns="18288">
+            <a:spAutoFit/>
+          </a:bodyPr>
+          <a:lstStyle/>
+          <a:p>
+            <a:pPr algn="l">
+              <a:spcAft>
+                <a:spcPts val="300"/>
+              </a:spcAft>
+            </a:pPr>
+            <a:r>
+              <a:rPr sz="1200" b="0">
+                <a:solidFill>
+                  <a:srgbClr val="1E2836"/>
+                </a:solidFill>
+                <a:latin typeface="Segoe UI"/>
+              </a:rPr>
+              <a:t>Как сервис будет выглядеть на детальных снимках — по просьбе жюри. В точках событий CSV организаторов — демо-снимки из реальной воды и вырезок предметов с дронов, числа из строк CSV. Выключен — ни одного демо-объекта.</a:t>
+            </a:r>
+          </a:p>
+        </p:txBody>
+      </p:sp>
+      <p:sp>
+        <p:nvSpPr>
+          <p:cNvPr id="19" name="Rectangle 18"/>
+          <p:cNvSpPr/>
+          <p:nvPr/>
+        </p:nvSpPr>
+        <p:spPr>
+          <a:xfrm>
+            <a:off x="649224" y="5422392"/>
+            <a:ext cx="10881360" cy="19050"/>
+          </a:xfrm>
+          <a:prstGeom prst="rect">
+            <a:avLst/>
+          </a:prstGeom>
+          <a:solidFill>
+            <a:srgbClr val="A7ADB7"/>
+          </a:solidFill>
+          <a:ln>
+            <a:noFill/>
+          </a:ln>
+        </p:spPr>
+        <p:style>
+          <a:lnRef idx="1">
+            <a:schemeClr val="accent1"/>
+          </a:lnRef>
+          <a:fillRef idx="3">
+            <a:schemeClr val="accent1"/>
+          </a:fillRef>
+          <a:effectRef idx="2">
+            <a:schemeClr val="accent1"/>
+          </a:effectRef>
+          <a:fontRef idx="minor">
+            <a:schemeClr val="lt1"/>
+          </a:fontRef>
+        </p:style>
+        <p:txBody>
+          <a:bodyPr rtlCol="0" anchor="ctr"/>
+          <a:lstStyle/>
+          <a:p>
+            <a:pPr algn="ctr"/>
+          </a:p>
+        </p:txBody>
+      </p:sp>
+      <p:sp>
+        <p:nvSpPr>
+          <p:cNvPr id="20" name="TextBox 19"/>
+          <p:cNvSpPr txBox="1"/>
+          <p:nvPr/>
+        </p:nvSpPr>
+        <p:spPr>
+          <a:xfrm>
+            <a:off x="649224" y="5532120"/>
+            <a:ext cx="10881360" cy="548640"/>
+          </a:xfrm>
+          <a:prstGeom prst="rect">
+            <a:avLst/>
+          </a:prstGeom>
+          <a:noFill/>
+        </p:spPr>
+        <p:txBody>
+          <a:bodyPr wrap="square" anchor="t" lIns="18288" rIns="18288" tIns="18288" bIns="18288">
+            <a:spAutoFit/>
+          </a:bodyPr>
+          <a:lstStyle/>
+          <a:p>
+            <a:pPr algn="l">
+              <a:spcAft>
+                <a:spcPts val="400"/>
+              </a:spcAft>
+            </a:pPr>
+            <a:r>
+              <a:rPr sz="1800" b="1">
+                <a:solidFill>
+                  <a:srgbClr val="1E2836"/>
+                </a:solidFill>
+                <a:latin typeface="Segoe UI"/>
+              </a:rPr>
+              <a:t>Обзор ≠ обнаружение · дрон ≠ спутник · демо ≠ результат модели</a:t>
+            </a:r>
+          </a:p>
+        </p:txBody>
+      </p:sp>
+      <p:sp>
+        <p:nvSpPr>
+          <p:cNvPr id="21" name="TextBox 20"/>
           <p:cNvSpPr txBox="1"/>
           <p:nvPr/>
         </p:nvSpPr>
@@ -7757,13 +8254,13 @@
               </a:spcAft>
             </a:pPr>
             <a:r>
-              <a:rPr sz="3200" b="1">
+              <a:rPr sz="2800" b="1">
                 <a:solidFill>
                   <a:srgbClr val="1E2836"/>
                 </a:solidFill>
                 <a:latin typeface="Segoe UI"/>
               </a:rPr>
-              <a:t>Одна команда воспроизводит все числа из чистой копии</a:t>
+              <a:t>Мы проверили связку снимок → штуки на всех найденных парах — посчитанные предметы спутнику не видны</a:t>
             </a:r>
           </a:p>
         </p:txBody>
@@ -7776,33 +8273,33 @@
         </p:nvSpPr>
         <p:spPr>
           <a:xfrm>
-            <a:off x="649224" y="1783080"/>
-            <a:ext cx="5166360" cy="1047749"/>
-          </a:xfrm>
-          <a:prstGeom prst="rect">
-            <a:avLst/>
-          </a:prstGeom>
-          <a:noFill/>
-        </p:spPr>
-        <p:txBody>
-          <a:bodyPr wrap="square" anchor="t" lIns="18288" rIns="18288" tIns="18288" bIns="18288">
-            <a:spAutoFit/>
-          </a:bodyPr>
-          <a:lstStyle/>
-          <a:p>
-            <a:pPr algn="l">
-              <a:spcAft>
-                <a:spcPts val="400"/>
-              </a:spcAft>
-            </a:pPr>
-            <a:r>
-              <a:rPr sz="6600" b="1">
+            <a:off x="649224" y="1737360"/>
+            <a:ext cx="4206240" cy="952500"/>
+          </a:xfrm>
+          <a:prstGeom prst="rect">
+            <a:avLst/>
+          </a:prstGeom>
+          <a:noFill/>
+        </p:spPr>
+        <p:txBody>
+          <a:bodyPr wrap="square" anchor="t" lIns="18288" rIns="18288" tIns="18288" bIns="18288">
+            <a:spAutoFit/>
+          </a:bodyPr>
+          <a:lstStyle/>
+          <a:p>
+            <a:pPr algn="l">
+              <a:spcAft>
+                <a:spcPts val="400"/>
+              </a:spcAft>
+            </a:pPr>
+            <a:r>
+              <a:rPr sz="6000" b="1">
                 <a:solidFill>
                   <a:srgbClr val="C1400B"/>
                 </a:solidFill>
                 <a:latin typeface="Segoe UI"/>
               </a:rPr>
-              <a:t>7,5 мин</a:t>
+              <a:t>66</a:t>
             </a:r>
           </a:p>
         </p:txBody>
@@ -7815,33 +8312,33 @@
         </p:nvSpPr>
         <p:spPr>
           <a:xfrm>
-            <a:off x="676656" y="2872740"/>
-            <a:ext cx="5166360" cy="822960"/>
-          </a:xfrm>
-          <a:prstGeom prst="rect">
-            <a:avLst/>
-          </a:prstGeom>
-          <a:noFill/>
-        </p:spPr>
-        <p:txBody>
-          <a:bodyPr wrap="square" anchor="t" lIns="18288" rIns="18288" tIns="18288" bIns="18288">
-            <a:spAutoFit/>
-          </a:bodyPr>
-          <a:lstStyle/>
-          <a:p>
-            <a:pPr algn="l">
-              <a:spcAft>
-                <a:spcPts val="400"/>
-              </a:spcAft>
-            </a:pPr>
-            <a:r>
-              <a:rPr sz="1600" b="0">
+            <a:off x="676656" y="2727960"/>
+            <a:ext cx="4206240" cy="822960"/>
+          </a:xfrm>
+          <a:prstGeom prst="rect">
+            <a:avLst/>
+          </a:prstGeom>
+          <a:noFill/>
+        </p:spPr>
+        <p:txBody>
+          <a:bodyPr wrap="square" anchor="t" lIns="18288" rIns="18288" tIns="18288" bIns="18288">
+            <a:spAutoFit/>
+          </a:bodyPr>
+          <a:lstStyle/>
+          <a:p>
+            <a:pPr algn="l">
+              <a:spcAft>
+                <a:spcPts val="400"/>
+              </a:spcAft>
+            </a:pPr>
+            <a:r>
+              <a:rPr sz="1500" b="0">
                 <a:solidFill>
                   <a:srgbClr val="4A5462"/>
                 </a:solidFill>
                 <a:latin typeface="Segoe UI"/>
               </a:rPr>
-              <a:t>чистый клон → карта и числа</a:t>
+              <a:t>пар ADIS по месту и времени</a:t>
             </a:r>
           </a:p>
         </p:txBody>
@@ -7854,33 +8351,33 @@
         </p:nvSpPr>
         <p:spPr>
           <a:xfrm>
-            <a:off x="6089904" y="1783080"/>
-            <a:ext cx="5166360" cy="1143000"/>
-          </a:xfrm>
-          <a:prstGeom prst="rect">
-            <a:avLst/>
-          </a:prstGeom>
-          <a:noFill/>
-        </p:spPr>
-        <p:txBody>
-          <a:bodyPr wrap="square" anchor="t" lIns="18288" rIns="18288" tIns="18288" bIns="18288">
-            <a:spAutoFit/>
-          </a:bodyPr>
-          <a:lstStyle/>
-          <a:p>
-            <a:pPr algn="l">
-              <a:spcAft>
-                <a:spcPts val="400"/>
-              </a:spcAft>
-            </a:pPr>
-            <a:r>
-              <a:rPr sz="7200" b="1">
+            <a:off x="649224" y="3520439"/>
+            <a:ext cx="4206240" cy="952500"/>
+          </a:xfrm>
+          <a:prstGeom prst="rect">
+            <a:avLst/>
+          </a:prstGeom>
+          <a:noFill/>
+        </p:spPr>
+        <p:txBody>
+          <a:bodyPr wrap="square" anchor="t" lIns="18288" rIns="18288" tIns="18288" bIns="18288">
+            <a:spAutoFit/>
+          </a:bodyPr>
+          <a:lstStyle/>
+          <a:p>
+            <a:pPr algn="l">
+              <a:spcAft>
+                <a:spcPts val="400"/>
+              </a:spcAft>
+            </a:pPr>
+            <a:r>
+              <a:rPr sz="6000" b="1">
                 <a:solidFill>
                   <a:srgbClr val="C1400B"/>
                 </a:solidFill>
                 <a:latin typeface="Segoe UI"/>
               </a:rPr>
-              <a:t>255</a:t>
+              <a:t>0</a:t>
             </a:r>
           </a:p>
         </p:txBody>
@@ -7893,148 +8390,134 @@
         </p:nvSpPr>
         <p:spPr>
           <a:xfrm>
-            <a:off x="6117336" y="2971800"/>
-            <a:ext cx="5166360" cy="822960"/>
-          </a:xfrm>
-          <a:prstGeom prst="rect">
-            <a:avLst/>
-          </a:prstGeom>
-          <a:noFill/>
-        </p:spPr>
-        <p:txBody>
-          <a:bodyPr wrap="square" anchor="t" lIns="18288" rIns="18288" tIns="18288" bIns="18288">
-            <a:spAutoFit/>
-          </a:bodyPr>
-          <a:lstStyle/>
-          <a:p>
-            <a:pPr algn="l">
-              <a:spcAft>
-                <a:spcPts val="400"/>
-              </a:spcAft>
-            </a:pPr>
-            <a:r>
-              <a:rPr sz="1600" b="0">
+            <a:off x="676656" y="4511040"/>
+            <a:ext cx="4206240" cy="822960"/>
+          </a:xfrm>
+          <a:prstGeom prst="rect">
+            <a:avLst/>
+          </a:prstGeom>
+          <a:noFill/>
+        </p:spPr>
+        <p:txBody>
+          <a:bodyPr wrap="square" anchor="t" lIns="18288" rIns="18288" tIns="18288" bIns="18288">
+            <a:spAutoFit/>
+          </a:bodyPr>
+          <a:lstStyle/>
+          <a:p>
+            <a:pPr algn="l">
+              <a:spcAft>
+                <a:spcPts val="400"/>
+              </a:spcAft>
+            </a:pPr>
+            <a:r>
+              <a:rPr sz="1500" b="0">
                 <a:solidFill>
                   <a:srgbClr val="4A5462"/>
                 </a:solidFill>
                 <a:latin typeface="Segoe UI"/>
               </a:rPr>
-              <a:t>автотестов</a:t>
-            </a:r>
-          </a:p>
-        </p:txBody>
-      </p:sp>
-      <p:sp>
-        <p:nvSpPr>
-          <p:cNvPr id="7" name="TextBox 6"/>
-          <p:cNvSpPr txBox="1"/>
-          <p:nvPr/>
-        </p:nvSpPr>
-        <p:spPr>
-          <a:xfrm>
-            <a:off x="649224" y="3931920"/>
-            <a:ext cx="10881360" cy="1371600"/>
-          </a:xfrm>
-          <a:prstGeom prst="rect">
-            <a:avLst/>
-          </a:prstGeom>
-          <a:noFill/>
-        </p:spPr>
-        <p:txBody>
-          <a:bodyPr wrap="square" anchor="t" lIns="18288" rIns="18288" tIns="18288" bIns="18288">
-            <a:spAutoFit/>
-          </a:bodyPr>
-          <a:lstStyle/>
-          <a:p>
-            <a:pPr algn="l">
-              <a:spcAft>
-                <a:spcPts val="400"/>
-              </a:spcAft>
-            </a:pPr>
-            <a:r>
-              <a:rPr sz="1500" b="0">
+              <a:t>пар с видимым сигналом на снимке</a:t>
+            </a:r>
+          </a:p>
+        </p:txBody>
+      </p:sp>
+      <p:pic>
+        <p:nvPicPr>
+          <p:cNvPr id="7" name="Picture 6" descr="ispra_er604_20190916.png"/>
+          <p:cNvPicPr>
+            <a:picLocks noChangeAspect="1"/>
+          </p:cNvPicPr>
+          <p:nvPr/>
+        </p:nvPicPr>
+        <p:blipFill>
+          <a:blip r:embed="rId2"/>
+          <a:stretch>
+            <a:fillRect/>
+          </a:stretch>
+        </p:blipFill>
+        <p:spPr>
+          <a:xfrm>
+            <a:off x="5120640" y="1951061"/>
+            <a:ext cx="6400799" cy="3184477"/>
+          </a:xfrm>
+          <a:prstGeom prst="rect">
+            <a:avLst/>
+          </a:prstGeom>
+          <a:ln w="9525">
+            <a:solidFill>
+              <a:srgbClr val="DDDFE3"/>
+            </a:solidFill>
+          </a:ln>
+        </p:spPr>
+      </p:pic>
+      <p:sp>
+        <p:nvSpPr>
+          <p:cNvPr id="8" name="TextBox 7"/>
+          <p:cNvSpPr txBox="1"/>
+          <p:nvPr/>
+        </p:nvSpPr>
+        <p:spPr>
+          <a:xfrm>
+            <a:off x="5120640" y="5440680"/>
+            <a:ext cx="6400800" cy="822960"/>
+          </a:xfrm>
+          <a:prstGeom prst="rect">
+            <a:avLst/>
+          </a:prstGeom>
+          <a:noFill/>
+        </p:spPr>
+        <p:txBody>
+          <a:bodyPr wrap="square" anchor="t" lIns="18288" rIns="18288" tIns="18288" bIns="18288">
+            <a:spAutoFit/>
+          </a:bodyPr>
+          <a:lstStyle/>
+          <a:p>
+            <a:pPr algn="l">
+              <a:spcAft>
+                <a:spcPts val="200"/>
+              </a:spcAft>
+            </a:pPr>
+            <a:r>
+              <a:rPr sz="1200" b="0">
                 <a:solidFill>
                   <a:srgbClr val="4A5462"/>
                 </a:solidFill>
                 <a:latin typeface="Segoe UI"/>
               </a:rPr>
-              <a:t>Установка 3 мин 17 с, карта открывается за 8,1 с</a:t>
-            </a:r>
-          </a:p>
-          <a:p>
-            <a:pPr algn="l">
-              <a:spcAft>
-                <a:spcPts val="400"/>
-              </a:spcAft>
-            </a:pPr>
-            <a:r>
-              <a:rPr sz="1500" b="0">
+              <a:t>ADIS: 21 444 отрезков → 66 пар; в 6 с предметами детектор сработал в 0</a:t>
+            </a:r>
+          </a:p>
+          <a:p>
+            <a:pPr algn="l">
+              <a:spcAft>
+                <a:spcPts val="200"/>
+              </a:spcAft>
+            </a:pPr>
+            <a:r>
+              <a:rPr sz="1200" b="0">
                 <a:solidFill>
                   <a:srgbClr val="4A5462"/>
                 </a:solidFill>
                 <a:latin typeface="Segoe UI"/>
               </a:rPr>
-              <a:t>Веса моделей в репозитории; все числа — reports/final_numbers.json с источником и протоколом</a:t>
-            </a:r>
-          </a:p>
-          <a:p>
-            <a:pPr algn="l">
-              <a:spcAft>
-                <a:spcPts val="400"/>
-              </a:spcAft>
-            </a:pPr>
-            <a:r>
-              <a:rPr sz="1500" b="0">
+              <a:t>ISPRA: 167 трансект обработаны одним скриптом; на ER604 ни один предмет не ближе к пикселю детектора</a:t>
+            </a:r>
+          </a:p>
+          <a:p>
+            <a:pPr algn="l">
+              <a:spcAft>
+                <a:spcPts val="200"/>
+              </a:spcAft>
+            </a:pPr>
+            <a:r>
+              <a:rPr sz="1200" b="0">
                 <a:solidFill>
                   <a:srgbClr val="4A5462"/>
                 </a:solidFill>
                 <a:latin typeface="Segoe UI"/>
               </a:rPr>
-              <a:t>Правила принятия решений записаны до сравнения (детектор, поле, счётчик)</a:t>
-            </a:r>
-          </a:p>
-        </p:txBody>
-      </p:sp>
-      <p:sp>
-        <p:nvSpPr>
-          <p:cNvPr id="8" name="Rectangle 7"/>
-          <p:cNvSpPr/>
-          <p:nvPr/>
-        </p:nvSpPr>
-        <p:spPr>
-          <a:xfrm>
-            <a:off x="649224" y="5422392"/>
-            <a:ext cx="10881360" cy="19050"/>
-          </a:xfrm>
-          <a:prstGeom prst="rect">
-            <a:avLst/>
-          </a:prstGeom>
-          <a:solidFill>
-            <a:srgbClr val="A7ADB7"/>
-          </a:solidFill>
-          <a:ln>
-            <a:noFill/>
-          </a:ln>
-        </p:spPr>
-        <p:style>
-          <a:lnRef idx="1">
-            <a:schemeClr val="accent1"/>
-          </a:lnRef>
-          <a:fillRef idx="3">
-            <a:schemeClr val="accent1"/>
-          </a:fillRef>
-          <a:effectRef idx="2">
-            <a:schemeClr val="accent1"/>
-          </a:effectRef>
-          <a:fontRef idx="minor">
-            <a:schemeClr val="lt1"/>
-          </a:fontRef>
-        </p:style>
-        <p:txBody>
-          <a:bodyPr rtlCol="0" anchor="ctr"/>
-          <a:lstStyle/>
-          <a:p>
-            <a:pPr algn="ctr"/>
+              <a:t>Искусственные мишени: 19 дат со счётом — детектор видит пиксель только при большом покрытии</a:t>
+            </a:r>
           </a:p>
         </p:txBody>
       </p:sp>
@@ -8046,33 +8529,33 @@
         </p:nvSpPr>
         <p:spPr>
           <a:xfrm>
-            <a:off x="649224" y="5532120"/>
-            <a:ext cx="10881360" cy="548640"/>
-          </a:xfrm>
-          <a:prstGeom prst="rect">
-            <a:avLst/>
-          </a:prstGeom>
-          <a:noFill/>
-        </p:spPr>
-        <p:txBody>
-          <a:bodyPr wrap="square" anchor="t" lIns="18288" rIns="18288" tIns="18288" bIns="18288">
-            <a:spAutoFit/>
-          </a:bodyPr>
-          <a:lstStyle/>
-          <a:p>
-            <a:pPr algn="l">
-              <a:spcAft>
-                <a:spcPts val="400"/>
-              </a:spcAft>
-            </a:pPr>
-            <a:r>
-              <a:rPr sz="2000" b="1">
+            <a:off x="649224" y="5349240"/>
+            <a:ext cx="4297680" cy="914400"/>
+          </a:xfrm>
+          <a:prstGeom prst="rect">
+            <a:avLst/>
+          </a:prstGeom>
+          <a:noFill/>
+        </p:spPr>
+        <p:txBody>
+          <a:bodyPr wrap="square" anchor="t" lIns="18288" rIns="18288" tIns="18288" bIns="18288">
+            <a:spAutoFit/>
+          </a:bodyPr>
+          <a:lstStyle/>
+          <a:p>
+            <a:pPr algn="l">
+              <a:spcAft>
+                <a:spcPts val="400"/>
+              </a:spcAft>
+            </a:pPr>
+            <a:r>
+              <a:rPr sz="1500" b="1">
                 <a:solidFill>
                   <a:srgbClr val="1E2836"/>
                 </a:solidFill>
                 <a:latin typeface="Segoe UI"/>
               </a:rPr>
-              <a:t>Любое число в презентации можно проверить по файлу и команде</a:t>
+              <a:t>Число штук по снимку — только исследовательский сценарий, не измерение</a:t>
             </a:r>
           </a:p>
         </p:txBody>
@@ -8111,7 +8594,7 @@
                 </a:solidFill>
                 <a:latin typeface="Segoe UI"/>
               </a:rPr>
-              <a:t>14 / 41</a:t>
+              <a:t>14 / 42</a:t>
             </a:r>
           </a:p>
         </p:txBody>
@@ -8170,13 +8653,13 @@
               </a:spcAft>
             </a:pPr>
             <a:r>
-              <a:rPr sz="2800" b="1">
+              <a:rPr sz="3200" b="1">
                 <a:solidFill>
                   <a:srgbClr val="1E2836"/>
                 </a:solidFill>
                 <a:latin typeface="Segoe UI"/>
               </a:rPr>
-              <a:t>Из событий CSV организаторов синхронных пар «снимок → поле» — ноль</a:t>
+              <a:t>Одна команда воспроизводит все числа из чистой копии</a:t>
             </a:r>
           </a:p>
         </p:txBody>
@@ -8189,33 +8672,33 @@
         </p:nvSpPr>
         <p:spPr>
           <a:xfrm>
-            <a:off x="649224" y="1737360"/>
-            <a:ext cx="5120640" cy="857250"/>
-          </a:xfrm>
-          <a:prstGeom prst="rect">
-            <a:avLst/>
-          </a:prstGeom>
-          <a:noFill/>
-        </p:spPr>
-        <p:txBody>
-          <a:bodyPr wrap="square" anchor="t" lIns="18288" rIns="18288" tIns="18288" bIns="18288">
-            <a:spAutoFit/>
-          </a:bodyPr>
-          <a:lstStyle/>
-          <a:p>
-            <a:pPr algn="l">
-              <a:spcAft>
-                <a:spcPts val="400"/>
-              </a:spcAft>
-            </a:pPr>
-            <a:r>
-              <a:rPr sz="5400" b="1">
+            <a:off x="649224" y="1783080"/>
+            <a:ext cx="5166360" cy="1047749"/>
+          </a:xfrm>
+          <a:prstGeom prst="rect">
+            <a:avLst/>
+          </a:prstGeom>
+          <a:noFill/>
+        </p:spPr>
+        <p:txBody>
+          <a:bodyPr wrap="square" anchor="t" lIns="18288" rIns="18288" tIns="18288" bIns="18288">
+            <a:spAutoFit/>
+          </a:bodyPr>
+          <a:lstStyle/>
+          <a:p>
+            <a:pPr algn="l">
+              <a:spcAft>
+                <a:spcPts val="400"/>
+              </a:spcAft>
+            </a:pPr>
+            <a:r>
+              <a:rPr sz="6600" b="1">
                 <a:solidFill>
                   <a:srgbClr val="C1400B"/>
                 </a:solidFill>
                 <a:latin typeface="Segoe UI"/>
               </a:rPr>
-              <a:t>0</a:t>
+              <a:t>7,5 мин</a:t>
             </a:r>
           </a:p>
         </p:txBody>
@@ -8228,33 +8711,33 @@
         </p:nvSpPr>
         <p:spPr>
           <a:xfrm>
-            <a:off x="676656" y="2628900"/>
-            <a:ext cx="5120640" cy="822960"/>
-          </a:xfrm>
-          <a:prstGeom prst="rect">
-            <a:avLst/>
-          </a:prstGeom>
-          <a:noFill/>
-        </p:spPr>
-        <p:txBody>
-          <a:bodyPr wrap="square" anchor="t" lIns="18288" rIns="18288" tIns="18288" bIns="18288">
-            <a:spAutoFit/>
-          </a:bodyPr>
-          <a:lstStyle/>
-          <a:p>
-            <a:pPr algn="l">
-              <a:spcAft>
-                <a:spcPts val="400"/>
-              </a:spcAft>
-            </a:pPr>
-            <a:r>
-              <a:rPr sz="1400" b="0">
+            <a:off x="676656" y="2872740"/>
+            <a:ext cx="5166360" cy="822960"/>
+          </a:xfrm>
+          <a:prstGeom prst="rect">
+            <a:avLst/>
+          </a:prstGeom>
+          <a:noFill/>
+        </p:spPr>
+        <p:txBody>
+          <a:bodyPr wrap="square" anchor="t" lIns="18288" rIns="18288" tIns="18288" bIns="18288">
+            <a:spAutoFit/>
+          </a:bodyPr>
+          <a:lstStyle/>
+          <a:p>
+            <a:pPr algn="l">
+              <a:spcAft>
+                <a:spcPts val="400"/>
+              </a:spcAft>
+            </a:pPr>
+            <a:r>
+              <a:rPr sz="1600" b="0">
                 <a:solidFill>
                   <a:srgbClr val="4A5462"/>
                 </a:solidFill>
                 <a:latin typeface="Segoe UI"/>
               </a:rPr>
-              <a:t>синхронных из 318 событий</a:t>
+              <a:t>чистый клон → карта и числа</a:t>
             </a:r>
           </a:p>
         </p:txBody>
@@ -8267,33 +8750,33 @@
         </p:nvSpPr>
         <p:spPr>
           <a:xfrm>
-            <a:off x="649224" y="3246120"/>
-            <a:ext cx="5120640" cy="256032"/>
-          </a:xfrm>
-          <a:prstGeom prst="rect">
-            <a:avLst/>
-          </a:prstGeom>
-          <a:noFill/>
-        </p:spPr>
-        <p:txBody>
-          <a:bodyPr wrap="square" anchor="t" lIns="18288" rIns="18288" tIns="18288" bIns="18288">
-            <a:spAutoFit/>
-          </a:bodyPr>
-          <a:lstStyle/>
-          <a:p>
-            <a:pPr algn="l">
-              <a:spcAft>
-                <a:spcPts val="400"/>
-              </a:spcAft>
-            </a:pPr>
-            <a:r>
-              <a:rPr sz="1100" b="1">
+            <a:off x="6089904" y="1783080"/>
+            <a:ext cx="5166360" cy="1143000"/>
+          </a:xfrm>
+          <a:prstGeom prst="rect">
+            <a:avLst/>
+          </a:prstGeom>
+          <a:noFill/>
+        </p:spPr>
+        <p:txBody>
+          <a:bodyPr wrap="square" anchor="t" lIns="18288" rIns="18288" tIns="18288" bIns="18288">
+            <a:spAutoFit/>
+          </a:bodyPr>
+          <a:lstStyle/>
+          <a:p>
+            <a:pPr algn="l">
+              <a:spcAft>
+                <a:spcPts val="400"/>
+              </a:spcAft>
+            </a:pPr>
+            <a:r>
+              <a:rPr sz="7200" b="1">
                 <a:solidFill>
                   <a:srgbClr val="C1400B"/>
                 </a:solidFill>
                 <a:latin typeface="Segoe UI"/>
               </a:rPr>
-              <a:t>ГИПОТЕЗА</a:t>
+              <a:t>252</a:t>
             </a:r>
           </a:p>
         </p:txBody>
@@ -8306,150 +8789,186 @@
         </p:nvSpPr>
         <p:spPr>
           <a:xfrm>
-            <a:off x="649224" y="3493008"/>
-            <a:ext cx="5120640" cy="701040"/>
-          </a:xfrm>
-          <a:prstGeom prst="rect">
-            <a:avLst/>
-          </a:prstGeom>
-          <a:noFill/>
-        </p:spPr>
-        <p:txBody>
-          <a:bodyPr wrap="square" anchor="t" lIns="18288" rIns="18288" tIns="18288" bIns="18288">
-            <a:spAutoFit/>
-          </a:bodyPr>
-          <a:lstStyle/>
-          <a:p>
-            <a:pPr algn="l">
-              <a:spcAft>
-                <a:spcPts val="400"/>
-              </a:spcAft>
-            </a:pPr>
-            <a:r>
-              <a:rPr sz="1300" b="0">
+            <a:off x="6117336" y="2971800"/>
+            <a:ext cx="5166360" cy="822960"/>
+          </a:xfrm>
+          <a:prstGeom prst="rect">
+            <a:avLst/>
+          </a:prstGeom>
+          <a:noFill/>
+        </p:spPr>
+        <p:txBody>
+          <a:bodyPr wrap="square" anchor="t" lIns="18288" rIns="18288" tIns="18288" bIns="18288">
+            <a:spAutoFit/>
+          </a:bodyPr>
+          <a:lstStyle/>
+          <a:p>
+            <a:pPr algn="l">
+              <a:spcAft>
+                <a:spcPts val="400"/>
+              </a:spcAft>
+            </a:pPr>
+            <a:r>
+              <a:rPr sz="1600" b="0">
+                <a:solidFill>
+                  <a:srgbClr val="4A5462"/>
+                </a:solidFill>
+                <a:latin typeface="Segoe UI"/>
+              </a:rPr>
+              <a:t>автотестов</a:t>
+            </a:r>
+          </a:p>
+        </p:txBody>
+      </p:sp>
+      <p:sp>
+        <p:nvSpPr>
+          <p:cNvPr id="7" name="TextBox 6"/>
+          <p:cNvSpPr txBox="1"/>
+          <p:nvPr/>
+        </p:nvSpPr>
+        <p:spPr>
+          <a:xfrm>
+            <a:off x="649224" y="3931920"/>
+            <a:ext cx="10881360" cy="1371600"/>
+          </a:xfrm>
+          <a:prstGeom prst="rect">
+            <a:avLst/>
+          </a:prstGeom>
+          <a:noFill/>
+        </p:spPr>
+        <p:txBody>
+          <a:bodyPr wrap="square" anchor="t" lIns="18288" rIns="18288" tIns="18288" bIns="18288">
+            <a:spAutoFit/>
+          </a:bodyPr>
+          <a:lstStyle/>
+          <a:p>
+            <a:pPr algn="l">
+              <a:spcAft>
+                <a:spcPts val="400"/>
+              </a:spcAft>
+            </a:pPr>
+            <a:r>
+              <a:rPr sz="1500" b="0">
+                <a:solidFill>
+                  <a:srgbClr val="4A5462"/>
+                </a:solidFill>
+                <a:latin typeface="Segoe UI"/>
+              </a:rPr>
+              <a:t>Установка 3 мин 17 с, карта открывается за 8,1 с</a:t>
+            </a:r>
+          </a:p>
+          <a:p>
+            <a:pPr algn="l">
+              <a:spcAft>
+                <a:spcPts val="400"/>
+              </a:spcAft>
+            </a:pPr>
+            <a:r>
+              <a:rPr sz="1500" b="0">
+                <a:solidFill>
+                  <a:srgbClr val="4A5462"/>
+                </a:solidFill>
+                <a:latin typeface="Segoe UI"/>
+              </a:rPr>
+              <a:t>Веса моделей в репозитории; все числа — reports/final_numbers.json с источником и протоколом</a:t>
+            </a:r>
+          </a:p>
+          <a:p>
+            <a:pPr algn="l">
+              <a:spcAft>
+                <a:spcPts val="400"/>
+              </a:spcAft>
+            </a:pPr>
+            <a:r>
+              <a:rPr sz="1500" b="0">
+                <a:solidFill>
+                  <a:srgbClr val="4A5462"/>
+                </a:solidFill>
+                <a:latin typeface="Segoe UI"/>
+              </a:rPr>
+              <a:t>Правила принятия решений записаны до сравнения (детектор, поле, счётчик)</a:t>
+            </a:r>
+          </a:p>
+        </p:txBody>
+      </p:sp>
+      <p:sp>
+        <p:nvSpPr>
+          <p:cNvPr id="8" name="Rectangle 7"/>
+          <p:cNvSpPr/>
+          <p:nvPr/>
+        </p:nvSpPr>
+        <p:spPr>
+          <a:xfrm>
+            <a:off x="649224" y="5422392"/>
+            <a:ext cx="10881360" cy="19050"/>
+          </a:xfrm>
+          <a:prstGeom prst="rect">
+            <a:avLst/>
+          </a:prstGeom>
+          <a:solidFill>
+            <a:srgbClr val="A7ADB7"/>
+          </a:solidFill>
+          <a:ln>
+            <a:noFill/>
+          </a:ln>
+        </p:spPr>
+        <p:style>
+          <a:lnRef idx="1">
+            <a:schemeClr val="accent1"/>
+          </a:lnRef>
+          <a:fillRef idx="3">
+            <a:schemeClr val="accent1"/>
+          </a:fillRef>
+          <a:effectRef idx="2">
+            <a:schemeClr val="accent1"/>
+          </a:effectRef>
+          <a:fontRef idx="minor">
+            <a:schemeClr val="lt1"/>
+          </a:fontRef>
+        </p:style>
+        <p:txBody>
+          <a:bodyPr rtlCol="0" anchor="ctr"/>
+          <a:lstStyle/>
+          <a:p>
+            <a:pPr algn="ctr"/>
+          </a:p>
+        </p:txBody>
+      </p:sp>
+      <p:sp>
+        <p:nvSpPr>
+          <p:cNvPr id="9" name="TextBox 8"/>
+          <p:cNvSpPr txBox="1"/>
+          <p:nvPr/>
+        </p:nvSpPr>
+        <p:spPr>
+          <a:xfrm>
+            <a:off x="649224" y="5532120"/>
+            <a:ext cx="10881360" cy="548640"/>
+          </a:xfrm>
+          <a:prstGeom prst="rect">
+            <a:avLst/>
+          </a:prstGeom>
+          <a:noFill/>
+        </p:spPr>
+        <p:txBody>
+          <a:bodyPr wrap="square" anchor="t" lIns="18288" rIns="18288" tIns="18288" bIns="18288">
+            <a:spAutoFit/>
+          </a:bodyPr>
+          <a:lstStyle/>
+          <a:p>
+            <a:pPr algn="l">
+              <a:spcAft>
+                <a:spcPts val="400"/>
+              </a:spcAft>
+            </a:pPr>
+            <a:r>
+              <a:rPr sz="2000" b="1">
                 <a:solidFill>
                   <a:srgbClr val="1E2836"/>
                 </a:solidFill>
                 <a:latin typeface="Segoe UI"/>
               </a:rPr>
-              <a:t>Среди событий CSV есть пары снимка и полевого счёта для обучения.</a:t>
-            </a:r>
-          </a:p>
-        </p:txBody>
-      </p:sp>
-      <p:sp>
-        <p:nvSpPr>
-          <p:cNvPr id="7" name="TextBox 6"/>
-          <p:cNvSpPr txBox="1"/>
-          <p:nvPr/>
-        </p:nvSpPr>
-        <p:spPr>
-          <a:xfrm>
-            <a:off x="649224" y="4221480"/>
-            <a:ext cx="5120640" cy="256032"/>
-          </a:xfrm>
-          <a:prstGeom prst="rect">
-            <a:avLst/>
-          </a:prstGeom>
-          <a:noFill/>
-        </p:spPr>
-        <p:txBody>
-          <a:bodyPr wrap="square" anchor="t" lIns="18288" rIns="18288" tIns="18288" bIns="18288">
-            <a:spAutoFit/>
-          </a:bodyPr>
-          <a:lstStyle/>
-          <a:p>
-            <a:pPr algn="l">
-              <a:spcAft>
-                <a:spcPts val="400"/>
-              </a:spcAft>
-            </a:pPr>
-            <a:r>
-              <a:rPr sz="1100" b="1">
-                <a:solidFill>
-                  <a:srgbClr val="C1400B"/>
-                </a:solidFill>
-                <a:latin typeface="Segoe UI"/>
-              </a:rPr>
-              <a:t>КАК ПРОВЕРИЛИ</a:t>
-            </a:r>
-          </a:p>
-        </p:txBody>
-      </p:sp>
-      <p:sp>
-        <p:nvSpPr>
-          <p:cNvPr id="8" name="TextBox 7"/>
-          <p:cNvSpPr txBox="1"/>
-          <p:nvPr/>
-        </p:nvSpPr>
-        <p:spPr>
-          <a:xfrm>
-            <a:off x="649224" y="4468368"/>
-            <a:ext cx="5120640" cy="701040"/>
-          </a:xfrm>
-          <a:prstGeom prst="rect">
-            <a:avLst/>
-          </a:prstGeom>
-          <a:noFill/>
-        </p:spPr>
-        <p:txBody>
-          <a:bodyPr wrap="square" anchor="t" lIns="18288" rIns="18288" tIns="18288" bIns="18288">
-            <a:spAutoFit/>
-          </a:bodyPr>
-          <a:lstStyle/>
-          <a:p>
-            <a:pPr algn="l">
-              <a:spcAft>
-                <a:spcPts val="400"/>
-              </a:spcAft>
-            </a:pPr>
-            <a:r>
-              <a:rPr sz="1300" b="0">
-                <a:solidFill>
-                  <a:srgbClr val="1E2836"/>
-                </a:solidFill>
-                <a:latin typeface="Segoe UI"/>
-              </a:rPr>
-              <a:t>Для каждого события искали снимок S2/Landsat, отбирали по времени и облачности, маскам качества и дрейфу.</a:t>
-            </a:r>
-          </a:p>
-        </p:txBody>
-      </p:sp>
-      <p:sp>
-        <p:nvSpPr>
-          <p:cNvPr id="9" name="TextBox 8"/>
-          <p:cNvSpPr txBox="1"/>
-          <p:nvPr/>
-        </p:nvSpPr>
-        <p:spPr>
-          <a:xfrm>
-            <a:off x="649224" y="5196839"/>
-            <a:ext cx="5120640" cy="256032"/>
-          </a:xfrm>
-          <a:prstGeom prst="rect">
-            <a:avLst/>
-          </a:prstGeom>
-          <a:noFill/>
-        </p:spPr>
-        <p:txBody>
-          <a:bodyPr wrap="square" anchor="t" lIns="18288" rIns="18288" tIns="18288" bIns="18288">
-            <a:spAutoFit/>
-          </a:bodyPr>
-          <a:lstStyle/>
-          <a:p>
-            <a:pPr algn="l">
-              <a:spcAft>
-                <a:spcPts val="400"/>
-              </a:spcAft>
-            </a:pPr>
-            <a:r>
-              <a:rPr sz="1100" b="1">
-                <a:solidFill>
-                  <a:srgbClr val="C1400B"/>
-                </a:solidFill>
-                <a:latin typeface="Segoe UI"/>
-              </a:rPr>
-              <a:t>РЕШЕНИЕ</a:t>
+              <a:t>Любое число в презентации можно проверить по файлу и команде</a:t>
             </a:r>
           </a:p>
         </p:txBody>
@@ -8457,113 +8976,6 @@
       <p:sp>
         <p:nvSpPr>
           <p:cNvPr id="10" name="TextBox 9"/>
-          <p:cNvSpPr txBox="1"/>
-          <p:nvPr/>
-        </p:nvSpPr>
-        <p:spPr>
-          <a:xfrm>
-            <a:off x="649224" y="5443728"/>
-            <a:ext cx="5120640" cy="701040"/>
-          </a:xfrm>
-          <a:prstGeom prst="rect">
-            <a:avLst/>
-          </a:prstGeom>
-          <a:noFill/>
-        </p:spPr>
-        <p:txBody>
-          <a:bodyPr wrap="square" anchor="t" lIns="18288" rIns="18288" tIns="18288" bIns="18288">
-            <a:spAutoFit/>
-          </a:bodyPr>
-          <a:lstStyle/>
-          <a:p>
-            <a:pPr algn="l">
-              <a:spcAft>
-                <a:spcPts val="400"/>
-              </a:spcAft>
-            </a:pPr>
-            <a:r>
-              <a:rPr sz="1300" b="0">
-                <a:solidFill>
-                  <a:srgbClr val="1E2836"/>
-                </a:solidFill>
-                <a:latin typeface="Segoe UI"/>
-              </a:rPr>
-              <a:t>Пары из CSV не используем для перевода снимка в штуки; ищем другие источники.</a:t>
-            </a:r>
-          </a:p>
-        </p:txBody>
-      </p:sp>
-      <p:pic>
-        <p:nvPicPr>
-          <p:cNvPr id="11" name="Picture 10" descr="funnel.png"/>
-          <p:cNvPicPr>
-            <a:picLocks noChangeAspect="1"/>
-          </p:cNvPicPr>
-          <p:nvPr/>
-        </p:nvPicPr>
-        <p:blipFill>
-          <a:blip r:embed="rId2"/>
-          <a:stretch>
-            <a:fillRect/>
-          </a:stretch>
-        </p:blipFill>
-        <p:spPr>
-          <a:xfrm>
-            <a:off x="6035040" y="2240279"/>
-            <a:ext cx="5486400" cy="3291840"/>
-          </a:xfrm>
-          <a:prstGeom prst="rect">
-            <a:avLst/>
-          </a:prstGeom>
-          <a:ln w="9525">
-            <a:solidFill>
-              <a:srgbClr val="DDDFE3"/>
-            </a:solidFill>
-          </a:ln>
-        </p:spPr>
-      </p:pic>
-      <p:sp>
-        <p:nvSpPr>
-          <p:cNvPr id="12" name="TextBox 11"/>
-          <p:cNvSpPr txBox="1"/>
-          <p:nvPr/>
-        </p:nvSpPr>
-        <p:spPr>
-          <a:xfrm>
-            <a:off x="649224" y="6355080"/>
-            <a:ext cx="5486400" cy="274320"/>
-          </a:xfrm>
-          <a:prstGeom prst="rect">
-            <a:avLst/>
-          </a:prstGeom>
-          <a:noFill/>
-        </p:spPr>
-        <p:txBody>
-          <a:bodyPr wrap="square" anchor="t" lIns="18288" rIns="18288" tIns="18288" bIns="18288">
-            <a:spAutoFit/>
-          </a:bodyPr>
-          <a:lstStyle/>
-          <a:p>
-            <a:pPr algn="l">
-              <a:spcAft>
-                <a:spcPts val="400"/>
-              </a:spcAft>
-            </a:pPr>
-            <a:r>
-              <a:rPr sz="1100" b="0">
-                <a:solidFill>
-                  <a:srgbClr val="9AA1AC"/>
-                </a:solidFill>
-                <a:latin typeface="Segoe UI"/>
-              </a:rPr>
-              <a:t>Приложение · Исследование</a:t>
-            </a:r>
-          </a:p>
-        </p:txBody>
-      </p:sp>
-      <p:sp>
-        <p:nvSpPr>
-          <p:cNvPr id="13" name="TextBox 12"/>
           <p:cNvSpPr txBox="1"/>
           <p:nvPr/>
         </p:nvSpPr>
@@ -8595,7 +9007,7 @@
                 </a:solidFill>
                 <a:latin typeface="Segoe UI"/>
               </a:rPr>
-              <a:t>15 / 41</a:t>
+              <a:t>15 / 42</a:t>
             </a:r>
           </a:p>
         </p:txBody>
@@ -8654,13 +9066,13 @@
               </a:spcAft>
             </a:pPr>
             <a:r>
-              <a:rPr sz="3200" b="1">
+              <a:rPr sz="2800" b="1">
                 <a:solidFill>
                   <a:srgbClr val="1E2836"/>
                 </a:solidFill>
                 <a:latin typeface="Segoe UI"/>
               </a:rPr>
-              <a:t>У каждой пары — уровень доказательности и маски качества</a:t>
+              <a:t>Из событий CSV организаторов синхронных пар «снимок → поле» — ноль</a:t>
             </a:r>
           </a:p>
         </p:txBody>
@@ -8673,33 +9085,33 @@
         </p:nvSpPr>
         <p:spPr>
           <a:xfrm>
-            <a:off x="649224" y="1783080"/>
-            <a:ext cx="3931920" cy="1143000"/>
-          </a:xfrm>
-          <a:prstGeom prst="rect">
-            <a:avLst/>
-          </a:prstGeom>
-          <a:noFill/>
-        </p:spPr>
-        <p:txBody>
-          <a:bodyPr wrap="square" anchor="t" lIns="18288" rIns="18288" tIns="18288" bIns="18288">
-            <a:spAutoFit/>
-          </a:bodyPr>
-          <a:lstStyle/>
-          <a:p>
-            <a:pPr algn="l">
-              <a:spcAft>
-                <a:spcPts val="400"/>
-              </a:spcAft>
-            </a:pPr>
-            <a:r>
-              <a:rPr sz="7200" b="1">
+            <a:off x="649224" y="1737360"/>
+            <a:ext cx="5120640" cy="857250"/>
+          </a:xfrm>
+          <a:prstGeom prst="rect">
+            <a:avLst/>
+          </a:prstGeom>
+          <a:noFill/>
+        </p:spPr>
+        <p:txBody>
+          <a:bodyPr wrap="square" anchor="t" lIns="18288" rIns="18288" tIns="18288" bIns="18288">
+            <a:spAutoFit/>
+          </a:bodyPr>
+          <a:lstStyle/>
+          <a:p>
+            <a:pPr algn="l">
+              <a:spcAft>
+                <a:spcPts val="400"/>
+              </a:spcAft>
+            </a:pPr>
+            <a:r>
+              <a:rPr sz="5400" b="1">
                 <a:solidFill>
                   <a:srgbClr val="C1400B"/>
                 </a:solidFill>
                 <a:latin typeface="Segoe UI"/>
               </a:rPr>
-              <a:t>12</a:t>
+              <a:t>0</a:t>
             </a:r>
           </a:p>
         </p:txBody>
@@ -8712,33 +9124,33 @@
         </p:nvSpPr>
         <p:spPr>
           <a:xfrm>
-            <a:off x="676656" y="2971800"/>
-            <a:ext cx="3931920" cy="822960"/>
-          </a:xfrm>
-          <a:prstGeom prst="rect">
-            <a:avLst/>
-          </a:prstGeom>
-          <a:noFill/>
-        </p:spPr>
-        <p:txBody>
-          <a:bodyPr wrap="square" anchor="t" lIns="18288" rIns="18288" tIns="18288" bIns="18288">
-            <a:spAutoFit/>
-          </a:bodyPr>
-          <a:lstStyle/>
-          <a:p>
-            <a:pPr algn="l">
-              <a:spcAft>
-                <a:spcPts val="400"/>
-              </a:spcAft>
-            </a:pPr>
-            <a:r>
-              <a:rPr sz="1600" b="0">
+            <a:off x="676656" y="2628900"/>
+            <a:ext cx="5120640" cy="822960"/>
+          </a:xfrm>
+          <a:prstGeom prst="rect">
+            <a:avLst/>
+          </a:prstGeom>
+          <a:noFill/>
+        </p:spPr>
+        <p:txBody>
+          <a:bodyPr wrap="square" anchor="t" lIns="18288" rIns="18288" tIns="18288" bIns="18288">
+            <a:spAutoFit/>
+          </a:bodyPr>
+          <a:lstStyle/>
+          <a:p>
+            <a:pPr algn="l">
+              <a:spcAft>
+                <a:spcPts val="400"/>
+              </a:spcAft>
+            </a:pPr>
+            <a:r>
+              <a:rPr sz="1400" b="0">
                 <a:solidFill>
                   <a:srgbClr val="4A5462"/>
                 </a:solidFill>
                 <a:latin typeface="Segoe UI"/>
               </a:rPr>
-              <a:t>из 29 прошли маски качества</a:t>
+              <a:t>синхронных из 318 событий</a:t>
             </a:r>
           </a:p>
         </p:txBody>
@@ -8751,27 +9163,27 @@
         </p:nvSpPr>
         <p:spPr>
           <a:xfrm>
-            <a:off x="4937760" y="1783080"/>
-            <a:ext cx="6601967" cy="274320"/>
-          </a:xfrm>
-          <a:prstGeom prst="rect">
-            <a:avLst/>
-          </a:prstGeom>
-          <a:noFill/>
-        </p:spPr>
-        <p:txBody>
-          <a:bodyPr wrap="square" anchor="t" lIns="18288" rIns="18288" tIns="18288" bIns="18288">
-            <a:spAutoFit/>
-          </a:bodyPr>
-          <a:lstStyle/>
-          <a:p>
-            <a:pPr algn="l">
-              <a:spcAft>
-                <a:spcPts val="400"/>
-              </a:spcAft>
-            </a:pPr>
-            <a:r>
-              <a:rPr sz="1200" b="1">
+            <a:off x="649224" y="3246120"/>
+            <a:ext cx="5120640" cy="256032"/>
+          </a:xfrm>
+          <a:prstGeom prst="rect">
+            <a:avLst/>
+          </a:prstGeom>
+          <a:noFill/>
+        </p:spPr>
+        <p:txBody>
+          <a:bodyPr wrap="square" anchor="t" lIns="18288" rIns="18288" tIns="18288" bIns="18288">
+            <a:spAutoFit/>
+          </a:bodyPr>
+          <a:lstStyle/>
+          <a:p>
+            <a:pPr algn="l">
+              <a:spcAft>
+                <a:spcPts val="400"/>
+              </a:spcAft>
+            </a:pPr>
+            <a:r>
+              <a:rPr sz="1100" b="1">
                 <a:solidFill>
                   <a:srgbClr val="C1400B"/>
                 </a:solidFill>
@@ -8790,33 +9202,33 @@
         </p:nvSpPr>
         <p:spPr>
           <a:xfrm>
-            <a:off x="4937760" y="2057400"/>
-            <a:ext cx="6601967" cy="1005840"/>
-          </a:xfrm>
-          <a:prstGeom prst="rect">
-            <a:avLst/>
-          </a:prstGeom>
-          <a:noFill/>
-        </p:spPr>
-        <p:txBody>
-          <a:bodyPr wrap="square" anchor="t" lIns="18288" rIns="18288" tIns="18288" bIns="18288">
-            <a:spAutoFit/>
-          </a:bodyPr>
-          <a:lstStyle/>
-          <a:p>
-            <a:pPr algn="l">
-              <a:spcAft>
-                <a:spcPts val="400"/>
-              </a:spcAft>
-            </a:pPr>
-            <a:r>
-              <a:rPr sz="1500" b="0">
+            <a:off x="649224" y="3493008"/>
+            <a:ext cx="5120640" cy="701040"/>
+          </a:xfrm>
+          <a:prstGeom prst="rect">
+            <a:avLst/>
+          </a:prstGeom>
+          <a:noFill/>
+        </p:spPr>
+        <p:txBody>
+          <a:bodyPr wrap="square" anchor="t" lIns="18288" rIns="18288" tIns="18288" bIns="18288">
+            <a:spAutoFit/>
+          </a:bodyPr>
+          <a:lstStyle/>
+          <a:p>
+            <a:pPr algn="l">
+              <a:spcAft>
+                <a:spcPts val="400"/>
+              </a:spcAft>
+            </a:pPr>
+            <a:r>
+              <a:rPr sz="1300" b="0">
                 <a:solidFill>
                   <a:srgbClr val="1E2836"/>
                 </a:solidFill>
                 <a:latin typeface="Segoe UI"/>
               </a:rPr>
-              <a:t>Отобранные по метаданным пары пригодны без проверки облаков и блика.</a:t>
+              <a:t>Среди событий CSV есть пары снимка и полевого счёта для обучения.</a:t>
             </a:r>
           </a:p>
         </p:txBody>
@@ -8829,27 +9241,27 @@
         </p:nvSpPr>
         <p:spPr>
           <a:xfrm>
-            <a:off x="4937760" y="3108960"/>
-            <a:ext cx="6601967" cy="274320"/>
-          </a:xfrm>
-          <a:prstGeom prst="rect">
-            <a:avLst/>
-          </a:prstGeom>
-          <a:noFill/>
-        </p:spPr>
-        <p:txBody>
-          <a:bodyPr wrap="square" anchor="t" lIns="18288" rIns="18288" tIns="18288" bIns="18288">
-            <a:spAutoFit/>
-          </a:bodyPr>
-          <a:lstStyle/>
-          <a:p>
-            <a:pPr algn="l">
-              <a:spcAft>
-                <a:spcPts val="400"/>
-              </a:spcAft>
-            </a:pPr>
-            <a:r>
-              <a:rPr sz="1200" b="1">
+            <a:off x="649224" y="4221480"/>
+            <a:ext cx="5120640" cy="256032"/>
+          </a:xfrm>
+          <a:prstGeom prst="rect">
+            <a:avLst/>
+          </a:prstGeom>
+          <a:noFill/>
+        </p:spPr>
+        <p:txBody>
+          <a:bodyPr wrap="square" anchor="t" lIns="18288" rIns="18288" tIns="18288" bIns="18288">
+            <a:spAutoFit/>
+          </a:bodyPr>
+          <a:lstStyle/>
+          <a:p>
+            <a:pPr algn="l">
+              <a:spcAft>
+                <a:spcPts val="400"/>
+              </a:spcAft>
+            </a:pPr>
+            <a:r>
+              <a:rPr sz="1100" b="1">
                 <a:solidFill>
                   <a:srgbClr val="C1400B"/>
                 </a:solidFill>
@@ -8868,33 +9280,33 @@
         </p:nvSpPr>
         <p:spPr>
           <a:xfrm>
-            <a:off x="4937760" y="3383279"/>
-            <a:ext cx="6601967" cy="1005840"/>
-          </a:xfrm>
-          <a:prstGeom prst="rect">
-            <a:avLst/>
-          </a:prstGeom>
-          <a:noFill/>
-        </p:spPr>
-        <p:txBody>
-          <a:bodyPr wrap="square" anchor="t" lIns="18288" rIns="18288" tIns="18288" bIns="18288">
-            <a:spAutoFit/>
-          </a:bodyPr>
-          <a:lstStyle/>
-          <a:p>
-            <a:pPr algn="l">
-              <a:spcAft>
-                <a:spcPts val="400"/>
-              </a:spcAft>
-            </a:pPr>
-            <a:r>
-              <a:rPr sz="1500" b="0">
+            <a:off x="649224" y="4468368"/>
+            <a:ext cx="5120640" cy="701040"/>
+          </a:xfrm>
+          <a:prstGeom prst="rect">
+            <a:avLst/>
+          </a:prstGeom>
+          <a:noFill/>
+        </p:spPr>
+        <p:txBody>
+          <a:bodyPr wrap="square" anchor="t" lIns="18288" rIns="18288" tIns="18288" bIns="18288">
+            <a:spAutoFit/>
+          </a:bodyPr>
+          <a:lstStyle/>
+          <a:p>
+            <a:pPr algn="l">
+              <a:spcAft>
+                <a:spcPts val="400"/>
+              </a:spcAft>
+            </a:pPr>
+            <a:r>
+              <a:rPr sz="1300" b="0">
                 <a:solidFill>
                   <a:srgbClr val="1E2836"/>
                 </a:solidFill>
                 <a:latin typeface="Segoe UI"/>
               </a:rPr>
-              <a:t>Маски SCL и блика в полосе обследования; отбраковано по блику 10, по облакам 6.</a:t>
+              <a:t>Для каждого события искали снимок S2/Landsat, отбирали по времени и облачности, маскам качества и дрейфу.</a:t>
             </a:r>
           </a:p>
         </p:txBody>
@@ -8907,27 +9319,27 @@
         </p:nvSpPr>
         <p:spPr>
           <a:xfrm>
-            <a:off x="4937760" y="4434840"/>
-            <a:ext cx="6601967" cy="274320"/>
-          </a:xfrm>
-          <a:prstGeom prst="rect">
-            <a:avLst/>
-          </a:prstGeom>
-          <a:noFill/>
-        </p:spPr>
-        <p:txBody>
-          <a:bodyPr wrap="square" anchor="t" lIns="18288" rIns="18288" tIns="18288" bIns="18288">
-            <a:spAutoFit/>
-          </a:bodyPr>
-          <a:lstStyle/>
-          <a:p>
-            <a:pPr algn="l">
-              <a:spcAft>
-                <a:spcPts val="400"/>
-              </a:spcAft>
-            </a:pPr>
-            <a:r>
-              <a:rPr sz="1200" b="1">
+            <a:off x="649224" y="5196839"/>
+            <a:ext cx="5120640" cy="256032"/>
+          </a:xfrm>
+          <a:prstGeom prst="rect">
+            <a:avLst/>
+          </a:prstGeom>
+          <a:noFill/>
+        </p:spPr>
+        <p:txBody>
+          <a:bodyPr wrap="square" anchor="t" lIns="18288" rIns="18288" tIns="18288" bIns="18288">
+            <a:spAutoFit/>
+          </a:bodyPr>
+          <a:lstStyle/>
+          <a:p>
+            <a:pPr algn="l">
+              <a:spcAft>
+                <a:spcPts val="400"/>
+              </a:spcAft>
+            </a:pPr>
+            <a:r>
+              <a:rPr sz="1100" b="1">
                 <a:solidFill>
                   <a:srgbClr val="C1400B"/>
                 </a:solidFill>
@@ -8946,40 +9358,69 @@
         </p:nvSpPr>
         <p:spPr>
           <a:xfrm>
-            <a:off x="4937760" y="4709159"/>
-            <a:ext cx="6601967" cy="1005840"/>
-          </a:xfrm>
-          <a:prstGeom prst="rect">
-            <a:avLst/>
-          </a:prstGeom>
-          <a:noFill/>
-        </p:spPr>
-        <p:txBody>
-          <a:bodyPr wrap="square" anchor="t" lIns="18288" rIns="18288" tIns="18288" bIns="18288">
-            <a:spAutoFit/>
-          </a:bodyPr>
-          <a:lstStyle/>
-          <a:p>
-            <a:pPr algn="l">
-              <a:spcAft>
-                <a:spcPts val="400"/>
-              </a:spcAft>
-            </a:pPr>
-            <a:r>
-              <a:rPr sz="1500" b="0">
+            <a:off x="649224" y="5443728"/>
+            <a:ext cx="5120640" cy="701040"/>
+          </a:xfrm>
+          <a:prstGeom prst="rect">
+            <a:avLst/>
+          </a:prstGeom>
+          <a:noFill/>
+        </p:spPr>
+        <p:txBody>
+          <a:bodyPr wrap="square" anchor="t" lIns="18288" rIns="18288" tIns="18288" bIns="18288">
+            <a:spAutoFit/>
+          </a:bodyPr>
+          <a:lstStyle/>
+          <a:p>
+            <a:pPr algn="l">
+              <a:spcAft>
+                <a:spcPts val="400"/>
+              </a:spcAft>
+            </a:pPr>
+            <a:r>
+              <a:rPr sz="1300" b="0">
                 <a:solidFill>
                   <a:srgbClr val="1E2836"/>
                 </a:solidFill>
                 <a:latin typeface="Segoe UI"/>
               </a:rPr>
-              <a:t>Реестр пар хранит уровень A–D и причину отказа для каждой строки.</a:t>
-            </a:r>
-          </a:p>
-        </p:txBody>
-      </p:sp>
-      <p:sp>
-        <p:nvSpPr>
-          <p:cNvPr id="11" name="TextBox 10"/>
+              <a:t>Пары из CSV не используем для перевода снимка в штуки; ищем другие источники.</a:t>
+            </a:r>
+          </a:p>
+        </p:txBody>
+      </p:sp>
+      <p:pic>
+        <p:nvPicPr>
+          <p:cNvPr id="11" name="Picture 10" descr="funnel.png"/>
+          <p:cNvPicPr>
+            <a:picLocks noChangeAspect="1"/>
+          </p:cNvPicPr>
+          <p:nvPr/>
+        </p:nvPicPr>
+        <p:blipFill>
+          <a:blip r:embed="rId2"/>
+          <a:stretch>
+            <a:fillRect/>
+          </a:stretch>
+        </p:blipFill>
+        <p:spPr>
+          <a:xfrm>
+            <a:off x="6035040" y="2240279"/>
+            <a:ext cx="5486400" cy="3291840"/>
+          </a:xfrm>
+          <a:prstGeom prst="rect">
+            <a:avLst/>
+          </a:prstGeom>
+          <a:ln w="9525">
+            <a:solidFill>
+              <a:srgbClr val="DDDFE3"/>
+            </a:solidFill>
+          </a:ln>
+        </p:spPr>
+      </p:pic>
+      <p:sp>
+        <p:nvSpPr>
+          <p:cNvPr id="12" name="TextBox 11"/>
           <p:cNvSpPr txBox="1"/>
           <p:nvPr/>
         </p:nvSpPr>
@@ -9018,7 +9459,7 @@
       </p:sp>
       <p:sp>
         <p:nvSpPr>
-          <p:cNvPr id="12" name="TextBox 11"/>
+          <p:cNvPr id="13" name="TextBox 12"/>
           <p:cNvSpPr txBox="1"/>
           <p:nvPr/>
         </p:nvSpPr>
@@ -9050,7 +9491,7 @@
                 </a:solidFill>
                 <a:latin typeface="Segoe UI"/>
               </a:rPr>
-              <a:t>16 / 41</a:t>
+              <a:t>16 / 42</a:t>
             </a:r>
           </a:p>
         </p:txBody>
@@ -9115,7 +9556,7 @@
                 </a:solidFill>
                 <a:latin typeface="Segoe UI"/>
               </a:rPr>
-              <a:t>ADIS: 66 пар по месту и времени, видимого сигнала — 0</a:t>
+              <a:t>У каждой пары — уровень доказательности и маски качества</a:t>
             </a:r>
           </a:p>
         </p:txBody>
@@ -9128,33 +9569,33 @@
         </p:nvSpPr>
         <p:spPr>
           <a:xfrm>
-            <a:off x="649224" y="1737360"/>
-            <a:ext cx="5120640" cy="857250"/>
-          </a:xfrm>
-          <a:prstGeom prst="rect">
-            <a:avLst/>
-          </a:prstGeom>
-          <a:noFill/>
-        </p:spPr>
-        <p:txBody>
-          <a:bodyPr wrap="square" anchor="t" lIns="18288" rIns="18288" tIns="18288" bIns="18288">
-            <a:spAutoFit/>
-          </a:bodyPr>
-          <a:lstStyle/>
-          <a:p>
-            <a:pPr algn="l">
-              <a:spcAft>
-                <a:spcPts val="400"/>
-              </a:spcAft>
-            </a:pPr>
-            <a:r>
-              <a:rPr sz="5400" b="1">
+            <a:off x="649224" y="1783080"/>
+            <a:ext cx="3931920" cy="1143000"/>
+          </a:xfrm>
+          <a:prstGeom prst="rect">
+            <a:avLst/>
+          </a:prstGeom>
+          <a:noFill/>
+        </p:spPr>
+        <p:txBody>
+          <a:bodyPr wrap="square" anchor="t" lIns="18288" rIns="18288" tIns="18288" bIns="18288">
+            <a:spAutoFit/>
+          </a:bodyPr>
+          <a:lstStyle/>
+          <a:p>
+            <a:pPr algn="l">
+              <a:spcAft>
+                <a:spcPts val="400"/>
+              </a:spcAft>
+            </a:pPr>
+            <a:r>
+              <a:rPr sz="7200" b="1">
                 <a:solidFill>
                   <a:srgbClr val="C1400B"/>
                 </a:solidFill>
                 <a:latin typeface="Segoe UI"/>
               </a:rPr>
-              <a:t>0</a:t>
+              <a:t>12</a:t>
             </a:r>
           </a:p>
         </p:txBody>
@@ -9167,33 +9608,33 @@
         </p:nvSpPr>
         <p:spPr>
           <a:xfrm>
-            <a:off x="676656" y="2628900"/>
-            <a:ext cx="5120640" cy="822960"/>
-          </a:xfrm>
-          <a:prstGeom prst="rect">
-            <a:avLst/>
-          </a:prstGeom>
-          <a:noFill/>
-        </p:spPr>
-        <p:txBody>
-          <a:bodyPr wrap="square" anchor="t" lIns="18288" rIns="18288" tIns="18288" bIns="18288">
-            <a:spAutoFit/>
-          </a:bodyPr>
-          <a:lstStyle/>
-          <a:p>
-            <a:pPr algn="l">
-              <a:spcAft>
-                <a:spcPts val="400"/>
-              </a:spcAft>
-            </a:pPr>
-            <a:r>
-              <a:rPr sz="1400" b="0">
+            <a:off x="676656" y="2971800"/>
+            <a:ext cx="3931920" cy="822960"/>
+          </a:xfrm>
+          <a:prstGeom prst="rect">
+            <a:avLst/>
+          </a:prstGeom>
+          <a:noFill/>
+        </p:spPr>
+        <p:txBody>
+          <a:bodyPr wrap="square" anchor="t" lIns="18288" rIns="18288" tIns="18288" bIns="18288">
+            <a:spAutoFit/>
+          </a:bodyPr>
+          <a:lstStyle/>
+          <a:p>
+            <a:pPr algn="l">
+              <a:spcAft>
+                <a:spcPts val="400"/>
+              </a:spcAft>
+            </a:pPr>
+            <a:r>
+              <a:rPr sz="1600" b="0">
                 <a:solidFill>
                   <a:srgbClr val="4A5462"/>
                 </a:solidFill>
                 <a:latin typeface="Segoe UI"/>
               </a:rPr>
-              <a:t>срабатываний в 6 парах с предметами</a:t>
+              <a:t>из 29 прошли маски качества</a:t>
             </a:r>
           </a:p>
         </p:txBody>
@@ -9206,27 +9647,27 @@
         </p:nvSpPr>
         <p:spPr>
           <a:xfrm>
-            <a:off x="649224" y="3246120"/>
-            <a:ext cx="5120640" cy="256032"/>
-          </a:xfrm>
-          <a:prstGeom prst="rect">
-            <a:avLst/>
-          </a:prstGeom>
-          <a:noFill/>
-        </p:spPr>
-        <p:txBody>
-          <a:bodyPr wrap="square" anchor="t" lIns="18288" rIns="18288" tIns="18288" bIns="18288">
-            <a:spAutoFit/>
-          </a:bodyPr>
-          <a:lstStyle/>
-          <a:p>
-            <a:pPr algn="l">
-              <a:spcAft>
-                <a:spcPts val="400"/>
-              </a:spcAft>
-            </a:pPr>
-            <a:r>
-              <a:rPr sz="1100" b="1">
+            <a:off x="4937760" y="1783080"/>
+            <a:ext cx="6601967" cy="274320"/>
+          </a:xfrm>
+          <a:prstGeom prst="rect">
+            <a:avLst/>
+          </a:prstGeom>
+          <a:noFill/>
+        </p:spPr>
+        <p:txBody>
+          <a:bodyPr wrap="square" anchor="t" lIns="18288" rIns="18288" tIns="18288" bIns="18288">
+            <a:spAutoFit/>
+          </a:bodyPr>
+          <a:lstStyle/>
+          <a:p>
+            <a:pPr algn="l">
+              <a:spcAft>
+                <a:spcPts val="400"/>
+              </a:spcAft>
+            </a:pPr>
+            <a:r>
+              <a:rPr sz="1200" b="1">
                 <a:solidFill>
                   <a:srgbClr val="C1400B"/>
                 </a:solidFill>
@@ -9245,33 +9686,33 @@
         </p:nvSpPr>
         <p:spPr>
           <a:xfrm>
-            <a:off x="649224" y="3493008"/>
-            <a:ext cx="5120640" cy="701040"/>
-          </a:xfrm>
-          <a:prstGeom prst="rect">
-            <a:avLst/>
-          </a:prstGeom>
-          <a:noFill/>
-        </p:spPr>
-        <p:txBody>
-          <a:bodyPr wrap="square" anchor="t" lIns="18288" rIns="18288" tIns="18288" bIns="18288">
-            <a:spAutoFit/>
-          </a:bodyPr>
-          <a:lstStyle/>
-          <a:p>
-            <a:pPr algn="l">
-              <a:spcAft>
-                <a:spcPts val="400"/>
-              </a:spcAft>
-            </a:pPr>
-            <a:r>
-              <a:rPr sz="1300" b="0">
+            <a:off x="4937760" y="2057400"/>
+            <a:ext cx="6601967" cy="1005840"/>
+          </a:xfrm>
+          <a:prstGeom prst="rect">
+            <a:avLst/>
+          </a:prstGeom>
+          <a:noFill/>
+        </p:spPr>
+        <p:txBody>
+          <a:bodyPr wrap="square" anchor="t" lIns="18288" rIns="18288" tIns="18288" bIns="18288">
+            <a:spAutoFit/>
+          </a:bodyPr>
+          <a:lstStyle/>
+          <a:p>
+            <a:pPr algn="l">
+              <a:spcAft>
+                <a:spcPts val="400"/>
+              </a:spcAft>
+            </a:pPr>
+            <a:r>
+              <a:rPr sz="1500" b="0">
                 <a:solidFill>
                   <a:srgbClr val="1E2836"/>
                 </a:solidFill>
                 <a:latin typeface="Segoe UI"/>
               </a:rPr>
-              <a:t>В пересечениях маршрутов ADIS со снимками детектор увидит посчитанные предметы.</a:t>
+              <a:t>Отобранные по метаданным пары пригодны без проверки облаков и блика.</a:t>
             </a:r>
           </a:p>
         </p:txBody>
@@ -9284,27 +9725,27 @@
         </p:nvSpPr>
         <p:spPr>
           <a:xfrm>
-            <a:off x="649224" y="4221480"/>
-            <a:ext cx="5120640" cy="256032"/>
-          </a:xfrm>
-          <a:prstGeom prst="rect">
-            <a:avLst/>
-          </a:prstGeom>
-          <a:noFill/>
-        </p:spPr>
-        <p:txBody>
-          <a:bodyPr wrap="square" anchor="t" lIns="18288" rIns="18288" tIns="18288" bIns="18288">
-            <a:spAutoFit/>
-          </a:bodyPr>
-          <a:lstStyle/>
-          <a:p>
-            <a:pPr algn="l">
-              <a:spcAft>
-                <a:spcPts val="400"/>
-              </a:spcAft>
-            </a:pPr>
-            <a:r>
-              <a:rPr sz="1100" b="1">
+            <a:off x="4937760" y="3108960"/>
+            <a:ext cx="6601967" cy="274320"/>
+          </a:xfrm>
+          <a:prstGeom prst="rect">
+            <a:avLst/>
+          </a:prstGeom>
+          <a:noFill/>
+        </p:spPr>
+        <p:txBody>
+          <a:bodyPr wrap="square" anchor="t" lIns="18288" rIns="18288" tIns="18288" bIns="18288">
+            <a:spAutoFit/>
+          </a:bodyPr>
+          <a:lstStyle/>
+          <a:p>
+            <a:pPr algn="l">
+              <a:spcAft>
+                <a:spcPts val="400"/>
+              </a:spcAft>
+            </a:pPr>
+            <a:r>
+              <a:rPr sz="1200" b="1">
                 <a:solidFill>
                   <a:srgbClr val="C1400B"/>
                 </a:solidFill>
@@ -9323,33 +9764,33 @@
         </p:nvSpPr>
         <p:spPr>
           <a:xfrm>
-            <a:off x="649224" y="4468368"/>
-            <a:ext cx="5120640" cy="701040"/>
-          </a:xfrm>
-          <a:prstGeom prst="rect">
-            <a:avLst/>
-          </a:prstGeom>
-          <a:noFill/>
-        </p:spPr>
-        <p:txBody>
-          <a:bodyPr wrap="square" anchor="t" lIns="18288" rIns="18288" tIns="18288" bIns="18288">
-            <a:spAutoFit/>
-          </a:bodyPr>
-          <a:lstStyle/>
-          <a:p>
-            <a:pPr algn="l">
-              <a:spcAft>
-                <a:spcPts val="400"/>
-              </a:spcAft>
-            </a:pPr>
-            <a:r>
-              <a:rPr sz="1300" b="0">
+            <a:off x="4937760" y="3383279"/>
+            <a:ext cx="6601967" cy="1005840"/>
+          </a:xfrm>
+          <a:prstGeom prst="rect">
+            <a:avLst/>
+          </a:prstGeom>
+          <a:noFill/>
+        </p:spPr>
+        <p:txBody>
+          <a:bodyPr wrap="square" anchor="t" lIns="18288" rIns="18288" tIns="18288" bIns="18288">
+            <a:spAutoFit/>
+          </a:bodyPr>
+          <a:lstStyle/>
+          <a:p>
+            <a:pPr algn="l">
+              <a:spcAft>
+                <a:spcPts val="400"/>
+              </a:spcAft>
+            </a:pPr>
+            <a:r>
+              <a:rPr sz="1500" b="0">
                 <a:solidFill>
                   <a:srgbClr val="1E2836"/>
                 </a:solidFill>
                 <a:latin typeface="Segoe UI"/>
               </a:rPr>
-              <a:t>21 444 отрезков ADIS сопоставлены со снимками в окне по времени; полоса наблюдения против пикселей детектора.</a:t>
+              <a:t>Маски SCL и блика в полосе обследования; отбраковано по блику 10, по облакам 6.</a:t>
             </a:r>
           </a:p>
         </p:txBody>
@@ -9362,27 +9803,27 @@
         </p:nvSpPr>
         <p:spPr>
           <a:xfrm>
-            <a:off x="649224" y="5196839"/>
-            <a:ext cx="5120640" cy="256032"/>
-          </a:xfrm>
-          <a:prstGeom prst="rect">
-            <a:avLst/>
-          </a:prstGeom>
-          <a:noFill/>
-        </p:spPr>
-        <p:txBody>
-          <a:bodyPr wrap="square" anchor="t" lIns="18288" rIns="18288" tIns="18288" bIns="18288">
-            <a:spAutoFit/>
-          </a:bodyPr>
-          <a:lstStyle/>
-          <a:p>
-            <a:pPr algn="l">
-              <a:spcAft>
-                <a:spcPts val="400"/>
-              </a:spcAft>
-            </a:pPr>
-            <a:r>
-              <a:rPr sz="1100" b="1">
+            <a:off x="4937760" y="4434840"/>
+            <a:ext cx="6601967" cy="274320"/>
+          </a:xfrm>
+          <a:prstGeom prst="rect">
+            <a:avLst/>
+          </a:prstGeom>
+          <a:noFill/>
+        </p:spPr>
+        <p:txBody>
+          <a:bodyPr wrap="square" anchor="t" lIns="18288" rIns="18288" tIns="18288" bIns="18288">
+            <a:spAutoFit/>
+          </a:bodyPr>
+          <a:lstStyle/>
+          <a:p>
+            <a:pPr algn="l">
+              <a:spcAft>
+                <a:spcPts val="400"/>
+              </a:spcAft>
+            </a:pPr>
+            <a:r>
+              <a:rPr sz="1200" b="1">
                 <a:solidFill>
                   <a:srgbClr val="C1400B"/>
                 </a:solidFill>
@@ -9401,69 +9842,40 @@
         </p:nvSpPr>
         <p:spPr>
           <a:xfrm>
-            <a:off x="649224" y="5443728"/>
-            <a:ext cx="5120640" cy="701040"/>
-          </a:xfrm>
-          <a:prstGeom prst="rect">
-            <a:avLst/>
-          </a:prstGeom>
-          <a:noFill/>
-        </p:spPr>
-        <p:txBody>
-          <a:bodyPr wrap="square" anchor="t" lIns="18288" rIns="18288" tIns="18288" bIns="18288">
-            <a:spAutoFit/>
-          </a:bodyPr>
-          <a:lstStyle/>
-          <a:p>
-            <a:pPr algn="l">
-              <a:spcAft>
-                <a:spcPts val="400"/>
-              </a:spcAft>
-            </a:pPr>
-            <a:r>
-              <a:rPr sz="1300" b="0">
+            <a:off x="4937760" y="4709159"/>
+            <a:ext cx="6601967" cy="1005840"/>
+          </a:xfrm>
+          <a:prstGeom prst="rect">
+            <a:avLst/>
+          </a:prstGeom>
+          <a:noFill/>
+        </p:spPr>
+        <p:txBody>
+          <a:bodyPr wrap="square" anchor="t" lIns="18288" rIns="18288" tIns="18288" bIns="18288">
+            <a:spAutoFit/>
+          </a:bodyPr>
+          <a:lstStyle/>
+          <a:p>
+            <a:pPr algn="l">
+              <a:spcAft>
+                <a:spcPts val="400"/>
+              </a:spcAft>
+            </a:pPr>
+            <a:r>
+              <a:rPr sz="1500" b="0">
                 <a:solidFill>
                   <a:srgbClr val="1E2836"/>
                 </a:solidFill>
                 <a:latin typeface="Segoe UI"/>
               </a:rPr>
-              <a:t>Пары ADIS — «по месту и времени», не калибровочные; доля покрытия пикселя 6.6·10⁻⁸ объясняет результат.</a:t>
-            </a:r>
-          </a:p>
-        </p:txBody>
-      </p:sp>
-      <p:pic>
-        <p:nvPicPr>
-          <p:cNvPr id="11" name="Picture 10" descr="search_adis_pair.jpg"/>
-          <p:cNvPicPr>
-            <a:picLocks noChangeAspect="1"/>
-          </p:cNvPicPr>
-          <p:nvPr/>
-        </p:nvPicPr>
-        <p:blipFill>
-          <a:blip r:embed="rId2"/>
-          <a:stretch>
-            <a:fillRect/>
-          </a:stretch>
-        </p:blipFill>
-        <p:spPr>
-          <a:xfrm>
-            <a:off x="6035040" y="3205543"/>
-            <a:ext cx="5486400" cy="1361313"/>
-          </a:xfrm>
-          <a:prstGeom prst="rect">
-            <a:avLst/>
-          </a:prstGeom>
-          <a:ln w="9525">
-            <a:solidFill>
-              <a:srgbClr val="DDDFE3"/>
-            </a:solidFill>
-          </a:ln>
-        </p:spPr>
-      </p:pic>
-      <p:sp>
-        <p:nvSpPr>
-          <p:cNvPr id="12" name="TextBox 11"/>
+              <a:t>Реестр пар хранит уровень A–D и причину отказа для каждой строки.</a:t>
+            </a:r>
+          </a:p>
+        </p:txBody>
+      </p:sp>
+      <p:sp>
+        <p:nvSpPr>
+          <p:cNvPr id="11" name="TextBox 10"/>
           <p:cNvSpPr txBox="1"/>
           <p:nvPr/>
         </p:nvSpPr>
@@ -9502,7 +9914,7 @@
       </p:sp>
       <p:sp>
         <p:nvSpPr>
-          <p:cNvPr id="13" name="TextBox 12"/>
+          <p:cNvPr id="12" name="TextBox 11"/>
           <p:cNvSpPr txBox="1"/>
           <p:nvPr/>
         </p:nvSpPr>
@@ -9534,7 +9946,7 @@
                 </a:solidFill>
                 <a:latin typeface="Segoe UI"/>
               </a:rPr>
-              <a:t>17 / 41</a:t>
+              <a:t>17 / 42</a:t>
             </a:r>
           </a:p>
         </p:txBody>
@@ -9599,7 +10011,7 @@
                 </a:solidFill>
                 <a:latin typeface="Segoe UI"/>
               </a:rPr>
-              <a:t>Окна Cózar 2024 — только для проверки, не для обучения</a:t>
+              <a:t>ADIS: 66 пар по месту и времени, видимого сигнала — 0</a:t>
             </a:r>
           </a:p>
         </p:txBody>
@@ -9612,33 +10024,33 @@
         </p:nvSpPr>
         <p:spPr>
           <a:xfrm>
-            <a:off x="649224" y="1783080"/>
-            <a:ext cx="3931920" cy="1143000"/>
-          </a:xfrm>
-          <a:prstGeom prst="rect">
-            <a:avLst/>
-          </a:prstGeom>
-          <a:noFill/>
-        </p:spPr>
-        <p:txBody>
-          <a:bodyPr wrap="square" anchor="t" lIns="18288" rIns="18288" tIns="18288" bIns="18288">
-            <a:spAutoFit/>
-          </a:bodyPr>
-          <a:lstStyle/>
-          <a:p>
-            <a:pPr algn="l">
-              <a:spcAft>
-                <a:spcPts val="400"/>
-              </a:spcAft>
-            </a:pPr>
-            <a:r>
-              <a:rPr sz="7200" b="1">
+            <a:off x="649224" y="1737360"/>
+            <a:ext cx="5120640" cy="857250"/>
+          </a:xfrm>
+          <a:prstGeom prst="rect">
+            <a:avLst/>
+          </a:prstGeom>
+          <a:noFill/>
+        </p:spPr>
+        <p:txBody>
+          <a:bodyPr wrap="square" anchor="t" lIns="18288" rIns="18288" tIns="18288" bIns="18288">
+            <a:spAutoFit/>
+          </a:bodyPr>
+          <a:lstStyle/>
+          <a:p>
+            <a:pPr algn="l">
+              <a:spcAft>
+                <a:spcPts val="400"/>
+              </a:spcAft>
+            </a:pPr>
+            <a:r>
+              <a:rPr sz="5400" b="1">
                 <a:solidFill>
                   <a:srgbClr val="C1400B"/>
                 </a:solidFill>
                 <a:latin typeface="Segoe UI"/>
               </a:rPr>
-              <a:t>14 374</a:t>
+              <a:t>0</a:t>
             </a:r>
           </a:p>
         </p:txBody>
@@ -9651,33 +10063,33 @@
         </p:nvSpPr>
         <p:spPr>
           <a:xfrm>
-            <a:off x="676656" y="2971800"/>
-            <a:ext cx="3931920" cy="822960"/>
-          </a:xfrm>
-          <a:prstGeom prst="rect">
-            <a:avLst/>
-          </a:prstGeom>
-          <a:noFill/>
-        </p:spPr>
-        <p:txBody>
-          <a:bodyPr wrap="square" anchor="t" lIns="18288" rIns="18288" tIns="18288" bIns="18288">
-            <a:spAutoFit/>
-          </a:bodyPr>
-          <a:lstStyle/>
-          <a:p>
-            <a:pPr algn="l">
-              <a:spcAft>
-                <a:spcPts val="400"/>
-              </a:spcAft>
-            </a:pPr>
-            <a:r>
-              <a:rPr sz="1600" b="0">
+            <a:off x="676656" y="2628900"/>
+            <a:ext cx="5120640" cy="822960"/>
+          </a:xfrm>
+          <a:prstGeom prst="rect">
+            <a:avLst/>
+          </a:prstGeom>
+          <a:noFill/>
+        </p:spPr>
+        <p:txBody>
+          <a:bodyPr wrap="square" anchor="t" lIns="18288" rIns="18288" tIns="18288" bIns="18288">
+            <a:spAutoFit/>
+          </a:bodyPr>
+          <a:lstStyle/>
+          <a:p>
+            <a:pPr algn="l">
+              <a:spcAft>
+                <a:spcPts val="400"/>
+              </a:spcAft>
+            </a:pPr>
+            <a:r>
+              <a:rPr sz="1400" b="0">
                 <a:solidFill>
                   <a:srgbClr val="4A5462"/>
                 </a:solidFill>
                 <a:latin typeface="Segoe UI"/>
               </a:rPr>
-              <a:t>окон разметки Cózar 2024</a:t>
+              <a:t>срабатываний в 6 парах с предметами</a:t>
             </a:r>
           </a:p>
         </p:txBody>
@@ -9690,27 +10102,27 @@
         </p:nvSpPr>
         <p:spPr>
           <a:xfrm>
-            <a:off x="4937760" y="1783080"/>
-            <a:ext cx="6601967" cy="274320"/>
-          </a:xfrm>
-          <a:prstGeom prst="rect">
-            <a:avLst/>
-          </a:prstGeom>
-          <a:noFill/>
-        </p:spPr>
-        <p:txBody>
-          <a:bodyPr wrap="square" anchor="t" lIns="18288" rIns="18288" tIns="18288" bIns="18288">
-            <a:spAutoFit/>
-          </a:bodyPr>
-          <a:lstStyle/>
-          <a:p>
-            <a:pPr algn="l">
-              <a:spcAft>
-                <a:spcPts val="400"/>
-              </a:spcAft>
-            </a:pPr>
-            <a:r>
-              <a:rPr sz="1200" b="1">
+            <a:off x="649224" y="3246120"/>
+            <a:ext cx="5120640" cy="256032"/>
+          </a:xfrm>
+          <a:prstGeom prst="rect">
+            <a:avLst/>
+          </a:prstGeom>
+          <a:noFill/>
+        </p:spPr>
+        <p:txBody>
+          <a:bodyPr wrap="square" anchor="t" lIns="18288" rIns="18288" tIns="18288" bIns="18288">
+            <a:spAutoFit/>
+          </a:bodyPr>
+          <a:lstStyle/>
+          <a:p>
+            <a:pPr algn="l">
+              <a:spcAft>
+                <a:spcPts val="400"/>
+              </a:spcAft>
+            </a:pPr>
+            <a:r>
+              <a:rPr sz="1100" b="1">
                 <a:solidFill>
                   <a:srgbClr val="C1400B"/>
                 </a:solidFill>
@@ -9729,33 +10141,33 @@
         </p:nvSpPr>
         <p:spPr>
           <a:xfrm>
-            <a:off x="4937760" y="2057400"/>
-            <a:ext cx="6601967" cy="1005840"/>
-          </a:xfrm>
-          <a:prstGeom prst="rect">
-            <a:avLst/>
-          </a:prstGeom>
-          <a:noFill/>
-        </p:spPr>
-        <p:txBody>
-          <a:bodyPr wrap="square" anchor="t" lIns="18288" rIns="18288" tIns="18288" bIns="18288">
-            <a:spAutoFit/>
-          </a:bodyPr>
-          <a:lstStyle/>
-          <a:p>
-            <a:pPr algn="l">
-              <a:spcAft>
-                <a:spcPts val="400"/>
-              </a:spcAft>
-            </a:pPr>
-            <a:r>
-              <a:rPr sz="1500" b="0">
+            <a:off x="649224" y="3493008"/>
+            <a:ext cx="5120640" cy="701040"/>
+          </a:xfrm>
+          <a:prstGeom prst="rect">
+            <a:avLst/>
+          </a:prstGeom>
+          <a:noFill/>
+        </p:spPr>
+        <p:txBody>
+          <a:bodyPr wrap="square" anchor="t" lIns="18288" rIns="18288" tIns="18288" bIns="18288">
+            <a:spAutoFit/>
+          </a:bodyPr>
+          <a:lstStyle/>
+          <a:p>
+            <a:pPr algn="l">
+              <a:spcAft>
+                <a:spcPts val="400"/>
+              </a:spcAft>
+            </a:pPr>
+            <a:r>
+              <a:rPr sz="1300" b="0">
                 <a:solidFill>
                   <a:srgbClr val="1E2836"/>
                 </a:solidFill>
                 <a:latin typeface="Segoe UI"/>
               </a:rPr>
-              <a:t>Ручная разметка нитей Cózar 2024 годится как независимая проверка детектора.</a:t>
+              <a:t>В пересечениях маршрутов ADIS со снимками детектор увидит посчитанные предметы.</a:t>
             </a:r>
           </a:p>
         </p:txBody>
@@ -9768,27 +10180,27 @@
         </p:nvSpPr>
         <p:spPr>
           <a:xfrm>
-            <a:off x="4937760" y="3108960"/>
-            <a:ext cx="6601967" cy="274320"/>
-          </a:xfrm>
-          <a:prstGeom prst="rect">
-            <a:avLst/>
-          </a:prstGeom>
-          <a:noFill/>
-        </p:spPr>
-        <p:txBody>
-          <a:bodyPr wrap="square" anchor="t" lIns="18288" rIns="18288" tIns="18288" bIns="18288">
-            <a:spAutoFit/>
-          </a:bodyPr>
-          <a:lstStyle/>
-          <a:p>
-            <a:pPr algn="l">
-              <a:spcAft>
-                <a:spcPts val="400"/>
-              </a:spcAft>
-            </a:pPr>
-            <a:r>
-              <a:rPr sz="1200" b="1">
+            <a:off x="649224" y="4221480"/>
+            <a:ext cx="5120640" cy="256032"/>
+          </a:xfrm>
+          <a:prstGeom prst="rect">
+            <a:avLst/>
+          </a:prstGeom>
+          <a:noFill/>
+        </p:spPr>
+        <p:txBody>
+          <a:bodyPr wrap="square" anchor="t" lIns="18288" rIns="18288" tIns="18288" bIns="18288">
+            <a:spAutoFit/>
+          </a:bodyPr>
+          <a:lstStyle/>
+          <a:p>
+            <a:pPr algn="l">
+              <a:spcAft>
+                <a:spcPts val="400"/>
+              </a:spcAft>
+            </a:pPr>
+            <a:r>
+              <a:rPr sz="1100" b="1">
                 <a:solidFill>
                   <a:srgbClr val="C1400B"/>
                 </a:solidFill>
@@ -9807,33 +10219,33 @@
         </p:nvSpPr>
         <p:spPr>
           <a:xfrm>
-            <a:off x="4937760" y="3383279"/>
-            <a:ext cx="6601967" cy="1005840"/>
-          </a:xfrm>
-          <a:prstGeom prst="rect">
-            <a:avLst/>
-          </a:prstGeom>
-          <a:noFill/>
-        </p:spPr>
-        <p:txBody>
-          <a:bodyPr wrap="square" anchor="t" lIns="18288" rIns="18288" tIns="18288" bIns="18288">
-            <a:spAutoFit/>
-          </a:bodyPr>
-          <a:lstStyle/>
-          <a:p>
-            <a:pPr algn="l">
-              <a:spcAft>
-                <a:spcPts val="400"/>
-              </a:spcAft>
-            </a:pPr>
-            <a:r>
-              <a:rPr sz="1500" b="0">
+            <a:off x="649224" y="4468368"/>
+            <a:ext cx="5120640" cy="701040"/>
+          </a:xfrm>
+          <a:prstGeom prst="rect">
+            <a:avLst/>
+          </a:prstGeom>
+          <a:noFill/>
+        </p:spPr>
+        <p:txBody>
+          <a:bodyPr wrap="square" anchor="t" lIns="18288" rIns="18288" tIns="18288" bIns="18288">
+            <a:spAutoFit/>
+          </a:bodyPr>
+          <a:lstStyle/>
+          <a:p>
+            <a:pPr algn="l">
+              <a:spcAft>
+                <a:spcPts val="400"/>
+              </a:spcAft>
+            </a:pPr>
+            <a:r>
+              <a:rPr sz="1300" b="0">
                 <a:solidFill>
                   <a:srgbClr val="1E2836"/>
                 </a:solidFill>
                 <a:latin typeface="Segoe UI"/>
               </a:rPr>
-              <a:t>Сопоставили находки с 14 374 окнами разметки; на демо-сцене — совпадения по зонам.</a:t>
+              <a:t>21 444 отрезков ADIS сопоставлены со снимками в окне по времени; полоса наблюдения против пикселей детектора.</a:t>
             </a:r>
           </a:p>
         </p:txBody>
@@ -9846,27 +10258,27 @@
         </p:nvSpPr>
         <p:spPr>
           <a:xfrm>
-            <a:off x="4937760" y="4434840"/>
-            <a:ext cx="6601967" cy="274320"/>
-          </a:xfrm>
-          <a:prstGeom prst="rect">
-            <a:avLst/>
-          </a:prstGeom>
-          <a:noFill/>
-        </p:spPr>
-        <p:txBody>
-          <a:bodyPr wrap="square" anchor="t" lIns="18288" rIns="18288" tIns="18288" bIns="18288">
-            <a:spAutoFit/>
-          </a:bodyPr>
-          <a:lstStyle/>
-          <a:p>
-            <a:pPr algn="l">
-              <a:spcAft>
-                <a:spcPts val="400"/>
-              </a:spcAft>
-            </a:pPr>
-            <a:r>
-              <a:rPr sz="1200" b="1">
+            <a:off x="649224" y="5196839"/>
+            <a:ext cx="5120640" cy="256032"/>
+          </a:xfrm>
+          <a:prstGeom prst="rect">
+            <a:avLst/>
+          </a:prstGeom>
+          <a:noFill/>
+        </p:spPr>
+        <p:txBody>
+          <a:bodyPr wrap="square" anchor="t" lIns="18288" rIns="18288" tIns="18288" bIns="18288">
+            <a:spAutoFit/>
+          </a:bodyPr>
+          <a:lstStyle/>
+          <a:p>
+            <a:pPr algn="l">
+              <a:spcAft>
+                <a:spcPts val="400"/>
+              </a:spcAft>
+            </a:pPr>
+            <a:r>
+              <a:rPr sz="1100" b="1">
                 <a:solidFill>
                   <a:srgbClr val="C1400B"/>
                 </a:solidFill>
@@ -9885,40 +10297,69 @@
         </p:nvSpPr>
         <p:spPr>
           <a:xfrm>
-            <a:off x="4937760" y="4709159"/>
-            <a:ext cx="6601967" cy="1005840"/>
-          </a:xfrm>
-          <a:prstGeom prst="rect">
-            <a:avLst/>
-          </a:prstGeom>
-          <a:noFill/>
-        </p:spPr>
-        <p:txBody>
-          <a:bodyPr wrap="square" anchor="t" lIns="18288" rIns="18288" tIns="18288" bIns="18288">
-            <a:spAutoFit/>
-          </a:bodyPr>
-          <a:lstStyle/>
-          <a:p>
-            <a:pPr algn="l">
-              <a:spcAft>
-                <a:spcPts val="400"/>
-              </a:spcAft>
-            </a:pPr>
-            <a:r>
-              <a:rPr sz="1500" b="0">
+            <a:off x="649224" y="5443728"/>
+            <a:ext cx="5120640" cy="701040"/>
+          </a:xfrm>
+          <a:prstGeom prst="rect">
+            <a:avLst/>
+          </a:prstGeom>
+          <a:noFill/>
+        </p:spPr>
+        <p:txBody>
+          <a:bodyPr wrap="square" anchor="t" lIns="18288" rIns="18288" tIns="18288" bIns="18288">
+            <a:spAutoFit/>
+          </a:bodyPr>
+          <a:lstStyle/>
+          <a:p>
+            <a:pPr algn="l">
+              <a:spcAft>
+                <a:spcPts val="400"/>
+              </a:spcAft>
+            </a:pPr>
+            <a:r>
+              <a:rPr sz="1300" b="0">
                 <a:solidFill>
                   <a:srgbClr val="1E2836"/>
                 </a:solidFill>
                 <a:latin typeface="Segoe UI"/>
               </a:rPr>
-              <a:t>Используем только как «подтверждение» в карточке, в обучение не берём.</a:t>
-            </a:r>
-          </a:p>
-        </p:txBody>
-      </p:sp>
-      <p:sp>
-        <p:nvSpPr>
-          <p:cNvPr id="11" name="TextBox 10"/>
+              <a:t>Пары ADIS — «по месту и времени», не калибровочные; доля покрытия пикселя 6.6·10⁻⁸ объясняет результат.</a:t>
+            </a:r>
+          </a:p>
+        </p:txBody>
+      </p:sp>
+      <p:pic>
+        <p:nvPicPr>
+          <p:cNvPr id="11" name="Picture 10" descr="search_adis_pair.jpg"/>
+          <p:cNvPicPr>
+            <a:picLocks noChangeAspect="1"/>
+          </p:cNvPicPr>
+          <p:nvPr/>
+        </p:nvPicPr>
+        <p:blipFill>
+          <a:blip r:embed="rId2"/>
+          <a:stretch>
+            <a:fillRect/>
+          </a:stretch>
+        </p:blipFill>
+        <p:spPr>
+          <a:xfrm>
+            <a:off x="6035040" y="3205543"/>
+            <a:ext cx="5486400" cy="1361313"/>
+          </a:xfrm>
+          <a:prstGeom prst="rect">
+            <a:avLst/>
+          </a:prstGeom>
+          <a:ln w="9525">
+            <a:solidFill>
+              <a:srgbClr val="DDDFE3"/>
+            </a:solidFill>
+          </a:ln>
+        </p:spPr>
+      </p:pic>
+      <p:sp>
+        <p:nvSpPr>
+          <p:cNvPr id="12" name="TextBox 11"/>
           <p:cNvSpPr txBox="1"/>
           <p:nvPr/>
         </p:nvSpPr>
@@ -9957,7 +10398,7 @@
       </p:sp>
       <p:sp>
         <p:nvSpPr>
-          <p:cNvPr id="12" name="TextBox 11"/>
+          <p:cNvPr id="13" name="TextBox 12"/>
           <p:cNvSpPr txBox="1"/>
           <p:nvPr/>
         </p:nvSpPr>
@@ -9989,7 +10430,7 @@
                 </a:solidFill>
                 <a:latin typeface="Segoe UI"/>
               </a:rPr>
-              <a:t>18 / 41</a:t>
+              <a:t>18 / 42</a:t>
             </a:r>
           </a:p>
         </p:txBody>
@@ -10054,7 +10495,7 @@
                 </a:solidFill>
                 <a:latin typeface="Segoe UI"/>
               </a:rPr>
-              <a:t>MARIDA: утечек между обучением и тестом нет</a:t>
+              <a:t>Окна Cózar 2024 — только для проверки, не для обучения</a:t>
             </a:r>
           </a:p>
         </p:txBody>
@@ -10093,7 +10534,7 @@
                 </a:solidFill>
                 <a:latin typeface="Segoe UI"/>
               </a:rPr>
-              <a:t>0</a:t>
+              <a:t>14 374</a:t>
             </a:r>
           </a:p>
         </p:txBody>
@@ -10132,7 +10573,7 @@
                 </a:solidFill>
                 <a:latin typeface="Segoe UI"/>
               </a:rPr>
-              <a:t>пересечений train/test</a:t>
+              <a:t>окон разметки Cózar 2024</a:t>
             </a:r>
           </a:p>
         </p:txBody>
@@ -10210,7 +10651,7 @@
                 </a:solidFill>
                 <a:latin typeface="Segoe UI"/>
               </a:rPr>
-              <a:t>Одни и те же сцены или дубликаты могут попасть в обучение и тест.</a:t>
+              <a:t>Ручная разметка нитей Cózar 2024 годится как независимая проверка детектора.</a:t>
             </a:r>
           </a:p>
         </p:txBody>
@@ -10288,7 +10729,7 @@
                 </a:solidFill>
                 <a:latin typeface="Segoe UI"/>
               </a:rPr>
-              <a:t>Сверка по сценам, датам и содержимому; проверено 119 пар, исключено дубликатов 1.</a:t>
+              <a:t>Сопоставили находки с 14 374 окнами разметки; на демо-сцене — совпадения по зонам.</a:t>
             </a:r>
           </a:p>
         </p:txBody>
@@ -10366,7 +10807,7 @@
                 </a:solidFill>
                 <a:latin typeface="Segoe UI"/>
               </a:rPr>
-              <a:t>Находку на снимке обучения MARIDA помечаем и не считаем находкой.</a:t>
+              <a:t>Используем только как «подтверждение» в карточке, в обучение не берём.</a:t>
             </a:r>
           </a:p>
         </p:txBody>
@@ -10444,7 +10885,7 @@
                 </a:solidFill>
                 <a:latin typeface="Segoe UI"/>
               </a:rPr>
-              <a:t>19 / 41</a:t>
+              <a:t>19 / 42</a:t>
             </a:r>
           </a:p>
         </p:txBody>
@@ -10670,13 +11111,13 @@
               </a:spcAft>
             </a:pPr>
             <a:r>
-              <a:rPr sz="2800" b="1">
+              <a:rPr sz="3200" b="1">
                 <a:solidFill>
                   <a:srgbClr val="1E2836"/>
                 </a:solidFill>
                 <a:latin typeface="Segoe UI"/>
               </a:rPr>
-              <a:t>Детектор v2: 13 вариантов с новыми данными — ни один не прошёл правило</a:t>
+              <a:t>MARIDA: утечек между обучением и тестом нет</a:t>
             </a:r>
           </a:p>
         </p:txBody>
@@ -10754,7 +11195,7 @@
                 </a:solidFill>
                 <a:latin typeface="Segoe UI"/>
               </a:rPr>
-              <a:t>принято из 13</a:t>
+              <a:t>пересечений train/test</a:t>
             </a:r>
           </a:p>
         </p:txBody>
@@ -10832,7 +11273,7 @@
                 </a:solidFill>
                 <a:latin typeface="Segoe UI"/>
               </a:rPr>
-              <a:t>Новые размеченные данные (PLP, Floating Objects, суда) улучшат детектор.</a:t>
+              <a:t>Одни и те же сцены или дубликаты могут попасть в обучение и тест.</a:t>
             </a:r>
           </a:p>
         </p:txBody>
@@ -10910,7 +11351,7 @@
                 </a:solidFill>
                 <a:latin typeface="Segoe UI"/>
               </a:rPr>
-              <a:t>13 вариантов × 3 seed против контрольного; правило записано до экспериментов.</a:t>
+              <a:t>Сверка по сценам, датам и содержимому; проверено 119 пар, исключено дубликатов 1.</a:t>
             </a:r>
           </a:p>
         </p:txBody>
@@ -10988,7 +11429,7 @@
                 </a:solidFill>
                 <a:latin typeface="Segoe UI"/>
               </a:rPr>
-              <a:t>В сервисе остаётся прежний LightGBM.</a:t>
+              <a:t>Находку на снимке обучения MARIDA помечаем и не считаем находкой.</a:t>
             </a:r>
           </a:p>
         </p:txBody>
@@ -11066,7 +11507,7 @@
                 </a:solidFill>
                 <a:latin typeface="Segoe UI"/>
               </a:rPr>
-              <a:t>20 / 41</a:t>
+              <a:t>20 / 42</a:t>
             </a:r>
           </a:p>
         </p:txBody>
@@ -11125,13 +11566,13 @@
               </a:spcAft>
             </a:pPr>
             <a:r>
-              <a:rPr sz="3200" b="1">
+              <a:rPr sz="2800" b="1">
                 <a:solidFill>
                   <a:srgbClr val="1E2836"/>
                 </a:solidFill>
                 <a:latin typeface="Segoe UI"/>
               </a:rPr>
-              <a:t>U-Net проигрывает бустингу на узких полосах</a:t>
+              <a:t>Детектор v2: 13 вариантов с новыми данными — ни один не прошёл правило</a:t>
             </a:r>
           </a:p>
         </p:txBody>
@@ -11170,7 +11611,7 @@
                 </a:solidFill>
                 <a:latin typeface="Segoe UI"/>
               </a:rPr>
-              <a:t>0.501</a:t>
+              <a:t>0</a:t>
             </a:r>
           </a:p>
         </p:txBody>
@@ -11209,7 +11650,7 @@
                 </a:solidFill>
                 <a:latin typeface="Segoe UI"/>
               </a:rPr>
-              <a:t>F1 U-Net против 0.871 у LightGBM</a:t>
+              <a:t>принято из 13</a:t>
             </a:r>
           </a:p>
         </p:txBody>
@@ -11287,7 +11728,7 @@
                 </a:solidFill>
                 <a:latin typeface="Segoe UI"/>
               </a:rPr>
-              <a:t>Свёрточная сеть лучше признаков пикселя.</a:t>
+              <a:t>Новые размеченные данные (PLP, Floating Objects, суда) улучшат детектор.</a:t>
             </a:r>
           </a:p>
         </p:txBody>
@@ -11365,7 +11806,7 @@
                 </a:solidFill>
                 <a:latin typeface="Segoe UI"/>
               </a:rPr>
-              <a:t>U-Net на тех же сценах и том же пороговом протоколе; сравнение по сценам (15).</a:t>
+              <a:t>13 вариантов × 3 seed против контрольного; правило записано до экспериментов.</a:t>
             </a:r>
           </a:p>
         </p:txBody>
@@ -11443,7 +11884,7 @@
                 </a:solidFill>
                 <a:latin typeface="Segoe UI"/>
               </a:rPr>
-              <a:t>U-Net — только как бейзлайн.</a:t>
+              <a:t>В сервисе остаётся прежний LightGBM.</a:t>
             </a:r>
           </a:p>
         </p:txBody>
@@ -11521,7 +11962,7 @@
                 </a:solidFill>
                 <a:latin typeface="Segoe UI"/>
               </a:rPr>
-              <a:t>21 / 41</a:t>
+              <a:t>21 / 42</a:t>
             </a:r>
           </a:p>
         </p:txBody>
@@ -11586,7 +12027,7 @@
                 </a:solidFill>
                 <a:latin typeface="Segoe UI"/>
               </a:rPr>
-              <a:t>Слой нефти MADOS — только эксперимент</a:t>
+              <a:t>U-Net проигрывает бустингу на узких полосах</a:t>
             </a:r>
           </a:p>
         </p:txBody>
@@ -11625,7 +12066,7 @@
                 </a:solidFill>
                 <a:latin typeface="Segoe UI"/>
               </a:rPr>
-              <a:t>0.733</a:t>
+              <a:t>0.501</a:t>
             </a:r>
           </a:p>
         </p:txBody>
@@ -11664,7 +12105,7 @@
                 </a:solidFill>
                 <a:latin typeface="Segoe UI"/>
               </a:rPr>
-              <a:t>F1 на тесте MADOS</a:t>
+              <a:t>F1 U-Net против 0.871 у LightGBM</a:t>
             </a:r>
           </a:p>
         </p:txBody>
@@ -11742,7 +12183,7 @@
                 </a:solidFill>
                 <a:latin typeface="Segoe UI"/>
               </a:rPr>
-              <a:t>Голова для нефтяных пятен даст полезный слой.</a:t>
+              <a:t>Свёрточная сеть лучше признаков пикселя.</a:t>
             </a:r>
           </a:p>
         </p:txBody>
@@ -11820,7 +12261,7 @@
                 </a:solidFill>
                 <a:latin typeface="Segoe UI"/>
               </a:rPr>
-              <a:t>Обучили на MADOS, проверили на отложенном тесте и на реальных L2A (Wakashio).</a:t>
+              <a:t>U-Net на тех же сценах и том же пороговом протоколе; сравнение по сценам (15).</a:t>
             </a:r>
           </a:p>
         </p:txBody>
@@ -11898,7 +12339,7 @@
                 </a:solidFill>
                 <a:latin typeface="Segoe UI"/>
               </a:rPr>
-              <a:t>На реальных сценах ложные срабатывания — слой выключен по умолчанию.</a:t>
+              <a:t>U-Net — только как бейзлайн.</a:t>
             </a:r>
           </a:p>
         </p:txBody>
@@ -11976,7 +12417,7 @@
                 </a:solidFill>
                 <a:latin typeface="Segoe UI"/>
               </a:rPr>
-              <a:t>22 / 41</a:t>
+              <a:t>22 / 42</a:t>
             </a:r>
           </a:p>
         </p:txBody>
@@ -12041,7 +12482,7 @@
                 </a:solidFill>
                 <a:latin typeface="Segoe UI"/>
               </a:rPr>
-              <a:t>При ветре ≥ 5 м/с снимок не информативен</a:t>
+              <a:t>Слой нефти MADOS — только эксперимент</a:t>
             </a:r>
           </a:p>
         </p:txBody>
@@ -12080,7 +12521,7 @@
                 </a:solidFill>
                 <a:latin typeface="Segoe UI"/>
               </a:rPr>
-              <a:t>5 м/с</a:t>
+              <a:t>0.733</a:t>
             </a:r>
           </a:p>
         </p:txBody>
@@ -12119,7 +12560,7 @@
                 </a:solidFill>
                 <a:latin typeface="Segoe UI"/>
               </a:rPr>
-              <a:t>порог ветра</a:t>
+              <a:t>F1 на тесте MADOS</a:t>
             </a:r>
           </a:p>
         </p:txBody>
@@ -12197,7 +12638,7 @@
                 </a:solidFill>
                 <a:latin typeface="Segoe UI"/>
               </a:rPr>
-              <a:t>Детектор одинаково работает при любом ветре.</a:t>
+              <a:t>Голова для нефтяных пятен даст полезный слой.</a:t>
             </a:r>
           </a:p>
         </p:txBody>
@@ -12275,7 +12716,7 @@
                 </a:solidFill>
                 <a:latin typeface="Segoe UI"/>
               </a:rPr>
-              <a:t>Ветер ERA5 для каждой зоны; правило из методики Cózar 2024.</a:t>
+              <a:t>Обучили на MADOS, проверили на отложенном тесте и на реальных L2A (Wakashio).</a:t>
             </a:r>
           </a:p>
         </p:txBody>
@@ -12353,7 +12794,7 @@
                 </a:solidFill>
                 <a:latin typeface="Segoe UI"/>
               </a:rPr>
-              <a:t>Зоны с сильным ветром — «недостаточно данных», в знаменатель «обследовано» не входят.</a:t>
+              <a:t>На реальных сценах ложные срабатывания — слой выключен по умолчанию.</a:t>
             </a:r>
           </a:p>
         </p:txBody>
@@ -12431,7 +12872,7 @@
                 </a:solidFill>
                 <a:latin typeface="Segoe UI"/>
               </a:rPr>
-              <a:t>23 / 41</a:t>
+              <a:t>23 / 42</a:t>
             </a:r>
           </a:p>
         </p:txBody>
@@ -12490,13 +12931,13 @@
               </a:spcAft>
             </a:pPr>
             <a:r>
-              <a:rPr sz="2800" b="1">
+              <a:rPr sz="3200" b="1">
                 <a:solidFill>
                   <a:srgbClr val="1E2836"/>
                 </a:solidFill>
                 <a:latin typeface="Segoe UI"/>
               </a:rPr>
-              <a:t>Интервал поля: пуассоновский слишком узкий, бутстреп по дням — честный</a:t>
+              <a:t>При ветре ≥ 5 м/с снимок не информативен</a:t>
             </a:r>
           </a:p>
         </p:txBody>
@@ -12535,7 +12976,7 @@
                 </a:solidFill>
                 <a:latin typeface="Segoe UI"/>
               </a:rPr>
-              <a:t>×3.8</a:t>
+              <a:t>5 м/с</a:t>
             </a:r>
           </a:p>
         </p:txBody>
@@ -12574,7 +13015,7 @@
                 </a:solidFill>
                 <a:latin typeface="Segoe UI"/>
               </a:rPr>
-              <a:t>шире интервал бутстрепа</a:t>
+              <a:t>порог ветра</a:t>
             </a:r>
           </a:p>
         </p:txBody>
@@ -12652,7 +13093,7 @@
                 </a:solidFill>
                 <a:latin typeface="Segoe UI"/>
               </a:rPr>
-              <a:t>Ошибка счёта (Пуассон) описывает неопределённость концентрации.</a:t>
+              <a:t>Детектор одинаково работает при любом ветре.</a:t>
             </a:r>
           </a:p>
         </p:txBody>
@@ -12730,7 +13171,7 @@
                 </a:solidFill>
                 <a:latin typeface="Segoe UI"/>
               </a:rPr>
-              <a:t>Сравнили охват отложенного рейса: пуассоновский интервал и кластерный бутстреп по дням рейса.</a:t>
+              <a:t>Ветер ERA5 для каждой зоны; правило из методики Cózar 2024.</a:t>
             </a:r>
           </a:p>
         </p:txBody>
@@ -12808,7 +13249,7 @@
                 </a:solidFill>
                 <a:latin typeface="Segoe UI"/>
               </a:rPr>
-              <a:t>Показываем бутстреп; пуассоновский — только с подписью «только ошибка счёта».</a:t>
+              <a:t>Зоны с сильным ветром — «недостаточно данных», в знаменатель «обследовано» не входят.</a:t>
             </a:r>
           </a:p>
         </p:txBody>
@@ -12886,7 +13327,7 @@
                 </a:solidFill>
                 <a:latin typeface="Segoe UI"/>
               </a:rPr>
-              <a:t>24 / 41</a:t>
+              <a:t>24 / 42</a:t>
             </a:r>
           </a:p>
         </p:txBody>
@@ -12945,13 +13386,13 @@
               </a:spcAft>
             </a:pPr>
             <a:r>
-              <a:rPr sz="3200" b="1">
+              <a:rPr sz="2800" b="1">
                 <a:solidFill>
                   <a:srgbClr val="1E2836"/>
                 </a:solidFill>
                 <a:latin typeface="Segoe UI"/>
               </a:rPr>
-              <a:t>Прогноз ADIS: модели не лучше медианы профиля</a:t>
+              <a:t>Интервал поля: пуассоновский слишком узкий, бутстреп по дням — честный</a:t>
             </a:r>
           </a:p>
         </p:txBody>
@@ -12990,7 +13431,7 @@
                 </a:solidFill>
                 <a:latin typeface="Segoe UI"/>
               </a:rPr>
-              <a:t>1.27</a:t>
+              <a:t>×3.8</a:t>
             </a:r>
           </a:p>
         </p:txBody>
@@ -13029,7 +13470,7 @@
                 </a:solidFill>
                 <a:latin typeface="Segoe UI"/>
               </a:rPr>
-              <a:t>MAE медианы; лучший кандидат 1.28</a:t>
+              <a:t>шире интервал бутстрепа</a:t>
             </a:r>
           </a:p>
         </p:txBody>
@@ -13107,7 +13548,7 @@
                 </a:solidFill>
                 <a:latin typeface="Segoe UI"/>
               </a:rPr>
-              <a:t>Модель по месту и времени предскажет концентрацию ADIS.</a:t>
+              <a:t>Ошибка счёта (Пуассон) описывает неопределённость концентрации.</a:t>
             </a:r>
           </a:p>
         </p:txBody>
@@ -13185,7 +13626,7 @@
                 </a:solidFill>
                 <a:latin typeface="Segoe UI"/>
               </a:rPr>
-              <a:t>Кандидаты B1, M1, M2 против медианы на отложенных отрезках, правило на val.</a:t>
+              <a:t>Сравнили охват отложенного рейса: пуассоновский интервал и кластерный бутстреп по дням рейса.</a:t>
             </a:r>
           </a:p>
         </p:txBody>
@@ -13263,7 +13704,7 @@
                 </a:solidFill>
                 <a:latin typeface="Segoe UI"/>
               </a:rPr>
-              <a:t>Показываем медиану профиля.</a:t>
+              <a:t>Показываем бутстреп; пуассоновский — только с подписью «только ошибка счёта».</a:t>
             </a:r>
           </a:p>
         </p:txBody>
@@ -13341,7 +13782,7 @@
                 </a:solidFill>
                 <a:latin typeface="Segoe UI"/>
               </a:rPr>
-              <a:t>25 / 41</a:t>
+              <a:t>25 / 42</a:t>
             </a:r>
           </a:p>
         </p:txBody>
@@ -13406,7 +13847,7 @@
                 </a:solidFill>
                 <a:latin typeface="Segoe UI"/>
               </a:rPr>
-              <a:t>Калибровка по ячейкам сетки — отказ</a:t>
+              <a:t>Прогноз ADIS: модели не лучше медианы профиля</a:t>
             </a:r>
           </a:p>
         </p:txBody>
@@ -13445,7 +13886,7 @@
                 </a:solidFill>
                 <a:latin typeface="Segoe UI"/>
               </a:rPr>
-              <a:t>0.18</a:t>
+              <a:t>1.27</a:t>
             </a:r>
           </a:p>
         </p:txBody>
@@ -13484,7 +13925,7 @@
                 </a:solidFill>
                 <a:latin typeface="Segoe UI"/>
               </a:rPr>
-              <a:t>ρ — связь слабая, интервал задевает ноль</a:t>
+              <a:t>MAE медианы; лучший кандидат 1.28</a:t>
             </a:r>
           </a:p>
         </p:txBody>
@@ -13562,7 +14003,7 @@
                 </a:solidFill>
                 <a:latin typeface="Segoe UI"/>
               </a:rPr>
-              <a:t>Климатология поля по ячейкам свяжется с сигналом снимков.</a:t>
+              <a:t>Модель по месту и времени предскажет концентрацию ADIS.</a:t>
             </a:r>
           </a:p>
         </p:txBody>
@@ -13640,7 +14081,7 @@
                 </a:solidFill>
                 <a:latin typeface="Segoe UI"/>
               </a:rPr>
-              <a:t>123 ячеек; ранговая корреляция с доверительным интервалом по дням судна.</a:t>
+              <a:t>Кандидаты B1, M1, M2 против медианы на отложенных отрезках, правило на val.</a:t>
             </a:r>
           </a:p>
         </p:txBody>
@@ -13718,7 +14159,7 @@
                 </a:solidFill>
                 <a:latin typeface="Segoe UI"/>
               </a:rPr>
-              <a:t>Калибровки по ячейкам нет; в одном периоде общих дат поле × спутник — ноль.</a:t>
+              <a:t>Показываем медиану профиля.</a:t>
             </a:r>
           </a:p>
         </p:txBody>
@@ -13796,7 +14237,7 @@
                 </a:solidFill>
                 <a:latin typeface="Segoe UI"/>
               </a:rPr>
-              <a:t>26 / 41</a:t>
+              <a:t>26 / 42</a:t>
             </a:r>
           </a:p>
         </p:txBody>
@@ -13855,13 +14296,13 @@
               </a:spcAft>
             </a:pPr>
             <a:r>
-              <a:rPr sz="2800" b="1">
+              <a:rPr sz="3200" b="1">
                 <a:solidFill>
                   <a:srgbClr val="1E2836"/>
                 </a:solidFill>
                 <a:latin typeface="Segoe UI"/>
               </a:rPr>
-              <a:t>Физика разрешения: при пикселе Sentinel-2 предметы поштучно не считаемы</a:t>
+              <a:t>Калибровка по ячейкам сетки — отказ</a:t>
             </a:r>
           </a:p>
         </p:txBody>
@@ -13874,33 +14315,33 @@
         </p:nvSpPr>
         <p:spPr>
           <a:xfrm>
-            <a:off x="649224" y="1737360"/>
-            <a:ext cx="5120640" cy="857250"/>
-          </a:xfrm>
-          <a:prstGeom prst="rect">
-            <a:avLst/>
-          </a:prstGeom>
-          <a:noFill/>
-        </p:spPr>
-        <p:txBody>
-          <a:bodyPr wrap="square" anchor="t" lIns="18288" rIns="18288" tIns="18288" bIns="18288">
-            <a:spAutoFit/>
-          </a:bodyPr>
-          <a:lstStyle/>
-          <a:p>
-            <a:pPr algn="l">
-              <a:spcAft>
-                <a:spcPts val="400"/>
-              </a:spcAft>
-            </a:pPr>
-            <a:r>
-              <a:rPr sz="5400" b="1">
+            <a:off x="649224" y="1783080"/>
+            <a:ext cx="3931920" cy="1143000"/>
+          </a:xfrm>
+          <a:prstGeom prst="rect">
+            <a:avLst/>
+          </a:prstGeom>
+          <a:noFill/>
+        </p:spPr>
+        <p:txBody>
+          <a:bodyPr wrap="square" anchor="t" lIns="18288" rIns="18288" tIns="18288" bIns="18288">
+            <a:spAutoFit/>
+          </a:bodyPr>
+          <a:lstStyle/>
+          <a:p>
+            <a:pPr algn="l">
+              <a:spcAft>
+                <a:spcPts val="400"/>
+              </a:spcAft>
+            </a:pPr>
+            <a:r>
+              <a:rPr sz="7200" b="1">
                 <a:solidFill>
                   <a:srgbClr val="C1400B"/>
                 </a:solidFill>
                 <a:latin typeface="Segoe UI"/>
               </a:rPr>
-              <a:t>25 %</a:t>
+              <a:t>0.18</a:t>
             </a:r>
           </a:p>
         </p:txBody>
@@ -13913,33 +14354,33 @@
         </p:nvSpPr>
         <p:spPr>
           <a:xfrm>
-            <a:off x="676656" y="2628900"/>
-            <a:ext cx="5120640" cy="822960"/>
-          </a:xfrm>
-          <a:prstGeom prst="rect">
-            <a:avLst/>
-          </a:prstGeom>
-          <a:noFill/>
-        </p:spPr>
-        <p:txBody>
-          <a:bodyPr wrap="square" anchor="t" lIns="18288" rIns="18288" tIns="18288" bIns="18288">
-            <a:spAutoFit/>
-          </a:bodyPr>
-          <a:lstStyle/>
-          <a:p>
-            <a:pPr algn="l">
-              <a:spcAft>
-                <a:spcPts val="400"/>
-              </a:spcAft>
-            </a:pPr>
-            <a:r>
-              <a:rPr sz="1400" b="0">
+            <a:off x="676656" y="2971800"/>
+            <a:ext cx="3931920" cy="822960"/>
+          </a:xfrm>
+          <a:prstGeom prst="rect">
+            <a:avLst/>
+          </a:prstGeom>
+          <a:noFill/>
+        </p:spPr>
+        <p:txBody>
+          <a:bodyPr wrap="square" anchor="t" lIns="18288" rIns="18288" tIns="18288" bIns="18288">
+            <a:spAutoFit/>
+          </a:bodyPr>
+          <a:lstStyle/>
+          <a:p>
+            <a:pPr algn="l">
+              <a:spcAft>
+                <a:spcPts val="400"/>
+              </a:spcAft>
+            </a:pPr>
+            <a:r>
+              <a:rPr sz="1600" b="0">
                 <a:solidFill>
                   <a:srgbClr val="4A5462"/>
                 </a:solidFill>
                 <a:latin typeface="Segoe UI"/>
               </a:rPr>
-              <a:t>предметов считаемы на пикселе 0.3 м</a:t>
+              <a:t>ρ — связь слабая, интервал задевает ноль</a:t>
             </a:r>
           </a:p>
         </p:txBody>
@@ -13952,27 +14393,27 @@
         </p:nvSpPr>
         <p:spPr>
           <a:xfrm>
-            <a:off x="649224" y="3246120"/>
-            <a:ext cx="5120640" cy="256032"/>
-          </a:xfrm>
-          <a:prstGeom prst="rect">
-            <a:avLst/>
-          </a:prstGeom>
-          <a:noFill/>
-        </p:spPr>
-        <p:txBody>
-          <a:bodyPr wrap="square" anchor="t" lIns="18288" rIns="18288" tIns="18288" bIns="18288">
-            <a:spAutoFit/>
-          </a:bodyPr>
-          <a:lstStyle/>
-          <a:p>
-            <a:pPr algn="l">
-              <a:spcAft>
-                <a:spcPts val="400"/>
-              </a:spcAft>
-            </a:pPr>
-            <a:r>
-              <a:rPr sz="1100" b="1">
+            <a:off x="4937760" y="1783080"/>
+            <a:ext cx="6601967" cy="274320"/>
+          </a:xfrm>
+          <a:prstGeom prst="rect">
+            <a:avLst/>
+          </a:prstGeom>
+          <a:noFill/>
+        </p:spPr>
+        <p:txBody>
+          <a:bodyPr wrap="square" anchor="t" lIns="18288" rIns="18288" tIns="18288" bIns="18288">
+            <a:spAutoFit/>
+          </a:bodyPr>
+          <a:lstStyle/>
+          <a:p>
+            <a:pPr algn="l">
+              <a:spcAft>
+                <a:spcPts val="400"/>
+              </a:spcAft>
+            </a:pPr>
+            <a:r>
+              <a:rPr sz="1200" b="1">
                 <a:solidFill>
                   <a:srgbClr val="C1400B"/>
                 </a:solidFill>
@@ -13991,33 +14432,33 @@
         </p:nvSpPr>
         <p:spPr>
           <a:xfrm>
-            <a:off x="649224" y="3493008"/>
-            <a:ext cx="5120640" cy="701040"/>
-          </a:xfrm>
-          <a:prstGeom prst="rect">
-            <a:avLst/>
-          </a:prstGeom>
-          <a:noFill/>
-        </p:spPr>
-        <p:txBody>
-          <a:bodyPr wrap="square" anchor="t" lIns="18288" rIns="18288" tIns="18288" bIns="18288">
-            <a:spAutoFit/>
-          </a:bodyPr>
-          <a:lstStyle/>
-          <a:p>
-            <a:pPr algn="l">
-              <a:spcAft>
-                <a:spcPts val="400"/>
-              </a:spcAft>
-            </a:pPr>
-            <a:r>
-              <a:rPr sz="1300" b="0">
+            <a:off x="4937760" y="2057400"/>
+            <a:ext cx="6601967" cy="1005840"/>
+          </a:xfrm>
+          <a:prstGeom prst="rect">
+            <a:avLst/>
+          </a:prstGeom>
+          <a:noFill/>
+        </p:spPr>
+        <p:txBody>
+          <a:bodyPr wrap="square" anchor="t" lIns="18288" rIns="18288" tIns="18288" bIns="18288">
+            <a:spAutoFit/>
+          </a:bodyPr>
+          <a:lstStyle/>
+          <a:p>
+            <a:pPr algn="l">
+              <a:spcAft>
+                <a:spcPts val="400"/>
+              </a:spcAft>
+            </a:pPr>
+            <a:r>
+              <a:rPr sz="1500" b="0">
                 <a:solidFill>
                   <a:srgbClr val="1E2836"/>
                 </a:solidFill>
                 <a:latin typeface="Segoe UI"/>
               </a:rPr>
-              <a:t>При достаточной модели штуки можно считать по пикселю Sentinel-2.</a:t>
+              <a:t>Климатология поля по ячейкам свяжется с сигналом снимков.</a:t>
             </a:r>
           </a:p>
         </p:txBody>
@@ -14030,27 +14471,27 @@
         </p:nvSpPr>
         <p:spPr>
           <a:xfrm>
-            <a:off x="649224" y="4221480"/>
-            <a:ext cx="5120640" cy="256032"/>
-          </a:xfrm>
-          <a:prstGeom prst="rect">
-            <a:avLst/>
-          </a:prstGeom>
-          <a:noFill/>
-        </p:spPr>
-        <p:txBody>
-          <a:bodyPr wrap="square" anchor="t" lIns="18288" rIns="18288" tIns="18288" bIns="18288">
-            <a:spAutoFit/>
-          </a:bodyPr>
-          <a:lstStyle/>
-          <a:p>
-            <a:pPr algn="l">
-              <a:spcAft>
-                <a:spcPts val="400"/>
-              </a:spcAft>
-            </a:pPr>
-            <a:r>
-              <a:rPr sz="1100" b="1">
+            <a:off x="4937760" y="3108960"/>
+            <a:ext cx="6601967" cy="274320"/>
+          </a:xfrm>
+          <a:prstGeom prst="rect">
+            <a:avLst/>
+          </a:prstGeom>
+          <a:noFill/>
+        </p:spPr>
+        <p:txBody>
+          <a:bodyPr wrap="square" anchor="t" lIns="18288" rIns="18288" tIns="18288" bIns="18288">
+            <a:spAutoFit/>
+          </a:bodyPr>
+          <a:lstStyle/>
+          <a:p>
+            <a:pPr algn="l">
+              <a:spcAft>
+                <a:spcPts val="400"/>
+              </a:spcAft>
+            </a:pPr>
+            <a:r>
+              <a:rPr sz="1200" b="1">
                 <a:solidFill>
                   <a:srgbClr val="C1400B"/>
                 </a:solidFill>
@@ -14069,33 +14510,33 @@
         </p:nvSpPr>
         <p:spPr>
           <a:xfrm>
-            <a:off x="649224" y="4468368"/>
-            <a:ext cx="5120640" cy="701040"/>
-          </a:xfrm>
-          <a:prstGeom prst="rect">
-            <a:avLst/>
-          </a:prstGeom>
-          <a:noFill/>
-        </p:spPr>
-        <p:txBody>
-          <a:bodyPr wrap="square" anchor="t" lIns="18288" rIns="18288" tIns="18288" bIns="18288">
-            <a:spAutoFit/>
-          </a:bodyPr>
-          <a:lstStyle/>
-          <a:p>
-            <a:pPr algn="l">
-              <a:spcAft>
-                <a:spcPts val="400"/>
-              </a:spcAft>
-            </a:pPr>
-            <a:r>
-              <a:rPr sz="1300" b="0">
+            <a:off x="4937760" y="3383279"/>
+            <a:ext cx="6601967" cy="1005840"/>
+          </a:xfrm>
+          <a:prstGeom prst="rect">
+            <a:avLst/>
+          </a:prstGeom>
+          <a:noFill/>
+        </p:spPr>
+        <p:txBody>
+          <a:bodyPr wrap="square" anchor="t" lIns="18288" rIns="18288" tIns="18288" bIns="18288">
+            <a:spAutoFit/>
+          </a:bodyPr>
+          <a:lstStyle/>
+          <a:p>
+            <a:pPr algn="l">
+              <a:spcAft>
+                <a:spcPts val="400"/>
+              </a:spcAft>
+            </a:pPr>
+            <a:r>
+              <a:rPr sz="1500" b="0">
                 <a:solidFill>
                   <a:srgbClr val="1E2836"/>
                 </a:solidFill>
                 <a:latin typeface="Segoe UI"/>
               </a:rPr>
-              <a:t>Распределение размеров предметов против размера пикселя разных спутников.</a:t>
+              <a:t>123 ячеек; ранговая корреляция с доверительным интервалом по дням судна.</a:t>
             </a:r>
           </a:p>
         </p:txBody>
@@ -14108,27 +14549,27 @@
         </p:nvSpPr>
         <p:spPr>
           <a:xfrm>
-            <a:off x="649224" y="5196839"/>
-            <a:ext cx="5120640" cy="256032"/>
-          </a:xfrm>
-          <a:prstGeom prst="rect">
-            <a:avLst/>
-          </a:prstGeom>
-          <a:noFill/>
-        </p:spPr>
-        <p:txBody>
-          <a:bodyPr wrap="square" anchor="t" lIns="18288" rIns="18288" tIns="18288" bIns="18288">
-            <a:spAutoFit/>
-          </a:bodyPr>
-          <a:lstStyle/>
-          <a:p>
-            <a:pPr algn="l">
-              <a:spcAft>
-                <a:spcPts val="400"/>
-              </a:spcAft>
-            </a:pPr>
-            <a:r>
-              <a:rPr sz="1100" b="1">
+            <a:off x="4937760" y="4434840"/>
+            <a:ext cx="6601967" cy="274320"/>
+          </a:xfrm>
+          <a:prstGeom prst="rect">
+            <a:avLst/>
+          </a:prstGeom>
+          <a:noFill/>
+        </p:spPr>
+        <p:txBody>
+          <a:bodyPr wrap="square" anchor="t" lIns="18288" rIns="18288" tIns="18288" bIns="18288">
+            <a:spAutoFit/>
+          </a:bodyPr>
+          <a:lstStyle/>
+          <a:p>
+            <a:pPr algn="l">
+              <a:spcAft>
+                <a:spcPts val="400"/>
+              </a:spcAft>
+            </a:pPr>
+            <a:r>
+              <a:rPr sz="1200" b="1">
                 <a:solidFill>
                   <a:srgbClr val="C1400B"/>
                 </a:solidFill>
@@ -14147,69 +14588,40 @@
         </p:nvSpPr>
         <p:spPr>
           <a:xfrm>
-            <a:off x="649224" y="5443728"/>
-            <a:ext cx="5120640" cy="701040"/>
-          </a:xfrm>
-          <a:prstGeom prst="rect">
-            <a:avLst/>
-          </a:prstGeom>
-          <a:noFill/>
-        </p:spPr>
-        <p:txBody>
-          <a:bodyPr wrap="square" anchor="t" lIns="18288" rIns="18288" tIns="18288" bIns="18288">
-            <a:spAutoFit/>
-          </a:bodyPr>
-          <a:lstStyle/>
-          <a:p>
-            <a:pPr algn="l">
-              <a:spcAft>
-                <a:spcPts val="400"/>
-              </a:spcAft>
-            </a:pPr>
-            <a:r>
-              <a:rPr sz="1300" b="0">
+            <a:off x="4937760" y="4709159"/>
+            <a:ext cx="6601967" cy="1005840"/>
+          </a:xfrm>
+          <a:prstGeom prst="rect">
+            <a:avLst/>
+          </a:prstGeom>
+          <a:noFill/>
+        </p:spPr>
+        <p:txBody>
+          <a:bodyPr wrap="square" anchor="t" lIns="18288" rIns="18288" tIns="18288" bIns="18288">
+            <a:spAutoFit/>
+          </a:bodyPr>
+          <a:lstStyle/>
+          <a:p>
+            <a:pPr algn="l">
+              <a:spcAft>
+                <a:spcPts val="400"/>
+              </a:spcAft>
+            </a:pPr>
+            <a:r>
+              <a:rPr sz="1500" b="0">
                 <a:solidFill>
                   <a:srgbClr val="1E2836"/>
                 </a:solidFill>
                 <a:latin typeface="Segoe UI"/>
               </a:rPr>
-              <a:t>На Sentinel-2 — только зоны скоплений; штуки — поле и детальное фото.</a:t>
-            </a:r>
-          </a:p>
-        </p:txBody>
-      </p:sp>
-      <p:pic>
-        <p:nvPicPr>
-          <p:cNvPr id="11" name="Picture 10" descr="units_ladder.png"/>
-          <p:cNvPicPr>
-            <a:picLocks noChangeAspect="1"/>
-          </p:cNvPicPr>
-          <p:nvPr/>
-        </p:nvPicPr>
-        <p:blipFill>
-          <a:blip r:embed="rId2"/>
-          <a:stretch>
-            <a:fillRect/>
-          </a:stretch>
-        </p:blipFill>
-        <p:spPr>
-          <a:xfrm>
-            <a:off x="6035040" y="2961232"/>
-            <a:ext cx="5486400" cy="1849935"/>
-          </a:xfrm>
-          <a:prstGeom prst="rect">
-            <a:avLst/>
-          </a:prstGeom>
-          <a:ln w="9525">
-            <a:solidFill>
-              <a:srgbClr val="DDDFE3"/>
-            </a:solidFill>
-          </a:ln>
-        </p:spPr>
-      </p:pic>
-      <p:sp>
-        <p:nvSpPr>
-          <p:cNvPr id="12" name="TextBox 11"/>
+              <a:t>Калибровки по ячейкам нет; в одном периоде общих дат поле × спутник — ноль.</a:t>
+            </a:r>
+          </a:p>
+        </p:txBody>
+      </p:sp>
+      <p:sp>
+        <p:nvSpPr>
+          <p:cNvPr id="11" name="TextBox 10"/>
           <p:cNvSpPr txBox="1"/>
           <p:nvPr/>
         </p:nvSpPr>
@@ -14248,7 +14660,7 @@
       </p:sp>
       <p:sp>
         <p:nvSpPr>
-          <p:cNvPr id="13" name="TextBox 12"/>
+          <p:cNvPr id="12" name="TextBox 11"/>
           <p:cNvSpPr txBox="1"/>
           <p:nvPr/>
         </p:nvSpPr>
@@ -14280,7 +14692,7 @@
                 </a:solidFill>
                 <a:latin typeface="Segoe UI"/>
               </a:rPr>
-              <a:t>27 / 41</a:t>
+              <a:t>27 / 42</a:t>
             </a:r>
           </a:p>
         </p:txBody>
@@ -14339,13 +14751,13 @@
               </a:spcAft>
             </a:pPr>
             <a:r>
-              <a:rPr sz="3200" b="1">
+              <a:rPr sz="2800" b="1">
                 <a:solidFill>
                   <a:srgbClr val="1E2836"/>
                 </a:solidFill>
                 <a:latin typeface="Segoe UI"/>
               </a:rPr>
-              <a:t>Снимков сверхвысокого разрешения в день наблюдений ADIS нет</a:t>
+              <a:t>Физика разрешения: при пикселе Sentinel-2 предметы поштучно не считаемы</a:t>
             </a:r>
           </a:p>
         </p:txBody>
@@ -14358,33 +14770,33 @@
         </p:nvSpPr>
         <p:spPr>
           <a:xfrm>
-            <a:off x="649224" y="1783080"/>
-            <a:ext cx="3931920" cy="1143000"/>
-          </a:xfrm>
-          <a:prstGeom prst="rect">
-            <a:avLst/>
-          </a:prstGeom>
-          <a:noFill/>
-        </p:spPr>
-        <p:txBody>
-          <a:bodyPr wrap="square" anchor="t" lIns="18288" rIns="18288" tIns="18288" bIns="18288">
-            <a:spAutoFit/>
-          </a:bodyPr>
-          <a:lstStyle/>
-          <a:p>
-            <a:pPr algn="l">
-              <a:spcAft>
-                <a:spcPts val="400"/>
-              </a:spcAft>
-            </a:pPr>
-            <a:r>
-              <a:rPr sz="7200" b="1">
+            <a:off x="649224" y="1737360"/>
+            <a:ext cx="5120640" cy="857250"/>
+          </a:xfrm>
+          <a:prstGeom prst="rect">
+            <a:avLst/>
+          </a:prstGeom>
+          <a:noFill/>
+        </p:spPr>
+        <p:txBody>
+          <a:bodyPr wrap="square" anchor="t" lIns="18288" rIns="18288" tIns="18288" bIns="18288">
+            <a:spAutoFit/>
+          </a:bodyPr>
+          <a:lstStyle/>
+          <a:p>
+            <a:pPr algn="l">
+              <a:spcAft>
+                <a:spcPts val="400"/>
+              </a:spcAft>
+            </a:pPr>
+            <a:r>
+              <a:rPr sz="5400" b="1">
                 <a:solidFill>
                   <a:srgbClr val="C1400B"/>
                 </a:solidFill>
                 <a:latin typeface="Segoe UI"/>
               </a:rPr>
-              <a:t>0</a:t>
+              <a:t>25 %</a:t>
             </a:r>
           </a:p>
         </p:txBody>
@@ -14397,33 +14809,33 @@
         </p:nvSpPr>
         <p:spPr>
           <a:xfrm>
-            <a:off x="676656" y="2971800"/>
-            <a:ext cx="3931920" cy="822960"/>
-          </a:xfrm>
-          <a:prstGeom prst="rect">
-            <a:avLst/>
-          </a:prstGeom>
-          <a:noFill/>
-        </p:spPr>
-        <p:txBody>
-          <a:bodyPr wrap="square" anchor="t" lIns="18288" rIns="18288" tIns="18288" bIns="18288">
-            <a:spAutoFit/>
-          </a:bodyPr>
-          <a:lstStyle/>
-          <a:p>
-            <a:pPr algn="l">
-              <a:spcAft>
-                <a:spcPts val="400"/>
-              </a:spcAft>
-            </a:pPr>
-            <a:r>
-              <a:rPr sz="1600" b="0">
+            <a:off x="676656" y="2628900"/>
+            <a:ext cx="5120640" cy="822960"/>
+          </a:xfrm>
+          <a:prstGeom prst="rect">
+            <a:avLst/>
+          </a:prstGeom>
+          <a:noFill/>
+        </p:spPr>
+        <p:txBody>
+          <a:bodyPr wrap="square" anchor="t" lIns="18288" rIns="18288" tIns="18288" bIns="18288">
+            <a:spAutoFit/>
+          </a:bodyPr>
+          <a:lstStyle/>
+          <a:p>
+            <a:pPr algn="l">
+              <a:spcAft>
+                <a:spcPts val="400"/>
+              </a:spcAft>
+            </a:pPr>
+            <a:r>
+              <a:rPr sz="1400" b="0">
                 <a:solidFill>
                   <a:srgbClr val="4A5462"/>
                 </a:solidFill>
                 <a:latin typeface="Segoe UI"/>
               </a:rPr>
-              <a:t>VHR-снимков в тот же день</a:t>
+              <a:t>предметов считаемы на пикселе 0.3 м</a:t>
             </a:r>
           </a:p>
         </p:txBody>
@@ -14436,27 +14848,27 @@
         </p:nvSpPr>
         <p:spPr>
           <a:xfrm>
-            <a:off x="4937760" y="1783080"/>
-            <a:ext cx="6601967" cy="274320"/>
-          </a:xfrm>
-          <a:prstGeom prst="rect">
-            <a:avLst/>
-          </a:prstGeom>
-          <a:noFill/>
-        </p:spPr>
-        <p:txBody>
-          <a:bodyPr wrap="square" anchor="t" lIns="18288" rIns="18288" tIns="18288" bIns="18288">
-            <a:spAutoFit/>
-          </a:bodyPr>
-          <a:lstStyle/>
-          <a:p>
-            <a:pPr algn="l">
-              <a:spcAft>
-                <a:spcPts val="400"/>
-              </a:spcAft>
-            </a:pPr>
-            <a:r>
-              <a:rPr sz="1200" b="1">
+            <a:off x="649224" y="3246120"/>
+            <a:ext cx="5120640" cy="256032"/>
+          </a:xfrm>
+          <a:prstGeom prst="rect">
+            <a:avLst/>
+          </a:prstGeom>
+          <a:noFill/>
+        </p:spPr>
+        <p:txBody>
+          <a:bodyPr wrap="square" anchor="t" lIns="18288" rIns="18288" tIns="18288" bIns="18288">
+            <a:spAutoFit/>
+          </a:bodyPr>
+          <a:lstStyle/>
+          <a:p>
+            <a:pPr algn="l">
+              <a:spcAft>
+                <a:spcPts val="400"/>
+              </a:spcAft>
+            </a:pPr>
+            <a:r>
+              <a:rPr sz="1100" b="1">
                 <a:solidFill>
                   <a:srgbClr val="C1400B"/>
                 </a:solidFill>
@@ -14475,33 +14887,33 @@
         </p:nvSpPr>
         <p:spPr>
           <a:xfrm>
-            <a:off x="4937760" y="2057400"/>
-            <a:ext cx="6601967" cy="1005840"/>
-          </a:xfrm>
-          <a:prstGeom prst="rect">
-            <a:avLst/>
-          </a:prstGeom>
-          <a:noFill/>
-        </p:spPr>
-        <p:txBody>
-          <a:bodyPr wrap="square" anchor="t" lIns="18288" rIns="18288" tIns="18288" bIns="18288">
-            <a:spAutoFit/>
-          </a:bodyPr>
-          <a:lstStyle/>
-          <a:p>
-            <a:pPr algn="l">
-              <a:spcAft>
-                <a:spcPts val="400"/>
-              </a:spcAft>
-            </a:pPr>
-            <a:r>
-              <a:rPr sz="1500" b="0">
+            <a:off x="649224" y="3493008"/>
+            <a:ext cx="5120640" cy="701040"/>
+          </a:xfrm>
+          <a:prstGeom prst="rect">
+            <a:avLst/>
+          </a:prstGeom>
+          <a:noFill/>
+        </p:spPr>
+        <p:txBody>
+          <a:bodyPr wrap="square" anchor="t" lIns="18288" rIns="18288" tIns="18288" bIns="18288">
+            <a:spAutoFit/>
+          </a:bodyPr>
+          <a:lstStyle/>
+          <a:p>
+            <a:pPr algn="l">
+              <a:spcAft>
+                <a:spcPts val="400"/>
+              </a:spcAft>
+            </a:pPr>
+            <a:r>
+              <a:rPr sz="1300" b="0">
                 <a:solidFill>
                   <a:srgbClr val="1E2836"/>
                 </a:solidFill>
                 <a:latin typeface="Segoe UI"/>
               </a:rPr>
-              <a:t>Для пар ADIS найдутся снимки VHR, где предмет виден.</a:t>
+              <a:t>При достаточной модели штуки можно считать по пикселю Sentinel-2.</a:t>
             </a:r>
           </a:p>
         </p:txBody>
@@ -14514,27 +14926,27 @@
         </p:nvSpPr>
         <p:spPr>
           <a:xfrm>
-            <a:off x="4937760" y="3108960"/>
-            <a:ext cx="6601967" cy="274320"/>
-          </a:xfrm>
-          <a:prstGeom prst="rect">
-            <a:avLst/>
-          </a:prstGeom>
-          <a:noFill/>
-        </p:spPr>
-        <p:txBody>
-          <a:bodyPr wrap="square" anchor="t" lIns="18288" rIns="18288" tIns="18288" bIns="18288">
-            <a:spAutoFit/>
-          </a:bodyPr>
-          <a:lstStyle/>
-          <a:p>
-            <a:pPr algn="l">
-              <a:spcAft>
-                <a:spcPts val="400"/>
-              </a:spcAft>
-            </a:pPr>
-            <a:r>
-              <a:rPr sz="1200" b="1">
+            <a:off x="649224" y="4221480"/>
+            <a:ext cx="5120640" cy="256032"/>
+          </a:xfrm>
+          <a:prstGeom prst="rect">
+            <a:avLst/>
+          </a:prstGeom>
+          <a:noFill/>
+        </p:spPr>
+        <p:txBody>
+          <a:bodyPr wrap="square" anchor="t" lIns="18288" rIns="18288" tIns="18288" bIns="18288">
+            <a:spAutoFit/>
+          </a:bodyPr>
+          <a:lstStyle/>
+          <a:p>
+            <a:pPr algn="l">
+              <a:spcAft>
+                <a:spcPts val="400"/>
+              </a:spcAft>
+            </a:pPr>
+            <a:r>
+              <a:rPr sz="1100" b="1">
                 <a:solidFill>
                   <a:srgbClr val="C1400B"/>
                 </a:solidFill>
@@ -14553,33 +14965,33 @@
         </p:nvSpPr>
         <p:spPr>
           <a:xfrm>
-            <a:off x="4937760" y="3383279"/>
-            <a:ext cx="6601967" cy="1005840"/>
-          </a:xfrm>
-          <a:prstGeom prst="rect">
-            <a:avLst/>
-          </a:prstGeom>
-          <a:noFill/>
-        </p:spPr>
-        <p:txBody>
-          <a:bodyPr wrap="square" anchor="t" lIns="18288" rIns="18288" tIns="18288" bIns="18288">
-            <a:spAutoFit/>
-          </a:bodyPr>
-          <a:lstStyle/>
-          <a:p>
-            <a:pPr algn="l">
-              <a:spcAft>
-                <a:spcPts val="400"/>
-              </a:spcAft>
-            </a:pPr>
-            <a:r>
-              <a:rPr sz="1500" b="0">
+            <a:off x="649224" y="4468368"/>
+            <a:ext cx="5120640" cy="701040"/>
+          </a:xfrm>
+          <a:prstGeom prst="rect">
+            <a:avLst/>
+          </a:prstGeom>
+          <a:noFill/>
+        </p:spPr>
+        <p:txBody>
+          <a:bodyPr wrap="square" anchor="t" lIns="18288" rIns="18288" tIns="18288" bIns="18288">
+            <a:spAutoFit/>
+          </a:bodyPr>
+          <a:lstStyle/>
+          <a:p>
+            <a:pPr algn="l">
+              <a:spcAft>
+                <a:spcPts val="400"/>
+              </a:spcAft>
+            </a:pPr>
+            <a:r>
+              <a:rPr sz="1300" b="0">
                 <a:solidFill>
                   <a:srgbClr val="1E2836"/>
                 </a:solidFill>
                 <a:latin typeface="Segoe UI"/>
               </a:rPr>
-              <a:t>Поиск в открытых каталогах по отрезкам ADIS в тот же день.</a:t>
+              <a:t>Распределение размеров предметов против размера пикселя разных спутников.</a:t>
             </a:r>
           </a:p>
         </p:txBody>
@@ -14592,27 +15004,27 @@
         </p:nvSpPr>
         <p:spPr>
           <a:xfrm>
-            <a:off x="4937760" y="4434840"/>
-            <a:ext cx="6601967" cy="274320"/>
-          </a:xfrm>
-          <a:prstGeom prst="rect">
-            <a:avLst/>
-          </a:prstGeom>
-          <a:noFill/>
-        </p:spPr>
-        <p:txBody>
-          <a:bodyPr wrap="square" anchor="t" lIns="18288" rIns="18288" tIns="18288" bIns="18288">
-            <a:spAutoFit/>
-          </a:bodyPr>
-          <a:lstStyle/>
-          <a:p>
-            <a:pPr algn="l">
-              <a:spcAft>
-                <a:spcPts val="400"/>
-              </a:spcAft>
-            </a:pPr>
-            <a:r>
-              <a:rPr sz="1200" b="1">
+            <a:off x="649224" y="5196839"/>
+            <a:ext cx="5120640" cy="256032"/>
+          </a:xfrm>
+          <a:prstGeom prst="rect">
+            <a:avLst/>
+          </a:prstGeom>
+          <a:noFill/>
+        </p:spPr>
+        <p:txBody>
+          <a:bodyPr wrap="square" anchor="t" lIns="18288" rIns="18288" tIns="18288" bIns="18288">
+            <a:spAutoFit/>
+          </a:bodyPr>
+          <a:lstStyle/>
+          <a:p>
+            <a:pPr algn="l">
+              <a:spcAft>
+                <a:spcPts val="400"/>
+              </a:spcAft>
+            </a:pPr>
+            <a:r>
+              <a:rPr sz="1100" b="1">
                 <a:solidFill>
                   <a:srgbClr val="C1400B"/>
                 </a:solidFill>
@@ -14631,40 +15043,69 @@
         </p:nvSpPr>
         <p:spPr>
           <a:xfrm>
-            <a:off x="4937760" y="4709159"/>
-            <a:ext cx="6601967" cy="1005840"/>
-          </a:xfrm>
-          <a:prstGeom prst="rect">
-            <a:avLst/>
-          </a:prstGeom>
-          <a:noFill/>
-        </p:spPr>
-        <p:txBody>
-          <a:bodyPr wrap="square" anchor="t" lIns="18288" rIns="18288" tIns="18288" bIns="18288">
-            <a:spAutoFit/>
-          </a:bodyPr>
-          <a:lstStyle/>
-          <a:p>
-            <a:pPr algn="l">
-              <a:spcAft>
-                <a:spcPts val="400"/>
-              </a:spcAft>
-            </a:pPr>
-            <a:r>
-              <a:rPr sz="1500" b="0">
+            <a:off x="649224" y="5443728"/>
+            <a:ext cx="5120640" cy="701040"/>
+          </a:xfrm>
+          <a:prstGeom prst="rect">
+            <a:avLst/>
+          </a:prstGeom>
+          <a:noFill/>
+        </p:spPr>
+        <p:txBody>
+          <a:bodyPr wrap="square" anchor="t" lIns="18288" rIns="18288" tIns="18288" bIns="18288">
+            <a:spAutoFit/>
+          </a:bodyPr>
+          <a:lstStyle/>
+          <a:p>
+            <a:pPr algn="l">
+              <a:spcAft>
+                <a:spcPts val="400"/>
+              </a:spcAft>
+            </a:pPr>
+            <a:r>
+              <a:rPr sz="1300" b="0">
                 <a:solidFill>
                   <a:srgbClr val="1E2836"/>
                 </a:solidFill>
                 <a:latin typeface="Segoe UI"/>
               </a:rPr>
-              <a:t>VHR — в плане развития (запросы операторам).</a:t>
-            </a:r>
-          </a:p>
-        </p:txBody>
-      </p:sp>
-      <p:sp>
-        <p:nvSpPr>
-          <p:cNvPr id="11" name="TextBox 10"/>
+              <a:t>На Sentinel-2 — только зоны скоплений; штуки — поле и детальное фото.</a:t>
+            </a:r>
+          </a:p>
+        </p:txBody>
+      </p:sp>
+      <p:pic>
+        <p:nvPicPr>
+          <p:cNvPr id="11" name="Picture 10" descr="units_ladder.png"/>
+          <p:cNvPicPr>
+            <a:picLocks noChangeAspect="1"/>
+          </p:cNvPicPr>
+          <p:nvPr/>
+        </p:nvPicPr>
+        <p:blipFill>
+          <a:blip r:embed="rId2"/>
+          <a:stretch>
+            <a:fillRect/>
+          </a:stretch>
+        </p:blipFill>
+        <p:spPr>
+          <a:xfrm>
+            <a:off x="6035040" y="2961232"/>
+            <a:ext cx="5486400" cy="1849935"/>
+          </a:xfrm>
+          <a:prstGeom prst="rect">
+            <a:avLst/>
+          </a:prstGeom>
+          <a:ln w="9525">
+            <a:solidFill>
+              <a:srgbClr val="DDDFE3"/>
+            </a:solidFill>
+          </a:ln>
+        </p:spPr>
+      </p:pic>
+      <p:sp>
+        <p:nvSpPr>
+          <p:cNvPr id="12" name="TextBox 11"/>
           <p:cNvSpPr txBox="1"/>
           <p:nvPr/>
         </p:nvSpPr>
@@ -14703,7 +15144,7 @@
       </p:sp>
       <p:sp>
         <p:nvSpPr>
-          <p:cNvPr id="12" name="TextBox 11"/>
+          <p:cNvPr id="13" name="TextBox 12"/>
           <p:cNvSpPr txBox="1"/>
           <p:nvPr/>
         </p:nvSpPr>
@@ -14735,7 +15176,7 @@
                 </a:solidFill>
                 <a:latin typeface="Segoe UI"/>
               </a:rPr>
-              <a:t>28 / 41</a:t>
+              <a:t>28 / 42</a:t>
             </a:r>
           </a:p>
         </p:txBody>
@@ -14794,13 +15235,13 @@
               </a:spcAft>
             </a:pPr>
             <a:r>
-              <a:rPr sz="2800" b="1">
+              <a:rPr sz="3200" b="1">
                 <a:solidFill>
                   <a:srgbClr val="1E2836"/>
                 </a:solidFill>
                 <a:latin typeface="Segoe UI"/>
               </a:rPr>
-              <a:t>Искусственные мишени PLP: спектр пикселя не переводится в долю покрытия</a:t>
+              <a:t>Снимков сверхвысокого разрешения в день наблюдений ADIS нет</a:t>
             </a:r>
           </a:p>
         </p:txBody>
@@ -14839,7 +15280,7 @@
                 </a:solidFill>
                 <a:latin typeface="Segoe UI"/>
               </a:rPr>
-              <a:t>0.09</a:t>
+              <a:t>0</a:t>
             </a:r>
           </a:p>
         </p:txBody>
@@ -14878,7 +15319,7 @@
                 </a:solidFill>
                 <a:latin typeface="Segoe UI"/>
               </a:rPr>
-              <a:t>ρ FDI с долей покрытия</a:t>
+              <a:t>VHR-снимков в тот же день</a:t>
             </a:r>
           </a:p>
         </p:txBody>
@@ -14956,7 +15397,7 @@
                 </a:solidFill>
                 <a:latin typeface="Segoe UI"/>
               </a:rPr>
-              <a:t>По спектру пикселя можно восстановить долю площади под пластиком.</a:t>
+              <a:t>Для пар ADIS найдутся снимки VHR, где предмет виден.</a:t>
             </a:r>
           </a:p>
         </p:txBody>
@@ -15034,7 +15475,7 @@
                 </a:solidFill>
                 <a:latin typeface="Segoe UI"/>
               </a:rPr>
-              <a:t>63 пикселей мишеней, 5 дат; проверка с отложенной датой.</a:t>
+              <a:t>Поиск в открытых каталогах по отрезкам ADIS в тот же день.</a:t>
             </a:r>
           </a:p>
         </p:txBody>
@@ -15112,7 +15553,7 @@
                 </a:solidFill>
                 <a:latin typeface="Segoe UI"/>
               </a:rPr>
-              <a:t>Перевод «спектр → покрытие» не подтверждён; сценарий по мишеням — только исследовательский.</a:t>
+              <a:t>VHR — в плане развития (запросы операторам).</a:t>
             </a:r>
           </a:p>
         </p:txBody>
@@ -15190,7 +15631,7 @@
                 </a:solidFill>
                 <a:latin typeface="Segoe UI"/>
               </a:rPr>
-              <a:t>29 / 41</a:t>
+              <a:t>29 / 42</a:t>
             </a:r>
           </a:p>
         </p:txBody>
@@ -15632,13 +16073,13 @@
               </a:spcAft>
             </a:pPr>
             <a:r>
-              <a:rPr sz="3200" b="1">
+              <a:rPr sz="2800" b="1">
                 <a:solidFill>
                   <a:srgbClr val="1E2836"/>
                 </a:solidFill>
                 <a:latin typeface="Segoe UI"/>
               </a:rPr>
-              <a:t>Синтетические пары — отклонены</a:t>
+              <a:t>Искусственные мишени PLP: спектр пикселя не переводится в долю покрытия</a:t>
             </a:r>
           </a:p>
         </p:txBody>
@@ -15652,7 +16093,85 @@
         <p:spPr>
           <a:xfrm>
             <a:off x="649224" y="1783080"/>
-            <a:ext cx="10890504" cy="274320"/>
+            <a:ext cx="3931920" cy="1143000"/>
+          </a:xfrm>
+          <a:prstGeom prst="rect">
+            <a:avLst/>
+          </a:prstGeom>
+          <a:noFill/>
+        </p:spPr>
+        <p:txBody>
+          <a:bodyPr wrap="square" anchor="t" lIns="18288" rIns="18288" tIns="18288" bIns="18288">
+            <a:spAutoFit/>
+          </a:bodyPr>
+          <a:lstStyle/>
+          <a:p>
+            <a:pPr algn="l">
+              <a:spcAft>
+                <a:spcPts val="400"/>
+              </a:spcAft>
+            </a:pPr>
+            <a:r>
+              <a:rPr sz="7200" b="1">
+                <a:solidFill>
+                  <a:srgbClr val="C1400B"/>
+                </a:solidFill>
+                <a:latin typeface="Segoe UI"/>
+              </a:rPr>
+              <a:t>0.09</a:t>
+            </a:r>
+          </a:p>
+        </p:txBody>
+      </p:sp>
+      <p:sp>
+        <p:nvSpPr>
+          <p:cNvPr id="4" name="TextBox 3"/>
+          <p:cNvSpPr txBox="1"/>
+          <p:nvPr/>
+        </p:nvSpPr>
+        <p:spPr>
+          <a:xfrm>
+            <a:off x="676656" y="2971800"/>
+            <a:ext cx="3931920" cy="822960"/>
+          </a:xfrm>
+          <a:prstGeom prst="rect">
+            <a:avLst/>
+          </a:prstGeom>
+          <a:noFill/>
+        </p:spPr>
+        <p:txBody>
+          <a:bodyPr wrap="square" anchor="t" lIns="18288" rIns="18288" tIns="18288" bIns="18288">
+            <a:spAutoFit/>
+          </a:bodyPr>
+          <a:lstStyle/>
+          <a:p>
+            <a:pPr algn="l">
+              <a:spcAft>
+                <a:spcPts val="400"/>
+              </a:spcAft>
+            </a:pPr>
+            <a:r>
+              <a:rPr sz="1600" b="0">
+                <a:solidFill>
+                  <a:srgbClr val="4A5462"/>
+                </a:solidFill>
+                <a:latin typeface="Segoe UI"/>
+              </a:rPr>
+              <a:t>ρ FDI с долей покрытия</a:t>
+            </a:r>
+          </a:p>
+        </p:txBody>
+      </p:sp>
+      <p:sp>
+        <p:nvSpPr>
+          <p:cNvPr id="5" name="TextBox 4"/>
+          <p:cNvSpPr txBox="1"/>
+          <p:nvPr/>
+        </p:nvSpPr>
+        <p:spPr>
+          <a:xfrm>
+            <a:off x="4937760" y="1783080"/>
+            <a:ext cx="6601967" cy="274320"/>
           </a:xfrm>
           <a:prstGeom prst="rect">
             <a:avLst/>
@@ -15684,14 +16203,14 @@
       </p:sp>
       <p:sp>
         <p:nvSpPr>
-          <p:cNvPr id="4" name="TextBox 3"/>
-          <p:cNvSpPr txBox="1"/>
-          <p:nvPr/>
-        </p:nvSpPr>
-        <p:spPr>
-          <a:xfrm>
-            <a:off x="649224" y="2057400"/>
-            <a:ext cx="10890504" cy="1005840"/>
+          <p:cNvPr id="6" name="TextBox 5"/>
+          <p:cNvSpPr txBox="1"/>
+          <p:nvPr/>
+        </p:nvSpPr>
+        <p:spPr>
+          <a:xfrm>
+            <a:off x="4937760" y="2057400"/>
+            <a:ext cx="6601967" cy="1005840"/>
           </a:xfrm>
           <a:prstGeom prst="rect">
             <a:avLst/>
@@ -15716,21 +16235,21 @@
                 </a:solidFill>
                 <a:latin typeface="Segoe UI"/>
               </a:rPr>
-              <a:t>Синтетика (вставка предметов в снимок) заменит настоящие пары.</a:t>
-            </a:r>
-          </a:p>
-        </p:txBody>
-      </p:sp>
-      <p:sp>
-        <p:nvSpPr>
-          <p:cNvPr id="5" name="TextBox 4"/>
-          <p:cNvSpPr txBox="1"/>
-          <p:nvPr/>
-        </p:nvSpPr>
-        <p:spPr>
-          <a:xfrm>
-            <a:off x="649224" y="3108960"/>
-            <a:ext cx="10890504" cy="274320"/>
+              <a:t>По спектру пикселя можно восстановить долю площади под пластиком.</a:t>
+            </a:r>
+          </a:p>
+        </p:txBody>
+      </p:sp>
+      <p:sp>
+        <p:nvSpPr>
+          <p:cNvPr id="7" name="TextBox 6"/>
+          <p:cNvSpPr txBox="1"/>
+          <p:nvPr/>
+        </p:nvSpPr>
+        <p:spPr>
+          <a:xfrm>
+            <a:off x="4937760" y="3108960"/>
+            <a:ext cx="6601967" cy="274320"/>
           </a:xfrm>
           <a:prstGeom prst="rect">
             <a:avLst/>
@@ -15762,14 +16281,14 @@
       </p:sp>
       <p:sp>
         <p:nvSpPr>
-          <p:cNvPr id="6" name="TextBox 5"/>
-          <p:cNvSpPr txBox="1"/>
-          <p:nvPr/>
-        </p:nvSpPr>
-        <p:spPr>
-          <a:xfrm>
-            <a:off x="649224" y="3383279"/>
-            <a:ext cx="10890504" cy="1005840"/>
+          <p:cNvPr id="8" name="TextBox 7"/>
+          <p:cNvSpPr txBox="1"/>
+          <p:nvPr/>
+        </p:nvSpPr>
+        <p:spPr>
+          <a:xfrm>
+            <a:off x="4937760" y="3383279"/>
+            <a:ext cx="6601967" cy="1005840"/>
           </a:xfrm>
           <a:prstGeom prst="rect">
             <a:avLst/>
@@ -15794,21 +16313,21 @@
                 </a:solidFill>
                 <a:latin typeface="Segoe UI"/>
               </a:rPr>
-              <a:t>Проверка переносимости синтетики на природные сцены.</a:t>
-            </a:r>
-          </a:p>
-        </p:txBody>
-      </p:sp>
-      <p:sp>
-        <p:nvSpPr>
-          <p:cNvPr id="7" name="TextBox 6"/>
-          <p:cNvSpPr txBox="1"/>
-          <p:nvPr/>
-        </p:nvSpPr>
-        <p:spPr>
-          <a:xfrm>
-            <a:off x="649224" y="4434840"/>
-            <a:ext cx="10890504" cy="274320"/>
+              <a:t>63 пикселей мишеней, 5 дат; проверка с отложенной датой.</a:t>
+            </a:r>
+          </a:p>
+        </p:txBody>
+      </p:sp>
+      <p:sp>
+        <p:nvSpPr>
+          <p:cNvPr id="9" name="TextBox 8"/>
+          <p:cNvSpPr txBox="1"/>
+          <p:nvPr/>
+        </p:nvSpPr>
+        <p:spPr>
+          <a:xfrm>
+            <a:off x="4937760" y="4434840"/>
+            <a:ext cx="6601967" cy="274320"/>
           </a:xfrm>
           <a:prstGeom prst="rect">
             <a:avLst/>
@@ -15840,14 +16359,14 @@
       </p:sp>
       <p:sp>
         <p:nvSpPr>
-          <p:cNvPr id="8" name="TextBox 7"/>
-          <p:cNvSpPr txBox="1"/>
-          <p:nvPr/>
-        </p:nvSpPr>
-        <p:spPr>
-          <a:xfrm>
-            <a:off x="649224" y="4709159"/>
-            <a:ext cx="10890504" cy="1005840"/>
+          <p:cNvPr id="10" name="TextBox 9"/>
+          <p:cNvSpPr txBox="1"/>
+          <p:nvPr/>
+        </p:nvSpPr>
+        <p:spPr>
+          <a:xfrm>
+            <a:off x="4937760" y="4709159"/>
+            <a:ext cx="6601967" cy="1005840"/>
           </a:xfrm>
           <a:prstGeom prst="rect">
             <a:avLst/>
@@ -15872,14 +16391,14 @@
                 </a:solidFill>
                 <a:latin typeface="Segoe UI"/>
               </a:rPr>
-              <a:t>Не принята: на 11 датах мишеней A* (оставь-одну-дату) MAE 893.5 против 100.9 у плоской калибровки и 113.5 у ответа «0».</a:t>
-            </a:r>
-          </a:p>
-        </p:txBody>
-      </p:sp>
-      <p:sp>
-        <p:nvSpPr>
-          <p:cNvPr id="9" name="TextBox 8"/>
+              <a:t>Перевод «спектр → покрытие» не подтверждён; сценарий по мишеням — только исследовательский.</a:t>
+            </a:r>
+          </a:p>
+        </p:txBody>
+      </p:sp>
+      <p:sp>
+        <p:nvSpPr>
+          <p:cNvPr id="11" name="TextBox 10"/>
           <p:cNvSpPr txBox="1"/>
           <p:nvPr/>
         </p:nvSpPr>
@@ -15918,7 +16437,7 @@
       </p:sp>
       <p:sp>
         <p:nvSpPr>
-          <p:cNvPr id="10" name="TextBox 9"/>
+          <p:cNvPr id="12" name="TextBox 11"/>
           <p:cNvSpPr txBox="1"/>
           <p:nvPr/>
         </p:nvSpPr>
@@ -15950,7 +16469,7 @@
                 </a:solidFill>
                 <a:latin typeface="Segoe UI"/>
               </a:rPr>
-              <a:t>30 / 41</a:t>
+              <a:t>30 / 42</a:t>
             </a:r>
           </a:p>
         </p:txBody>
@@ -16015,7 +16534,7 @@
                 </a:solidFill>
                 <a:latin typeface="Segoe UI"/>
               </a:rPr>
-              <a:t>Оценщик «снимок → штуки»: плоская калибровка хуже ответа «0»</a:t>
+              <a:t>Синтетические пары — отклонены</a:t>
             </a:r>
           </a:p>
         </p:txBody>
@@ -16029,32 +16548,32 @@
         <p:spPr>
           <a:xfrm>
             <a:off x="649224" y="1783080"/>
-            <a:ext cx="3931920" cy="1143000"/>
-          </a:xfrm>
-          <a:prstGeom prst="rect">
-            <a:avLst/>
-          </a:prstGeom>
-          <a:noFill/>
-        </p:spPr>
-        <p:txBody>
-          <a:bodyPr wrap="square" anchor="t" lIns="18288" rIns="18288" tIns="18288" bIns="18288">
-            <a:spAutoFit/>
-          </a:bodyPr>
-          <a:lstStyle/>
-          <a:p>
-            <a:pPr algn="l">
-              <a:spcAft>
-                <a:spcPts val="400"/>
-              </a:spcAft>
-            </a:pPr>
-            <a:r>
-              <a:rPr sz="7200" b="1">
+            <a:ext cx="10890504" cy="274320"/>
+          </a:xfrm>
+          <a:prstGeom prst="rect">
+            <a:avLst/>
+          </a:prstGeom>
+          <a:noFill/>
+        </p:spPr>
+        <p:txBody>
+          <a:bodyPr wrap="square" anchor="t" lIns="18288" rIns="18288" tIns="18288" bIns="18288">
+            <a:spAutoFit/>
+          </a:bodyPr>
+          <a:lstStyle/>
+          <a:p>
+            <a:pPr algn="l">
+              <a:spcAft>
+                <a:spcPts val="400"/>
+              </a:spcAft>
+            </a:pPr>
+            <a:r>
+              <a:rPr sz="1200" b="1">
                 <a:solidFill>
                   <a:srgbClr val="C1400B"/>
                 </a:solidFill>
                 <a:latin typeface="Segoe UI"/>
               </a:rPr>
-              <a:t>5</a:t>
+              <a:t>ГИПОТЕЗА</a:t>
             </a:r>
           </a:p>
         </p:txBody>
@@ -16067,33 +16586,33 @@
         </p:nvSpPr>
         <p:spPr>
           <a:xfrm>
-            <a:off x="676656" y="2971800"/>
-            <a:ext cx="3931920" cy="822960"/>
-          </a:xfrm>
-          <a:prstGeom prst="rect">
-            <a:avLst/>
-          </a:prstGeom>
-          <a:noFill/>
-        </p:spPr>
-        <p:txBody>
-          <a:bodyPr wrap="square" anchor="t" lIns="18288" rIns="18288" tIns="18288" bIns="18288">
-            <a:spAutoFit/>
-          </a:bodyPr>
-          <a:lstStyle/>
-          <a:p>
-            <a:pPr algn="l">
-              <a:spcAft>
-                <a:spcPts val="400"/>
-              </a:spcAft>
-            </a:pPr>
-            <a:r>
-              <a:rPr sz="1600" b="0">
-                <a:solidFill>
-                  <a:srgbClr val="4A5462"/>
-                </a:solidFill>
-                <a:latin typeface="Segoe UI"/>
-              </a:rPr>
-              <a:t>методов на лидерборде</a:t>
+            <a:off x="649224" y="2057400"/>
+            <a:ext cx="10890504" cy="1005840"/>
+          </a:xfrm>
+          <a:prstGeom prst="rect">
+            <a:avLst/>
+          </a:prstGeom>
+          <a:noFill/>
+        </p:spPr>
+        <p:txBody>
+          <a:bodyPr wrap="square" anchor="t" lIns="18288" rIns="18288" tIns="18288" bIns="18288">
+            <a:spAutoFit/>
+          </a:bodyPr>
+          <a:lstStyle/>
+          <a:p>
+            <a:pPr algn="l">
+              <a:spcAft>
+                <a:spcPts val="400"/>
+              </a:spcAft>
+            </a:pPr>
+            <a:r>
+              <a:rPr sz="1500" b="0">
+                <a:solidFill>
+                  <a:srgbClr val="1E2836"/>
+                </a:solidFill>
+                <a:latin typeface="Segoe UI"/>
+              </a:rPr>
+              <a:t>Синтетика (вставка предметов в снимок) заменит настоящие пары.</a:t>
             </a:r>
           </a:p>
         </p:txBody>
@@ -16106,8 +16625,8 @@
         </p:nvSpPr>
         <p:spPr>
           <a:xfrm>
-            <a:off x="4937760" y="1783080"/>
-            <a:ext cx="6601967" cy="274320"/>
+            <a:off x="649224" y="3108960"/>
+            <a:ext cx="10890504" cy="274320"/>
           </a:xfrm>
           <a:prstGeom prst="rect">
             <a:avLst/>
@@ -16132,7 +16651,7 @@
                 </a:solidFill>
                 <a:latin typeface="Segoe UI"/>
               </a:rPr>
-              <a:t>ГИПОТЕЗА</a:t>
+              <a:t>КАК ПРОВЕРИЛИ</a:t>
             </a:r>
           </a:p>
         </p:txBody>
@@ -16145,8 +16664,8 @@
         </p:nvSpPr>
         <p:spPr>
           <a:xfrm>
-            <a:off x="4937760" y="2057400"/>
-            <a:ext cx="6601967" cy="1005840"/>
+            <a:off x="649224" y="3383279"/>
+            <a:ext cx="10890504" cy="1005840"/>
           </a:xfrm>
           <a:prstGeom prst="rect">
             <a:avLst/>
@@ -16171,7 +16690,7 @@
                 </a:solidFill>
                 <a:latin typeface="Segoe UI"/>
               </a:rPr>
-              <a:t>Простая калибровка площади маски в штуки даёт полезную оценку.</a:t>
+              <a:t>Проверка переносимости синтетики на природные сцены.</a:t>
             </a:r>
           </a:p>
         </p:txBody>
@@ -16184,8 +16703,8 @@
         </p:nvSpPr>
         <p:spPr>
           <a:xfrm>
-            <a:off x="4937760" y="3108960"/>
-            <a:ext cx="6601967" cy="274320"/>
+            <a:off x="649224" y="4434840"/>
+            <a:ext cx="10890504" cy="274320"/>
           </a:xfrm>
           <a:prstGeom prst="rect">
             <a:avLst/>
@@ -16210,7 +16729,7 @@
                 </a:solidFill>
                 <a:latin typeface="Segoe UI"/>
               </a:rPr>
-              <a:t>КАК ПРОВЕРИЛИ</a:t>
+              <a:t>РЕШЕНИЕ</a:t>
             </a:r>
           </a:p>
         </p:txBody>
@@ -16223,8 +16742,8 @@
         </p:nvSpPr>
         <p:spPr>
           <a:xfrm>
-            <a:off x="4937760" y="3383279"/>
-            <a:ext cx="6601967" cy="1005840"/>
+            <a:off x="649224" y="4709159"/>
+            <a:ext cx="10890504" cy="1005840"/>
           </a:xfrm>
           <a:prstGeom prst="rect">
             <a:avLst/>
@@ -16249,7 +16768,7 @@
                 </a:solidFill>
                 <a:latin typeface="Segoe UI"/>
               </a:rPr>
-              <a:t>Лидерборд методов на парах по месту и времени, общий протокол и метрика.</a:t>
+              <a:t>Не принята: на 11 датах мишеней A* (оставь-одну-дату) MAE 893.5 против 100.9 у плоской калибровки и 113.5 у ответа «0».</a:t>
             </a:r>
           </a:p>
         </p:txBody>
@@ -16257,84 +16776,6 @@
       <p:sp>
         <p:nvSpPr>
           <p:cNvPr id="9" name="TextBox 8"/>
-          <p:cNvSpPr txBox="1"/>
-          <p:nvPr/>
-        </p:nvSpPr>
-        <p:spPr>
-          <a:xfrm>
-            <a:off x="4937760" y="4434840"/>
-            <a:ext cx="6601967" cy="274320"/>
-          </a:xfrm>
-          <a:prstGeom prst="rect">
-            <a:avLst/>
-          </a:prstGeom>
-          <a:noFill/>
-        </p:spPr>
-        <p:txBody>
-          <a:bodyPr wrap="square" anchor="t" lIns="18288" rIns="18288" tIns="18288" bIns="18288">
-            <a:spAutoFit/>
-          </a:bodyPr>
-          <a:lstStyle/>
-          <a:p>
-            <a:pPr algn="l">
-              <a:spcAft>
-                <a:spcPts val="400"/>
-              </a:spcAft>
-            </a:pPr>
-            <a:r>
-              <a:rPr sz="1200" b="1">
-                <a:solidFill>
-                  <a:srgbClr val="C1400B"/>
-                </a:solidFill>
-                <a:latin typeface="Segoe UI"/>
-              </a:rPr>
-              <a:t>РЕШЕНИЕ</a:t>
-            </a:r>
-          </a:p>
-        </p:txBody>
-      </p:sp>
-      <p:sp>
-        <p:nvSpPr>
-          <p:cNvPr id="10" name="TextBox 9"/>
-          <p:cNvSpPr txBox="1"/>
-          <p:nvPr/>
-        </p:nvSpPr>
-        <p:spPr>
-          <a:xfrm>
-            <a:off x="4937760" y="4709159"/>
-            <a:ext cx="6601967" cy="1005840"/>
-          </a:xfrm>
-          <a:prstGeom prst="rect">
-            <a:avLst/>
-          </a:prstGeom>
-          <a:noFill/>
-        </p:spPr>
-        <p:txBody>
-          <a:bodyPr wrap="square" anchor="t" lIns="18288" rIns="18288" tIns="18288" bIns="18288">
-            <a:spAutoFit/>
-          </a:bodyPr>
-          <a:lstStyle/>
-          <a:p>
-            <a:pPr algn="l">
-              <a:spcAft>
-                <a:spcPts val="400"/>
-              </a:spcAft>
-            </a:pPr>
-            <a:r>
-              <a:rPr sz="1500" b="0">
-                <a:solidFill>
-                  <a:srgbClr val="1E2836"/>
-                </a:solidFill>
-                <a:latin typeface="Segoe UI"/>
-              </a:rPr>
-              <a:t>В карточке — «количество не определено», сценарий свёрнут с оговорками.</a:t>
-            </a:r>
-          </a:p>
-        </p:txBody>
-      </p:sp>
-      <p:sp>
-        <p:nvSpPr>
-          <p:cNvPr id="11" name="TextBox 10"/>
           <p:cNvSpPr txBox="1"/>
           <p:nvPr/>
         </p:nvSpPr>
@@ -16373,7 +16814,7 @@
       </p:sp>
       <p:sp>
         <p:nvSpPr>
-          <p:cNvPr id="12" name="TextBox 11"/>
+          <p:cNvPr id="10" name="TextBox 9"/>
           <p:cNvSpPr txBox="1"/>
           <p:nvPr/>
         </p:nvSpPr>
@@ -16405,7 +16846,7 @@
                 </a:solidFill>
                 <a:latin typeface="Segoe UI"/>
               </a:rPr>
-              <a:t>31 / 41</a:t>
+              <a:t>31 / 42</a:t>
             </a:r>
           </a:p>
         </p:txBody>
@@ -16464,13 +16905,13 @@
               </a:spcAft>
             </a:pPr>
             <a:r>
-              <a:rPr sz="2800" b="1">
+              <a:rPr sz="3200" b="1">
                 <a:solidFill>
                   <a:srgbClr val="1E2836"/>
                 </a:solidFill>
                 <a:latin typeface="Segoe UI"/>
               </a:rPr>
-              <a:t>ISPRA: все трансекты разобраны одним скриптом, пара по месту и дню — одна</a:t>
+              <a:t>Оценщик «снимок → штуки»: плоская калибровка хуже ответа «0»</a:t>
             </a:r>
           </a:p>
         </p:txBody>
@@ -16483,33 +16924,33 @@
         </p:nvSpPr>
         <p:spPr>
           <a:xfrm>
-            <a:off x="649224" y="1737360"/>
-            <a:ext cx="5120640" cy="857250"/>
-          </a:xfrm>
-          <a:prstGeom prst="rect">
-            <a:avLst/>
-          </a:prstGeom>
-          <a:noFill/>
-        </p:spPr>
-        <p:txBody>
-          <a:bodyPr wrap="square" anchor="t" lIns="18288" rIns="18288" tIns="18288" bIns="18288">
-            <a:spAutoFit/>
-          </a:bodyPr>
-          <a:lstStyle/>
-          <a:p>
-            <a:pPr algn="l">
-              <a:spcAft>
-                <a:spcPts val="400"/>
-              </a:spcAft>
-            </a:pPr>
-            <a:r>
-              <a:rPr sz="5400" b="1">
+            <a:off x="649224" y="1783080"/>
+            <a:ext cx="3931920" cy="1143000"/>
+          </a:xfrm>
+          <a:prstGeom prst="rect">
+            <a:avLst/>
+          </a:prstGeom>
+          <a:noFill/>
+        </p:spPr>
+        <p:txBody>
+          <a:bodyPr wrap="square" anchor="t" lIns="18288" rIns="18288" tIns="18288" bIns="18288">
+            <a:spAutoFit/>
+          </a:bodyPr>
+          <a:lstStyle/>
+          <a:p>
+            <a:pPr algn="l">
+              <a:spcAft>
+                <a:spcPts val="400"/>
+              </a:spcAft>
+            </a:pPr>
+            <a:r>
+              <a:rPr sz="7200" b="1">
                 <a:solidFill>
                   <a:srgbClr val="C1400B"/>
                 </a:solidFill>
                 <a:latin typeface="Segoe UI"/>
               </a:rPr>
-              <a:t>1</a:t>
+              <a:t>5</a:t>
             </a:r>
           </a:p>
         </p:txBody>
@@ -16522,33 +16963,33 @@
         </p:nvSpPr>
         <p:spPr>
           <a:xfrm>
-            <a:off x="676656" y="2628900"/>
-            <a:ext cx="5120640" cy="822960"/>
-          </a:xfrm>
-          <a:prstGeom prst="rect">
-            <a:avLst/>
-          </a:prstGeom>
-          <a:noFill/>
-        </p:spPr>
-        <p:txBody>
-          <a:bodyPr wrap="square" anchor="t" lIns="18288" rIns="18288" tIns="18288" bIns="18288">
-            <a:spAutoFit/>
-          </a:bodyPr>
-          <a:lstStyle/>
-          <a:p>
-            <a:pPr algn="l">
-              <a:spcAft>
-                <a:spcPts val="400"/>
-              </a:spcAft>
-            </a:pPr>
-            <a:r>
-              <a:rPr sz="1400" b="0">
+            <a:off x="676656" y="2971800"/>
+            <a:ext cx="3931920" cy="822960"/>
+          </a:xfrm>
+          <a:prstGeom prst="rect">
+            <a:avLst/>
+          </a:prstGeom>
+          <a:noFill/>
+        </p:spPr>
+        <p:txBody>
+          <a:bodyPr wrap="square" anchor="t" lIns="18288" rIns="18288" tIns="18288" bIns="18288">
+            <a:spAutoFit/>
+          </a:bodyPr>
+          <a:lstStyle/>
+          <a:p>
+            <a:pPr algn="l">
+              <a:spcAft>
+                <a:spcPts val="400"/>
+              </a:spcAft>
+            </a:pPr>
+            <a:r>
+              <a:rPr sz="1600" b="0">
                 <a:solidFill>
                   <a:srgbClr val="4A5462"/>
                 </a:solidFill>
                 <a:latin typeface="Segoe UI"/>
               </a:rPr>
-              <a:t>пара уровня A (ER604)</a:t>
+              <a:t>методов на лидерборде</a:t>
             </a:r>
           </a:p>
         </p:txBody>
@@ -16561,27 +17002,27 @@
         </p:nvSpPr>
         <p:spPr>
           <a:xfrm>
-            <a:off x="649224" y="3246120"/>
-            <a:ext cx="5120640" cy="256032"/>
-          </a:xfrm>
-          <a:prstGeom prst="rect">
-            <a:avLst/>
-          </a:prstGeom>
-          <a:noFill/>
-        </p:spPr>
-        <p:txBody>
-          <a:bodyPr wrap="square" anchor="t" lIns="18288" rIns="18288" tIns="18288" bIns="18288">
-            <a:spAutoFit/>
-          </a:bodyPr>
-          <a:lstStyle/>
-          <a:p>
-            <a:pPr algn="l">
-              <a:spcAft>
-                <a:spcPts val="400"/>
-              </a:spcAft>
-            </a:pPr>
-            <a:r>
-              <a:rPr sz="1100" b="1">
+            <a:off x="4937760" y="1783080"/>
+            <a:ext cx="6601967" cy="274320"/>
+          </a:xfrm>
+          <a:prstGeom prst="rect">
+            <a:avLst/>
+          </a:prstGeom>
+          <a:noFill/>
+        </p:spPr>
+        <p:txBody>
+          <a:bodyPr wrap="square" anchor="t" lIns="18288" rIns="18288" tIns="18288" bIns="18288">
+            <a:spAutoFit/>
+          </a:bodyPr>
+          <a:lstStyle/>
+          <a:p>
+            <a:pPr algn="l">
+              <a:spcAft>
+                <a:spcPts val="400"/>
+              </a:spcAft>
+            </a:pPr>
+            <a:r>
+              <a:rPr sz="1200" b="1">
                 <a:solidFill>
                   <a:srgbClr val="C1400B"/>
                 </a:solidFill>
@@ -16600,33 +17041,33 @@
         </p:nvSpPr>
         <p:spPr>
           <a:xfrm>
-            <a:off x="649224" y="3493008"/>
-            <a:ext cx="5120640" cy="701040"/>
-          </a:xfrm>
-          <a:prstGeom prst="rect">
-            <a:avLst/>
-          </a:prstGeom>
-          <a:noFill/>
-        </p:spPr>
-        <p:txBody>
-          <a:bodyPr wrap="square" anchor="t" lIns="18288" rIns="18288" tIns="18288" bIns="18288">
-            <a:spAutoFit/>
-          </a:bodyPr>
-          <a:lstStyle/>
-          <a:p>
-            <a:pPr algn="l">
-              <a:spcAft>
-                <a:spcPts val="400"/>
-              </a:spcAft>
-            </a:pPr>
-            <a:r>
-              <a:rPr sz="1300" b="0">
+            <a:off x="4937760" y="2057400"/>
+            <a:ext cx="6601967" cy="1005840"/>
+          </a:xfrm>
+          <a:prstGeom prst="rect">
+            <a:avLst/>
+          </a:prstGeom>
+          <a:noFill/>
+        </p:spPr>
+        <p:txBody>
+          <a:bodyPr wrap="square" anchor="t" lIns="18288" rIns="18288" tIns="18288" bIns="18288">
+            <a:spAutoFit/>
+          </a:bodyPr>
+          <a:lstStyle/>
+          <a:p>
+            <a:pPr algn="l">
+              <a:spcAft>
+                <a:spcPts val="400"/>
+              </a:spcAft>
+            </a:pPr>
+            <a:r>
+              <a:rPr sz="1500" b="0">
                 <a:solidFill>
                   <a:srgbClr val="1E2836"/>
                 </a:solidFill>
                 <a:latin typeface="Segoe UI"/>
               </a:rPr>
-              <a:t>Итальянские трансекты MSFD дадут пары со снимком.</a:t>
+              <a:t>Простая калибровка площади маски в штуки даёт полезную оценку.</a:t>
             </a:r>
           </a:p>
         </p:txBody>
@@ -16639,27 +17080,27 @@
         </p:nvSpPr>
         <p:spPr>
           <a:xfrm>
-            <a:off x="649224" y="4221480"/>
-            <a:ext cx="5120640" cy="256032"/>
-          </a:xfrm>
-          <a:prstGeom prst="rect">
-            <a:avLst/>
-          </a:prstGeom>
-          <a:noFill/>
-        </p:spPr>
-        <p:txBody>
-          <a:bodyPr wrap="square" anchor="t" lIns="18288" rIns="18288" tIns="18288" bIns="18288">
-            <a:spAutoFit/>
-          </a:bodyPr>
-          <a:lstStyle/>
-          <a:p>
-            <a:pPr algn="l">
-              <a:spcAft>
-                <a:spcPts val="400"/>
-              </a:spcAft>
-            </a:pPr>
-            <a:r>
-              <a:rPr sz="1100" b="1">
+            <a:off x="4937760" y="3108960"/>
+            <a:ext cx="6601967" cy="274320"/>
+          </a:xfrm>
+          <a:prstGeom prst="rect">
+            <a:avLst/>
+          </a:prstGeom>
+          <a:noFill/>
+        </p:spPr>
+        <p:txBody>
+          <a:bodyPr wrap="square" anchor="t" lIns="18288" rIns="18288" tIns="18288" bIns="18288">
+            <a:spAutoFit/>
+          </a:bodyPr>
+          <a:lstStyle/>
+          <a:p>
+            <a:pPr algn="l">
+              <a:spcAft>
+                <a:spcPts val="400"/>
+              </a:spcAft>
+            </a:pPr>
+            <a:r>
+              <a:rPr sz="1200" b="1">
                 <a:solidFill>
                   <a:srgbClr val="C1400B"/>
                 </a:solidFill>
@@ -16678,33 +17119,33 @@
         </p:nvSpPr>
         <p:spPr>
           <a:xfrm>
-            <a:off x="649224" y="4468368"/>
-            <a:ext cx="5120640" cy="701040"/>
-          </a:xfrm>
-          <a:prstGeom prst="rect">
-            <a:avLst/>
-          </a:prstGeom>
-          <a:noFill/>
-        </p:spPr>
-        <p:txBody>
-          <a:bodyPr wrap="square" anchor="t" lIns="18288" rIns="18288" tIns="18288" bIns="18288">
-            <a:spAutoFit/>
-          </a:bodyPr>
-          <a:lstStyle/>
-          <a:p>
-            <a:pPr algn="l">
-              <a:spcAft>
-                <a:spcPts val="400"/>
-              </a:spcAft>
-            </a:pPr>
-            <a:r>
-              <a:rPr sz="1300" b="0">
+            <a:off x="4937760" y="3383279"/>
+            <a:ext cx="6601967" cy="1005840"/>
+          </a:xfrm>
+          <a:prstGeom prst="rect">
+            <a:avLst/>
+          </a:prstGeom>
+          <a:noFill/>
+        </p:spPr>
+        <p:txBody>
+          <a:bodyPr wrap="square" anchor="t" lIns="18288" rIns="18288" tIns="18288" bIns="18288">
+            <a:spAutoFit/>
+          </a:bodyPr>
+          <a:lstStyle/>
+          <a:p>
+            <a:pPr algn="l">
+              <a:spcAft>
+                <a:spcPts val="400"/>
+              </a:spcAft>
+            </a:pPr>
+            <a:r>
+              <a:rPr sz="1500" b="0">
                 <a:solidFill>
                   <a:srgbClr val="1E2836"/>
                 </a:solidFill>
                 <a:latin typeface="Segoe UI"/>
               </a:rPr>
-              <a:t>Поиск снимков под каждую трансекту, маски, уровни A/C/D.</a:t>
+              <a:t>Лидерборд методов на парах по месту и времени, общий протокол и метрика.</a:t>
             </a:r>
           </a:p>
         </p:txBody>
@@ -16717,27 +17158,27 @@
         </p:nvSpPr>
         <p:spPr>
           <a:xfrm>
-            <a:off x="649224" y="5196839"/>
-            <a:ext cx="5120640" cy="256032"/>
-          </a:xfrm>
-          <a:prstGeom prst="rect">
-            <a:avLst/>
-          </a:prstGeom>
-          <a:noFill/>
-        </p:spPr>
-        <p:txBody>
-          <a:bodyPr wrap="square" anchor="t" lIns="18288" rIns="18288" tIns="18288" bIns="18288">
-            <a:spAutoFit/>
-          </a:bodyPr>
-          <a:lstStyle/>
-          <a:p>
-            <a:pPr algn="l">
-              <a:spcAft>
-                <a:spcPts val="400"/>
-              </a:spcAft>
-            </a:pPr>
-            <a:r>
-              <a:rPr sz="1100" b="1">
+            <a:off x="4937760" y="4434840"/>
+            <a:ext cx="6601967" cy="274320"/>
+          </a:xfrm>
+          <a:prstGeom prst="rect">
+            <a:avLst/>
+          </a:prstGeom>
+          <a:noFill/>
+        </p:spPr>
+        <p:txBody>
+          <a:bodyPr wrap="square" anchor="t" lIns="18288" rIns="18288" tIns="18288" bIns="18288">
+            <a:spAutoFit/>
+          </a:bodyPr>
+          <a:lstStyle/>
+          <a:p>
+            <a:pPr algn="l">
+              <a:spcAft>
+                <a:spcPts val="400"/>
+              </a:spcAft>
+            </a:pPr>
+            <a:r>
+              <a:rPr sz="1200" b="1">
                 <a:solidFill>
                   <a:srgbClr val="C1400B"/>
                 </a:solidFill>
@@ -16756,69 +17197,40 @@
         </p:nvSpPr>
         <p:spPr>
           <a:xfrm>
-            <a:off x="649224" y="5443728"/>
-            <a:ext cx="5120640" cy="701040"/>
-          </a:xfrm>
-          <a:prstGeom prst="rect">
-            <a:avLst/>
-          </a:prstGeom>
-          <a:noFill/>
-        </p:spPr>
-        <p:txBody>
-          <a:bodyPr wrap="square" anchor="t" lIns="18288" rIns="18288" tIns="18288" bIns="18288">
-            <a:spAutoFit/>
-          </a:bodyPr>
-          <a:lstStyle/>
-          <a:p>
-            <a:pPr algn="l">
-              <a:spcAft>
-                <a:spcPts val="400"/>
-              </a:spcAft>
-            </a:pPr>
-            <a:r>
-              <a:rPr sz="1300" b="0">
+            <a:off x="4937760" y="4709159"/>
+            <a:ext cx="6601967" cy="1005840"/>
+          </a:xfrm>
+          <a:prstGeom prst="rect">
+            <a:avLst/>
+          </a:prstGeom>
+          <a:noFill/>
+        </p:spPr>
+        <p:txBody>
+          <a:bodyPr wrap="square" anchor="t" lIns="18288" rIns="18288" tIns="18288" bIns="18288">
+            <a:spAutoFit/>
+          </a:bodyPr>
+          <a:lstStyle/>
+          <a:p>
+            <a:pPr algn="l">
+              <a:spcAft>
+                <a:spcPts val="400"/>
+              </a:spcAft>
+            </a:pPr>
+            <a:r>
+              <a:rPr sz="1500" b="0">
                 <a:solidFill>
                   <a:srgbClr val="1E2836"/>
                 </a:solidFill>
                 <a:latin typeface="Segoe UI"/>
               </a:rPr>
-              <a:t>ER604 — пара по месту и дню, не калибровочная: ни один предмет не рядом с пикселем детектора.</a:t>
-            </a:r>
-          </a:p>
-        </p:txBody>
-      </p:sp>
-      <p:pic>
-        <p:nvPicPr>
-          <p:cNvPr id="11" name="Picture 10" descr="ispra_er604_20190916.png"/>
-          <p:cNvPicPr>
-            <a:picLocks noChangeAspect="1"/>
-          </p:cNvPicPr>
-          <p:nvPr/>
-        </p:nvPicPr>
-        <p:blipFill>
-          <a:blip r:embed="rId2"/>
-          <a:stretch>
-            <a:fillRect/>
-          </a:stretch>
-        </p:blipFill>
-        <p:spPr>
-          <a:xfrm>
-            <a:off x="6035040" y="2521423"/>
-            <a:ext cx="5486400" cy="2729552"/>
-          </a:xfrm>
-          <a:prstGeom prst="rect">
-            <a:avLst/>
-          </a:prstGeom>
-          <a:ln w="9525">
-            <a:solidFill>
-              <a:srgbClr val="DDDFE3"/>
-            </a:solidFill>
-          </a:ln>
-        </p:spPr>
-      </p:pic>
-      <p:sp>
-        <p:nvSpPr>
-          <p:cNvPr id="12" name="TextBox 11"/>
+              <a:t>В карточке — «количество не определено», сценарий свёрнут с оговорками.</a:t>
+            </a:r>
+          </a:p>
+        </p:txBody>
+      </p:sp>
+      <p:sp>
+        <p:nvSpPr>
+          <p:cNvPr id="11" name="TextBox 10"/>
           <p:cNvSpPr txBox="1"/>
           <p:nvPr/>
         </p:nvSpPr>
@@ -16857,7 +17269,7 @@
       </p:sp>
       <p:sp>
         <p:nvSpPr>
-          <p:cNvPr id="13" name="TextBox 12"/>
+          <p:cNvPr id="12" name="TextBox 11"/>
           <p:cNvSpPr txBox="1"/>
           <p:nvPr/>
         </p:nvSpPr>
@@ -16889,7 +17301,7 @@
                 </a:solidFill>
                 <a:latin typeface="Segoe UI"/>
               </a:rPr>
-              <a:t>32 / 41</a:t>
+              <a:t>32 / 42</a:t>
             </a:r>
           </a:p>
         </p:txBody>
@@ -16948,13 +17360,13 @@
               </a:spcAft>
             </a:pPr>
             <a:r>
-              <a:rPr sz="3200" b="1">
+              <a:rPr sz="2800" b="1">
                 <a:solidFill>
                   <a:srgbClr val="1E2836"/>
                 </a:solidFill>
                 <a:latin typeface="Segoe UI"/>
               </a:rPr>
-              <a:t>PLASTIC MONITOR: квадрат 1 м² не равен пикселю</a:t>
+              <a:t>ISPRA: все трансекты разобраны одним скриптом, пара по месту и дню — одна</a:t>
             </a:r>
           </a:p>
         </p:txBody>
@@ -16967,32 +17379,110 @@
         </p:nvSpPr>
         <p:spPr>
           <a:xfrm>
-            <a:off x="649224" y="1783080"/>
-            <a:ext cx="10890504" cy="274320"/>
-          </a:xfrm>
-          <a:prstGeom prst="rect">
-            <a:avLst/>
-          </a:prstGeom>
-          <a:noFill/>
-        </p:spPr>
-        <p:txBody>
-          <a:bodyPr wrap="square" anchor="t" lIns="18288" rIns="18288" tIns="18288" bIns="18288">
-            <a:spAutoFit/>
-          </a:bodyPr>
-          <a:lstStyle/>
-          <a:p>
-            <a:pPr algn="l">
-              <a:spcAft>
-                <a:spcPts val="400"/>
-              </a:spcAft>
-            </a:pPr>
-            <a:r>
-              <a:rPr sz="1200" b="1">
+            <a:off x="649224" y="1737360"/>
+            <a:ext cx="5120640" cy="857250"/>
+          </a:xfrm>
+          <a:prstGeom prst="rect">
+            <a:avLst/>
+          </a:prstGeom>
+          <a:noFill/>
+        </p:spPr>
+        <p:txBody>
+          <a:bodyPr wrap="square" anchor="t" lIns="18288" rIns="18288" tIns="18288" bIns="18288">
+            <a:spAutoFit/>
+          </a:bodyPr>
+          <a:lstStyle/>
+          <a:p>
+            <a:pPr algn="l">
+              <a:spcAft>
+                <a:spcPts val="400"/>
+              </a:spcAft>
+            </a:pPr>
+            <a:r>
+              <a:rPr sz="5400" b="1">
                 <a:solidFill>
                   <a:srgbClr val="C1400B"/>
                 </a:solidFill>
                 <a:latin typeface="Segoe UI"/>
               </a:rPr>
+              <a:t>1</a:t>
+            </a:r>
+          </a:p>
+        </p:txBody>
+      </p:sp>
+      <p:sp>
+        <p:nvSpPr>
+          <p:cNvPr id="4" name="TextBox 3"/>
+          <p:cNvSpPr txBox="1"/>
+          <p:nvPr/>
+        </p:nvSpPr>
+        <p:spPr>
+          <a:xfrm>
+            <a:off x="676656" y="2628900"/>
+            <a:ext cx="5120640" cy="822960"/>
+          </a:xfrm>
+          <a:prstGeom prst="rect">
+            <a:avLst/>
+          </a:prstGeom>
+          <a:noFill/>
+        </p:spPr>
+        <p:txBody>
+          <a:bodyPr wrap="square" anchor="t" lIns="18288" rIns="18288" tIns="18288" bIns="18288">
+            <a:spAutoFit/>
+          </a:bodyPr>
+          <a:lstStyle/>
+          <a:p>
+            <a:pPr algn="l">
+              <a:spcAft>
+                <a:spcPts val="400"/>
+              </a:spcAft>
+            </a:pPr>
+            <a:r>
+              <a:rPr sz="1400" b="0">
+                <a:solidFill>
+                  <a:srgbClr val="4A5462"/>
+                </a:solidFill>
+                <a:latin typeface="Segoe UI"/>
+              </a:rPr>
+              <a:t>пара уровня A (ER604)</a:t>
+            </a:r>
+          </a:p>
+        </p:txBody>
+      </p:sp>
+      <p:sp>
+        <p:nvSpPr>
+          <p:cNvPr id="5" name="TextBox 4"/>
+          <p:cNvSpPr txBox="1"/>
+          <p:nvPr/>
+        </p:nvSpPr>
+        <p:spPr>
+          <a:xfrm>
+            <a:off x="649224" y="3246120"/>
+            <a:ext cx="5120640" cy="256032"/>
+          </a:xfrm>
+          <a:prstGeom prst="rect">
+            <a:avLst/>
+          </a:prstGeom>
+          <a:noFill/>
+        </p:spPr>
+        <p:txBody>
+          <a:bodyPr wrap="square" anchor="t" lIns="18288" rIns="18288" tIns="18288" bIns="18288">
+            <a:spAutoFit/>
+          </a:bodyPr>
+          <a:lstStyle/>
+          <a:p>
+            <a:pPr algn="l">
+              <a:spcAft>
+                <a:spcPts val="400"/>
+              </a:spcAft>
+            </a:pPr>
+            <a:r>
+              <a:rPr sz="1100" b="1">
+                <a:solidFill>
+                  <a:srgbClr val="C1400B"/>
+                </a:solidFill>
+                <a:latin typeface="Segoe UI"/>
+              </a:rPr>
               <a:t>ГИПОТЕЗА</a:t>
             </a:r>
           </a:p>
@@ -17000,72 +17490,72 @@
       </p:sp>
       <p:sp>
         <p:nvSpPr>
-          <p:cNvPr id="4" name="TextBox 3"/>
-          <p:cNvSpPr txBox="1"/>
-          <p:nvPr/>
-        </p:nvSpPr>
-        <p:spPr>
-          <a:xfrm>
-            <a:off x="649224" y="2057400"/>
-            <a:ext cx="10890504" cy="1005840"/>
-          </a:xfrm>
-          <a:prstGeom prst="rect">
-            <a:avLst/>
-          </a:prstGeom>
-          <a:noFill/>
-        </p:spPr>
-        <p:txBody>
-          <a:bodyPr wrap="square" anchor="t" lIns="18288" rIns="18288" tIns="18288" bIns="18288">
-            <a:spAutoFit/>
-          </a:bodyPr>
-          <a:lstStyle/>
-          <a:p>
-            <a:pPr algn="l">
-              <a:spcAft>
-                <a:spcPts val="400"/>
-              </a:spcAft>
-            </a:pPr>
-            <a:r>
-              <a:rPr sz="1500" b="0">
+          <p:cNvPr id="6" name="TextBox 5"/>
+          <p:cNvSpPr txBox="1"/>
+          <p:nvPr/>
+        </p:nvSpPr>
+        <p:spPr>
+          <a:xfrm>
+            <a:off x="649224" y="3493008"/>
+            <a:ext cx="5120640" cy="701040"/>
+          </a:xfrm>
+          <a:prstGeom prst="rect">
+            <a:avLst/>
+          </a:prstGeom>
+          <a:noFill/>
+        </p:spPr>
+        <p:txBody>
+          <a:bodyPr wrap="square" anchor="t" lIns="18288" rIns="18288" tIns="18288" bIns="18288">
+            <a:spAutoFit/>
+          </a:bodyPr>
+          <a:lstStyle/>
+          <a:p>
+            <a:pPr algn="l">
+              <a:spcAft>
+                <a:spcPts val="400"/>
+              </a:spcAft>
+            </a:pPr>
+            <a:r>
+              <a:rPr sz="1300" b="0">
                 <a:solidFill>
                   <a:srgbClr val="1E2836"/>
                 </a:solidFill>
                 <a:latin typeface="Segoe UI"/>
               </a:rPr>
-              <a:t>Фото-учёт PLASTIC MONITOR даст пары со снимком.</a:t>
-            </a:r>
-          </a:p>
-        </p:txBody>
-      </p:sp>
-      <p:sp>
-        <p:nvSpPr>
-          <p:cNvPr id="5" name="TextBox 4"/>
-          <p:cNvSpPr txBox="1"/>
-          <p:nvPr/>
-        </p:nvSpPr>
-        <p:spPr>
-          <a:xfrm>
-            <a:off x="649224" y="3108960"/>
-            <a:ext cx="10890504" cy="274320"/>
-          </a:xfrm>
-          <a:prstGeom prst="rect">
-            <a:avLst/>
-          </a:prstGeom>
-          <a:noFill/>
-        </p:spPr>
-        <p:txBody>
-          <a:bodyPr wrap="square" anchor="t" lIns="18288" rIns="18288" tIns="18288" bIns="18288">
-            <a:spAutoFit/>
-          </a:bodyPr>
-          <a:lstStyle/>
-          <a:p>
-            <a:pPr algn="l">
-              <a:spcAft>
-                <a:spcPts val="400"/>
-              </a:spcAft>
-            </a:pPr>
-            <a:r>
-              <a:rPr sz="1200" b="1">
+              <a:t>Итальянские трансекты MSFD дадут пары со снимком.</a:t>
+            </a:r>
+          </a:p>
+        </p:txBody>
+      </p:sp>
+      <p:sp>
+        <p:nvSpPr>
+          <p:cNvPr id="7" name="TextBox 6"/>
+          <p:cNvSpPr txBox="1"/>
+          <p:nvPr/>
+        </p:nvSpPr>
+        <p:spPr>
+          <a:xfrm>
+            <a:off x="649224" y="4221480"/>
+            <a:ext cx="5120640" cy="256032"/>
+          </a:xfrm>
+          <a:prstGeom prst="rect">
+            <a:avLst/>
+          </a:prstGeom>
+          <a:noFill/>
+        </p:spPr>
+        <p:txBody>
+          <a:bodyPr wrap="square" anchor="t" lIns="18288" rIns="18288" tIns="18288" bIns="18288">
+            <a:spAutoFit/>
+          </a:bodyPr>
+          <a:lstStyle/>
+          <a:p>
+            <a:pPr algn="l">
+              <a:spcAft>
+                <a:spcPts val="400"/>
+              </a:spcAft>
+            </a:pPr>
+            <a:r>
+              <a:rPr sz="1100" b="1">
                 <a:solidFill>
                   <a:srgbClr val="C1400B"/>
                 </a:solidFill>
@@ -17078,72 +17568,72 @@
       </p:sp>
       <p:sp>
         <p:nvSpPr>
-          <p:cNvPr id="6" name="TextBox 5"/>
-          <p:cNvSpPr txBox="1"/>
-          <p:nvPr/>
-        </p:nvSpPr>
-        <p:spPr>
-          <a:xfrm>
-            <a:off x="649224" y="3383279"/>
-            <a:ext cx="10890504" cy="1005840"/>
-          </a:xfrm>
-          <a:prstGeom prst="rect">
-            <a:avLst/>
-          </a:prstGeom>
-          <a:noFill/>
-        </p:spPr>
-        <p:txBody>
-          <a:bodyPr wrap="square" anchor="t" lIns="18288" rIns="18288" tIns="18288" bIns="18288">
-            <a:spAutoFit/>
-          </a:bodyPr>
-          <a:lstStyle/>
-          <a:p>
-            <a:pPr algn="l">
-              <a:spcAft>
-                <a:spcPts val="400"/>
-              </a:spcAft>
-            </a:pPr>
-            <a:r>
-              <a:rPr sz="1500" b="0">
+          <p:cNvPr id="8" name="TextBox 7"/>
+          <p:cNvSpPr txBox="1"/>
+          <p:nvPr/>
+        </p:nvSpPr>
+        <p:spPr>
+          <a:xfrm>
+            <a:off x="649224" y="4468368"/>
+            <a:ext cx="5120640" cy="701040"/>
+          </a:xfrm>
+          <a:prstGeom prst="rect">
+            <a:avLst/>
+          </a:prstGeom>
+          <a:noFill/>
+        </p:spPr>
+        <p:txBody>
+          <a:bodyPr wrap="square" anchor="t" lIns="18288" rIns="18288" tIns="18288" bIns="18288">
+            <a:spAutoFit/>
+          </a:bodyPr>
+          <a:lstStyle/>
+          <a:p>
+            <a:pPr algn="l">
+              <a:spcAft>
+                <a:spcPts val="400"/>
+              </a:spcAft>
+            </a:pPr>
+            <a:r>
+              <a:rPr sz="1300" b="0">
                 <a:solidFill>
                   <a:srgbClr val="1E2836"/>
                 </a:solidFill>
                 <a:latin typeface="Segoe UI"/>
               </a:rPr>
-              <a:t>Сопоставление площадки учёта с пикселем и пятном на снимке.</a:t>
-            </a:r>
-          </a:p>
-        </p:txBody>
-      </p:sp>
-      <p:sp>
-        <p:nvSpPr>
-          <p:cNvPr id="7" name="TextBox 6"/>
-          <p:cNvSpPr txBox="1"/>
-          <p:nvPr/>
-        </p:nvSpPr>
-        <p:spPr>
-          <a:xfrm>
-            <a:off x="649224" y="4434840"/>
-            <a:ext cx="10890504" cy="274320"/>
-          </a:xfrm>
-          <a:prstGeom prst="rect">
-            <a:avLst/>
-          </a:prstGeom>
-          <a:noFill/>
-        </p:spPr>
-        <p:txBody>
-          <a:bodyPr wrap="square" anchor="t" lIns="18288" rIns="18288" tIns="18288" bIns="18288">
-            <a:spAutoFit/>
-          </a:bodyPr>
-          <a:lstStyle/>
-          <a:p>
-            <a:pPr algn="l">
-              <a:spcAft>
-                <a:spcPts val="400"/>
-              </a:spcAft>
-            </a:pPr>
-            <a:r>
-              <a:rPr sz="1200" b="1">
+              <a:t>Поиск снимков под каждую трансекту, маски, уровни A/C/D.</a:t>
+            </a:r>
+          </a:p>
+        </p:txBody>
+      </p:sp>
+      <p:sp>
+        <p:nvSpPr>
+          <p:cNvPr id="9" name="TextBox 8"/>
+          <p:cNvSpPr txBox="1"/>
+          <p:nvPr/>
+        </p:nvSpPr>
+        <p:spPr>
+          <a:xfrm>
+            <a:off x="649224" y="5196839"/>
+            <a:ext cx="5120640" cy="256032"/>
+          </a:xfrm>
+          <a:prstGeom prst="rect">
+            <a:avLst/>
+          </a:prstGeom>
+          <a:noFill/>
+        </p:spPr>
+        <p:txBody>
+          <a:bodyPr wrap="square" anchor="t" lIns="18288" rIns="18288" tIns="18288" bIns="18288">
+            <a:spAutoFit/>
+          </a:bodyPr>
+          <a:lstStyle/>
+          <a:p>
+            <a:pPr algn="l">
+              <a:spcAft>
+                <a:spcPts val="400"/>
+              </a:spcAft>
+            </a:pPr>
+            <a:r>
+              <a:rPr sz="1100" b="1">
                 <a:solidFill>
                   <a:srgbClr val="C1400B"/>
                 </a:solidFill>
@@ -17156,46 +17646,75 @@
       </p:sp>
       <p:sp>
         <p:nvSpPr>
-          <p:cNvPr id="8" name="TextBox 7"/>
-          <p:cNvSpPr txBox="1"/>
-          <p:nvPr/>
-        </p:nvSpPr>
-        <p:spPr>
-          <a:xfrm>
-            <a:off x="649224" y="4709159"/>
-            <a:ext cx="10890504" cy="1005840"/>
-          </a:xfrm>
-          <a:prstGeom prst="rect">
-            <a:avLst/>
-          </a:prstGeom>
-          <a:noFill/>
-        </p:spPr>
-        <p:txBody>
-          <a:bodyPr wrap="square" anchor="t" lIns="18288" rIns="18288" tIns="18288" bIns="18288">
-            <a:spAutoFit/>
-          </a:bodyPr>
-          <a:lstStyle/>
-          <a:p>
-            <a:pPr algn="l">
-              <a:spcAft>
-                <a:spcPts val="400"/>
-              </a:spcAft>
-            </a:pPr>
-            <a:r>
-              <a:rPr sz="1500" b="0">
+          <p:cNvPr id="10" name="TextBox 9"/>
+          <p:cNvSpPr txBox="1"/>
+          <p:nvPr/>
+        </p:nvSpPr>
+        <p:spPr>
+          <a:xfrm>
+            <a:off x="649224" y="5443728"/>
+            <a:ext cx="5120640" cy="701040"/>
+          </a:xfrm>
+          <a:prstGeom prst="rect">
+            <a:avLst/>
+          </a:prstGeom>
+          <a:noFill/>
+        </p:spPr>
+        <p:txBody>
+          <a:bodyPr wrap="square" anchor="t" lIns="18288" rIns="18288" tIns="18288" bIns="18288">
+            <a:spAutoFit/>
+          </a:bodyPr>
+          <a:lstStyle/>
+          <a:p>
+            <a:pPr algn="l">
+              <a:spcAft>
+                <a:spcPts val="400"/>
+              </a:spcAft>
+            </a:pPr>
+            <a:r>
+              <a:rPr sz="1300" b="0">
                 <a:solidFill>
                   <a:srgbClr val="1E2836"/>
                 </a:solidFill>
                 <a:latin typeface="Segoe UI"/>
               </a:rPr>
-              <a:t>Уровень C: единица наблюдения несовместима с пикселем.</a:t>
-            </a:r>
-          </a:p>
-        </p:txBody>
-      </p:sp>
-      <p:sp>
-        <p:nvSpPr>
-          <p:cNvPr id="9" name="TextBox 8"/>
+              <a:t>ER604 — пара по месту и дню, не калибровочная: ни один предмет не рядом с пикселем детектора.</a:t>
+            </a:r>
+          </a:p>
+        </p:txBody>
+      </p:sp>
+      <p:pic>
+        <p:nvPicPr>
+          <p:cNvPr id="11" name="Picture 10" descr="ispra_er604_20190916.png"/>
+          <p:cNvPicPr>
+            <a:picLocks noChangeAspect="1"/>
+          </p:cNvPicPr>
+          <p:nvPr/>
+        </p:nvPicPr>
+        <p:blipFill>
+          <a:blip r:embed="rId2"/>
+          <a:stretch>
+            <a:fillRect/>
+          </a:stretch>
+        </p:blipFill>
+        <p:spPr>
+          <a:xfrm>
+            <a:off x="6035040" y="2521423"/>
+            <a:ext cx="5486400" cy="2729552"/>
+          </a:xfrm>
+          <a:prstGeom prst="rect">
+            <a:avLst/>
+          </a:prstGeom>
+          <a:ln w="9525">
+            <a:solidFill>
+              <a:srgbClr val="DDDFE3"/>
+            </a:solidFill>
+          </a:ln>
+        </p:spPr>
+      </p:pic>
+      <p:sp>
+        <p:nvSpPr>
+          <p:cNvPr id="12" name="TextBox 11"/>
           <p:cNvSpPr txBox="1"/>
           <p:nvPr/>
         </p:nvSpPr>
@@ -17234,7 +17753,7 @@
       </p:sp>
       <p:sp>
         <p:nvSpPr>
-          <p:cNvPr id="10" name="TextBox 9"/>
+          <p:cNvPr id="13" name="TextBox 12"/>
           <p:cNvSpPr txBox="1"/>
           <p:nvPr/>
         </p:nvSpPr>
@@ -17266,7 +17785,7 @@
                 </a:solidFill>
                 <a:latin typeface="Segoe UI"/>
               </a:rPr>
-              <a:t>33 / 41</a:t>
+              <a:t>33 / 42</a:t>
             </a:r>
           </a:p>
         </p:txBody>
@@ -17331,7 +17850,7 @@
                 </a:solidFill>
                 <a:latin typeface="Segoe UI"/>
               </a:rPr>
-              <a:t>Архивы и приложения статей: кандидаты есть, пар нет</a:t>
+              <a:t>PLASTIC MONITOR: квадрат 1 м² не равен пикселю</a:t>
             </a:r>
           </a:p>
         </p:txBody>
@@ -17345,32 +17864,32 @@
         <p:spPr>
           <a:xfrm>
             <a:off x="649224" y="1783080"/>
-            <a:ext cx="3931920" cy="1143000"/>
-          </a:xfrm>
-          <a:prstGeom prst="rect">
-            <a:avLst/>
-          </a:prstGeom>
-          <a:noFill/>
-        </p:spPr>
-        <p:txBody>
-          <a:bodyPr wrap="square" anchor="t" lIns="18288" rIns="18288" tIns="18288" bIns="18288">
-            <a:spAutoFit/>
-          </a:bodyPr>
-          <a:lstStyle/>
-          <a:p>
-            <a:pPr algn="l">
-              <a:spcAft>
-                <a:spcPts val="400"/>
-              </a:spcAft>
-            </a:pPr>
-            <a:r>
-              <a:rPr sz="7200" b="1">
+            <a:ext cx="10890504" cy="274320"/>
+          </a:xfrm>
+          <a:prstGeom prst="rect">
+            <a:avLst/>
+          </a:prstGeom>
+          <a:noFill/>
+        </p:spPr>
+        <p:txBody>
+          <a:bodyPr wrap="square" anchor="t" lIns="18288" rIns="18288" tIns="18288" bIns="18288">
+            <a:spAutoFit/>
+          </a:bodyPr>
+          <a:lstStyle/>
+          <a:p>
+            <a:pPr algn="l">
+              <a:spcAft>
+                <a:spcPts val="400"/>
+              </a:spcAft>
+            </a:pPr>
+            <a:r>
+              <a:rPr sz="1200" b="1">
                 <a:solidFill>
                   <a:srgbClr val="C1400B"/>
                 </a:solidFill>
                 <a:latin typeface="Segoe UI"/>
               </a:rPr>
-              <a:t>42</a:t>
+              <a:t>ГИПОТЕЗА</a:t>
             </a:r>
           </a:p>
         </p:txBody>
@@ -17383,33 +17902,33 @@
         </p:nvSpPr>
         <p:spPr>
           <a:xfrm>
-            <a:off x="676656" y="2971800"/>
-            <a:ext cx="3931920" cy="822960"/>
-          </a:xfrm>
-          <a:prstGeom prst="rect">
-            <a:avLst/>
-          </a:prstGeom>
-          <a:noFill/>
-        </p:spPr>
-        <p:txBody>
-          <a:bodyPr wrap="square" anchor="t" lIns="18288" rIns="18288" tIns="18288" bIns="18288">
-            <a:spAutoFit/>
-          </a:bodyPr>
-          <a:lstStyle/>
-          <a:p>
-            <a:pPr algn="l">
-              <a:spcAft>
-                <a:spcPts val="400"/>
-              </a:spcAft>
-            </a:pPr>
-            <a:r>
-              <a:rPr sz="1600" b="0">
-                <a:solidFill>
-                  <a:srgbClr val="4A5462"/>
-                </a:solidFill>
-                <a:latin typeface="Segoe UI"/>
-              </a:rPr>
-              <a:t>файлов разобрано</a:t>
+            <a:off x="649224" y="2057400"/>
+            <a:ext cx="10890504" cy="1005840"/>
+          </a:xfrm>
+          <a:prstGeom prst="rect">
+            <a:avLst/>
+          </a:prstGeom>
+          <a:noFill/>
+        </p:spPr>
+        <p:txBody>
+          <a:bodyPr wrap="square" anchor="t" lIns="18288" rIns="18288" tIns="18288" bIns="18288">
+            <a:spAutoFit/>
+          </a:bodyPr>
+          <a:lstStyle/>
+          <a:p>
+            <a:pPr algn="l">
+              <a:spcAft>
+                <a:spcPts val="400"/>
+              </a:spcAft>
+            </a:pPr>
+            <a:r>
+              <a:rPr sz="1500" b="0">
+                <a:solidFill>
+                  <a:srgbClr val="1E2836"/>
+                </a:solidFill>
+                <a:latin typeface="Segoe UI"/>
+              </a:rPr>
+              <a:t>Фото-учёт PLASTIC MONITOR даст пары со снимком.</a:t>
             </a:r>
           </a:p>
         </p:txBody>
@@ -17422,8 +17941,8 @@
         </p:nvSpPr>
         <p:spPr>
           <a:xfrm>
-            <a:off x="4937760" y="1783080"/>
-            <a:ext cx="6601967" cy="274320"/>
+            <a:off x="649224" y="3108960"/>
+            <a:ext cx="10890504" cy="274320"/>
           </a:xfrm>
           <a:prstGeom prst="rect">
             <a:avLst/>
@@ -17448,7 +17967,7 @@
                 </a:solidFill>
                 <a:latin typeface="Segoe UI"/>
               </a:rPr>
-              <a:t>ГИПОТЕЗА</a:t>
+              <a:t>КАК ПРОВЕРИЛИ</a:t>
             </a:r>
           </a:p>
         </p:txBody>
@@ -17461,8 +17980,8 @@
         </p:nvSpPr>
         <p:spPr>
           <a:xfrm>
-            <a:off x="4937760" y="2057400"/>
-            <a:ext cx="6601967" cy="1005840"/>
+            <a:off x="649224" y="3383279"/>
+            <a:ext cx="10890504" cy="1005840"/>
           </a:xfrm>
           <a:prstGeom prst="rect">
             <a:avLst/>
@@ -17487,7 +18006,7 @@
                 </a:solidFill>
                 <a:latin typeface="Segoe UI"/>
               </a:rPr>
-              <a:t>В приложениях к статьям лежат пары «снимок — счёт».</a:t>
+              <a:t>Сопоставление площадки учёта с пикселем и пятном на снимке.</a:t>
             </a:r>
           </a:p>
         </p:txBody>
@@ -17500,8 +18019,8 @@
         </p:nvSpPr>
         <p:spPr>
           <a:xfrm>
-            <a:off x="4937760" y="3108960"/>
-            <a:ext cx="6601967" cy="274320"/>
+            <a:off x="649224" y="4434840"/>
+            <a:ext cx="10890504" cy="274320"/>
           </a:xfrm>
           <a:prstGeom prst="rect">
             <a:avLst/>
@@ -17526,7 +18045,7 @@
                 </a:solidFill>
                 <a:latin typeface="Segoe UI"/>
               </a:rPr>
-              <a:t>КАК ПРОВЕРИЛИ</a:t>
+              <a:t>РЕШЕНИЕ</a:t>
             </a:r>
           </a:p>
         </p:txBody>
@@ -17539,8 +18058,8 @@
         </p:nvSpPr>
         <p:spPr>
           <a:xfrm>
-            <a:off x="4937760" y="3383279"/>
-            <a:ext cx="6601967" cy="1005840"/>
+            <a:off x="649224" y="4709159"/>
+            <a:ext cx="10890504" cy="1005840"/>
           </a:xfrm>
           <a:prstGeom prst="rect">
             <a:avLst/>
@@ -17565,7 +18084,7 @@
                 </a:solidFill>
                 <a:latin typeface="Segoe UI"/>
               </a:rPr>
-              <a:t>Разбор архивов и приложений: координаты, время, площадь, счёт.</a:t>
+              <a:t>Уровень C: единица наблюдения несовместима с пикселем.</a:t>
             </a:r>
           </a:p>
         </p:txBody>
@@ -17573,84 +18092,6 @@
       <p:sp>
         <p:nvSpPr>
           <p:cNvPr id="9" name="TextBox 8"/>
-          <p:cNvSpPr txBox="1"/>
-          <p:nvPr/>
-        </p:nvSpPr>
-        <p:spPr>
-          <a:xfrm>
-            <a:off x="4937760" y="4434840"/>
-            <a:ext cx="6601967" cy="274320"/>
-          </a:xfrm>
-          <a:prstGeom prst="rect">
-            <a:avLst/>
-          </a:prstGeom>
-          <a:noFill/>
-        </p:spPr>
-        <p:txBody>
-          <a:bodyPr wrap="square" anchor="t" lIns="18288" rIns="18288" tIns="18288" bIns="18288">
-            <a:spAutoFit/>
-          </a:bodyPr>
-          <a:lstStyle/>
-          <a:p>
-            <a:pPr algn="l">
-              <a:spcAft>
-                <a:spcPts val="400"/>
-              </a:spcAft>
-            </a:pPr>
-            <a:r>
-              <a:rPr sz="1200" b="1">
-                <a:solidFill>
-                  <a:srgbClr val="C1400B"/>
-                </a:solidFill>
-                <a:latin typeface="Segoe UI"/>
-              </a:rPr>
-              <a:t>РЕШЕНИЕ</a:t>
-            </a:r>
-          </a:p>
-        </p:txBody>
-      </p:sp>
-      <p:sp>
-        <p:nvSpPr>
-          <p:cNvPr id="10" name="TextBox 9"/>
-          <p:cNvSpPr txBox="1"/>
-          <p:nvPr/>
-        </p:nvSpPr>
-        <p:spPr>
-          <a:xfrm>
-            <a:off x="4937760" y="4709159"/>
-            <a:ext cx="6601967" cy="1005840"/>
-          </a:xfrm>
-          <a:prstGeom prst="rect">
-            <a:avLst/>
-          </a:prstGeom>
-          <a:noFill/>
-        </p:spPr>
-        <p:txBody>
-          <a:bodyPr wrap="square" anchor="t" lIns="18288" rIns="18288" tIns="18288" bIns="18288">
-            <a:spAutoFit/>
-          </a:bodyPr>
-          <a:lstStyle/>
-          <a:p>
-            <a:pPr algn="l">
-              <a:spcAft>
-                <a:spcPts val="400"/>
-              </a:spcAft>
-            </a:pPr>
-            <a:r>
-              <a:rPr sz="1500" b="0">
-                <a:solidFill>
-                  <a:srgbClr val="1E2836"/>
-                </a:solidFill>
-                <a:latin typeface="Segoe UI"/>
-              </a:rPr>
-              <a:t>Запросы авторам — в плане развития.</a:t>
-            </a:r>
-          </a:p>
-        </p:txBody>
-      </p:sp>
-      <p:sp>
-        <p:nvSpPr>
-          <p:cNvPr id="11" name="TextBox 10"/>
           <p:cNvSpPr txBox="1"/>
           <p:nvPr/>
         </p:nvSpPr>
@@ -17689,7 +18130,7 @@
       </p:sp>
       <p:sp>
         <p:nvSpPr>
-          <p:cNvPr id="12" name="TextBox 11"/>
+          <p:cNvPr id="10" name="TextBox 9"/>
           <p:cNvSpPr txBox="1"/>
           <p:nvPr/>
         </p:nvSpPr>
@@ -17721,7 +18162,7 @@
                 </a:solidFill>
                 <a:latin typeface="Segoe UI"/>
               </a:rPr>
-              <a:t>34 / 41</a:t>
+              <a:t>34 / 42</a:t>
             </a:r>
           </a:p>
         </p:txBody>
@@ -17780,13 +18221,13 @@
               </a:spcAft>
             </a:pPr>
             <a:r>
-              <a:rPr sz="2800" b="1">
+              <a:rPr sz="3200" b="1">
                 <a:solidFill>
                   <a:srgbClr val="1E2836"/>
                 </a:solidFill>
                 <a:latin typeface="Segoe UI"/>
               </a:rPr>
-              <a:t>FML: разбиение по сессиям съёмки убирает утечку соседних кадров</a:t>
+              <a:t>Архивы и приложения статей: кандидаты есть, пар нет</a:t>
             </a:r>
           </a:p>
         </p:txBody>
@@ -17825,7 +18266,7 @@
                 </a:solidFill>
                 <a:latin typeface="Segoe UI"/>
               </a:rPr>
-              <a:t>0.59</a:t>
+              <a:t>42</a:t>
             </a:r>
           </a:p>
         </p:txBody>
@@ -17864,7 +18305,7 @@
                 </a:solidFill>
                 <a:latin typeface="Segoe UI"/>
               </a:rPr>
-              <a:t>шт./кадр на отложенных сессиях, 95 % [0.54; 0.66]</a:t>
+              <a:t>файлов разобрано</a:t>
             </a:r>
           </a:p>
         </p:txBody>
@@ -17942,7 +18383,7 @@
                 </a:solidFill>
                 <a:latin typeface="Segoe UI"/>
               </a:rPr>
-              <a:t>Случайное разбиение кадров честно оценивает счётчик.</a:t>
+              <a:t>В приложениях к статьям лежат пары «снимок — счёт».</a:t>
             </a:r>
           </a:p>
         </p:txBody>
@@ -18020,7 +18461,7 @@
                 </a:solidFill>
                 <a:latin typeface="Segoe UI"/>
               </a:rPr>
-              <a:t>Сравнили случайное разбиение и разбиение по сессиям съёмки.</a:t>
+              <a:t>Разбор архивов и приложений: координаты, время, площадь, счёт.</a:t>
             </a:r>
           </a:p>
         </p:txBody>
@@ -18098,7 +18539,7 @@
                 </a:solidFill>
                 <a:latin typeface="Segoe UI"/>
               </a:rPr>
-              <a:t>Публикуем только метрику по сессиям.</a:t>
+              <a:t>Запросы авторам — в плане развития.</a:t>
             </a:r>
           </a:p>
         </p:txBody>
@@ -18176,7 +18617,7 @@
                 </a:solidFill>
                 <a:latin typeface="Segoe UI"/>
               </a:rPr>
-              <a:t>35 / 41</a:t>
+              <a:t>35 / 42</a:t>
             </a:r>
           </a:p>
         </p:txBody>
@@ -18235,13 +18676,13 @@
               </a:spcAft>
             </a:pPr>
             <a:r>
-              <a:rPr sz="3200" b="1">
+              <a:rPr sz="2800" b="1">
                 <a:solidFill>
                   <a:srgbClr val="1E2836"/>
                 </a:solidFill>
                 <a:latin typeface="Segoe UI"/>
               </a:rPr>
-              <a:t>Winans: плотность на кадре берега — при известной площади</a:t>
+              <a:t>FML: разбиение по сессиям съёмки убирает утечку соседних кадров</a:t>
             </a:r>
           </a:p>
         </p:txBody>
@@ -18280,7 +18721,7 @@
                 </a:solidFill>
                 <a:latin typeface="Segoe UI"/>
               </a:rPr>
-              <a:t>1.85</a:t>
+              <a:t>0.59</a:t>
             </a:r>
           </a:p>
         </p:txBody>
@@ -18319,7 +18760,7 @@
                 </a:solidFill>
                 <a:latin typeface="Segoe UI"/>
               </a:rPr>
-              <a:t>шт. на кадр берега — ошибка</a:t>
+              <a:t>шт./кадр на отложенных сессиях, 95 % [0.54; 0.66]</a:t>
             </a:r>
           </a:p>
         </p:txBody>
@@ -18397,7 +18838,7 @@
                 </a:solidFill>
                 <a:latin typeface="Segoe UI"/>
               </a:rPr>
-              <a:t>Счётчик по фото даёт шт. на площадь, если известна площадь кадра.</a:t>
+              <a:t>Случайное разбиение кадров честно оценивает счётчик.</a:t>
             </a:r>
           </a:p>
         </p:txBody>
@@ -18475,7 +18916,7 @@
                 </a:solidFill>
                 <a:latin typeface="Segoe UI"/>
               </a:rPr>
-              <a:t>Пространственное разбиение, 397 тестовых кадров по 164 м².</a:t>
+              <a:t>Сравнили случайное разбиение и разбиение по сессиям съёмки.</a:t>
             </a:r>
           </a:p>
         </p:txBody>
@@ -18553,7 +18994,7 @@
                 </a:solidFill>
                 <a:latin typeface="Segoe UI"/>
               </a:rPr>
-              <a:t>Подпись «шт. на кадр берега»; берег ≠ вода, Sentinel-2 так не считает.</a:t>
+              <a:t>Публикуем только метрику по сессиям.</a:t>
             </a:r>
           </a:p>
         </p:txBody>
@@ -18631,7 +19072,7 @@
                 </a:solidFill>
                 <a:latin typeface="Segoe UI"/>
               </a:rPr>
-              <a:t>36 / 41</a:t>
+              <a:t>36 / 42</a:t>
             </a:r>
           </a:p>
         </p:txBody>
@@ -18696,7 +19137,7 @@
                 </a:solidFill>
                 <a:latin typeface="Segoe UI"/>
               </a:rPr>
-              <a:t>Перенос счётчика на реку и дрон — не работает без дообучения</a:t>
+              <a:t>Winans: плотность на кадре берега — при известной площади</a:t>
             </a:r>
           </a:p>
         </p:txBody>
@@ -18710,7 +19151,85 @@
         <p:spPr>
           <a:xfrm>
             <a:off x="649224" y="1783080"/>
-            <a:ext cx="10890504" cy="274320"/>
+            <a:ext cx="3931920" cy="1143000"/>
+          </a:xfrm>
+          <a:prstGeom prst="rect">
+            <a:avLst/>
+          </a:prstGeom>
+          <a:noFill/>
+        </p:spPr>
+        <p:txBody>
+          <a:bodyPr wrap="square" anchor="t" lIns="18288" rIns="18288" tIns="18288" bIns="18288">
+            <a:spAutoFit/>
+          </a:bodyPr>
+          <a:lstStyle/>
+          <a:p>
+            <a:pPr algn="l">
+              <a:spcAft>
+                <a:spcPts val="400"/>
+              </a:spcAft>
+            </a:pPr>
+            <a:r>
+              <a:rPr sz="7200" b="1">
+                <a:solidFill>
+                  <a:srgbClr val="C1400B"/>
+                </a:solidFill>
+                <a:latin typeface="Segoe UI"/>
+              </a:rPr>
+              <a:t>1.85</a:t>
+            </a:r>
+          </a:p>
+        </p:txBody>
+      </p:sp>
+      <p:sp>
+        <p:nvSpPr>
+          <p:cNvPr id="4" name="TextBox 3"/>
+          <p:cNvSpPr txBox="1"/>
+          <p:nvPr/>
+        </p:nvSpPr>
+        <p:spPr>
+          <a:xfrm>
+            <a:off x="676656" y="2971800"/>
+            <a:ext cx="3931920" cy="822960"/>
+          </a:xfrm>
+          <a:prstGeom prst="rect">
+            <a:avLst/>
+          </a:prstGeom>
+          <a:noFill/>
+        </p:spPr>
+        <p:txBody>
+          <a:bodyPr wrap="square" anchor="t" lIns="18288" rIns="18288" tIns="18288" bIns="18288">
+            <a:spAutoFit/>
+          </a:bodyPr>
+          <a:lstStyle/>
+          <a:p>
+            <a:pPr algn="l">
+              <a:spcAft>
+                <a:spcPts val="400"/>
+              </a:spcAft>
+            </a:pPr>
+            <a:r>
+              <a:rPr sz="1600" b="0">
+                <a:solidFill>
+                  <a:srgbClr val="4A5462"/>
+                </a:solidFill>
+                <a:latin typeface="Segoe UI"/>
+              </a:rPr>
+              <a:t>шт. на кадр берега — ошибка</a:t>
+            </a:r>
+          </a:p>
+        </p:txBody>
+      </p:sp>
+      <p:sp>
+        <p:nvSpPr>
+          <p:cNvPr id="5" name="TextBox 4"/>
+          <p:cNvSpPr txBox="1"/>
+          <p:nvPr/>
+        </p:nvSpPr>
+        <p:spPr>
+          <a:xfrm>
+            <a:off x="4937760" y="1783080"/>
+            <a:ext cx="6601967" cy="274320"/>
           </a:xfrm>
           <a:prstGeom prst="rect">
             <a:avLst/>
@@ -18742,14 +19261,14 @@
       </p:sp>
       <p:sp>
         <p:nvSpPr>
-          <p:cNvPr id="4" name="TextBox 3"/>
-          <p:cNvSpPr txBox="1"/>
-          <p:nvPr/>
-        </p:nvSpPr>
-        <p:spPr>
-          <a:xfrm>
-            <a:off x="649224" y="2057400"/>
-            <a:ext cx="10890504" cy="1005840"/>
+          <p:cNvPr id="6" name="TextBox 5"/>
+          <p:cNvSpPr txBox="1"/>
+          <p:nvPr/>
+        </p:nvSpPr>
+        <p:spPr>
+          <a:xfrm>
+            <a:off x="4937760" y="2057400"/>
+            <a:ext cx="6601967" cy="1005840"/>
           </a:xfrm>
           <a:prstGeom prst="rect">
             <a:avLst/>
@@ -18774,21 +19293,21 @@
                 </a:solidFill>
                 <a:latin typeface="Segoe UI"/>
               </a:rPr>
-              <a:t>Счётчик FML переносится на другие съёмки.</a:t>
-            </a:r>
-          </a:p>
-        </p:txBody>
-      </p:sp>
-      <p:sp>
-        <p:nvSpPr>
-          <p:cNvPr id="5" name="TextBox 4"/>
-          <p:cNvSpPr txBox="1"/>
-          <p:nvPr/>
-        </p:nvSpPr>
-        <p:spPr>
-          <a:xfrm>
-            <a:off x="649224" y="3108960"/>
-            <a:ext cx="10890504" cy="274320"/>
+              <a:t>Счётчик по фото даёт шт. на площадь, если известна площадь кадра.</a:t>
+            </a:r>
+          </a:p>
+        </p:txBody>
+      </p:sp>
+      <p:sp>
+        <p:nvSpPr>
+          <p:cNvPr id="7" name="TextBox 6"/>
+          <p:cNvSpPr txBox="1"/>
+          <p:nvPr/>
+        </p:nvSpPr>
+        <p:spPr>
+          <a:xfrm>
+            <a:off x="4937760" y="3108960"/>
+            <a:ext cx="6601967" cy="274320"/>
           </a:xfrm>
           <a:prstGeom prst="rect">
             <a:avLst/>
@@ -18820,14 +19339,14 @@
       </p:sp>
       <p:sp>
         <p:nvSpPr>
-          <p:cNvPr id="6" name="TextBox 5"/>
-          <p:cNvSpPr txBox="1"/>
-          <p:nvPr/>
-        </p:nvSpPr>
-        <p:spPr>
-          <a:xfrm>
-            <a:off x="649224" y="3383279"/>
-            <a:ext cx="10890504" cy="1005840"/>
+          <p:cNvPr id="8" name="TextBox 7"/>
+          <p:cNvSpPr txBox="1"/>
+          <p:nvPr/>
+        </p:nvSpPr>
+        <p:spPr>
+          <a:xfrm>
+            <a:off x="4937760" y="3383279"/>
+            <a:ext cx="6601967" cy="1005840"/>
           </a:xfrm>
           <a:prstGeom prst="rect">
             <a:avLst/>
@@ -18852,21 +19371,21 @@
                 </a:solidFill>
                 <a:latin typeface="Segoe UI"/>
               </a:rPr>
-              <a:t>Проверка на кадрах реки и дрона другого источника.</a:t>
-            </a:r>
-          </a:p>
-        </p:txBody>
-      </p:sp>
-      <p:sp>
-        <p:nvSpPr>
-          <p:cNvPr id="7" name="TextBox 6"/>
-          <p:cNvSpPr txBox="1"/>
-          <p:nvPr/>
-        </p:nvSpPr>
-        <p:spPr>
-          <a:xfrm>
-            <a:off x="649224" y="4434840"/>
-            <a:ext cx="10890504" cy="274320"/>
+              <a:t>Пространственное разбиение, 397 тестовых кадров по 164 м².</a:t>
+            </a:r>
+          </a:p>
+        </p:txBody>
+      </p:sp>
+      <p:sp>
+        <p:nvSpPr>
+          <p:cNvPr id="9" name="TextBox 8"/>
+          <p:cNvSpPr txBox="1"/>
+          <p:nvPr/>
+        </p:nvSpPr>
+        <p:spPr>
+          <a:xfrm>
+            <a:off x="4937760" y="4434840"/>
+            <a:ext cx="6601967" cy="274320"/>
           </a:xfrm>
           <a:prstGeom prst="rect">
             <a:avLst/>
@@ -18898,14 +19417,14 @@
       </p:sp>
       <p:sp>
         <p:nvSpPr>
-          <p:cNvPr id="8" name="TextBox 7"/>
-          <p:cNvSpPr txBox="1"/>
-          <p:nvPr/>
-        </p:nvSpPr>
-        <p:spPr>
-          <a:xfrm>
-            <a:off x="649224" y="4709159"/>
-            <a:ext cx="10890504" cy="1005840"/>
+          <p:cNvPr id="10" name="TextBox 9"/>
+          <p:cNvSpPr txBox="1"/>
+          <p:nvPr/>
+        </p:nvSpPr>
+        <p:spPr>
+          <a:xfrm>
+            <a:off x="4937760" y="4709159"/>
+            <a:ext cx="6601967" cy="1005840"/>
           </a:xfrm>
           <a:prstGeom prst="rect">
             <a:avLst/>
@@ -18930,14 +19449,14 @@
                 </a:solidFill>
                 <a:latin typeface="Segoe UI"/>
               </a:rPr>
-              <a:t>Без дообучения не переносится: AP50 0.914 на отложенном FML против дрон Maharjan 2022 0.01, камера над каналом TUD-GV 0.406, камера над рекой The Ocean Cleanup 0.001.</a:t>
-            </a:r>
-          </a:p>
-        </p:txBody>
-      </p:sp>
-      <p:sp>
-        <p:nvSpPr>
-          <p:cNvPr id="9" name="TextBox 8"/>
+              <a:t>Подпись «шт. на кадр берега»; берег ≠ вода, Sentinel-2 так не считает.</a:t>
+            </a:r>
+          </a:p>
+        </p:txBody>
+      </p:sp>
+      <p:sp>
+        <p:nvSpPr>
+          <p:cNvPr id="11" name="TextBox 10"/>
           <p:cNvSpPr txBox="1"/>
           <p:nvPr/>
         </p:nvSpPr>
@@ -18976,7 +19495,7 @@
       </p:sp>
       <p:sp>
         <p:nvSpPr>
-          <p:cNvPr id="10" name="TextBox 9"/>
+          <p:cNvPr id="12" name="TextBox 11"/>
           <p:cNvSpPr txBox="1"/>
           <p:nvPr/>
         </p:nvSpPr>
@@ -19008,7 +19527,7 @@
                 </a:solidFill>
                 <a:latin typeface="Segoe UI"/>
               </a:rPr>
-              <a:t>37 / 41</a:t>
+              <a:t>37 / 42</a:t>
             </a:r>
           </a:p>
         </p:txBody>
@@ -19073,7 +19592,7 @@
                 </a:solidFill>
                 <a:latin typeface="Segoe UI"/>
               </a:rPr>
-              <a:t>Материал на фото — только с матрицей ошибок</a:t>
+              <a:t>Перенос счётчика на реку и дрон — не работает без дообучения</a:t>
             </a:r>
           </a:p>
         </p:txBody>
@@ -19087,32 +19606,32 @@
         <p:spPr>
           <a:xfrm>
             <a:off x="649224" y="1783080"/>
-            <a:ext cx="3931920" cy="1143000"/>
-          </a:xfrm>
-          <a:prstGeom prst="rect">
-            <a:avLst/>
-          </a:prstGeom>
-          <a:noFill/>
-        </p:spPr>
-        <p:txBody>
-          <a:bodyPr wrap="square" anchor="t" lIns="18288" rIns="18288" tIns="18288" bIns="18288">
-            <a:spAutoFit/>
-          </a:bodyPr>
-          <a:lstStyle/>
-          <a:p>
-            <a:pPr algn="l">
-              <a:spcAft>
-                <a:spcPts val="400"/>
-              </a:spcAft>
-            </a:pPr>
-            <a:r>
-              <a:rPr sz="7200" b="1">
+            <a:ext cx="10890504" cy="274320"/>
+          </a:xfrm>
+          <a:prstGeom prst="rect">
+            <a:avLst/>
+          </a:prstGeom>
+          <a:noFill/>
+        </p:spPr>
+        <p:txBody>
+          <a:bodyPr wrap="square" anchor="t" lIns="18288" rIns="18288" tIns="18288" bIns="18288">
+            <a:spAutoFit/>
+          </a:bodyPr>
+          <a:lstStyle/>
+          <a:p>
+            <a:pPr algn="l">
+              <a:spcAft>
+                <a:spcPts val="400"/>
+              </a:spcAft>
+            </a:pPr>
+            <a:r>
+              <a:rPr sz="1200" b="1">
                 <a:solidFill>
                   <a:srgbClr val="C1400B"/>
                 </a:solidFill>
                 <a:latin typeface="Segoe UI"/>
               </a:rPr>
-              <a:t>0.75</a:t>
+              <a:t>ГИПОТЕЗА</a:t>
             </a:r>
           </a:p>
         </p:txBody>
@@ -19125,33 +19644,33 @@
         </p:nvSpPr>
         <p:spPr>
           <a:xfrm>
-            <a:off x="676656" y="2971800"/>
-            <a:ext cx="3931920" cy="822960"/>
-          </a:xfrm>
-          <a:prstGeom prst="rect">
-            <a:avLst/>
-          </a:prstGeom>
-          <a:noFill/>
-        </p:spPr>
-        <p:txBody>
-          <a:bodyPr wrap="square" anchor="t" lIns="18288" rIns="18288" tIns="18288" bIns="18288">
-            <a:spAutoFit/>
-          </a:bodyPr>
-          <a:lstStyle/>
-          <a:p>
-            <a:pPr algn="l">
-              <a:spcAft>
-                <a:spcPts val="400"/>
-              </a:spcAft>
-            </a:pPr>
-            <a:r>
-              <a:rPr sz="1600" b="0">
-                <a:solidFill>
-                  <a:srgbClr val="4A5462"/>
-                </a:solidFill>
-                <a:latin typeface="Segoe UI"/>
-              </a:rPr>
-              <a:t>macro-F1 по материалам</a:t>
+            <a:off x="649224" y="2057400"/>
+            <a:ext cx="10890504" cy="1005840"/>
+          </a:xfrm>
+          <a:prstGeom prst="rect">
+            <a:avLst/>
+          </a:prstGeom>
+          <a:noFill/>
+        </p:spPr>
+        <p:txBody>
+          <a:bodyPr wrap="square" anchor="t" lIns="18288" rIns="18288" tIns="18288" bIns="18288">
+            <a:spAutoFit/>
+          </a:bodyPr>
+          <a:lstStyle/>
+          <a:p>
+            <a:pPr algn="l">
+              <a:spcAft>
+                <a:spcPts val="400"/>
+              </a:spcAft>
+            </a:pPr>
+            <a:r>
+              <a:rPr sz="1500" b="0">
+                <a:solidFill>
+                  <a:srgbClr val="1E2836"/>
+                </a:solidFill>
+                <a:latin typeface="Segoe UI"/>
+              </a:rPr>
+              <a:t>Счётчик FML переносится на другие съёмки.</a:t>
             </a:r>
           </a:p>
         </p:txBody>
@@ -19164,8 +19683,8 @@
         </p:nvSpPr>
         <p:spPr>
           <a:xfrm>
-            <a:off x="4937760" y="1783080"/>
-            <a:ext cx="6601967" cy="274320"/>
+            <a:off x="649224" y="3108960"/>
+            <a:ext cx="10890504" cy="274320"/>
           </a:xfrm>
           <a:prstGeom prst="rect">
             <a:avLst/>
@@ -19190,7 +19709,7 @@
                 </a:solidFill>
                 <a:latin typeface="Segoe UI"/>
               </a:rPr>
-              <a:t>ГИПОТЕЗА</a:t>
+              <a:t>КАК ПРОВЕРИЛИ</a:t>
             </a:r>
           </a:p>
         </p:txBody>
@@ -19203,8 +19722,8 @@
         </p:nvSpPr>
         <p:spPr>
           <a:xfrm>
-            <a:off x="4937760" y="2057400"/>
-            <a:ext cx="6601967" cy="1005840"/>
+            <a:off x="649224" y="3383279"/>
+            <a:ext cx="10890504" cy="1005840"/>
           </a:xfrm>
           <a:prstGeom prst="rect">
             <a:avLst/>
@@ -19229,7 +19748,7 @@
                 </a:solidFill>
                 <a:latin typeface="Segoe UI"/>
               </a:rPr>
-              <a:t>Модель различает материалы предметов на фото.</a:t>
+              <a:t>Проверка на кадрах реки и дрона другого источника.</a:t>
             </a:r>
           </a:p>
         </p:txBody>
@@ -19242,8 +19761,8 @@
         </p:nvSpPr>
         <p:spPr>
           <a:xfrm>
-            <a:off x="4937760" y="3108960"/>
-            <a:ext cx="6601967" cy="274320"/>
+            <a:off x="649224" y="4434840"/>
+            <a:ext cx="10890504" cy="274320"/>
           </a:xfrm>
           <a:prstGeom prst="rect">
             <a:avLst/>
@@ -19268,7 +19787,7 @@
                 </a:solidFill>
                 <a:latin typeface="Segoe UI"/>
               </a:rPr>
-              <a:t>КАК ПРОВЕРИЛИ</a:t>
+              <a:t>РЕШЕНИЕ</a:t>
             </a:r>
           </a:p>
         </p:txBody>
@@ -19281,8 +19800,8 @@
         </p:nvSpPr>
         <p:spPr>
           <a:xfrm>
-            <a:off x="4937760" y="3383279"/>
-            <a:ext cx="6601967" cy="1005840"/>
+            <a:off x="649224" y="4709159"/>
+            <a:ext cx="10890504" cy="1005840"/>
           </a:xfrm>
           <a:prstGeom prst="rect">
             <a:avLst/>
@@ -19307,7 +19826,7 @@
                 </a:solidFill>
                 <a:latin typeface="Segoe UI"/>
               </a:rPr>
-              <a:t>Матрица ошибок по классам материала на отложенном источнике.</a:t>
+              <a:t>Без дообучения не переносится: AP50 0.914 на отложенном FML против дрон Maharjan 2022 0.01, камера над каналом TUD-GV 0.406, камера над рекой The Ocean Cleanup 0.001.</a:t>
             </a:r>
           </a:p>
         </p:txBody>
@@ -19315,84 +19834,6 @@
       <p:sp>
         <p:nvSpPr>
           <p:cNvPr id="9" name="TextBox 8"/>
-          <p:cNvSpPr txBox="1"/>
-          <p:nvPr/>
-        </p:nvSpPr>
-        <p:spPr>
-          <a:xfrm>
-            <a:off x="4937760" y="4434840"/>
-            <a:ext cx="6601967" cy="274320"/>
-          </a:xfrm>
-          <a:prstGeom prst="rect">
-            <a:avLst/>
-          </a:prstGeom>
-          <a:noFill/>
-        </p:spPr>
-        <p:txBody>
-          <a:bodyPr wrap="square" anchor="t" lIns="18288" rIns="18288" tIns="18288" bIns="18288">
-            <a:spAutoFit/>
-          </a:bodyPr>
-          <a:lstStyle/>
-          <a:p>
-            <a:pPr algn="l">
-              <a:spcAft>
-                <a:spcPts val="400"/>
-              </a:spcAft>
-            </a:pPr>
-            <a:r>
-              <a:rPr sz="1200" b="1">
-                <a:solidFill>
-                  <a:srgbClr val="C1400B"/>
-                </a:solidFill>
-                <a:latin typeface="Segoe UI"/>
-              </a:rPr>
-              <a:t>РЕШЕНИЕ</a:t>
-            </a:r>
-          </a:p>
-        </p:txBody>
-      </p:sp>
-      <p:sp>
-        <p:nvSpPr>
-          <p:cNvPr id="10" name="TextBox 9"/>
-          <p:cNvSpPr txBox="1"/>
-          <p:nvPr/>
-        </p:nvSpPr>
-        <p:spPr>
-          <a:xfrm>
-            <a:off x="4937760" y="4709159"/>
-            <a:ext cx="6601967" cy="1005840"/>
-          </a:xfrm>
-          <a:prstGeom prst="rect">
-            <a:avLst/>
-          </a:prstGeom>
-          <a:noFill/>
-        </p:spPr>
-        <p:txBody>
-          <a:bodyPr wrap="square" anchor="t" lIns="18288" rIns="18288" tIns="18288" bIns="18288">
-            <a:spAutoFit/>
-          </a:bodyPr>
-          <a:lstStyle/>
-          <a:p>
-            <a:pPr algn="l">
-              <a:spcAft>
-                <a:spcPts val="400"/>
-              </a:spcAft>
-            </a:pPr>
-            <a:r>
-              <a:rPr sz="1500" b="0">
-                <a:solidFill>
-                  <a:srgbClr val="1E2836"/>
-                </a:solidFill>
-                <a:latin typeface="Segoe UI"/>
-              </a:rPr>
-              <a:t>Число по классам — только при разметке и матрице ошибок; иначе «состав не определён».</a:t>
-            </a:r>
-          </a:p>
-        </p:txBody>
-      </p:sp>
-      <p:sp>
-        <p:nvSpPr>
-          <p:cNvPr id="11" name="TextBox 10"/>
           <p:cNvSpPr txBox="1"/>
           <p:nvPr/>
         </p:nvSpPr>
@@ -19431,7 +19872,7 @@
       </p:sp>
       <p:sp>
         <p:nvSpPr>
-          <p:cNvPr id="12" name="TextBox 11"/>
+          <p:cNvPr id="10" name="TextBox 9"/>
           <p:cNvSpPr txBox="1"/>
           <p:nvPr/>
         </p:nvSpPr>
@@ -19463,7 +19904,7 @@
                 </a:solidFill>
                 <a:latin typeface="Segoe UI"/>
               </a:rPr>
-              <a:t>38 / 41</a:t>
+              <a:t>38 / 42</a:t>
             </a:r>
           </a:p>
         </p:txBody>
@@ -19522,13 +19963,13 @@
               </a:spcAft>
             </a:pPr>
             <a:r>
-              <a:rPr sz="2800" b="1">
+              <a:rPr sz="3200" b="1">
                 <a:solidFill>
                   <a:srgbClr val="1E2836"/>
                 </a:solidFill>
                 <a:latin typeface="Segoe UI"/>
               </a:rPr>
-              <a:t>Внутренняя проверка глазами «жюри-человека» меняет подписи и статусы</a:t>
+              <a:t>Материал на фото — только с матрицей ошибок</a:t>
             </a:r>
           </a:p>
         </p:txBody>
@@ -19542,7 +19983,85 @@
         <p:spPr>
           <a:xfrm>
             <a:off x="649224" y="1783080"/>
-            <a:ext cx="10890504" cy="274320"/>
+            <a:ext cx="3931920" cy="1143000"/>
+          </a:xfrm>
+          <a:prstGeom prst="rect">
+            <a:avLst/>
+          </a:prstGeom>
+          <a:noFill/>
+        </p:spPr>
+        <p:txBody>
+          <a:bodyPr wrap="square" anchor="t" lIns="18288" rIns="18288" tIns="18288" bIns="18288">
+            <a:spAutoFit/>
+          </a:bodyPr>
+          <a:lstStyle/>
+          <a:p>
+            <a:pPr algn="l">
+              <a:spcAft>
+                <a:spcPts val="400"/>
+              </a:spcAft>
+            </a:pPr>
+            <a:r>
+              <a:rPr sz="7200" b="1">
+                <a:solidFill>
+                  <a:srgbClr val="C1400B"/>
+                </a:solidFill>
+                <a:latin typeface="Segoe UI"/>
+              </a:rPr>
+              <a:t>0.75</a:t>
+            </a:r>
+          </a:p>
+        </p:txBody>
+      </p:sp>
+      <p:sp>
+        <p:nvSpPr>
+          <p:cNvPr id="4" name="TextBox 3"/>
+          <p:cNvSpPr txBox="1"/>
+          <p:nvPr/>
+        </p:nvSpPr>
+        <p:spPr>
+          <a:xfrm>
+            <a:off x="676656" y="2971800"/>
+            <a:ext cx="3931920" cy="822960"/>
+          </a:xfrm>
+          <a:prstGeom prst="rect">
+            <a:avLst/>
+          </a:prstGeom>
+          <a:noFill/>
+        </p:spPr>
+        <p:txBody>
+          <a:bodyPr wrap="square" anchor="t" lIns="18288" rIns="18288" tIns="18288" bIns="18288">
+            <a:spAutoFit/>
+          </a:bodyPr>
+          <a:lstStyle/>
+          <a:p>
+            <a:pPr algn="l">
+              <a:spcAft>
+                <a:spcPts val="400"/>
+              </a:spcAft>
+            </a:pPr>
+            <a:r>
+              <a:rPr sz="1600" b="0">
+                <a:solidFill>
+                  <a:srgbClr val="4A5462"/>
+                </a:solidFill>
+                <a:latin typeface="Segoe UI"/>
+              </a:rPr>
+              <a:t>macro-F1 по материалам</a:t>
+            </a:r>
+          </a:p>
+        </p:txBody>
+      </p:sp>
+      <p:sp>
+        <p:nvSpPr>
+          <p:cNvPr id="5" name="TextBox 4"/>
+          <p:cNvSpPr txBox="1"/>
+          <p:nvPr/>
+        </p:nvSpPr>
+        <p:spPr>
+          <a:xfrm>
+            <a:off x="4937760" y="1783080"/>
+            <a:ext cx="6601967" cy="274320"/>
           </a:xfrm>
           <a:prstGeom prst="rect">
             <a:avLst/>
@@ -19574,14 +20093,14 @@
       </p:sp>
       <p:sp>
         <p:nvSpPr>
-          <p:cNvPr id="4" name="TextBox 3"/>
-          <p:cNvSpPr txBox="1"/>
-          <p:nvPr/>
-        </p:nvSpPr>
-        <p:spPr>
-          <a:xfrm>
-            <a:off x="649224" y="2057400"/>
-            <a:ext cx="10890504" cy="1005840"/>
+          <p:cNvPr id="6" name="TextBox 5"/>
+          <p:cNvSpPr txBox="1"/>
+          <p:nvPr/>
+        </p:nvSpPr>
+        <p:spPr>
+          <a:xfrm>
+            <a:off x="4937760" y="2057400"/>
+            <a:ext cx="6601967" cy="1005840"/>
           </a:xfrm>
           <a:prstGeom prst="rect">
             <a:avLst/>
@@ -19606,21 +20125,21 @@
                 </a:solidFill>
                 <a:latin typeface="Segoe UI"/>
               </a:rPr>
-              <a:t>Интерфейс и дека понятны без объяснений.</a:t>
-            </a:r>
-          </a:p>
-        </p:txBody>
-      </p:sp>
-      <p:sp>
-        <p:nvSpPr>
-          <p:cNvPr id="5" name="TextBox 4"/>
-          <p:cNvSpPr txBox="1"/>
-          <p:nvPr/>
-        </p:nvSpPr>
-        <p:spPr>
-          <a:xfrm>
-            <a:off x="649224" y="3108960"/>
-            <a:ext cx="10890504" cy="274320"/>
+              <a:t>Модель различает материалы предметов на фото.</a:t>
+            </a:r>
+          </a:p>
+        </p:txBody>
+      </p:sp>
+      <p:sp>
+        <p:nvSpPr>
+          <p:cNvPr id="7" name="TextBox 6"/>
+          <p:cNvSpPr txBox="1"/>
+          <p:nvPr/>
+        </p:nvSpPr>
+        <p:spPr>
+          <a:xfrm>
+            <a:off x="4937760" y="3108960"/>
+            <a:ext cx="6601967" cy="274320"/>
           </a:xfrm>
           <a:prstGeom prst="rect">
             <a:avLst/>
@@ -19652,14 +20171,14 @@
       </p:sp>
       <p:sp>
         <p:nvSpPr>
-          <p:cNvPr id="6" name="TextBox 5"/>
-          <p:cNvSpPr txBox="1"/>
-          <p:nvPr/>
-        </p:nvSpPr>
-        <p:spPr>
-          <a:xfrm>
-            <a:off x="649224" y="3383279"/>
-            <a:ext cx="10890504" cy="1005840"/>
+          <p:cNvPr id="8" name="TextBox 7"/>
+          <p:cNvSpPr txBox="1"/>
+          <p:nvPr/>
+        </p:nvSpPr>
+        <p:spPr>
+          <a:xfrm>
+            <a:off x="4937760" y="3383279"/>
+            <a:ext cx="6601967" cy="1005840"/>
           </a:xfrm>
           <a:prstGeom prst="rect">
             <a:avLst/>
@@ -19684,21 +20203,21 @@
                 </a:solidFill>
                 <a:latin typeface="Segoe UI"/>
               </a:rPr>
-              <a:t>Независимый проверяющий внутри команды листает сервис и деку по чек-листу ТЗ и записывает, что понял неверно.</a:t>
-            </a:r>
-          </a:p>
-        </p:txBody>
-      </p:sp>
-      <p:sp>
-        <p:nvSpPr>
-          <p:cNvPr id="7" name="TextBox 6"/>
-          <p:cNvSpPr txBox="1"/>
-          <p:nvPr/>
-        </p:nvSpPr>
-        <p:spPr>
-          <a:xfrm>
-            <a:off x="649224" y="4434840"/>
-            <a:ext cx="10890504" cy="274320"/>
+              <a:t>Матрица ошибок по классам материала на отложенном источнике.</a:t>
+            </a:r>
+          </a:p>
+        </p:txBody>
+      </p:sp>
+      <p:sp>
+        <p:nvSpPr>
+          <p:cNvPr id="9" name="TextBox 8"/>
+          <p:cNvSpPr txBox="1"/>
+          <p:nvPr/>
+        </p:nvSpPr>
+        <p:spPr>
+          <a:xfrm>
+            <a:off x="4937760" y="4434840"/>
+            <a:ext cx="6601967" cy="274320"/>
           </a:xfrm>
           <a:prstGeom prst="rect">
             <a:avLst/>
@@ -19730,14 +20249,14 @@
       </p:sp>
       <p:sp>
         <p:nvSpPr>
-          <p:cNvPr id="8" name="TextBox 7"/>
-          <p:cNvSpPr txBox="1"/>
-          <p:nvPr/>
-        </p:nvSpPr>
-        <p:spPr>
-          <a:xfrm>
-            <a:off x="649224" y="4709159"/>
-            <a:ext cx="10890504" cy="1005840"/>
+          <p:cNvPr id="10" name="TextBox 9"/>
+          <p:cNvSpPr txBox="1"/>
+          <p:nvPr/>
+        </p:nvSpPr>
+        <p:spPr>
+          <a:xfrm>
+            <a:off x="4937760" y="4709159"/>
+            <a:ext cx="6601967" cy="1005840"/>
           </a:xfrm>
           <a:prstGeom prst="rect">
             <a:avLst/>
@@ -19762,14 +20281,14 @@
                 </a:solidFill>
                 <a:latin typeface="Segoe UI"/>
               </a:rPr>
-              <a:t>Подписи «оценка детектора», «пластик не подтверждён», статусы по постановке, «количество не определено».</a:t>
-            </a:r>
-          </a:p>
-        </p:txBody>
-      </p:sp>
-      <p:sp>
-        <p:nvSpPr>
-          <p:cNvPr id="9" name="TextBox 8"/>
+              <a:t>Число по классам — только при разметке и матрице ошибок; иначе «состав не определён».</a:t>
+            </a:r>
+          </a:p>
+        </p:txBody>
+      </p:sp>
+      <p:sp>
+        <p:nvSpPr>
+          <p:cNvPr id="11" name="TextBox 10"/>
           <p:cNvSpPr txBox="1"/>
           <p:nvPr/>
         </p:nvSpPr>
@@ -19808,7 +20327,7 @@
       </p:sp>
       <p:sp>
         <p:nvSpPr>
-          <p:cNvPr id="10" name="TextBox 9"/>
+          <p:cNvPr id="12" name="TextBox 11"/>
           <p:cNvSpPr txBox="1"/>
           <p:nvPr/>
         </p:nvSpPr>
@@ -19840,7 +20359,7 @@
                 </a:solidFill>
                 <a:latin typeface="Segoe UI"/>
               </a:rPr>
-              <a:t>39 / 41</a:t>
+              <a:t>39 / 42</a:t>
             </a:r>
           </a:p>
         </p:txBody>
@@ -20390,13 +20909,13 @@
               </a:spcAft>
             </a:pPr>
             <a:r>
-              <a:rPr sz="3200" b="1">
+              <a:rPr sz="2800" b="1">
                 <a:solidFill>
                   <a:srgbClr val="1E2836"/>
                 </a:solidFill>
                 <a:latin typeface="Segoe UI"/>
               </a:rPr>
-              <a:t>Сколько гипотез мы проверили</a:t>
+              <a:t>Внутренняя проверка глазами «жюри-человека» меняет подписи и статусы</a:t>
             </a:r>
           </a:p>
         </p:txBody>
@@ -20410,32 +20929,32 @@
         <p:spPr>
           <a:xfrm>
             <a:off x="649224" y="1783080"/>
-            <a:ext cx="3931920" cy="1143000"/>
-          </a:xfrm>
-          <a:prstGeom prst="rect">
-            <a:avLst/>
-          </a:prstGeom>
-          <a:noFill/>
-        </p:spPr>
-        <p:txBody>
-          <a:bodyPr wrap="square" anchor="t" lIns="18288" rIns="18288" tIns="18288" bIns="18288">
-            <a:spAutoFit/>
-          </a:bodyPr>
-          <a:lstStyle/>
-          <a:p>
-            <a:pPr algn="l">
-              <a:spcAft>
-                <a:spcPts val="400"/>
-              </a:spcAft>
-            </a:pPr>
-            <a:r>
-              <a:rPr sz="7200" b="1">
+            <a:ext cx="10890504" cy="274320"/>
+          </a:xfrm>
+          <a:prstGeom prst="rect">
+            <a:avLst/>
+          </a:prstGeom>
+          <a:noFill/>
+        </p:spPr>
+        <p:txBody>
+          <a:bodyPr wrap="square" anchor="t" lIns="18288" rIns="18288" tIns="18288" bIns="18288">
+            <a:spAutoFit/>
+          </a:bodyPr>
+          <a:lstStyle/>
+          <a:p>
+            <a:pPr algn="l">
+              <a:spcAft>
+                <a:spcPts val="400"/>
+              </a:spcAft>
+            </a:pPr>
+            <a:r>
+              <a:rPr sz="1200" b="1">
                 <a:solidFill>
                   <a:srgbClr val="C1400B"/>
                 </a:solidFill>
                 <a:latin typeface="Segoe UI"/>
               </a:rPr>
-              <a:t>71</a:t>
+              <a:t>ГИПОТЕЗА</a:t>
             </a:r>
           </a:p>
         </p:txBody>
@@ -20448,33 +20967,33 @@
         </p:nvSpPr>
         <p:spPr>
           <a:xfrm>
-            <a:off x="676656" y="2971800"/>
-            <a:ext cx="3931920" cy="822960"/>
-          </a:xfrm>
-          <a:prstGeom prst="rect">
-            <a:avLst/>
-          </a:prstGeom>
-          <a:noFill/>
-        </p:spPr>
-        <p:txBody>
-          <a:bodyPr wrap="square" anchor="t" lIns="18288" rIns="18288" tIns="18288" bIns="18288">
-            <a:spAutoFit/>
-          </a:bodyPr>
-          <a:lstStyle/>
-          <a:p>
-            <a:pPr algn="l">
-              <a:spcAft>
-                <a:spcPts val="400"/>
-              </a:spcAft>
-            </a:pPr>
-            <a:r>
-              <a:rPr sz="1600" b="0">
-                <a:solidFill>
-                  <a:srgbClr val="4A5462"/>
-                </a:solidFill>
-                <a:latin typeface="Segoe UI"/>
-              </a:rPr>
-              <a:t>проверенных гипотез</a:t>
+            <a:off x="649224" y="2057400"/>
+            <a:ext cx="10890504" cy="1005840"/>
+          </a:xfrm>
+          <a:prstGeom prst="rect">
+            <a:avLst/>
+          </a:prstGeom>
+          <a:noFill/>
+        </p:spPr>
+        <p:txBody>
+          <a:bodyPr wrap="square" anchor="t" lIns="18288" rIns="18288" tIns="18288" bIns="18288">
+            <a:spAutoFit/>
+          </a:bodyPr>
+          <a:lstStyle/>
+          <a:p>
+            <a:pPr algn="l">
+              <a:spcAft>
+                <a:spcPts val="400"/>
+              </a:spcAft>
+            </a:pPr>
+            <a:r>
+              <a:rPr sz="1500" b="0">
+                <a:solidFill>
+                  <a:srgbClr val="1E2836"/>
+                </a:solidFill>
+                <a:latin typeface="Segoe UI"/>
+              </a:rPr>
+              <a:t>Интерфейс и дека понятны без объяснений.</a:t>
             </a:r>
           </a:p>
         </p:txBody>
@@ -20487,8 +21006,8 @@
         </p:nvSpPr>
         <p:spPr>
           <a:xfrm>
-            <a:off x="4937760" y="1783080"/>
-            <a:ext cx="6601967" cy="274320"/>
+            <a:off x="649224" y="3108960"/>
+            <a:ext cx="10890504" cy="274320"/>
           </a:xfrm>
           <a:prstGeom prst="rect">
             <a:avLst/>
@@ -20513,7 +21032,7 @@
                 </a:solidFill>
                 <a:latin typeface="Segoe UI"/>
               </a:rPr>
-              <a:t>ГИПОТЕЗА</a:t>
+              <a:t>КАК ПРОВЕРИЛИ</a:t>
             </a:r>
           </a:p>
         </p:txBody>
@@ -20526,8 +21045,8 @@
         </p:nvSpPr>
         <p:spPr>
           <a:xfrm>
-            <a:off x="4937760" y="2057400"/>
-            <a:ext cx="6601967" cy="1005840"/>
+            <a:off x="649224" y="3383279"/>
+            <a:ext cx="10890504" cy="1005840"/>
           </a:xfrm>
           <a:prstGeom prst="rect">
             <a:avLst/>
@@ -20552,7 +21071,7 @@
                 </a:solidFill>
                 <a:latin typeface="Segoe UI"/>
               </a:rPr>
-              <a:t>Итог — это отбор из многих проверенных идей, а не первая удачная.</a:t>
+              <a:t>Независимый проверяющий внутри команды листает сервис и деку по чек-листу ТЗ и записывает, что понял неверно.</a:t>
             </a:r>
           </a:p>
         </p:txBody>
@@ -20565,8 +21084,8 @@
         </p:nvSpPr>
         <p:spPr>
           <a:xfrm>
-            <a:off x="4937760" y="3108960"/>
-            <a:ext cx="6601967" cy="274320"/>
+            <a:off x="649224" y="4434840"/>
+            <a:ext cx="10890504" cy="274320"/>
           </a:xfrm>
           <a:prstGeom prst="rect">
             <a:avLst/>
@@ -20591,7 +21110,7 @@
                 </a:solidFill>
                 <a:latin typeface="Segoe UI"/>
               </a:rPr>
-              <a:t>КАК ПРОВЕРИЛИ</a:t>
+              <a:t>РЕШЕНИЕ</a:t>
             </a:r>
           </a:p>
         </p:txBody>
@@ -20604,8 +21123,8 @@
         </p:nvSpPr>
         <p:spPr>
           <a:xfrm>
-            <a:off x="4937760" y="3383279"/>
-            <a:ext cx="6601967" cy="1005840"/>
+            <a:off x="649224" y="4709159"/>
+            <a:ext cx="10890504" cy="1005840"/>
           </a:xfrm>
           <a:prstGeom prst="rect">
             <a:avLst/>
@@ -20630,7 +21149,7 @@
                 </a:solidFill>
                 <a:latin typeface="Segoe UI"/>
               </a:rPr>
-              <a:t>Подсчёт по журналу и конвейеру: гипотезы, эксперименты, решения.</a:t>
+              <a:t>Подписи «оценка детектора», «пластик не подтверждён», статусы по постановке, «количество не определено».</a:t>
             </a:r>
           </a:p>
         </p:txBody>
@@ -20638,84 +21157,6 @@
       <p:sp>
         <p:nvSpPr>
           <p:cNvPr id="9" name="TextBox 8"/>
-          <p:cNvSpPr txBox="1"/>
-          <p:nvPr/>
-        </p:nvSpPr>
-        <p:spPr>
-          <a:xfrm>
-            <a:off x="4937760" y="4434840"/>
-            <a:ext cx="6601967" cy="274320"/>
-          </a:xfrm>
-          <a:prstGeom prst="rect">
-            <a:avLst/>
-          </a:prstGeom>
-          <a:noFill/>
-        </p:spPr>
-        <p:txBody>
-          <a:bodyPr wrap="square" anchor="t" lIns="18288" rIns="18288" tIns="18288" bIns="18288">
-            <a:spAutoFit/>
-          </a:bodyPr>
-          <a:lstStyle/>
-          <a:p>
-            <a:pPr algn="l">
-              <a:spcAft>
-                <a:spcPts val="400"/>
-              </a:spcAft>
-            </a:pPr>
-            <a:r>
-              <a:rPr sz="1200" b="1">
-                <a:solidFill>
-                  <a:srgbClr val="C1400B"/>
-                </a:solidFill>
-                <a:latin typeface="Segoe UI"/>
-              </a:rPr>
-              <a:t>РЕШЕНИЕ</a:t>
-            </a:r>
-          </a:p>
-        </p:txBody>
-      </p:sp>
-      <p:sp>
-        <p:nvSpPr>
-          <p:cNvPr id="10" name="TextBox 9"/>
-          <p:cNvSpPr txBox="1"/>
-          <p:nvPr/>
-        </p:nvSpPr>
-        <p:spPr>
-          <a:xfrm>
-            <a:off x="4937760" y="4709159"/>
-            <a:ext cx="6601967" cy="1005840"/>
-          </a:xfrm>
-          <a:prstGeom prst="rect">
-            <a:avLst/>
-          </a:prstGeom>
-          <a:noFill/>
-        </p:spPr>
-        <p:txBody>
-          <a:bodyPr wrap="square" anchor="t" lIns="18288" rIns="18288" tIns="18288" bIns="18288">
-            <a:spAutoFit/>
-          </a:bodyPr>
-          <a:lstStyle/>
-          <a:p>
-            <a:pPr algn="l">
-              <a:spcAft>
-                <a:spcPts val="400"/>
-              </a:spcAft>
-            </a:pPr>
-            <a:r>
-              <a:rPr sz="1500" b="0">
-                <a:solidFill>
-                  <a:srgbClr val="1E2836"/>
-                </a:solidFill>
-                <a:latin typeface="Segoe UI"/>
-              </a:rPr>
-              <a:t>Каждое решение записано до сравнения.</a:t>
-            </a:r>
-          </a:p>
-        </p:txBody>
-      </p:sp>
-      <p:sp>
-        <p:nvSpPr>
-          <p:cNvPr id="11" name="TextBox 10"/>
           <p:cNvSpPr txBox="1"/>
           <p:nvPr/>
         </p:nvSpPr>
@@ -20754,7 +21195,7 @@
       </p:sp>
       <p:sp>
         <p:nvSpPr>
-          <p:cNvPr id="12" name="TextBox 11"/>
+          <p:cNvPr id="10" name="TextBox 9"/>
           <p:cNvSpPr txBox="1"/>
           <p:nvPr/>
         </p:nvSpPr>
@@ -20786,7 +21227,7 @@
                 </a:solidFill>
                 <a:latin typeface="Segoe UI"/>
               </a:rPr>
-              <a:t>40 / 41</a:t>
+              <a:t>40 / 42</a:t>
             </a:r>
           </a:p>
         </p:txBody>
@@ -20851,7 +21292,7 @@
                 </a:solidFill>
                 <a:latin typeface="Segoe UI"/>
               </a:rPr>
-              <a:t>Что нужно для настоящих пар «снимок → штуки»</a:t>
+              <a:t>Сколько гипотез мы проверили</a:t>
             </a:r>
           </a:p>
         </p:txBody>
@@ -20890,7 +21331,7 @@
                 </a:solidFill>
                 <a:latin typeface="Segoe UI"/>
               </a:rPr>
-              <a:t>0</a:t>
+              <a:t>71</a:t>
             </a:r>
           </a:p>
         </p:txBody>
@@ -20929,7 +21370,7 @@
                 </a:solidFill>
                 <a:latin typeface="Segoe UI"/>
               </a:rPr>
-              <a:t>калибровочных пар сейчас</a:t>
+              <a:t>проверенных гипотез</a:t>
             </a:r>
           </a:p>
         </p:txBody>
@@ -21007,7 +21448,7 @@
                 </a:solidFill>
                 <a:latin typeface="Segoe UI"/>
               </a:rPr>
-              <a:t>Связка возможна, если считать предметы там, где их видит спутник.</a:t>
+              <a:t>Итог — это отбор из многих проверенных идей, а не первая удачная.</a:t>
             </a:r>
           </a:p>
         </p:txBody>
@@ -21085,7 +21526,7 @@
                 </a:solidFill>
                 <a:latin typeface="Segoe UI"/>
               </a:rPr>
-              <a:t>По итогам всех проверок: какие данные закрывают разрыв.</a:t>
+              <a:t>Подсчёт по журналу и конвейеру: гипотезы, эксперименты, решения.</a:t>
             </a:r>
           </a:p>
         </p:txBody>
@@ -21163,7 +21604,7 @@
                 </a:solidFill>
                 <a:latin typeface="Segoe UI"/>
               </a:rPr>
-              <a:t>Запросы авторам полевых данных, VHR в день наблюдений, дроны над нитями, которые видит Sentinel-2.</a:t>
+              <a:t>Каждое решение записано до сравнения.</a:t>
             </a:r>
           </a:p>
         </p:txBody>
@@ -21241,7 +21682,462 @@
                 </a:solidFill>
                 <a:latin typeface="Segoe UI"/>
               </a:rPr>
-              <a:t>41 / 41</a:t>
+              <a:t>41 / 42</a:t>
+            </a:r>
+          </a:p>
+        </p:txBody>
+      </p:sp>
+    </p:spTree>
+  </p:cSld>
+  <p:clrMapOvr>
+    <a:masterClrMapping/>
+  </p:clrMapOvr>
+</p:sld>
+</file>
+
+<file path=ppt/slides/slide42.xml><?xml version="1.0" encoding="utf-8"?>
+<p:sld xmlns:a="http://schemas.openxmlformats.org/drawingml/2006/main" xmlns:p="http://schemas.openxmlformats.org/presentationml/2006/main" xmlns:r="http://schemas.openxmlformats.org/officeDocument/2006/relationships">
+  <p:cSld>
+    <p:bg>
+      <p:bgPr>
+        <a:solidFill>
+          <a:srgbClr val="F9F8F6"/>
+        </a:solidFill>
+        <a:effectLst/>
+      </p:bgPr>
+    </p:bg>
+    <p:spTree>
+      <p:nvGrpSpPr>
+        <p:cNvPr id="1" name=""/>
+        <p:cNvGrpSpPr/>
+        <p:nvPr/>
+      </p:nvGrpSpPr>
+      <p:grpSpPr/>
+      <p:sp>
+        <p:nvSpPr>
+          <p:cNvPr id="2" name="TextBox 1"/>
+          <p:cNvSpPr txBox="1"/>
+          <p:nvPr/>
+        </p:nvSpPr>
+        <p:spPr>
+          <a:xfrm>
+            <a:off x="649224" y="384048"/>
+            <a:ext cx="10881360" cy="1234440"/>
+          </a:xfrm>
+          <a:prstGeom prst="rect">
+            <a:avLst/>
+          </a:prstGeom>
+          <a:noFill/>
+        </p:spPr>
+        <p:txBody>
+          <a:bodyPr wrap="square" anchor="t" lIns="18288" rIns="18288" tIns="18288" bIns="18288">
+            <a:spAutoFit/>
+          </a:bodyPr>
+          <a:lstStyle/>
+          <a:p>
+            <a:pPr algn="l">
+              <a:spcAft>
+                <a:spcPts val="400"/>
+              </a:spcAft>
+            </a:pPr>
+            <a:r>
+              <a:rPr sz="3200" b="1">
+                <a:solidFill>
+                  <a:srgbClr val="1E2836"/>
+                </a:solidFill>
+                <a:latin typeface="Segoe UI"/>
+              </a:rPr>
+              <a:t>Что нужно для настоящих пар «снимок → штуки»</a:t>
+            </a:r>
+          </a:p>
+        </p:txBody>
+      </p:sp>
+      <p:sp>
+        <p:nvSpPr>
+          <p:cNvPr id="3" name="TextBox 2"/>
+          <p:cNvSpPr txBox="1"/>
+          <p:nvPr/>
+        </p:nvSpPr>
+        <p:spPr>
+          <a:xfrm>
+            <a:off x="649224" y="1783080"/>
+            <a:ext cx="3931920" cy="1143000"/>
+          </a:xfrm>
+          <a:prstGeom prst="rect">
+            <a:avLst/>
+          </a:prstGeom>
+          <a:noFill/>
+        </p:spPr>
+        <p:txBody>
+          <a:bodyPr wrap="square" anchor="t" lIns="18288" rIns="18288" tIns="18288" bIns="18288">
+            <a:spAutoFit/>
+          </a:bodyPr>
+          <a:lstStyle/>
+          <a:p>
+            <a:pPr algn="l">
+              <a:spcAft>
+                <a:spcPts val="400"/>
+              </a:spcAft>
+            </a:pPr>
+            <a:r>
+              <a:rPr sz="7200" b="1">
+                <a:solidFill>
+                  <a:srgbClr val="C1400B"/>
+                </a:solidFill>
+                <a:latin typeface="Segoe UI"/>
+              </a:rPr>
+              <a:t>0</a:t>
+            </a:r>
+          </a:p>
+        </p:txBody>
+      </p:sp>
+      <p:sp>
+        <p:nvSpPr>
+          <p:cNvPr id="4" name="TextBox 3"/>
+          <p:cNvSpPr txBox="1"/>
+          <p:nvPr/>
+        </p:nvSpPr>
+        <p:spPr>
+          <a:xfrm>
+            <a:off x="676656" y="2971800"/>
+            <a:ext cx="3931920" cy="822960"/>
+          </a:xfrm>
+          <a:prstGeom prst="rect">
+            <a:avLst/>
+          </a:prstGeom>
+          <a:noFill/>
+        </p:spPr>
+        <p:txBody>
+          <a:bodyPr wrap="square" anchor="t" lIns="18288" rIns="18288" tIns="18288" bIns="18288">
+            <a:spAutoFit/>
+          </a:bodyPr>
+          <a:lstStyle/>
+          <a:p>
+            <a:pPr algn="l">
+              <a:spcAft>
+                <a:spcPts val="400"/>
+              </a:spcAft>
+            </a:pPr>
+            <a:r>
+              <a:rPr sz="1600" b="0">
+                <a:solidFill>
+                  <a:srgbClr val="4A5462"/>
+                </a:solidFill>
+                <a:latin typeface="Segoe UI"/>
+              </a:rPr>
+              <a:t>калибровочных пар сейчас</a:t>
+            </a:r>
+          </a:p>
+        </p:txBody>
+      </p:sp>
+      <p:sp>
+        <p:nvSpPr>
+          <p:cNvPr id="5" name="TextBox 4"/>
+          <p:cNvSpPr txBox="1"/>
+          <p:nvPr/>
+        </p:nvSpPr>
+        <p:spPr>
+          <a:xfrm>
+            <a:off x="4937760" y="1783080"/>
+            <a:ext cx="6601967" cy="274320"/>
+          </a:xfrm>
+          <a:prstGeom prst="rect">
+            <a:avLst/>
+          </a:prstGeom>
+          <a:noFill/>
+        </p:spPr>
+        <p:txBody>
+          <a:bodyPr wrap="square" anchor="t" lIns="18288" rIns="18288" tIns="18288" bIns="18288">
+            <a:spAutoFit/>
+          </a:bodyPr>
+          <a:lstStyle/>
+          <a:p>
+            <a:pPr algn="l">
+              <a:spcAft>
+                <a:spcPts val="400"/>
+              </a:spcAft>
+            </a:pPr>
+            <a:r>
+              <a:rPr sz="1200" b="1">
+                <a:solidFill>
+                  <a:srgbClr val="C1400B"/>
+                </a:solidFill>
+                <a:latin typeface="Segoe UI"/>
+              </a:rPr>
+              <a:t>ГИПОТЕЗА</a:t>
+            </a:r>
+          </a:p>
+        </p:txBody>
+      </p:sp>
+      <p:sp>
+        <p:nvSpPr>
+          <p:cNvPr id="6" name="TextBox 5"/>
+          <p:cNvSpPr txBox="1"/>
+          <p:nvPr/>
+        </p:nvSpPr>
+        <p:spPr>
+          <a:xfrm>
+            <a:off x="4937760" y="2057400"/>
+            <a:ext cx="6601967" cy="1005840"/>
+          </a:xfrm>
+          <a:prstGeom prst="rect">
+            <a:avLst/>
+          </a:prstGeom>
+          <a:noFill/>
+        </p:spPr>
+        <p:txBody>
+          <a:bodyPr wrap="square" anchor="t" lIns="18288" rIns="18288" tIns="18288" bIns="18288">
+            <a:spAutoFit/>
+          </a:bodyPr>
+          <a:lstStyle/>
+          <a:p>
+            <a:pPr algn="l">
+              <a:spcAft>
+                <a:spcPts val="400"/>
+              </a:spcAft>
+            </a:pPr>
+            <a:r>
+              <a:rPr sz="1500" b="0">
+                <a:solidFill>
+                  <a:srgbClr val="1E2836"/>
+                </a:solidFill>
+                <a:latin typeface="Segoe UI"/>
+              </a:rPr>
+              <a:t>Связка возможна, если считать предметы там, где их видит спутник.</a:t>
+            </a:r>
+          </a:p>
+        </p:txBody>
+      </p:sp>
+      <p:sp>
+        <p:nvSpPr>
+          <p:cNvPr id="7" name="TextBox 6"/>
+          <p:cNvSpPr txBox="1"/>
+          <p:nvPr/>
+        </p:nvSpPr>
+        <p:spPr>
+          <a:xfrm>
+            <a:off x="4937760" y="3108960"/>
+            <a:ext cx="6601967" cy="274320"/>
+          </a:xfrm>
+          <a:prstGeom prst="rect">
+            <a:avLst/>
+          </a:prstGeom>
+          <a:noFill/>
+        </p:spPr>
+        <p:txBody>
+          <a:bodyPr wrap="square" anchor="t" lIns="18288" rIns="18288" tIns="18288" bIns="18288">
+            <a:spAutoFit/>
+          </a:bodyPr>
+          <a:lstStyle/>
+          <a:p>
+            <a:pPr algn="l">
+              <a:spcAft>
+                <a:spcPts val="400"/>
+              </a:spcAft>
+            </a:pPr>
+            <a:r>
+              <a:rPr sz="1200" b="1">
+                <a:solidFill>
+                  <a:srgbClr val="C1400B"/>
+                </a:solidFill>
+                <a:latin typeface="Segoe UI"/>
+              </a:rPr>
+              <a:t>КАК ПРОВЕРИЛИ</a:t>
+            </a:r>
+          </a:p>
+        </p:txBody>
+      </p:sp>
+      <p:sp>
+        <p:nvSpPr>
+          <p:cNvPr id="8" name="TextBox 7"/>
+          <p:cNvSpPr txBox="1"/>
+          <p:nvPr/>
+        </p:nvSpPr>
+        <p:spPr>
+          <a:xfrm>
+            <a:off x="4937760" y="3383279"/>
+            <a:ext cx="6601967" cy="1005840"/>
+          </a:xfrm>
+          <a:prstGeom prst="rect">
+            <a:avLst/>
+          </a:prstGeom>
+          <a:noFill/>
+        </p:spPr>
+        <p:txBody>
+          <a:bodyPr wrap="square" anchor="t" lIns="18288" rIns="18288" tIns="18288" bIns="18288">
+            <a:spAutoFit/>
+          </a:bodyPr>
+          <a:lstStyle/>
+          <a:p>
+            <a:pPr algn="l">
+              <a:spcAft>
+                <a:spcPts val="400"/>
+              </a:spcAft>
+            </a:pPr>
+            <a:r>
+              <a:rPr sz="1500" b="0">
+                <a:solidFill>
+                  <a:srgbClr val="1E2836"/>
+                </a:solidFill>
+                <a:latin typeface="Segoe UI"/>
+              </a:rPr>
+              <a:t>По итогам всех проверок: какие данные закрывают разрыв.</a:t>
+            </a:r>
+          </a:p>
+        </p:txBody>
+      </p:sp>
+      <p:sp>
+        <p:nvSpPr>
+          <p:cNvPr id="9" name="TextBox 8"/>
+          <p:cNvSpPr txBox="1"/>
+          <p:nvPr/>
+        </p:nvSpPr>
+        <p:spPr>
+          <a:xfrm>
+            <a:off x="4937760" y="4434840"/>
+            <a:ext cx="6601967" cy="274320"/>
+          </a:xfrm>
+          <a:prstGeom prst="rect">
+            <a:avLst/>
+          </a:prstGeom>
+          <a:noFill/>
+        </p:spPr>
+        <p:txBody>
+          <a:bodyPr wrap="square" anchor="t" lIns="18288" rIns="18288" tIns="18288" bIns="18288">
+            <a:spAutoFit/>
+          </a:bodyPr>
+          <a:lstStyle/>
+          <a:p>
+            <a:pPr algn="l">
+              <a:spcAft>
+                <a:spcPts val="400"/>
+              </a:spcAft>
+            </a:pPr>
+            <a:r>
+              <a:rPr sz="1200" b="1">
+                <a:solidFill>
+                  <a:srgbClr val="C1400B"/>
+                </a:solidFill>
+                <a:latin typeface="Segoe UI"/>
+              </a:rPr>
+              <a:t>РЕШЕНИЕ</a:t>
+            </a:r>
+          </a:p>
+        </p:txBody>
+      </p:sp>
+      <p:sp>
+        <p:nvSpPr>
+          <p:cNvPr id="10" name="TextBox 9"/>
+          <p:cNvSpPr txBox="1"/>
+          <p:nvPr/>
+        </p:nvSpPr>
+        <p:spPr>
+          <a:xfrm>
+            <a:off x="4937760" y="4709159"/>
+            <a:ext cx="6601967" cy="1005840"/>
+          </a:xfrm>
+          <a:prstGeom prst="rect">
+            <a:avLst/>
+          </a:prstGeom>
+          <a:noFill/>
+        </p:spPr>
+        <p:txBody>
+          <a:bodyPr wrap="square" anchor="t" lIns="18288" rIns="18288" tIns="18288" bIns="18288">
+            <a:spAutoFit/>
+          </a:bodyPr>
+          <a:lstStyle/>
+          <a:p>
+            <a:pPr algn="l">
+              <a:spcAft>
+                <a:spcPts val="400"/>
+              </a:spcAft>
+            </a:pPr>
+            <a:r>
+              <a:rPr sz="1500" b="0">
+                <a:solidFill>
+                  <a:srgbClr val="1E2836"/>
+                </a:solidFill>
+                <a:latin typeface="Segoe UI"/>
+              </a:rPr>
+              <a:t>Запросы авторам полевых данных, VHR в день наблюдений, дроны над нитями, которые видит Sentinel-2.</a:t>
+            </a:r>
+          </a:p>
+        </p:txBody>
+      </p:sp>
+      <p:sp>
+        <p:nvSpPr>
+          <p:cNvPr id="11" name="TextBox 10"/>
+          <p:cNvSpPr txBox="1"/>
+          <p:nvPr/>
+        </p:nvSpPr>
+        <p:spPr>
+          <a:xfrm>
+            <a:off x="649224" y="6355080"/>
+            <a:ext cx="5486400" cy="274320"/>
+          </a:xfrm>
+          <a:prstGeom prst="rect">
+            <a:avLst/>
+          </a:prstGeom>
+          <a:noFill/>
+        </p:spPr>
+        <p:txBody>
+          <a:bodyPr wrap="square" anchor="t" lIns="18288" rIns="18288" tIns="18288" bIns="18288">
+            <a:spAutoFit/>
+          </a:bodyPr>
+          <a:lstStyle/>
+          <a:p>
+            <a:pPr algn="l">
+              <a:spcAft>
+                <a:spcPts val="400"/>
+              </a:spcAft>
+            </a:pPr>
+            <a:r>
+              <a:rPr sz="1100" b="0">
+                <a:solidFill>
+                  <a:srgbClr val="9AA1AC"/>
+                </a:solidFill>
+                <a:latin typeface="Segoe UI"/>
+              </a:rPr>
+              <a:t>Приложение · Исследование</a:t>
+            </a:r>
+          </a:p>
+        </p:txBody>
+      </p:sp>
+      <p:sp>
+        <p:nvSpPr>
+          <p:cNvPr id="12" name="TextBox 11"/>
+          <p:cNvSpPr txBox="1"/>
+          <p:nvPr/>
+        </p:nvSpPr>
+        <p:spPr>
+          <a:xfrm>
+            <a:off x="10607040" y="6355080"/>
+            <a:ext cx="1005840" cy="274320"/>
+          </a:xfrm>
+          <a:prstGeom prst="rect">
+            <a:avLst/>
+          </a:prstGeom>
+          <a:noFill/>
+        </p:spPr>
+        <p:txBody>
+          <a:bodyPr wrap="square" anchor="t" lIns="18288" rIns="18288" tIns="18288" bIns="18288">
+            <a:spAutoFit/>
+          </a:bodyPr>
+          <a:lstStyle/>
+          <a:p>
+            <a:pPr algn="r">
+              <a:spcAft>
+                <a:spcPts val="400"/>
+              </a:spcAft>
+            </a:pPr>
+            <a:r>
+              <a:rPr sz="1100" b="0">
+                <a:solidFill>
+                  <a:srgbClr val="9AA1AC"/>
+                </a:solidFill>
+                <a:latin typeface="Segoe UI"/>
+              </a:rPr>
+              <a:t>42 / 42</a:t>
             </a:r>
           </a:p>
         </p:txBody>
@@ -23249,7 +24145,7 @@
                 </a:solidFill>
                 <a:latin typeface="Segoe UI"/>
               </a:rPr>
-              <a:t>Мы проверили связку снимок → штуки на всех найденных парах — посчитанные предметы спутнику не видны</a:t>
+              <a:t>На детальном фото модель считает предметы с ошибкой 0.59 шт. на кадр и определяет материал</a:t>
             </a:r>
           </a:p>
         </p:txBody>
@@ -23288,7 +24184,7 @@
                 </a:solidFill>
                 <a:latin typeface="Segoe UI"/>
               </a:rPr>
-              <a:t>66</a:t>
+              <a:t>0.59</a:t>
             </a:r>
           </a:p>
         </p:txBody>
@@ -23327,7 +24223,7 @@
                 </a:solidFill>
                 <a:latin typeface="Segoe UI"/>
               </a:rPr>
-              <a:t>пар ADIS по месту и времени</a:t>
+              <a:t>шт./кадр — ошибка на FML (медиана-бейзлайн 2.86)</a:t>
             </a:r>
           </a:p>
         </p:txBody>
@@ -23366,7 +24262,7 @@
                 </a:solidFill>
                 <a:latin typeface="Segoe UI"/>
               </a:rPr>
-              <a:t>0</a:t>
+              <a:t>1.85</a:t>
             </a:r>
           </a:p>
         </p:txBody>
@@ -23405,14 +24301,14 @@
                 </a:solidFill>
                 <a:latin typeface="Segoe UI"/>
               </a:rPr>
-              <a:t>пар с видимым сигналом на снимке</a:t>
+              <a:t>шт. на 164 м² кадра берега — Winans; DebrisScan 2.29</a:t>
             </a:r>
           </a:p>
         </p:txBody>
       </p:sp>
       <p:pic>
         <p:nvPicPr>
-          <p:cNvPr id="7" name="Picture 6" descr="ispra_er604_20190916.png"/>
+          <p:cNvPr id="7" name="Picture 6" descr="photo.jpg"/>
           <p:cNvPicPr>
             <a:picLocks noChangeAspect="1"/>
           </p:cNvPicPr>
@@ -23426,8 +24322,8 @@
         </p:blipFill>
         <p:spPr>
           <a:xfrm>
-            <a:off x="5120640" y="1951061"/>
-            <a:ext cx="6400799" cy="3184477"/>
+            <a:off x="5120640" y="2041133"/>
+            <a:ext cx="6400800" cy="3598692"/>
           </a:xfrm>
           <a:prstGeom prst="rect">
             <a:avLst/>
@@ -23447,8 +24343,8 @@
         </p:nvSpPr>
         <p:spPr>
           <a:xfrm>
-            <a:off x="5120640" y="5440680"/>
-            <a:ext cx="6400800" cy="822960"/>
+            <a:off x="5120640" y="5897880"/>
+            <a:ext cx="5394960" cy="731520"/>
           </a:xfrm>
           <a:prstGeom prst="rect">
             <a:avLst/>
@@ -23473,7 +24369,7 @@
                 </a:solidFill>
                 <a:latin typeface="Segoe UI"/>
               </a:rPr>
-              <a:t>ADIS: 21 444 отрезков → 66 пар; в 6 с предметами детектор сработал в 0</a:t>
+              <a:t>FML: 1 190 кадров, разбиение по сессиям съёмки; AP50 0.914</a:t>
             </a:r>
           </a:p>
           <a:p>
@@ -23489,23 +24385,7 @@
                 </a:solidFill>
                 <a:latin typeface="Segoe UI"/>
               </a:rPr>
-              <a:t>ISPRA: 167 трансект обработаны одним скриптом; на ER604 ни один предмет не ближе к пикселю детектора</a:t>
-            </a:r>
-          </a:p>
-          <a:p>
-            <a:pPr algn="l">
-              <a:spcAft>
-                <a:spcPts val="200"/>
-              </a:spcAft>
-            </a:pPr>
-            <a:r>
-              <a:rPr sz="1200" b="0">
-                <a:solidFill>
-                  <a:srgbClr val="4A5462"/>
-                </a:solidFill>
-                <a:latin typeface="Segoe UI"/>
-              </a:rPr>
-              <a:t>Искусственные мишени: 19 дат со счётом — детектор видит пиксель только при большом покрытии</a:t>
+              <a:t>Фото с воды или дрона, не спутник; шт./км² — только где известна площадь кадра</a:t>
             </a:r>
           </a:p>
         </p:txBody>
@@ -23513,45 +24393,6 @@
       <p:sp>
         <p:nvSpPr>
           <p:cNvPr id="9" name="TextBox 8"/>
-          <p:cNvSpPr txBox="1"/>
-          <p:nvPr/>
-        </p:nvSpPr>
-        <p:spPr>
-          <a:xfrm>
-            <a:off x="649224" y="5349240"/>
-            <a:ext cx="4297680" cy="914400"/>
-          </a:xfrm>
-          <a:prstGeom prst="rect">
-            <a:avLst/>
-          </a:prstGeom>
-          <a:noFill/>
-        </p:spPr>
-        <p:txBody>
-          <a:bodyPr wrap="square" anchor="t" lIns="18288" rIns="18288" tIns="18288" bIns="18288">
-            <a:spAutoFit/>
-          </a:bodyPr>
-          <a:lstStyle/>
-          <a:p>
-            <a:pPr algn="l">
-              <a:spcAft>
-                <a:spcPts val="400"/>
-              </a:spcAft>
-            </a:pPr>
-            <a:r>
-              <a:rPr sz="1500" b="1">
-                <a:solidFill>
-                  <a:srgbClr val="1E2836"/>
-                </a:solidFill>
-                <a:latin typeface="Segoe UI"/>
-              </a:rPr>
-              <a:t>Число штук по снимку — только исследовательский сценарий, не измерение</a:t>
-            </a:r>
-          </a:p>
-        </p:txBody>
-      </p:sp>
-      <p:sp>
-        <p:nvSpPr>
-          <p:cNvPr id="10" name="TextBox 9"/>
           <p:cNvSpPr txBox="1"/>
           <p:nvPr/>
         </p:nvSpPr>
